--- a/DA_NS/Webinar 01 - SP1 - Teorico/Sprint 1 - Python Basico.pptx
+++ b/DA_NS/Webinar 01 - SP1 - Teorico/Sprint 1 - Python Basico.pptx
@@ -1,56 +1,57 @@
 
 <file path=ppt/presentation.xml><?xml version="1.0" encoding="utf-8"?>
-<p:presentation xmlns:a="http://schemas.openxmlformats.org/drawingml/2006/main" xmlns:r="http://schemas.openxmlformats.org/officeDocument/2006/relationships" xmlns:mc="http://schemas.openxmlformats.org/markup-compatibility/2006" xmlns:mv="urn:schemas-microsoft-com:mac:vml" xmlns:p="http://schemas.openxmlformats.org/presentationml/2006/main" xmlns:c="http://schemas.openxmlformats.org/drawingml/2006/chart" xmlns:dgm="http://schemas.openxmlformats.org/drawingml/2006/diagram" xmlns:o="urn:schemas-microsoft-com:office:office" xmlns:v="urn:schemas-microsoft-com:vml" xmlns:pvml="urn:schemas-microsoft-com:office:powerpoint" xmlns:com="http://schemas.openxmlformats.org/drawingml/2006/compatibility" xmlns:p14="http://schemas.microsoft.com/office/powerpoint/2010/main" xmlns:p15="http://schemas.microsoft.com/office/powerpoint/2012/main" xmlns:ahyp="http://schemas.microsoft.com/office/drawing/2018/hyperlinkcolor" autoCompressPictures="0" embedTrueTypeFonts="1" strictFirstAndLastChars="0" saveSubsetFonts="1">
+<p:presentation xmlns:a="http://schemas.openxmlformats.org/drawingml/2006/main" xmlns:r="http://schemas.openxmlformats.org/officeDocument/2006/relationships" xmlns:p="http://schemas.openxmlformats.org/presentationml/2006/main" strictFirstAndLastChars="0" embedTrueTypeFonts="1" saveSubsetFonts="1" autoCompressPictures="0">
   <p:sldMasterIdLst>
-    <p:sldMasterId id="2147483648" r:id="rId4"/>
+    <p:sldMasterId id="2147483648" r:id="rId1"/>
   </p:sldMasterIdLst>
   <p:notesMasterIdLst>
-    <p:notesMasterId r:id="rId5"/>
+    <p:notesMasterId r:id="rId13"/>
   </p:notesMasterIdLst>
   <p:sldIdLst>
-    <p:sldId id="256" r:id="rId6"/>
-    <p:sldId id="257" r:id="rId7"/>
-    <p:sldId id="258" r:id="rId8"/>
-    <p:sldId id="259" r:id="rId9"/>
-    <p:sldId id="260" r:id="rId10"/>
-    <p:sldId id="261" r:id="rId11"/>
-    <p:sldId id="262" r:id="rId12"/>
-    <p:sldId id="263" r:id="rId13"/>
-    <p:sldId id="264" r:id="rId14"/>
-    <p:sldId id="265" r:id="rId15"/>
+    <p:sldId id="256" r:id="rId2"/>
+    <p:sldId id="266" r:id="rId3"/>
+    <p:sldId id="257" r:id="rId4"/>
+    <p:sldId id="258" r:id="rId5"/>
+    <p:sldId id="259" r:id="rId6"/>
+    <p:sldId id="260" r:id="rId7"/>
+    <p:sldId id="261" r:id="rId8"/>
+    <p:sldId id="262" r:id="rId9"/>
+    <p:sldId id="263" r:id="rId10"/>
+    <p:sldId id="264" r:id="rId11"/>
+    <p:sldId id="265" r:id="rId12"/>
   </p:sldIdLst>
-  <p:sldSz cy="5143500" cx="9144000"/>
+  <p:sldSz cx="9144000" cy="5143500" type="screen16x9"/>
   <p:notesSz cx="6858000" cy="9144000"/>
   <p:embeddedFontLst>
     <p:embeddedFont>
-      <p:font typeface="Inter"/>
-      <p:regular r:id="rId16"/>
-      <p:bold r:id="rId17"/>
-      <p:italic r:id="rId18"/>
+      <p:font typeface="Inter" panose="020B0604020202020204" charset="0"/>
+      <p:regular r:id="rId14"/>
+      <p:bold r:id="rId15"/>
+      <p:italic r:id="rId16"/>
+      <p:boldItalic r:id="rId17"/>
+    </p:embeddedFont>
+    <p:embeddedFont>
+      <p:font typeface="Inter ExtraBold" panose="020B0604020202020204" charset="0"/>
+      <p:bold r:id="rId18"/>
       <p:boldItalic r:id="rId19"/>
     </p:embeddedFont>
     <p:embeddedFont>
-      <p:font typeface="Inter ExtraBold"/>
-      <p:bold r:id="rId20"/>
-      <p:boldItalic r:id="rId21"/>
+      <p:font typeface="Inter Medium" panose="020B0604020202020204" charset="0"/>
+      <p:regular r:id="rId20"/>
+      <p:bold r:id="rId21"/>
+      <p:italic r:id="rId22"/>
+      <p:boldItalic r:id="rId23"/>
     </p:embeddedFont>
     <p:embeddedFont>
-      <p:font typeface="Roboto Mono"/>
-      <p:regular r:id="rId22"/>
-      <p:bold r:id="rId23"/>
-      <p:italic r:id="rId24"/>
-      <p:boldItalic r:id="rId25"/>
-    </p:embeddedFont>
-    <p:embeddedFont>
-      <p:font typeface="Inter Medium"/>
-      <p:regular r:id="rId26"/>
-      <p:bold r:id="rId27"/>
-      <p:italic r:id="rId28"/>
-      <p:boldItalic r:id="rId29"/>
+      <p:font typeface="Roboto Mono" panose="00000009000000000000" pitchFamily="49" charset="0"/>
+      <p:regular r:id="rId24"/>
+      <p:bold r:id="rId25"/>
+      <p:italic r:id="rId26"/>
+      <p:boldItalic r:id="rId27"/>
     </p:embeddedFont>
   </p:embeddedFontLst>
   <p:defaultTextStyle>
-    <a:defPPr lvl="0" marR="0" rtl="0" algn="l">
+    <a:defPPr marR="0" lvl="0" algn="l" rtl="0">
       <a:lnSpc>
         <a:spcPct val="100000"/>
       </a:lnSpc>
@@ -61,7 +62,7 @@
         <a:spcPts val="0"/>
       </a:spcAft>
     </a:defPPr>
-    <a:lvl1pPr lvl="0" marR="0" rtl="0" algn="l">
+    <a:lvl1pPr marR="0" lvl="0" algn="l" rtl="0">
       <a:lnSpc>
         <a:spcPct val="100000"/>
       </a:lnSpc>
@@ -75,7 +76,7 @@
         <a:srgbClr val="000000"/>
       </a:buClr>
       <a:buFont typeface="Arial"/>
-      <a:defRPr b="0" i="0" sz="1400" u="none" cap="none" strike="noStrike">
+      <a:defRPr sz="1400" b="0" i="0" u="none" strike="noStrike" cap="none">
         <a:solidFill>
           <a:srgbClr val="000000"/>
         </a:solidFill>
@@ -85,7 +86,7 @@
         <a:sym typeface="Arial"/>
       </a:defRPr>
     </a:lvl1pPr>
-    <a:lvl2pPr lvl="1" marR="0" rtl="0" algn="l">
+    <a:lvl2pPr marR="0" lvl="1" algn="l" rtl="0">
       <a:lnSpc>
         <a:spcPct val="100000"/>
       </a:lnSpc>
@@ -99,7 +100,7 @@
         <a:srgbClr val="000000"/>
       </a:buClr>
       <a:buFont typeface="Arial"/>
-      <a:defRPr b="0" i="0" sz="1400" u="none" cap="none" strike="noStrike">
+      <a:defRPr sz="1400" b="0" i="0" u="none" strike="noStrike" cap="none">
         <a:solidFill>
           <a:srgbClr val="000000"/>
         </a:solidFill>
@@ -109,7 +110,7 @@
         <a:sym typeface="Arial"/>
       </a:defRPr>
     </a:lvl2pPr>
-    <a:lvl3pPr lvl="2" marR="0" rtl="0" algn="l">
+    <a:lvl3pPr marR="0" lvl="2" algn="l" rtl="0">
       <a:lnSpc>
         <a:spcPct val="100000"/>
       </a:lnSpc>
@@ -123,7 +124,7 @@
         <a:srgbClr val="000000"/>
       </a:buClr>
       <a:buFont typeface="Arial"/>
-      <a:defRPr b="0" i="0" sz="1400" u="none" cap="none" strike="noStrike">
+      <a:defRPr sz="1400" b="0" i="0" u="none" strike="noStrike" cap="none">
         <a:solidFill>
           <a:srgbClr val="000000"/>
         </a:solidFill>
@@ -133,7 +134,7 @@
         <a:sym typeface="Arial"/>
       </a:defRPr>
     </a:lvl3pPr>
-    <a:lvl4pPr lvl="3" marR="0" rtl="0" algn="l">
+    <a:lvl4pPr marR="0" lvl="3" algn="l" rtl="0">
       <a:lnSpc>
         <a:spcPct val="100000"/>
       </a:lnSpc>
@@ -147,7 +148,7 @@
         <a:srgbClr val="000000"/>
       </a:buClr>
       <a:buFont typeface="Arial"/>
-      <a:defRPr b="0" i="0" sz="1400" u="none" cap="none" strike="noStrike">
+      <a:defRPr sz="1400" b="0" i="0" u="none" strike="noStrike" cap="none">
         <a:solidFill>
           <a:srgbClr val="000000"/>
         </a:solidFill>
@@ -157,7 +158,7 @@
         <a:sym typeface="Arial"/>
       </a:defRPr>
     </a:lvl4pPr>
-    <a:lvl5pPr lvl="4" marR="0" rtl="0" algn="l">
+    <a:lvl5pPr marR="0" lvl="4" algn="l" rtl="0">
       <a:lnSpc>
         <a:spcPct val="100000"/>
       </a:lnSpc>
@@ -171,7 +172,7 @@
         <a:srgbClr val="000000"/>
       </a:buClr>
       <a:buFont typeface="Arial"/>
-      <a:defRPr b="0" i="0" sz="1400" u="none" cap="none" strike="noStrike">
+      <a:defRPr sz="1400" b="0" i="0" u="none" strike="noStrike" cap="none">
         <a:solidFill>
           <a:srgbClr val="000000"/>
         </a:solidFill>
@@ -181,7 +182,7 @@
         <a:sym typeface="Arial"/>
       </a:defRPr>
     </a:lvl5pPr>
-    <a:lvl6pPr lvl="5" marR="0" rtl="0" algn="l">
+    <a:lvl6pPr marR="0" lvl="5" algn="l" rtl="0">
       <a:lnSpc>
         <a:spcPct val="100000"/>
       </a:lnSpc>
@@ -195,7 +196,7 @@
         <a:srgbClr val="000000"/>
       </a:buClr>
       <a:buFont typeface="Arial"/>
-      <a:defRPr b="0" i="0" sz="1400" u="none" cap="none" strike="noStrike">
+      <a:defRPr sz="1400" b="0" i="0" u="none" strike="noStrike" cap="none">
         <a:solidFill>
           <a:srgbClr val="000000"/>
         </a:solidFill>
@@ -205,7 +206,7 @@
         <a:sym typeface="Arial"/>
       </a:defRPr>
     </a:lvl6pPr>
-    <a:lvl7pPr lvl="6" marR="0" rtl="0" algn="l">
+    <a:lvl7pPr marR="0" lvl="6" algn="l" rtl="0">
       <a:lnSpc>
         <a:spcPct val="100000"/>
       </a:lnSpc>
@@ -219,7 +220,7 @@
         <a:srgbClr val="000000"/>
       </a:buClr>
       <a:buFont typeface="Arial"/>
-      <a:defRPr b="0" i="0" sz="1400" u="none" cap="none" strike="noStrike">
+      <a:defRPr sz="1400" b="0" i="0" u="none" strike="noStrike" cap="none">
         <a:solidFill>
           <a:srgbClr val="000000"/>
         </a:solidFill>
@@ -229,7 +230,7 @@
         <a:sym typeface="Arial"/>
       </a:defRPr>
     </a:lvl7pPr>
-    <a:lvl8pPr lvl="7" marR="0" rtl="0" algn="l">
+    <a:lvl8pPr marR="0" lvl="7" algn="l" rtl="0">
       <a:lnSpc>
         <a:spcPct val="100000"/>
       </a:lnSpc>
@@ -243,7 +244,7 @@
         <a:srgbClr val="000000"/>
       </a:buClr>
       <a:buFont typeface="Arial"/>
-      <a:defRPr b="0" i="0" sz="1400" u="none" cap="none" strike="noStrike">
+      <a:defRPr sz="1400" b="0" i="0" u="none" strike="noStrike" cap="none">
         <a:solidFill>
           <a:srgbClr val="000000"/>
         </a:solidFill>
@@ -253,7 +254,7 @@
         <a:sym typeface="Arial"/>
       </a:defRPr>
     </a:lvl8pPr>
-    <a:lvl9pPr lvl="8" marR="0" rtl="0" algn="l">
+    <a:lvl9pPr marR="0" lvl="8" algn="l" rtl="0">
       <a:lnSpc>
         <a:spcPct val="100000"/>
       </a:lnSpc>
@@ -267,7 +268,7 @@
         <a:srgbClr val="000000"/>
       </a:buClr>
       <a:buFont typeface="Arial"/>
-      <a:defRPr b="0" i="0" sz="1400" u="none" cap="none" strike="noStrike">
+      <a:defRPr sz="1400" b="0" i="0" u="none" strike="noStrike" cap="none">
         <a:solidFill>
           <a:srgbClr val="000000"/>
         </a:solidFill>
@@ -280,7 +281,7 @@
   </p:defaultTextStyle>
   <p:extLst>
     <p:ext uri="{EFAFB233-063F-42B5-8137-9DF3F51BA10A}">
-      <p15:sldGuideLst>
+      <p15:sldGuideLst xmlns:p15="http://schemas.microsoft.com/office/powerpoint/2012/main">
         <p15:guide id="1" orient="horz" pos="3096">
           <p15:clr>
             <a:srgbClr val="747775"/>
@@ -329,25 +330,26 @@
       </p15:sldGuideLst>
     </p:ext>
     <p:ext uri="GoogleSlidesCustomDataVersion2">
-      <go:slidesCustomData xmlns:go="http://customooxmlschemas.google.com/" r:id="rId30" roundtripDataSignature="AMtx7mj8tNZSu5dMjQ1Z8NnJe6pNwKBdsw=="/>
+      <go:slidesCustomData xmlns:go="http://customooxmlschemas.google.com/" xmlns:ahyp="http://schemas.microsoft.com/office/drawing/2018/hyperlinkcolor" xmlns:p15="http://schemas.microsoft.com/office/powerpoint/2012/main" xmlns:p14="http://schemas.microsoft.com/office/powerpoint/2010/main" xmlns:com="http://schemas.openxmlformats.org/drawingml/2006/compatibility" xmlns:pvml="urn:schemas-microsoft-com:office:powerpoint" xmlns:v="urn:schemas-microsoft-com:vml" xmlns:o="urn:schemas-microsoft-com:office:office" xmlns:dgm="http://schemas.openxmlformats.org/drawingml/2006/diagram" xmlns:c="http://schemas.openxmlformats.org/drawingml/2006/chart" xmlns:mv="urn:schemas-microsoft-com:mac:vml" xmlns:mc="http://schemas.openxmlformats.org/markup-compatibility/2006" xmlns="" r:id="rId30" roundtripDataSignature="AMtx7mj8tNZSu5dMjQ1Z8NnJe6pNwKBdsw=="/>
     </p:ext>
   </p:extLst>
 </p:presentation>
 </file>
 
 <file path=ppt/notesMasters/notesMaster1.xml><?xml version="1.0" encoding="utf-8"?>
-<p:notesMaster xmlns:a="http://schemas.openxmlformats.org/drawingml/2006/main" xmlns:r="http://schemas.openxmlformats.org/officeDocument/2006/relationships" xmlns:mc="http://schemas.openxmlformats.org/markup-compatibility/2006" xmlns:mv="urn:schemas-microsoft-com:mac:vml" xmlns:p="http://schemas.openxmlformats.org/presentationml/2006/main" xmlns:c="http://schemas.openxmlformats.org/drawingml/2006/chart" xmlns:dgm="http://schemas.openxmlformats.org/drawingml/2006/diagram" xmlns:o="urn:schemas-microsoft-com:office:office" xmlns:v="urn:schemas-microsoft-com:vml" xmlns:pvml="urn:schemas-microsoft-com:office:powerpoint" xmlns:com="http://schemas.openxmlformats.org/drawingml/2006/compatibility" xmlns:p14="http://schemas.microsoft.com/office/powerpoint/2010/main" xmlns:p15="http://schemas.microsoft.com/office/powerpoint/2012/main" xmlns:ahyp="http://schemas.microsoft.com/office/drawing/2018/hyperlinkcolor">
+<p:notesMaster xmlns:a="http://schemas.openxmlformats.org/drawingml/2006/main" xmlns:r="http://schemas.openxmlformats.org/officeDocument/2006/relationships" xmlns:p="http://schemas.openxmlformats.org/presentationml/2006/main">
   <p:cSld>
     <p:bg>
       <p:bgPr>
         <a:solidFill>
           <a:schemeClr val="lt1"/>
         </a:solidFill>
+        <a:effectLst/>
       </p:bgPr>
     </p:bg>
     <p:spTree>
       <p:nvGrpSpPr>
-        <p:cNvPr id="2" name="Shape 2"/>
+        <p:cNvPr id="1" name="Shape 2"/>
         <p:cNvGrpSpPr/>
         <p:nvPr/>
       </p:nvGrpSpPr>
@@ -362,9 +364,11 @@
       <p:sp>
         <p:nvSpPr>
           <p:cNvPr id="3" name="Google Shape;3;n"/>
-          <p:cNvSpPr/>
+          <p:cNvSpPr>
+            <a:spLocks noGrp="1" noRot="1" noChangeAspect="1"/>
+          </p:cNvSpPr>
           <p:nvPr>
-            <p:ph idx="2" type="sldImg"/>
+            <p:ph type="sldImg" idx="2"/>
           </p:nvPr>
         </p:nvSpPr>
         <p:spPr>
@@ -373,9 +377,13 @@
             <a:ext cx="6096075" cy="3429000"/>
           </a:xfrm>
           <a:custGeom>
-            <a:rect b="b" l="l" r="r" t="t"/>
+            <a:avLst/>
+            <a:gdLst/>
+            <a:ahLst/>
+            <a:cxnLst/>
+            <a:rect l="l" t="t" r="r" b="b"/>
             <a:pathLst>
-              <a:path extrusionOk="0" h="120000" w="120000">
+              <a:path w="120000" h="120000" extrusionOk="0">
                 <a:moveTo>
                   <a:pt x="0" y="0"/>
                 </a:moveTo>
@@ -393,23 +401,25 @@
             </a:pathLst>
           </a:custGeom>
           <a:noFill/>
-          <a:ln cap="flat" cmpd="sng" w="9525">
+          <a:ln w="9525" cap="flat" cmpd="sng">
             <a:solidFill>
               <a:srgbClr val="000000"/>
             </a:solidFill>
             <a:prstDash val="solid"/>
             <a:round/>
-            <a:headEnd len="sm" w="sm" type="none"/>
-            <a:tailEnd len="sm" w="sm" type="none"/>
+            <a:headEnd type="none" w="sm" len="sm"/>
+            <a:tailEnd type="none" w="sm" len="sm"/>
           </a:ln>
         </p:spPr>
       </p:sp>
       <p:sp>
         <p:nvSpPr>
           <p:cNvPr id="4" name="Google Shape;4;n"/>
-          <p:cNvSpPr txBox="1"/>
+          <p:cNvSpPr txBox="1">
+            <a:spLocks noGrp="1"/>
+          </p:cNvSpPr>
           <p:nvPr>
-            <p:ph idx="1" type="body"/>
+            <p:ph type="body" idx="1"/>
           </p:nvPr>
         </p:nvSpPr>
         <p:spPr>
@@ -426,11 +436,11 @@
           </a:ln>
         </p:spPr>
         <p:txBody>
-          <a:bodyPr anchorCtr="0" anchor="t" bIns="91425" lIns="91425" spcFirstLastPara="1" rIns="91425" wrap="square" tIns="91425">
+          <a:bodyPr spcFirstLastPara="1" wrap="square" lIns="91425" tIns="91425" rIns="91425" bIns="91425" anchor="t" anchorCtr="0">
             <a:noAutofit/>
           </a:bodyPr>
           <a:lstStyle>
-            <a:lvl1pPr indent="-298450" lvl="0" marL="457200" marR="0" rtl="0" algn="l">
+            <a:lvl1pPr marL="457200" marR="0" lvl="0" indent="-298450" algn="l" rtl="0">
               <a:lnSpc>
                 <a:spcPct val="100000"/>
               </a:lnSpc>
@@ -446,7 +456,7 @@
               <a:buSzPts val="1100"/>
               <a:buFont typeface="Arial"/>
               <a:buChar char="●"/>
-              <a:defRPr b="0" i="0" sz="1100" u="none" cap="none" strike="noStrike">
+              <a:defRPr sz="1100" b="0" i="0" u="none" strike="noStrike" cap="none">
                 <a:solidFill>
                   <a:srgbClr val="000000"/>
                 </a:solidFill>
@@ -456,7 +466,7 @@
                 <a:sym typeface="Arial"/>
               </a:defRPr>
             </a:lvl1pPr>
-            <a:lvl2pPr indent="-298450" lvl="1" marL="914400" marR="0" rtl="0" algn="l">
+            <a:lvl2pPr marL="914400" marR="0" lvl="1" indent="-298450" algn="l" rtl="0">
               <a:lnSpc>
                 <a:spcPct val="100000"/>
               </a:lnSpc>
@@ -472,7 +482,7 @@
               <a:buSzPts val="1100"/>
               <a:buFont typeface="Arial"/>
               <a:buChar char="○"/>
-              <a:defRPr b="0" i="0" sz="1100" u="none" cap="none" strike="noStrike">
+              <a:defRPr sz="1100" b="0" i="0" u="none" strike="noStrike" cap="none">
                 <a:solidFill>
                   <a:srgbClr val="000000"/>
                 </a:solidFill>
@@ -482,7 +492,7 @@
                 <a:sym typeface="Arial"/>
               </a:defRPr>
             </a:lvl2pPr>
-            <a:lvl3pPr indent="-298450" lvl="2" marL="1371600" marR="0" rtl="0" algn="l">
+            <a:lvl3pPr marL="1371600" marR="0" lvl="2" indent="-298450" algn="l" rtl="0">
               <a:lnSpc>
                 <a:spcPct val="100000"/>
               </a:lnSpc>
@@ -498,7 +508,7 @@
               <a:buSzPts val="1100"/>
               <a:buFont typeface="Arial"/>
               <a:buChar char="■"/>
-              <a:defRPr b="0" i="0" sz="1100" u="none" cap="none" strike="noStrike">
+              <a:defRPr sz="1100" b="0" i="0" u="none" strike="noStrike" cap="none">
                 <a:solidFill>
                   <a:srgbClr val="000000"/>
                 </a:solidFill>
@@ -508,7 +518,7 @@
                 <a:sym typeface="Arial"/>
               </a:defRPr>
             </a:lvl3pPr>
-            <a:lvl4pPr indent="-298450" lvl="3" marL="1828800" marR="0" rtl="0" algn="l">
+            <a:lvl4pPr marL="1828800" marR="0" lvl="3" indent="-298450" algn="l" rtl="0">
               <a:lnSpc>
                 <a:spcPct val="100000"/>
               </a:lnSpc>
@@ -524,7 +534,7 @@
               <a:buSzPts val="1100"/>
               <a:buFont typeface="Arial"/>
               <a:buChar char="●"/>
-              <a:defRPr b="0" i="0" sz="1100" u="none" cap="none" strike="noStrike">
+              <a:defRPr sz="1100" b="0" i="0" u="none" strike="noStrike" cap="none">
                 <a:solidFill>
                   <a:srgbClr val="000000"/>
                 </a:solidFill>
@@ -534,7 +544,7 @@
                 <a:sym typeface="Arial"/>
               </a:defRPr>
             </a:lvl4pPr>
-            <a:lvl5pPr indent="-298450" lvl="4" marL="2286000" marR="0" rtl="0" algn="l">
+            <a:lvl5pPr marL="2286000" marR="0" lvl="4" indent="-298450" algn="l" rtl="0">
               <a:lnSpc>
                 <a:spcPct val="100000"/>
               </a:lnSpc>
@@ -550,7 +560,7 @@
               <a:buSzPts val="1100"/>
               <a:buFont typeface="Arial"/>
               <a:buChar char="○"/>
-              <a:defRPr b="0" i="0" sz="1100" u="none" cap="none" strike="noStrike">
+              <a:defRPr sz="1100" b="0" i="0" u="none" strike="noStrike" cap="none">
                 <a:solidFill>
                   <a:srgbClr val="000000"/>
                 </a:solidFill>
@@ -560,7 +570,7 @@
                 <a:sym typeface="Arial"/>
               </a:defRPr>
             </a:lvl5pPr>
-            <a:lvl6pPr indent="-298450" lvl="5" marL="2743200" marR="0" rtl="0" algn="l">
+            <a:lvl6pPr marL="2743200" marR="0" lvl="5" indent="-298450" algn="l" rtl="0">
               <a:lnSpc>
                 <a:spcPct val="100000"/>
               </a:lnSpc>
@@ -576,7 +586,7 @@
               <a:buSzPts val="1100"/>
               <a:buFont typeface="Arial"/>
               <a:buChar char="■"/>
-              <a:defRPr b="0" i="0" sz="1100" u="none" cap="none" strike="noStrike">
+              <a:defRPr sz="1100" b="0" i="0" u="none" strike="noStrike" cap="none">
                 <a:solidFill>
                   <a:srgbClr val="000000"/>
                 </a:solidFill>
@@ -586,7 +596,7 @@
                 <a:sym typeface="Arial"/>
               </a:defRPr>
             </a:lvl6pPr>
-            <a:lvl7pPr indent="-298450" lvl="6" marL="3200400" marR="0" rtl="0" algn="l">
+            <a:lvl7pPr marL="3200400" marR="0" lvl="6" indent="-298450" algn="l" rtl="0">
               <a:lnSpc>
                 <a:spcPct val="100000"/>
               </a:lnSpc>
@@ -602,7 +612,7 @@
               <a:buSzPts val="1100"/>
               <a:buFont typeface="Arial"/>
               <a:buChar char="●"/>
-              <a:defRPr b="0" i="0" sz="1100" u="none" cap="none" strike="noStrike">
+              <a:defRPr sz="1100" b="0" i="0" u="none" strike="noStrike" cap="none">
                 <a:solidFill>
                   <a:srgbClr val="000000"/>
                 </a:solidFill>
@@ -612,7 +622,7 @@
                 <a:sym typeface="Arial"/>
               </a:defRPr>
             </a:lvl7pPr>
-            <a:lvl8pPr indent="-298450" lvl="7" marL="3657600" marR="0" rtl="0" algn="l">
+            <a:lvl8pPr marL="3657600" marR="0" lvl="7" indent="-298450" algn="l" rtl="0">
               <a:lnSpc>
                 <a:spcPct val="100000"/>
               </a:lnSpc>
@@ -628,7 +638,7 @@
               <a:buSzPts val="1100"/>
               <a:buFont typeface="Arial"/>
               <a:buChar char="○"/>
-              <a:defRPr b="0" i="0" sz="1100" u="none" cap="none" strike="noStrike">
+              <a:defRPr sz="1100" b="0" i="0" u="none" strike="noStrike" cap="none">
                 <a:solidFill>
                   <a:srgbClr val="000000"/>
                 </a:solidFill>
@@ -638,7 +648,7 @@
                 <a:sym typeface="Arial"/>
               </a:defRPr>
             </a:lvl8pPr>
-            <a:lvl9pPr indent="-298450" lvl="8" marL="4114800" marR="0" rtl="0" algn="l">
+            <a:lvl9pPr marL="4114800" marR="0" lvl="8" indent="-298450" algn="l" rtl="0">
               <a:lnSpc>
                 <a:spcPct val="100000"/>
               </a:lnSpc>
@@ -654,7 +664,7 @@
               <a:buSzPts val="1100"/>
               <a:buFont typeface="Arial"/>
               <a:buChar char="■"/>
-              <a:defRPr b="0" i="0" sz="1100" u="none" cap="none" strike="noStrike">
+              <a:defRPr sz="1100" b="0" i="0" u="none" strike="noStrike" cap="none">
                 <a:solidFill>
                   <a:srgbClr val="000000"/>
                 </a:solidFill>
@@ -665,14 +675,16 @@
               </a:defRPr>
             </a:lvl9pPr>
           </a:lstStyle>
-          <a:p/>
+          <a:p>
+            <a:endParaRPr/>
+          </a:p>
         </p:txBody>
       </p:sp>
     </p:spTree>
   </p:cSld>
-  <p:clrMap accent1="accent1" accent2="accent2" accent3="accent3" accent4="accent4" accent5="accent5" accent6="accent6" bg1="lt1" bg2="dk2" tx1="dk1" tx2="lt2" folHlink="folHlink" hlink="hlink"/>
+  <p:clrMap bg1="lt1" tx1="dk1" bg2="dk2" tx2="lt2" accent1="accent1" accent2="accent2" accent3="accent3" accent4="accent4" accent5="accent5" accent6="accent6" hlink="hlink" folHlink="folHlink"/>
   <p:notesStyle>
-    <a:defPPr lvl="0" marR="0" rtl="0" algn="l">
+    <a:defPPr marR="0" lvl="0" algn="l" rtl="0">
       <a:lnSpc>
         <a:spcPct val="100000"/>
       </a:lnSpc>
@@ -683,7 +695,7 @@
         <a:spcPts val="0"/>
       </a:spcAft>
     </a:defPPr>
-    <a:lvl1pPr lvl="0" marR="0" rtl="0" algn="l">
+    <a:lvl1pPr marR="0" lvl="0" algn="l" rtl="0">
       <a:lnSpc>
         <a:spcPct val="100000"/>
       </a:lnSpc>
@@ -697,7 +709,7 @@
         <a:srgbClr val="000000"/>
       </a:buClr>
       <a:buFont typeface="Arial"/>
-      <a:defRPr b="0" i="0" sz="1400" u="none" cap="none" strike="noStrike">
+      <a:defRPr sz="1400" b="0" i="0" u="none" strike="noStrike" cap="none">
         <a:solidFill>
           <a:srgbClr val="000000"/>
         </a:solidFill>
@@ -707,7 +719,7 @@
         <a:sym typeface="Arial"/>
       </a:defRPr>
     </a:lvl1pPr>
-    <a:lvl2pPr lvl="1" marR="0" rtl="0" algn="l">
+    <a:lvl2pPr marR="0" lvl="1" algn="l" rtl="0">
       <a:lnSpc>
         <a:spcPct val="100000"/>
       </a:lnSpc>
@@ -721,7 +733,7 @@
         <a:srgbClr val="000000"/>
       </a:buClr>
       <a:buFont typeface="Arial"/>
-      <a:defRPr b="0" i="0" sz="1400" u="none" cap="none" strike="noStrike">
+      <a:defRPr sz="1400" b="0" i="0" u="none" strike="noStrike" cap="none">
         <a:solidFill>
           <a:srgbClr val="000000"/>
         </a:solidFill>
@@ -731,7 +743,7 @@
         <a:sym typeface="Arial"/>
       </a:defRPr>
     </a:lvl2pPr>
-    <a:lvl3pPr lvl="2" marR="0" rtl="0" algn="l">
+    <a:lvl3pPr marR="0" lvl="2" algn="l" rtl="0">
       <a:lnSpc>
         <a:spcPct val="100000"/>
       </a:lnSpc>
@@ -745,7 +757,7 @@
         <a:srgbClr val="000000"/>
       </a:buClr>
       <a:buFont typeface="Arial"/>
-      <a:defRPr b="0" i="0" sz="1400" u="none" cap="none" strike="noStrike">
+      <a:defRPr sz="1400" b="0" i="0" u="none" strike="noStrike" cap="none">
         <a:solidFill>
           <a:srgbClr val="000000"/>
         </a:solidFill>
@@ -755,7 +767,7 @@
         <a:sym typeface="Arial"/>
       </a:defRPr>
     </a:lvl3pPr>
-    <a:lvl4pPr lvl="3" marR="0" rtl="0" algn="l">
+    <a:lvl4pPr marR="0" lvl="3" algn="l" rtl="0">
       <a:lnSpc>
         <a:spcPct val="100000"/>
       </a:lnSpc>
@@ -769,7 +781,7 @@
         <a:srgbClr val="000000"/>
       </a:buClr>
       <a:buFont typeface="Arial"/>
-      <a:defRPr b="0" i="0" sz="1400" u="none" cap="none" strike="noStrike">
+      <a:defRPr sz="1400" b="0" i="0" u="none" strike="noStrike" cap="none">
         <a:solidFill>
           <a:srgbClr val="000000"/>
         </a:solidFill>
@@ -779,7 +791,7 @@
         <a:sym typeface="Arial"/>
       </a:defRPr>
     </a:lvl4pPr>
-    <a:lvl5pPr lvl="4" marR="0" rtl="0" algn="l">
+    <a:lvl5pPr marR="0" lvl="4" algn="l" rtl="0">
       <a:lnSpc>
         <a:spcPct val="100000"/>
       </a:lnSpc>
@@ -793,7 +805,7 @@
         <a:srgbClr val="000000"/>
       </a:buClr>
       <a:buFont typeface="Arial"/>
-      <a:defRPr b="0" i="0" sz="1400" u="none" cap="none" strike="noStrike">
+      <a:defRPr sz="1400" b="0" i="0" u="none" strike="noStrike" cap="none">
         <a:solidFill>
           <a:srgbClr val="000000"/>
         </a:solidFill>
@@ -803,7 +815,7 @@
         <a:sym typeface="Arial"/>
       </a:defRPr>
     </a:lvl5pPr>
-    <a:lvl6pPr lvl="5" marR="0" rtl="0" algn="l">
+    <a:lvl6pPr marR="0" lvl="5" algn="l" rtl="0">
       <a:lnSpc>
         <a:spcPct val="100000"/>
       </a:lnSpc>
@@ -817,7 +829,7 @@
         <a:srgbClr val="000000"/>
       </a:buClr>
       <a:buFont typeface="Arial"/>
-      <a:defRPr b="0" i="0" sz="1400" u="none" cap="none" strike="noStrike">
+      <a:defRPr sz="1400" b="0" i="0" u="none" strike="noStrike" cap="none">
         <a:solidFill>
           <a:srgbClr val="000000"/>
         </a:solidFill>
@@ -827,7 +839,7 @@
         <a:sym typeface="Arial"/>
       </a:defRPr>
     </a:lvl6pPr>
-    <a:lvl7pPr lvl="6" marR="0" rtl="0" algn="l">
+    <a:lvl7pPr marR="0" lvl="6" algn="l" rtl="0">
       <a:lnSpc>
         <a:spcPct val="100000"/>
       </a:lnSpc>
@@ -841,7 +853,7 @@
         <a:srgbClr val="000000"/>
       </a:buClr>
       <a:buFont typeface="Arial"/>
-      <a:defRPr b="0" i="0" sz="1400" u="none" cap="none" strike="noStrike">
+      <a:defRPr sz="1400" b="0" i="0" u="none" strike="noStrike" cap="none">
         <a:solidFill>
           <a:srgbClr val="000000"/>
         </a:solidFill>
@@ -851,7 +863,7 @@
         <a:sym typeface="Arial"/>
       </a:defRPr>
     </a:lvl7pPr>
-    <a:lvl8pPr lvl="7" marR="0" rtl="0" algn="l">
+    <a:lvl8pPr marR="0" lvl="7" algn="l" rtl="0">
       <a:lnSpc>
         <a:spcPct val="100000"/>
       </a:lnSpc>
@@ -865,7 +877,7 @@
         <a:srgbClr val="000000"/>
       </a:buClr>
       <a:buFont typeface="Arial"/>
-      <a:defRPr b="0" i="0" sz="1400" u="none" cap="none" strike="noStrike">
+      <a:defRPr sz="1400" b="0" i="0" u="none" strike="noStrike" cap="none">
         <a:solidFill>
           <a:srgbClr val="000000"/>
         </a:solidFill>
@@ -875,7 +887,7 @@
         <a:sym typeface="Arial"/>
       </a:defRPr>
     </a:lvl8pPr>
-    <a:lvl9pPr lvl="8" marR="0" rtl="0" algn="l">
+    <a:lvl9pPr marR="0" lvl="8" algn="l" rtl="0">
       <a:lnSpc>
         <a:spcPct val="100000"/>
       </a:lnSpc>
@@ -889,7 +901,7 @@
         <a:srgbClr val="000000"/>
       </a:buClr>
       <a:buFont typeface="Arial"/>
-      <a:defRPr b="0" i="0" sz="1400" u="none" cap="none" strike="noStrike">
+      <a:defRPr sz="1400" b="0" i="0" u="none" strike="noStrike" cap="none">
         <a:solidFill>
           <a:srgbClr val="000000"/>
         </a:solidFill>
@@ -904,11 +916,11 @@
 </file>
 
 <file path=ppt/notesSlides/notesSlide1.xml><?xml version="1.0" encoding="utf-8"?>
-<p:notes xmlns:a="http://schemas.openxmlformats.org/drawingml/2006/main" xmlns:r="http://schemas.openxmlformats.org/officeDocument/2006/relationships" xmlns:mc="http://schemas.openxmlformats.org/markup-compatibility/2006" xmlns:mv="urn:schemas-microsoft-com:mac:vml" xmlns:p="http://schemas.openxmlformats.org/presentationml/2006/main" xmlns:c="http://schemas.openxmlformats.org/drawingml/2006/chart" xmlns:dgm="http://schemas.openxmlformats.org/drawingml/2006/diagram" xmlns:o="urn:schemas-microsoft-com:office:office" xmlns:v="urn:schemas-microsoft-com:vml" xmlns:pvml="urn:schemas-microsoft-com:office:powerpoint" xmlns:com="http://schemas.openxmlformats.org/drawingml/2006/compatibility" xmlns:p14="http://schemas.microsoft.com/office/powerpoint/2010/main" xmlns:p15="http://schemas.microsoft.com/office/powerpoint/2012/main" xmlns:ahyp="http://schemas.microsoft.com/office/drawing/2018/hyperlinkcolor" showMasterPhAnim="0" showMasterSp="0">
+<p:notes xmlns:a="http://schemas.openxmlformats.org/drawingml/2006/main" xmlns:r="http://schemas.openxmlformats.org/officeDocument/2006/relationships" xmlns:p="http://schemas.openxmlformats.org/presentationml/2006/main" showMasterSp="0" showMasterPhAnim="0">
   <p:cSld>
     <p:spTree>
       <p:nvGrpSpPr>
-        <p:cNvPr id="29" name="Shape 29"/>
+        <p:cNvPr id="1" name="Shape 29"/>
         <p:cNvGrpSpPr/>
         <p:nvPr/>
       </p:nvGrpSpPr>
@@ -923,9 +935,11 @@
       <p:sp>
         <p:nvSpPr>
           <p:cNvPr id="30" name="Google Shape;30;p1:notes"/>
-          <p:cNvSpPr/>
+          <p:cNvSpPr>
+            <a:spLocks noGrp="1" noRot="1" noChangeAspect="1"/>
+          </p:cNvSpPr>
           <p:nvPr>
-            <p:ph idx="2" type="sldImg"/>
+            <p:ph type="sldImg" idx="2"/>
           </p:nvPr>
         </p:nvSpPr>
         <p:spPr>
@@ -934,9 +948,13 @@
             <a:ext cx="6096000" cy="3429000"/>
           </a:xfrm>
           <a:custGeom>
-            <a:rect b="b" l="l" r="r" t="t"/>
+            <a:avLst/>
+            <a:gdLst/>
+            <a:ahLst/>
+            <a:cxnLst/>
+            <a:rect l="l" t="t" r="r" b="b"/>
             <a:pathLst>
-              <a:path extrusionOk="0" h="120000" w="120000">
+              <a:path w="120000" h="120000" extrusionOk="0">
                 <a:moveTo>
                   <a:pt x="0" y="0"/>
                 </a:moveTo>
@@ -954,23 +972,25 @@
             </a:pathLst>
           </a:custGeom>
           <a:noFill/>
-          <a:ln cap="flat" cmpd="sng" w="9525">
+          <a:ln w="9525" cap="flat" cmpd="sng">
             <a:solidFill>
               <a:srgbClr val="000000"/>
             </a:solidFill>
             <a:prstDash val="solid"/>
             <a:round/>
-            <a:headEnd len="sm" w="sm" type="none"/>
-            <a:tailEnd len="sm" w="sm" type="none"/>
+            <a:headEnd type="none" w="sm" len="sm"/>
+            <a:tailEnd type="none" w="sm" len="sm"/>
           </a:ln>
         </p:spPr>
       </p:sp>
       <p:sp>
         <p:nvSpPr>
           <p:cNvPr id="31" name="Google Shape;31;p1:notes"/>
-          <p:cNvSpPr txBox="1"/>
+          <p:cNvSpPr txBox="1">
+            <a:spLocks noGrp="1"/>
+          </p:cNvSpPr>
           <p:nvPr>
-            <p:ph idx="1" type="body"/>
+            <p:ph type="body" idx="1"/>
           </p:nvPr>
         </p:nvSpPr>
         <p:spPr>
@@ -987,12 +1007,12 @@
           </a:ln>
         </p:spPr>
         <p:txBody>
-          <a:bodyPr anchorCtr="0" anchor="t" bIns="91425" lIns="91425" spcFirstLastPara="1" rIns="91425" wrap="square" tIns="91425">
+          <a:bodyPr spcFirstLastPara="1" wrap="square" lIns="91425" tIns="91425" rIns="91425" bIns="91425" anchor="t" anchorCtr="0">
             <a:noAutofit/>
           </a:bodyPr>
           <a:lstStyle/>
           <a:p>
-            <a:pPr indent="0" lvl="0" marL="0" rtl="0" algn="l">
+            <a:pPr marL="0" lvl="0" indent="0" algn="l" rtl="0">
               <a:lnSpc>
                 <a:spcPct val="100000"/>
               </a:lnSpc>
@@ -1005,9 +1025,6 @@
               <a:buSzPts val="1100"/>
               <a:buNone/>
             </a:pPr>
-            <a:r>
-              <a:t/>
-            </a:r>
             <a:endParaRPr/>
           </a:p>
         </p:txBody>
@@ -1021,11 +1038,11 @@
 </file>
 
 <file path=ppt/notesSlides/notesSlide10.xml><?xml version="1.0" encoding="utf-8"?>
-<p:notes xmlns:a="http://schemas.openxmlformats.org/drawingml/2006/main" xmlns:r="http://schemas.openxmlformats.org/officeDocument/2006/relationships" xmlns:mc="http://schemas.openxmlformats.org/markup-compatibility/2006" xmlns:mv="urn:schemas-microsoft-com:mac:vml" xmlns:p="http://schemas.openxmlformats.org/presentationml/2006/main" xmlns:c="http://schemas.openxmlformats.org/drawingml/2006/chart" xmlns:dgm="http://schemas.openxmlformats.org/drawingml/2006/diagram" xmlns:o="urn:schemas-microsoft-com:office:office" xmlns:v="urn:schemas-microsoft-com:vml" xmlns:pvml="urn:schemas-microsoft-com:office:powerpoint" xmlns:com="http://schemas.openxmlformats.org/drawingml/2006/compatibility" xmlns:p14="http://schemas.microsoft.com/office/powerpoint/2010/main" xmlns:p15="http://schemas.microsoft.com/office/powerpoint/2012/main" xmlns:ahyp="http://schemas.microsoft.com/office/drawing/2018/hyperlinkcolor" showMasterPhAnim="0" showMasterSp="0">
+<p:notes xmlns:a="http://schemas.openxmlformats.org/drawingml/2006/main" xmlns:r="http://schemas.openxmlformats.org/officeDocument/2006/relationships" xmlns:p="http://schemas.openxmlformats.org/presentationml/2006/main" showMasterSp="0" showMasterPhAnim="0">
   <p:cSld>
     <p:spTree>
       <p:nvGrpSpPr>
-        <p:cNvPr id="124" name="Shape 124"/>
+        <p:cNvPr id="1" name="Shape 116"/>
         <p:cNvGrpSpPr/>
         <p:nvPr/>
       </p:nvGrpSpPr>
@@ -1039,10 +1056,12 @@
       </p:grpSpPr>
       <p:sp>
         <p:nvSpPr>
-          <p:cNvPr id="125" name="Google Shape;125;p10:notes"/>
-          <p:cNvSpPr/>
+          <p:cNvPr id="117" name="Google Shape;117;p9:notes"/>
+          <p:cNvSpPr>
+            <a:spLocks noGrp="1" noRot="1" noChangeAspect="1"/>
+          </p:cNvSpPr>
           <p:nvPr>
-            <p:ph idx="2" type="sldImg"/>
+            <p:ph type="sldImg" idx="2"/>
           </p:nvPr>
         </p:nvSpPr>
         <p:spPr>
@@ -1051,9 +1070,13 @@
             <a:ext cx="6096000" cy="3429000"/>
           </a:xfrm>
           <a:custGeom>
-            <a:rect b="b" l="l" r="r" t="t"/>
+            <a:avLst/>
+            <a:gdLst/>
+            <a:ahLst/>
+            <a:cxnLst/>
+            <a:rect l="l" t="t" r="r" b="b"/>
             <a:pathLst>
-              <a:path extrusionOk="0" h="120000" w="120000">
+              <a:path w="120000" h="120000" extrusionOk="0">
                 <a:moveTo>
                   <a:pt x="0" y="0"/>
                 </a:moveTo>
@@ -1071,23 +1094,25 @@
             </a:pathLst>
           </a:custGeom>
           <a:noFill/>
-          <a:ln cap="flat" cmpd="sng" w="9525">
+          <a:ln w="9525" cap="flat" cmpd="sng">
             <a:solidFill>
               <a:srgbClr val="000000"/>
             </a:solidFill>
             <a:prstDash val="solid"/>
             <a:round/>
-            <a:headEnd len="sm" w="sm" type="none"/>
-            <a:tailEnd len="sm" w="sm" type="none"/>
+            <a:headEnd type="none" w="sm" len="sm"/>
+            <a:tailEnd type="none" w="sm" len="sm"/>
           </a:ln>
         </p:spPr>
       </p:sp>
       <p:sp>
         <p:nvSpPr>
-          <p:cNvPr id="126" name="Google Shape;126;p10:notes"/>
-          <p:cNvSpPr txBox="1"/>
+          <p:cNvPr id="118" name="Google Shape;118;p9:notes"/>
+          <p:cNvSpPr txBox="1">
+            <a:spLocks noGrp="1"/>
+          </p:cNvSpPr>
           <p:nvPr>
-            <p:ph idx="1" type="body"/>
+            <p:ph type="body" idx="1"/>
           </p:nvPr>
         </p:nvSpPr>
         <p:spPr>
@@ -1104,12 +1129,12 @@
           </a:ln>
         </p:spPr>
         <p:txBody>
-          <a:bodyPr anchorCtr="0" anchor="t" bIns="91425" lIns="91425" spcFirstLastPara="1" rIns="91425" wrap="square" tIns="91425">
+          <a:bodyPr spcFirstLastPara="1" wrap="square" lIns="91425" tIns="91425" rIns="91425" bIns="91425" anchor="t" anchorCtr="0">
             <a:noAutofit/>
           </a:bodyPr>
           <a:lstStyle/>
           <a:p>
-            <a:pPr indent="0" lvl="0" marL="0" rtl="0" algn="l">
+            <a:pPr marL="0" lvl="0" indent="0" algn="l" rtl="0">
               <a:lnSpc>
                 <a:spcPct val="100000"/>
               </a:lnSpc>
@@ -1122,9 +1147,6 @@
               <a:buSzPts val="1100"/>
               <a:buNone/>
             </a:pPr>
-            <a:r>
-              <a:t/>
-            </a:r>
             <a:endParaRPr/>
           </a:p>
         </p:txBody>
@@ -1137,12 +1159,12 @@
 </p:notes>
 </file>
 
-<file path=ppt/notesSlides/notesSlide2.xml><?xml version="1.0" encoding="utf-8"?>
-<p:notes xmlns:a="http://schemas.openxmlformats.org/drawingml/2006/main" xmlns:r="http://schemas.openxmlformats.org/officeDocument/2006/relationships" xmlns:mc="http://schemas.openxmlformats.org/markup-compatibility/2006" xmlns:mv="urn:schemas-microsoft-com:mac:vml" xmlns:p="http://schemas.openxmlformats.org/presentationml/2006/main" xmlns:c="http://schemas.openxmlformats.org/drawingml/2006/chart" xmlns:dgm="http://schemas.openxmlformats.org/drawingml/2006/diagram" xmlns:o="urn:schemas-microsoft-com:office:office" xmlns:v="urn:schemas-microsoft-com:vml" xmlns:pvml="urn:schemas-microsoft-com:office:powerpoint" xmlns:com="http://schemas.openxmlformats.org/drawingml/2006/compatibility" xmlns:p14="http://schemas.microsoft.com/office/powerpoint/2010/main" xmlns:p15="http://schemas.microsoft.com/office/powerpoint/2012/main" xmlns:ahyp="http://schemas.microsoft.com/office/drawing/2018/hyperlinkcolor" showMasterPhAnim="0" showMasterSp="0">
+<file path=ppt/notesSlides/notesSlide11.xml><?xml version="1.0" encoding="utf-8"?>
+<p:notes xmlns:a="http://schemas.openxmlformats.org/drawingml/2006/main" xmlns:r="http://schemas.openxmlformats.org/officeDocument/2006/relationships" xmlns:p="http://schemas.openxmlformats.org/presentationml/2006/main" showMasterSp="0" showMasterPhAnim="0">
   <p:cSld>
     <p:spTree>
       <p:nvGrpSpPr>
-        <p:cNvPr id="35" name="Shape 35"/>
+        <p:cNvPr id="1" name="Shape 124"/>
         <p:cNvGrpSpPr/>
         <p:nvPr/>
       </p:nvGrpSpPr>
@@ -1156,21 +1178,27 @@
       </p:grpSpPr>
       <p:sp>
         <p:nvSpPr>
-          <p:cNvPr id="36" name="Google Shape;36;p2:notes"/>
-          <p:cNvSpPr/>
+          <p:cNvPr id="125" name="Google Shape;125;p10:notes"/>
+          <p:cNvSpPr>
+            <a:spLocks noGrp="1" noRot="1" noChangeAspect="1"/>
+          </p:cNvSpPr>
           <p:nvPr>
-            <p:ph idx="2" type="sldImg"/>
+            <p:ph type="sldImg" idx="2"/>
           </p:nvPr>
         </p:nvSpPr>
         <p:spPr>
           <a:xfrm>
-            <a:off x="381000" y="685800"/>
+            <a:off x="381300" y="685800"/>
             <a:ext cx="6096000" cy="3429000"/>
           </a:xfrm>
           <a:custGeom>
-            <a:rect b="b" l="l" r="r" t="t"/>
+            <a:avLst/>
+            <a:gdLst/>
+            <a:ahLst/>
+            <a:cxnLst/>
+            <a:rect l="l" t="t" r="r" b="b"/>
             <a:pathLst>
-              <a:path extrusionOk="0" h="120000" w="120000">
+              <a:path w="120000" h="120000" extrusionOk="0">
                 <a:moveTo>
                   <a:pt x="0" y="0"/>
                 </a:moveTo>
@@ -1188,23 +1216,25 @@
             </a:pathLst>
           </a:custGeom>
           <a:noFill/>
-          <a:ln cap="flat" cmpd="sng" w="9525">
+          <a:ln w="9525" cap="flat" cmpd="sng">
             <a:solidFill>
               <a:srgbClr val="000000"/>
             </a:solidFill>
             <a:prstDash val="solid"/>
             <a:round/>
-            <a:headEnd len="sm" w="sm" type="none"/>
-            <a:tailEnd len="sm" w="sm" type="none"/>
+            <a:headEnd type="none" w="sm" len="sm"/>
+            <a:tailEnd type="none" w="sm" len="sm"/>
           </a:ln>
         </p:spPr>
       </p:sp>
       <p:sp>
         <p:nvSpPr>
-          <p:cNvPr id="37" name="Google Shape;37;p2:notes"/>
-          <p:cNvSpPr txBox="1"/>
+          <p:cNvPr id="126" name="Google Shape;126;p10:notes"/>
+          <p:cNvSpPr txBox="1">
+            <a:spLocks noGrp="1"/>
+          </p:cNvSpPr>
           <p:nvPr>
-            <p:ph idx="1" type="body"/>
+            <p:ph type="body" idx="1"/>
           </p:nvPr>
         </p:nvSpPr>
         <p:spPr>
@@ -1221,12 +1251,12 @@
           </a:ln>
         </p:spPr>
         <p:txBody>
-          <a:bodyPr anchorCtr="0" anchor="t" bIns="91425" lIns="91425" spcFirstLastPara="1" rIns="91425" wrap="square" tIns="91425">
+          <a:bodyPr spcFirstLastPara="1" wrap="square" lIns="91425" tIns="91425" rIns="91425" bIns="91425" anchor="t" anchorCtr="0">
             <a:noAutofit/>
           </a:bodyPr>
           <a:lstStyle/>
           <a:p>
-            <a:pPr indent="0" lvl="0" marL="0" rtl="0" algn="l">
+            <a:pPr marL="0" lvl="0" indent="0" algn="l" rtl="0">
               <a:lnSpc>
                 <a:spcPct val="100000"/>
               </a:lnSpc>
@@ -1239,9 +1269,110 @@
               <a:buSzPts val="1100"/>
               <a:buNone/>
             </a:pPr>
-            <a:r>
-              <a:t/>
-            </a:r>
+            <a:endParaRPr/>
+          </a:p>
+        </p:txBody>
+      </p:sp>
+    </p:spTree>
+  </p:cSld>
+  <p:clrMapOvr>
+    <a:masterClrMapping/>
+  </p:clrMapOvr>
+</p:notes>
+</file>
+
+<file path=ppt/notesSlides/notesSlide2.xml><?xml version="1.0" encoding="utf-8"?>
+<p:notes xmlns:a="http://schemas.openxmlformats.org/drawingml/2006/main" xmlns:r="http://schemas.openxmlformats.org/officeDocument/2006/relationships" xmlns:p="http://schemas.openxmlformats.org/presentationml/2006/main" showMasterSp="0" showMasterPhAnim="0">
+  <p:cSld>
+    <p:spTree>
+      <p:nvGrpSpPr>
+        <p:cNvPr id="1" name="Shape 65"/>
+        <p:cNvGrpSpPr/>
+        <p:nvPr/>
+      </p:nvGrpSpPr>
+      <p:grpSpPr>
+        <a:xfrm>
+          <a:off x="0" y="0"/>
+          <a:ext cx="0" cy="0"/>
+          <a:chOff x="0" y="0"/>
+          <a:chExt cx="0" cy="0"/>
+        </a:xfrm>
+      </p:grpSpPr>
+      <p:sp>
+        <p:nvSpPr>
+          <p:cNvPr id="66" name="Google Shape;66;g2daed9049e9_0_0:notes"/>
+          <p:cNvSpPr>
+            <a:spLocks noGrp="1" noRot="1" noChangeAspect="1"/>
+          </p:cNvSpPr>
+          <p:nvPr>
+            <p:ph type="sldImg" idx="2"/>
+          </p:nvPr>
+        </p:nvSpPr>
+        <p:spPr>
+          <a:xfrm>
+            <a:off x="381000" y="685800"/>
+            <a:ext cx="6096000" cy="3429000"/>
+          </a:xfrm>
+          <a:custGeom>
+            <a:avLst/>
+            <a:gdLst/>
+            <a:ahLst/>
+            <a:cxnLst/>
+            <a:rect l="l" t="t" r="r" b="b"/>
+            <a:pathLst>
+              <a:path w="120000" h="120000" extrusionOk="0">
+                <a:moveTo>
+                  <a:pt x="0" y="0"/>
+                </a:moveTo>
+                <a:lnTo>
+                  <a:pt x="120000" y="0"/>
+                </a:lnTo>
+                <a:lnTo>
+                  <a:pt x="120000" y="120000"/>
+                </a:lnTo>
+                <a:lnTo>
+                  <a:pt x="0" y="120000"/>
+                </a:lnTo>
+                <a:close/>
+              </a:path>
+            </a:pathLst>
+          </a:custGeom>
+        </p:spPr>
+      </p:sp>
+      <p:sp>
+        <p:nvSpPr>
+          <p:cNvPr id="67" name="Google Shape;67;g2daed9049e9_0_0:notes"/>
+          <p:cNvSpPr txBox="1">
+            <a:spLocks noGrp="1"/>
+          </p:cNvSpPr>
+          <p:nvPr>
+            <p:ph type="body" idx="1"/>
+          </p:nvPr>
+        </p:nvSpPr>
+        <p:spPr>
+          <a:xfrm>
+            <a:off x="685800" y="4343400"/>
+            <a:ext cx="5486400" cy="4114800"/>
+          </a:xfrm>
+          <a:prstGeom prst="rect">
+            <a:avLst/>
+          </a:prstGeom>
+        </p:spPr>
+        <p:txBody>
+          <a:bodyPr spcFirstLastPara="1" wrap="square" lIns="91425" tIns="91425" rIns="91425" bIns="91425" anchor="t" anchorCtr="0">
+            <a:noAutofit/>
+          </a:bodyPr>
+          <a:lstStyle/>
+          <a:p>
+            <a:pPr marL="0" lvl="0" indent="0" algn="l" rtl="0">
+              <a:spcBef>
+                <a:spcPts val="0"/>
+              </a:spcBef>
+              <a:spcAft>
+                <a:spcPts val="0"/>
+              </a:spcAft>
+              <a:buNone/>
+            </a:pPr>
             <a:endParaRPr/>
           </a:p>
         </p:txBody>
@@ -1255,11 +1386,11 @@
 </file>
 
 <file path=ppt/notesSlides/notesSlide3.xml><?xml version="1.0" encoding="utf-8"?>
-<p:notes xmlns:a="http://schemas.openxmlformats.org/drawingml/2006/main" xmlns:r="http://schemas.openxmlformats.org/officeDocument/2006/relationships" xmlns:mc="http://schemas.openxmlformats.org/markup-compatibility/2006" xmlns:mv="urn:schemas-microsoft-com:mac:vml" xmlns:p="http://schemas.openxmlformats.org/presentationml/2006/main" xmlns:c="http://schemas.openxmlformats.org/drawingml/2006/chart" xmlns:dgm="http://schemas.openxmlformats.org/drawingml/2006/diagram" xmlns:o="urn:schemas-microsoft-com:office:office" xmlns:v="urn:schemas-microsoft-com:vml" xmlns:pvml="urn:schemas-microsoft-com:office:powerpoint" xmlns:com="http://schemas.openxmlformats.org/drawingml/2006/compatibility" xmlns:p14="http://schemas.microsoft.com/office/powerpoint/2010/main" xmlns:p15="http://schemas.microsoft.com/office/powerpoint/2012/main" xmlns:ahyp="http://schemas.microsoft.com/office/drawing/2018/hyperlinkcolor" showMasterPhAnim="0" showMasterSp="0">
+<p:notes xmlns:a="http://schemas.openxmlformats.org/drawingml/2006/main" xmlns:r="http://schemas.openxmlformats.org/officeDocument/2006/relationships" xmlns:p="http://schemas.openxmlformats.org/presentationml/2006/main" showMasterSp="0" showMasterPhAnim="0">
   <p:cSld>
     <p:spTree>
       <p:nvGrpSpPr>
-        <p:cNvPr id="48" name="Shape 48"/>
+        <p:cNvPr id="1" name="Shape 35"/>
         <p:cNvGrpSpPr/>
         <p:nvPr/>
       </p:nvGrpSpPr>
@@ -1273,10 +1404,12 @@
       </p:grpSpPr>
       <p:sp>
         <p:nvSpPr>
-          <p:cNvPr id="49" name="Google Shape;49;g2e433a42c2d_0_1:notes"/>
-          <p:cNvSpPr/>
+          <p:cNvPr id="36" name="Google Shape;36;p2:notes"/>
+          <p:cNvSpPr>
+            <a:spLocks noGrp="1" noRot="1" noChangeAspect="1"/>
+          </p:cNvSpPr>
           <p:nvPr>
-            <p:ph idx="2" type="sldImg"/>
+            <p:ph type="sldImg" idx="2"/>
           </p:nvPr>
         </p:nvSpPr>
         <p:spPr>
@@ -1285,9 +1418,13 @@
             <a:ext cx="6096000" cy="3429000"/>
           </a:xfrm>
           <a:custGeom>
-            <a:rect b="b" l="l" r="r" t="t"/>
+            <a:avLst/>
+            <a:gdLst/>
+            <a:ahLst/>
+            <a:cxnLst/>
+            <a:rect l="l" t="t" r="r" b="b"/>
             <a:pathLst>
-              <a:path extrusionOk="0" h="120000" w="120000">
+              <a:path w="120000" h="120000" extrusionOk="0">
                 <a:moveTo>
                   <a:pt x="0" y="0"/>
                 </a:moveTo>
@@ -1305,23 +1442,25 @@
             </a:pathLst>
           </a:custGeom>
           <a:noFill/>
-          <a:ln cap="flat" cmpd="sng" w="9525">
+          <a:ln w="9525" cap="flat" cmpd="sng">
             <a:solidFill>
               <a:srgbClr val="000000"/>
             </a:solidFill>
             <a:prstDash val="solid"/>
             <a:round/>
-            <a:headEnd len="sm" w="sm" type="none"/>
-            <a:tailEnd len="sm" w="sm" type="none"/>
+            <a:headEnd type="none" w="sm" len="sm"/>
+            <a:tailEnd type="none" w="sm" len="sm"/>
           </a:ln>
         </p:spPr>
       </p:sp>
       <p:sp>
         <p:nvSpPr>
-          <p:cNvPr id="50" name="Google Shape;50;g2e433a42c2d_0_1:notes"/>
-          <p:cNvSpPr txBox="1"/>
+          <p:cNvPr id="37" name="Google Shape;37;p2:notes"/>
+          <p:cNvSpPr txBox="1">
+            <a:spLocks noGrp="1"/>
+          </p:cNvSpPr>
           <p:nvPr>
-            <p:ph idx="1" type="body"/>
+            <p:ph type="body" idx="1"/>
           </p:nvPr>
         </p:nvSpPr>
         <p:spPr>
@@ -1338,12 +1477,12 @@
           </a:ln>
         </p:spPr>
         <p:txBody>
-          <a:bodyPr anchorCtr="0" anchor="t" bIns="91425" lIns="91425" spcFirstLastPara="1" rIns="91425" wrap="square" tIns="91425">
+          <a:bodyPr spcFirstLastPara="1" wrap="square" lIns="91425" tIns="91425" rIns="91425" bIns="91425" anchor="t" anchorCtr="0">
             <a:noAutofit/>
           </a:bodyPr>
           <a:lstStyle/>
           <a:p>
-            <a:pPr indent="0" lvl="0" marL="0" rtl="0" algn="l">
+            <a:pPr marL="0" lvl="0" indent="0" algn="l" rtl="0">
               <a:lnSpc>
                 <a:spcPct val="100000"/>
               </a:lnSpc>
@@ -1356,9 +1495,6 @@
               <a:buSzPts val="1100"/>
               <a:buNone/>
             </a:pPr>
-            <a:r>
-              <a:t/>
-            </a:r>
             <a:endParaRPr/>
           </a:p>
         </p:txBody>
@@ -1372,11 +1508,11 @@
 </file>
 
 <file path=ppt/notesSlides/notesSlide4.xml><?xml version="1.0" encoding="utf-8"?>
-<p:notes xmlns:a="http://schemas.openxmlformats.org/drawingml/2006/main" xmlns:r="http://schemas.openxmlformats.org/officeDocument/2006/relationships" xmlns:mc="http://schemas.openxmlformats.org/markup-compatibility/2006" xmlns:mv="urn:schemas-microsoft-com:mac:vml" xmlns:p="http://schemas.openxmlformats.org/presentationml/2006/main" xmlns:c="http://schemas.openxmlformats.org/drawingml/2006/chart" xmlns:dgm="http://schemas.openxmlformats.org/drawingml/2006/diagram" xmlns:o="urn:schemas-microsoft-com:office:office" xmlns:v="urn:schemas-microsoft-com:vml" xmlns:pvml="urn:schemas-microsoft-com:office:powerpoint" xmlns:com="http://schemas.openxmlformats.org/drawingml/2006/compatibility" xmlns:p14="http://schemas.microsoft.com/office/powerpoint/2010/main" xmlns:p15="http://schemas.microsoft.com/office/powerpoint/2012/main" xmlns:ahyp="http://schemas.microsoft.com/office/drawing/2018/hyperlinkcolor" showMasterPhAnim="0" showMasterSp="0">
+<p:notes xmlns:a="http://schemas.openxmlformats.org/drawingml/2006/main" xmlns:r="http://schemas.openxmlformats.org/officeDocument/2006/relationships" xmlns:p="http://schemas.openxmlformats.org/presentationml/2006/main" showMasterSp="0" showMasterPhAnim="0">
   <p:cSld>
     <p:spTree>
       <p:nvGrpSpPr>
-        <p:cNvPr id="59" name="Shape 59"/>
+        <p:cNvPr id="1" name="Shape 48"/>
         <p:cNvGrpSpPr/>
         <p:nvPr/>
       </p:nvGrpSpPr>
@@ -1390,21 +1526,27 @@
       </p:grpSpPr>
       <p:sp>
         <p:nvSpPr>
-          <p:cNvPr id="60" name="Google Shape;60;p5:notes"/>
-          <p:cNvSpPr/>
+          <p:cNvPr id="49" name="Google Shape;49;g2e433a42c2d_0_1:notes"/>
+          <p:cNvSpPr>
+            <a:spLocks noGrp="1" noRot="1" noChangeAspect="1"/>
+          </p:cNvSpPr>
           <p:nvPr>
-            <p:ph idx="2" type="sldImg"/>
+            <p:ph type="sldImg" idx="2"/>
           </p:nvPr>
         </p:nvSpPr>
         <p:spPr>
           <a:xfrm>
-            <a:off x="381300" y="685800"/>
+            <a:off x="381000" y="685800"/>
             <a:ext cx="6096000" cy="3429000"/>
           </a:xfrm>
           <a:custGeom>
-            <a:rect b="b" l="l" r="r" t="t"/>
+            <a:avLst/>
+            <a:gdLst/>
+            <a:ahLst/>
+            <a:cxnLst/>
+            <a:rect l="l" t="t" r="r" b="b"/>
             <a:pathLst>
-              <a:path extrusionOk="0" h="120000" w="120000">
+              <a:path w="120000" h="120000" extrusionOk="0">
                 <a:moveTo>
                   <a:pt x="0" y="0"/>
                 </a:moveTo>
@@ -1422,23 +1564,25 @@
             </a:pathLst>
           </a:custGeom>
           <a:noFill/>
-          <a:ln cap="flat" cmpd="sng" w="9525">
+          <a:ln w="9525" cap="flat" cmpd="sng">
             <a:solidFill>
               <a:srgbClr val="000000"/>
             </a:solidFill>
             <a:prstDash val="solid"/>
             <a:round/>
-            <a:headEnd len="sm" w="sm" type="none"/>
-            <a:tailEnd len="sm" w="sm" type="none"/>
+            <a:headEnd type="none" w="sm" len="sm"/>
+            <a:tailEnd type="none" w="sm" len="sm"/>
           </a:ln>
         </p:spPr>
       </p:sp>
       <p:sp>
         <p:nvSpPr>
-          <p:cNvPr id="61" name="Google Shape;61;p5:notes"/>
-          <p:cNvSpPr txBox="1"/>
+          <p:cNvPr id="50" name="Google Shape;50;g2e433a42c2d_0_1:notes"/>
+          <p:cNvSpPr txBox="1">
+            <a:spLocks noGrp="1"/>
+          </p:cNvSpPr>
           <p:nvPr>
-            <p:ph idx="1" type="body"/>
+            <p:ph type="body" idx="1"/>
           </p:nvPr>
         </p:nvSpPr>
         <p:spPr>
@@ -1455,12 +1599,12 @@
           </a:ln>
         </p:spPr>
         <p:txBody>
-          <a:bodyPr anchorCtr="0" anchor="t" bIns="91425" lIns="91425" spcFirstLastPara="1" rIns="91425" wrap="square" tIns="91425">
+          <a:bodyPr spcFirstLastPara="1" wrap="square" lIns="91425" tIns="91425" rIns="91425" bIns="91425" anchor="t" anchorCtr="0">
             <a:noAutofit/>
           </a:bodyPr>
           <a:lstStyle/>
           <a:p>
-            <a:pPr indent="0" lvl="0" marL="0" rtl="0" algn="l">
+            <a:pPr marL="0" lvl="0" indent="0" algn="l" rtl="0">
               <a:lnSpc>
                 <a:spcPct val="100000"/>
               </a:lnSpc>
@@ -1473,9 +1617,6 @@
               <a:buSzPts val="1100"/>
               <a:buNone/>
             </a:pPr>
-            <a:r>
-              <a:t/>
-            </a:r>
             <a:endParaRPr/>
           </a:p>
         </p:txBody>
@@ -1489,11 +1630,11 @@
 </file>
 
 <file path=ppt/notesSlides/notesSlide5.xml><?xml version="1.0" encoding="utf-8"?>
-<p:notes xmlns:a="http://schemas.openxmlformats.org/drawingml/2006/main" xmlns:r="http://schemas.openxmlformats.org/officeDocument/2006/relationships" xmlns:mc="http://schemas.openxmlformats.org/markup-compatibility/2006" xmlns:mv="urn:schemas-microsoft-com:mac:vml" xmlns:p="http://schemas.openxmlformats.org/presentationml/2006/main" xmlns:c="http://schemas.openxmlformats.org/drawingml/2006/chart" xmlns:dgm="http://schemas.openxmlformats.org/drawingml/2006/diagram" xmlns:o="urn:schemas-microsoft-com:office:office" xmlns:v="urn:schemas-microsoft-com:vml" xmlns:pvml="urn:schemas-microsoft-com:office:powerpoint" xmlns:com="http://schemas.openxmlformats.org/drawingml/2006/compatibility" xmlns:p14="http://schemas.microsoft.com/office/powerpoint/2010/main" xmlns:p15="http://schemas.microsoft.com/office/powerpoint/2012/main" xmlns:ahyp="http://schemas.microsoft.com/office/drawing/2018/hyperlinkcolor" showMasterPhAnim="0" showMasterSp="0">
+<p:notes xmlns:a="http://schemas.openxmlformats.org/drawingml/2006/main" xmlns:r="http://schemas.openxmlformats.org/officeDocument/2006/relationships" xmlns:p="http://schemas.openxmlformats.org/presentationml/2006/main" showMasterSp="0" showMasterPhAnim="0">
   <p:cSld>
     <p:spTree>
       <p:nvGrpSpPr>
-        <p:cNvPr id="71" name="Shape 71"/>
+        <p:cNvPr id="1" name="Shape 59"/>
         <p:cNvGrpSpPr/>
         <p:nvPr/>
       </p:nvGrpSpPr>
@@ -1507,10 +1648,12 @@
       </p:grpSpPr>
       <p:sp>
         <p:nvSpPr>
-          <p:cNvPr id="72" name="Google Shape;72;p6:notes"/>
-          <p:cNvSpPr/>
+          <p:cNvPr id="60" name="Google Shape;60;p5:notes"/>
+          <p:cNvSpPr>
+            <a:spLocks noGrp="1" noRot="1" noChangeAspect="1"/>
+          </p:cNvSpPr>
           <p:nvPr>
-            <p:ph idx="2" type="sldImg"/>
+            <p:ph type="sldImg" idx="2"/>
           </p:nvPr>
         </p:nvSpPr>
         <p:spPr>
@@ -1519,9 +1662,13 @@
             <a:ext cx="6096000" cy="3429000"/>
           </a:xfrm>
           <a:custGeom>
-            <a:rect b="b" l="l" r="r" t="t"/>
+            <a:avLst/>
+            <a:gdLst/>
+            <a:ahLst/>
+            <a:cxnLst/>
+            <a:rect l="l" t="t" r="r" b="b"/>
             <a:pathLst>
-              <a:path extrusionOk="0" h="120000" w="120000">
+              <a:path w="120000" h="120000" extrusionOk="0">
                 <a:moveTo>
                   <a:pt x="0" y="0"/>
                 </a:moveTo>
@@ -1539,23 +1686,25 @@
             </a:pathLst>
           </a:custGeom>
           <a:noFill/>
-          <a:ln cap="flat" cmpd="sng" w="9525">
+          <a:ln w="9525" cap="flat" cmpd="sng">
             <a:solidFill>
               <a:srgbClr val="000000"/>
             </a:solidFill>
             <a:prstDash val="solid"/>
             <a:round/>
-            <a:headEnd len="sm" w="sm" type="none"/>
-            <a:tailEnd len="sm" w="sm" type="none"/>
+            <a:headEnd type="none" w="sm" len="sm"/>
+            <a:tailEnd type="none" w="sm" len="sm"/>
           </a:ln>
         </p:spPr>
       </p:sp>
       <p:sp>
         <p:nvSpPr>
-          <p:cNvPr id="73" name="Google Shape;73;p6:notes"/>
-          <p:cNvSpPr txBox="1"/>
+          <p:cNvPr id="61" name="Google Shape;61;p5:notes"/>
+          <p:cNvSpPr txBox="1">
+            <a:spLocks noGrp="1"/>
+          </p:cNvSpPr>
           <p:nvPr>
-            <p:ph idx="1" type="body"/>
+            <p:ph type="body" idx="1"/>
           </p:nvPr>
         </p:nvSpPr>
         <p:spPr>
@@ -1572,12 +1721,12 @@
           </a:ln>
         </p:spPr>
         <p:txBody>
-          <a:bodyPr anchorCtr="0" anchor="t" bIns="91425" lIns="91425" spcFirstLastPara="1" rIns="91425" wrap="square" tIns="91425">
+          <a:bodyPr spcFirstLastPara="1" wrap="square" lIns="91425" tIns="91425" rIns="91425" bIns="91425" anchor="t" anchorCtr="0">
             <a:noAutofit/>
           </a:bodyPr>
           <a:lstStyle/>
           <a:p>
-            <a:pPr indent="0" lvl="0" marL="0" rtl="0" algn="l">
+            <a:pPr marL="0" lvl="0" indent="0" algn="l" rtl="0">
               <a:lnSpc>
                 <a:spcPct val="100000"/>
               </a:lnSpc>
@@ -1590,9 +1739,6 @@
               <a:buSzPts val="1100"/>
               <a:buNone/>
             </a:pPr>
-            <a:r>
-              <a:t/>
-            </a:r>
             <a:endParaRPr/>
           </a:p>
         </p:txBody>
@@ -1606,11 +1752,11 @@
 </file>
 
 <file path=ppt/notesSlides/notesSlide6.xml><?xml version="1.0" encoding="utf-8"?>
-<p:notes xmlns:a="http://schemas.openxmlformats.org/drawingml/2006/main" xmlns:r="http://schemas.openxmlformats.org/officeDocument/2006/relationships" xmlns:mc="http://schemas.openxmlformats.org/markup-compatibility/2006" xmlns:mv="urn:schemas-microsoft-com:mac:vml" xmlns:p="http://schemas.openxmlformats.org/presentationml/2006/main" xmlns:c="http://schemas.openxmlformats.org/drawingml/2006/chart" xmlns:dgm="http://schemas.openxmlformats.org/drawingml/2006/diagram" xmlns:o="urn:schemas-microsoft-com:office:office" xmlns:v="urn:schemas-microsoft-com:vml" xmlns:pvml="urn:schemas-microsoft-com:office:powerpoint" xmlns:com="http://schemas.openxmlformats.org/drawingml/2006/compatibility" xmlns:p14="http://schemas.microsoft.com/office/powerpoint/2010/main" xmlns:p15="http://schemas.microsoft.com/office/powerpoint/2012/main" xmlns:ahyp="http://schemas.microsoft.com/office/drawing/2018/hyperlinkcolor" showMasterPhAnim="0" showMasterSp="0">
+<p:notes xmlns:a="http://schemas.openxmlformats.org/drawingml/2006/main" xmlns:r="http://schemas.openxmlformats.org/officeDocument/2006/relationships" xmlns:p="http://schemas.openxmlformats.org/presentationml/2006/main" showMasterSp="0" showMasterPhAnim="0">
   <p:cSld>
     <p:spTree>
       <p:nvGrpSpPr>
-        <p:cNvPr id="80" name="Shape 80"/>
+        <p:cNvPr id="1" name="Shape 71"/>
         <p:cNvGrpSpPr/>
         <p:nvPr/>
       </p:nvGrpSpPr>
@@ -1624,10 +1770,12 @@
       </p:grpSpPr>
       <p:sp>
         <p:nvSpPr>
-          <p:cNvPr id="81" name="Google Shape;81;g32994d56a0f_0_0:notes"/>
-          <p:cNvSpPr/>
+          <p:cNvPr id="72" name="Google Shape;72;p6:notes"/>
+          <p:cNvSpPr>
+            <a:spLocks noGrp="1" noRot="1" noChangeAspect="1"/>
+          </p:cNvSpPr>
           <p:nvPr>
-            <p:ph idx="2" type="sldImg"/>
+            <p:ph type="sldImg" idx="2"/>
           </p:nvPr>
         </p:nvSpPr>
         <p:spPr>
@@ -1636,9 +1784,13 @@
             <a:ext cx="6096000" cy="3429000"/>
           </a:xfrm>
           <a:custGeom>
-            <a:rect b="b" l="l" r="r" t="t"/>
+            <a:avLst/>
+            <a:gdLst/>
+            <a:ahLst/>
+            <a:cxnLst/>
+            <a:rect l="l" t="t" r="r" b="b"/>
             <a:pathLst>
-              <a:path extrusionOk="0" h="120000" w="120000">
+              <a:path w="120000" h="120000" extrusionOk="0">
                 <a:moveTo>
                   <a:pt x="0" y="0"/>
                 </a:moveTo>
@@ -1656,23 +1808,25 @@
             </a:pathLst>
           </a:custGeom>
           <a:noFill/>
-          <a:ln cap="flat" cmpd="sng" w="12700">
+          <a:ln w="9525" cap="flat" cmpd="sng">
             <a:solidFill>
               <a:srgbClr val="000000"/>
             </a:solidFill>
             <a:prstDash val="solid"/>
             <a:round/>
-            <a:headEnd len="sm" w="sm" type="none"/>
-            <a:tailEnd len="sm" w="sm" type="none"/>
+            <a:headEnd type="none" w="sm" len="sm"/>
+            <a:tailEnd type="none" w="sm" len="sm"/>
           </a:ln>
         </p:spPr>
       </p:sp>
       <p:sp>
         <p:nvSpPr>
-          <p:cNvPr id="82" name="Google Shape;82;g32994d56a0f_0_0:notes"/>
-          <p:cNvSpPr txBox="1"/>
+          <p:cNvPr id="73" name="Google Shape;73;p6:notes"/>
+          <p:cNvSpPr txBox="1">
+            <a:spLocks noGrp="1"/>
+          </p:cNvSpPr>
           <p:nvPr>
-            <p:ph idx="1" type="body"/>
+            <p:ph type="body" idx="1"/>
           </p:nvPr>
         </p:nvSpPr>
         <p:spPr>
@@ -1689,28 +1843,24 @@
           </a:ln>
         </p:spPr>
         <p:txBody>
-          <a:bodyPr anchorCtr="0" anchor="t" bIns="91425" lIns="91425" spcFirstLastPara="1" rIns="91425" wrap="square" tIns="91425">
+          <a:bodyPr spcFirstLastPara="1" wrap="square" lIns="91425" tIns="91425" rIns="91425" bIns="91425" anchor="t" anchorCtr="0">
             <a:noAutofit/>
           </a:bodyPr>
           <a:lstStyle/>
           <a:p>
-            <a:pPr indent="0" lvl="0" marL="0" rtl="0" algn="l">
-              <a:spcBef>
-                <a:spcPts val="0"/>
-              </a:spcBef>
-              <a:spcAft>
-                <a:spcPts val="0"/>
-              </a:spcAft>
-              <a:buClr>
-                <a:schemeClr val="dk1"/>
-              </a:buClr>
-              <a:buSzPts val="1200"/>
-              <a:buFont typeface="Arial"/>
+            <a:pPr marL="0" lvl="0" indent="0" algn="l" rtl="0">
+              <a:lnSpc>
+                <a:spcPct val="100000"/>
+              </a:lnSpc>
+              <a:spcBef>
+                <a:spcPts val="0"/>
+              </a:spcBef>
+              <a:spcAft>
+                <a:spcPts val="0"/>
+              </a:spcAft>
+              <a:buSzPts val="1100"/>
               <a:buNone/>
             </a:pPr>
-            <a:r>
-              <a:t/>
-            </a:r>
             <a:endParaRPr/>
           </a:p>
         </p:txBody>
@@ -1724,11 +1874,11 @@
 </file>
 
 <file path=ppt/notesSlides/notesSlide7.xml><?xml version="1.0" encoding="utf-8"?>
-<p:notes xmlns:a="http://schemas.openxmlformats.org/drawingml/2006/main" xmlns:r="http://schemas.openxmlformats.org/officeDocument/2006/relationships" xmlns:mc="http://schemas.openxmlformats.org/markup-compatibility/2006" xmlns:mv="urn:schemas-microsoft-com:mac:vml" xmlns:p="http://schemas.openxmlformats.org/presentationml/2006/main" xmlns:c="http://schemas.openxmlformats.org/drawingml/2006/chart" xmlns:dgm="http://schemas.openxmlformats.org/drawingml/2006/diagram" xmlns:o="urn:schemas-microsoft-com:office:office" xmlns:v="urn:schemas-microsoft-com:vml" xmlns:pvml="urn:schemas-microsoft-com:office:powerpoint" xmlns:com="http://schemas.openxmlformats.org/drawingml/2006/compatibility" xmlns:p14="http://schemas.microsoft.com/office/powerpoint/2010/main" xmlns:p15="http://schemas.microsoft.com/office/powerpoint/2012/main" xmlns:ahyp="http://schemas.microsoft.com/office/drawing/2018/hyperlinkcolor" showMasterPhAnim="0" showMasterSp="0">
+<p:notes xmlns:a="http://schemas.openxmlformats.org/drawingml/2006/main" xmlns:r="http://schemas.openxmlformats.org/officeDocument/2006/relationships" xmlns:p="http://schemas.openxmlformats.org/presentationml/2006/main" showMasterSp="0" showMasterPhAnim="0">
   <p:cSld>
     <p:spTree>
       <p:nvGrpSpPr>
-        <p:cNvPr id="90" name="Shape 90"/>
+        <p:cNvPr id="1" name="Shape 80"/>
         <p:cNvGrpSpPr/>
         <p:nvPr/>
       </p:nvGrpSpPr>
@@ -1742,10 +1892,12 @@
       </p:grpSpPr>
       <p:sp>
         <p:nvSpPr>
-          <p:cNvPr id="91" name="Google Shape;91;g32994d56a0f_0_33:notes"/>
-          <p:cNvSpPr/>
+          <p:cNvPr id="81" name="Google Shape;81;g32994d56a0f_0_0:notes"/>
+          <p:cNvSpPr>
+            <a:spLocks noGrp="1" noRot="1" noChangeAspect="1"/>
+          </p:cNvSpPr>
           <p:nvPr>
-            <p:ph idx="2" type="sldImg"/>
+            <p:ph type="sldImg" idx="2"/>
           </p:nvPr>
         </p:nvSpPr>
         <p:spPr>
@@ -1754,9 +1906,13 @@
             <a:ext cx="6096000" cy="3429000"/>
           </a:xfrm>
           <a:custGeom>
-            <a:rect b="b" l="l" r="r" t="t"/>
+            <a:avLst/>
+            <a:gdLst/>
+            <a:ahLst/>
+            <a:cxnLst/>
+            <a:rect l="l" t="t" r="r" b="b"/>
             <a:pathLst>
-              <a:path extrusionOk="0" h="120000" w="120000">
+              <a:path w="120000" h="120000" extrusionOk="0">
                 <a:moveTo>
                   <a:pt x="0" y="0"/>
                 </a:moveTo>
@@ -1774,23 +1930,25 @@
             </a:pathLst>
           </a:custGeom>
           <a:noFill/>
-          <a:ln cap="flat" cmpd="sng" w="12700">
+          <a:ln w="12700" cap="flat" cmpd="sng">
             <a:solidFill>
               <a:srgbClr val="000000"/>
             </a:solidFill>
             <a:prstDash val="solid"/>
             <a:round/>
-            <a:headEnd len="sm" w="sm" type="none"/>
-            <a:tailEnd len="sm" w="sm" type="none"/>
+            <a:headEnd type="none" w="sm" len="sm"/>
+            <a:tailEnd type="none" w="sm" len="sm"/>
           </a:ln>
         </p:spPr>
       </p:sp>
       <p:sp>
         <p:nvSpPr>
-          <p:cNvPr id="92" name="Google Shape;92;g32994d56a0f_0_33:notes"/>
-          <p:cNvSpPr txBox="1"/>
+          <p:cNvPr id="82" name="Google Shape;82;g32994d56a0f_0_0:notes"/>
+          <p:cNvSpPr txBox="1">
+            <a:spLocks noGrp="1"/>
+          </p:cNvSpPr>
           <p:nvPr>
-            <p:ph idx="1" type="body"/>
+            <p:ph type="body" idx="1"/>
           </p:nvPr>
         </p:nvSpPr>
         <p:spPr>
@@ -1807,12 +1965,12 @@
           </a:ln>
         </p:spPr>
         <p:txBody>
-          <a:bodyPr anchorCtr="0" anchor="t" bIns="91425" lIns="91425" spcFirstLastPara="1" rIns="91425" wrap="square" tIns="91425">
+          <a:bodyPr spcFirstLastPara="1" wrap="square" lIns="91425" tIns="91425" rIns="91425" bIns="91425" anchor="t" anchorCtr="0">
             <a:noAutofit/>
           </a:bodyPr>
           <a:lstStyle/>
           <a:p>
-            <a:pPr indent="0" lvl="0" marL="0" rtl="0" algn="l">
+            <a:pPr marL="0" lvl="0" indent="0" algn="l" rtl="0">
               <a:spcBef>
                 <a:spcPts val="0"/>
               </a:spcBef>
@@ -1826,9 +1984,6 @@
               <a:buFont typeface="Arial"/>
               <a:buNone/>
             </a:pPr>
-            <a:r>
-              <a:t/>
-            </a:r>
             <a:endParaRPr/>
           </a:p>
         </p:txBody>
@@ -1842,11 +1997,11 @@
 </file>
 
 <file path=ppt/notesSlides/notesSlide8.xml><?xml version="1.0" encoding="utf-8"?>
-<p:notes xmlns:a="http://schemas.openxmlformats.org/drawingml/2006/main" xmlns:r="http://schemas.openxmlformats.org/officeDocument/2006/relationships" xmlns:mc="http://schemas.openxmlformats.org/markup-compatibility/2006" xmlns:mv="urn:schemas-microsoft-com:mac:vml" xmlns:p="http://schemas.openxmlformats.org/presentationml/2006/main" xmlns:c="http://schemas.openxmlformats.org/drawingml/2006/chart" xmlns:dgm="http://schemas.openxmlformats.org/drawingml/2006/diagram" xmlns:o="urn:schemas-microsoft-com:office:office" xmlns:v="urn:schemas-microsoft-com:vml" xmlns:pvml="urn:schemas-microsoft-com:office:powerpoint" xmlns:com="http://schemas.openxmlformats.org/drawingml/2006/compatibility" xmlns:p14="http://schemas.microsoft.com/office/powerpoint/2010/main" xmlns:p15="http://schemas.microsoft.com/office/powerpoint/2012/main" xmlns:ahyp="http://schemas.microsoft.com/office/drawing/2018/hyperlinkcolor" showMasterPhAnim="0" showMasterSp="0">
+<p:notes xmlns:a="http://schemas.openxmlformats.org/drawingml/2006/main" xmlns:r="http://schemas.openxmlformats.org/officeDocument/2006/relationships" xmlns:p="http://schemas.openxmlformats.org/presentationml/2006/main" showMasterSp="0" showMasterPhAnim="0">
   <p:cSld>
     <p:spTree>
       <p:nvGrpSpPr>
-        <p:cNvPr id="102" name="Shape 102"/>
+        <p:cNvPr id="1" name="Shape 90"/>
         <p:cNvGrpSpPr/>
         <p:nvPr/>
       </p:nvGrpSpPr>
@@ -1860,10 +2015,12 @@
       </p:grpSpPr>
       <p:sp>
         <p:nvSpPr>
-          <p:cNvPr id="103" name="Google Shape;103;p7:notes"/>
-          <p:cNvSpPr/>
+          <p:cNvPr id="91" name="Google Shape;91;g32994d56a0f_0_33:notes"/>
+          <p:cNvSpPr>
+            <a:spLocks noGrp="1" noRot="1" noChangeAspect="1"/>
+          </p:cNvSpPr>
           <p:nvPr>
-            <p:ph idx="2" type="sldImg"/>
+            <p:ph type="sldImg" idx="2"/>
           </p:nvPr>
         </p:nvSpPr>
         <p:spPr>
@@ -1872,9 +2029,13 @@
             <a:ext cx="6096000" cy="3429000"/>
           </a:xfrm>
           <a:custGeom>
-            <a:rect b="b" l="l" r="r" t="t"/>
+            <a:avLst/>
+            <a:gdLst/>
+            <a:ahLst/>
+            <a:cxnLst/>
+            <a:rect l="l" t="t" r="r" b="b"/>
             <a:pathLst>
-              <a:path extrusionOk="0" h="120000" w="120000">
+              <a:path w="120000" h="120000" extrusionOk="0">
                 <a:moveTo>
                   <a:pt x="0" y="0"/>
                 </a:moveTo>
@@ -1892,23 +2053,25 @@
             </a:pathLst>
           </a:custGeom>
           <a:noFill/>
-          <a:ln cap="flat" cmpd="sng" w="9525">
+          <a:ln w="12700" cap="flat" cmpd="sng">
             <a:solidFill>
               <a:srgbClr val="000000"/>
             </a:solidFill>
             <a:prstDash val="solid"/>
             <a:round/>
-            <a:headEnd len="sm" w="sm" type="none"/>
-            <a:tailEnd len="sm" w="sm" type="none"/>
+            <a:headEnd type="none" w="sm" len="sm"/>
+            <a:tailEnd type="none" w="sm" len="sm"/>
           </a:ln>
         </p:spPr>
       </p:sp>
       <p:sp>
         <p:nvSpPr>
-          <p:cNvPr id="104" name="Google Shape;104;p7:notes"/>
-          <p:cNvSpPr txBox="1"/>
+          <p:cNvPr id="92" name="Google Shape;92;g32994d56a0f_0_33:notes"/>
+          <p:cNvSpPr txBox="1">
+            <a:spLocks noGrp="1"/>
+          </p:cNvSpPr>
           <p:nvPr>
-            <p:ph idx="1" type="body"/>
+            <p:ph type="body" idx="1"/>
           </p:nvPr>
         </p:nvSpPr>
         <p:spPr>
@@ -1925,27 +2088,25 @@
           </a:ln>
         </p:spPr>
         <p:txBody>
-          <a:bodyPr anchorCtr="0" anchor="t" bIns="91425" lIns="91425" spcFirstLastPara="1" rIns="91425" wrap="square" tIns="91425">
+          <a:bodyPr spcFirstLastPara="1" wrap="square" lIns="91425" tIns="91425" rIns="91425" bIns="91425" anchor="t" anchorCtr="0">
             <a:noAutofit/>
           </a:bodyPr>
           <a:lstStyle/>
           <a:p>
-            <a:pPr indent="0" lvl="0" marL="0" rtl="0" algn="l">
-              <a:lnSpc>
-                <a:spcPct val="100000"/>
-              </a:lnSpc>
-              <a:spcBef>
-                <a:spcPts val="0"/>
-              </a:spcBef>
-              <a:spcAft>
-                <a:spcPts val="0"/>
-              </a:spcAft>
-              <a:buSzPts val="1100"/>
+            <a:pPr marL="0" lvl="0" indent="0" algn="l" rtl="0">
+              <a:spcBef>
+                <a:spcPts val="0"/>
+              </a:spcBef>
+              <a:spcAft>
+                <a:spcPts val="0"/>
+              </a:spcAft>
+              <a:buClr>
+                <a:schemeClr val="dk1"/>
+              </a:buClr>
+              <a:buSzPts val="1200"/>
+              <a:buFont typeface="Arial"/>
               <a:buNone/>
             </a:pPr>
-            <a:r>
-              <a:t/>
-            </a:r>
             <a:endParaRPr/>
           </a:p>
         </p:txBody>
@@ -1959,11 +2120,11 @@
 </file>
 
 <file path=ppt/notesSlides/notesSlide9.xml><?xml version="1.0" encoding="utf-8"?>
-<p:notes xmlns:a="http://schemas.openxmlformats.org/drawingml/2006/main" xmlns:r="http://schemas.openxmlformats.org/officeDocument/2006/relationships" xmlns:mc="http://schemas.openxmlformats.org/markup-compatibility/2006" xmlns:mv="urn:schemas-microsoft-com:mac:vml" xmlns:p="http://schemas.openxmlformats.org/presentationml/2006/main" xmlns:c="http://schemas.openxmlformats.org/drawingml/2006/chart" xmlns:dgm="http://schemas.openxmlformats.org/drawingml/2006/diagram" xmlns:o="urn:schemas-microsoft-com:office:office" xmlns:v="urn:schemas-microsoft-com:vml" xmlns:pvml="urn:schemas-microsoft-com:office:powerpoint" xmlns:com="http://schemas.openxmlformats.org/drawingml/2006/compatibility" xmlns:p14="http://schemas.microsoft.com/office/powerpoint/2010/main" xmlns:p15="http://schemas.microsoft.com/office/powerpoint/2012/main" xmlns:ahyp="http://schemas.microsoft.com/office/drawing/2018/hyperlinkcolor" showMasterPhAnim="0" showMasterSp="0">
+<p:notes xmlns:a="http://schemas.openxmlformats.org/drawingml/2006/main" xmlns:r="http://schemas.openxmlformats.org/officeDocument/2006/relationships" xmlns:p="http://schemas.openxmlformats.org/presentationml/2006/main" showMasterSp="0" showMasterPhAnim="0">
   <p:cSld>
     <p:spTree>
       <p:nvGrpSpPr>
-        <p:cNvPr id="116" name="Shape 116"/>
+        <p:cNvPr id="1" name="Shape 102"/>
         <p:cNvGrpSpPr/>
         <p:nvPr/>
       </p:nvGrpSpPr>
@@ -1977,10 +2138,12 @@
       </p:grpSpPr>
       <p:sp>
         <p:nvSpPr>
-          <p:cNvPr id="117" name="Google Shape;117;p9:notes"/>
-          <p:cNvSpPr/>
+          <p:cNvPr id="103" name="Google Shape;103;p7:notes"/>
+          <p:cNvSpPr>
+            <a:spLocks noGrp="1" noRot="1" noChangeAspect="1"/>
+          </p:cNvSpPr>
           <p:nvPr>
-            <p:ph idx="2" type="sldImg"/>
+            <p:ph type="sldImg" idx="2"/>
           </p:nvPr>
         </p:nvSpPr>
         <p:spPr>
@@ -1989,9 +2152,13 @@
             <a:ext cx="6096000" cy="3429000"/>
           </a:xfrm>
           <a:custGeom>
-            <a:rect b="b" l="l" r="r" t="t"/>
+            <a:avLst/>
+            <a:gdLst/>
+            <a:ahLst/>
+            <a:cxnLst/>
+            <a:rect l="l" t="t" r="r" b="b"/>
             <a:pathLst>
-              <a:path extrusionOk="0" h="120000" w="120000">
+              <a:path w="120000" h="120000" extrusionOk="0">
                 <a:moveTo>
                   <a:pt x="0" y="0"/>
                 </a:moveTo>
@@ -2009,23 +2176,25 @@
             </a:pathLst>
           </a:custGeom>
           <a:noFill/>
-          <a:ln cap="flat" cmpd="sng" w="9525">
+          <a:ln w="9525" cap="flat" cmpd="sng">
             <a:solidFill>
               <a:srgbClr val="000000"/>
             </a:solidFill>
             <a:prstDash val="solid"/>
             <a:round/>
-            <a:headEnd len="sm" w="sm" type="none"/>
-            <a:tailEnd len="sm" w="sm" type="none"/>
+            <a:headEnd type="none" w="sm" len="sm"/>
+            <a:tailEnd type="none" w="sm" len="sm"/>
           </a:ln>
         </p:spPr>
       </p:sp>
       <p:sp>
         <p:nvSpPr>
-          <p:cNvPr id="118" name="Google Shape;118;p9:notes"/>
-          <p:cNvSpPr txBox="1"/>
+          <p:cNvPr id="104" name="Google Shape;104;p7:notes"/>
+          <p:cNvSpPr txBox="1">
+            <a:spLocks noGrp="1"/>
+          </p:cNvSpPr>
           <p:nvPr>
-            <p:ph idx="1" type="body"/>
+            <p:ph type="body" idx="1"/>
           </p:nvPr>
         </p:nvSpPr>
         <p:spPr>
@@ -2042,12 +2211,12 @@
           </a:ln>
         </p:spPr>
         <p:txBody>
-          <a:bodyPr anchorCtr="0" anchor="t" bIns="91425" lIns="91425" spcFirstLastPara="1" rIns="91425" wrap="square" tIns="91425">
+          <a:bodyPr spcFirstLastPara="1" wrap="square" lIns="91425" tIns="91425" rIns="91425" bIns="91425" anchor="t" anchorCtr="0">
             <a:noAutofit/>
           </a:bodyPr>
           <a:lstStyle/>
           <a:p>
-            <a:pPr indent="0" lvl="0" marL="0" rtl="0" algn="l">
+            <a:pPr marL="0" lvl="0" indent="0" algn="l" rtl="0">
               <a:lnSpc>
                 <a:spcPct val="100000"/>
               </a:lnSpc>
@@ -2060,9 +2229,6 @@
               <a:buSzPts val="1100"/>
               <a:buNone/>
             </a:pPr>
-            <a:r>
-              <a:t/>
-            </a:r>
             <a:endParaRPr/>
           </a:p>
         </p:txBody>
@@ -2076,11 +2242,11 @@
 </file>
 
 <file path=ppt/slideLayouts/slideLayout1.xml><?xml version="1.0" encoding="utf-8"?>
-<p:sldLayout xmlns:a="http://schemas.openxmlformats.org/drawingml/2006/main" xmlns:r="http://schemas.openxmlformats.org/officeDocument/2006/relationships" xmlns:mc="http://schemas.openxmlformats.org/markup-compatibility/2006" xmlns:mv="urn:schemas-microsoft-com:mac:vml" xmlns:p="http://schemas.openxmlformats.org/presentationml/2006/main" xmlns:c="http://schemas.openxmlformats.org/drawingml/2006/chart" xmlns:dgm="http://schemas.openxmlformats.org/drawingml/2006/diagram" xmlns:o="urn:schemas-microsoft-com:office:office" xmlns:v="urn:schemas-microsoft-com:vml" xmlns:pvml="urn:schemas-microsoft-com:office:powerpoint" xmlns:com="http://schemas.openxmlformats.org/drawingml/2006/compatibility" xmlns:p14="http://schemas.microsoft.com/office/powerpoint/2010/main" xmlns:p15="http://schemas.microsoft.com/office/powerpoint/2012/main" xmlns:ahyp="http://schemas.microsoft.com/office/drawing/2018/hyperlinkcolor" matchingName="Title slide" type="title">
+<p:sldLayout xmlns:a="http://schemas.openxmlformats.org/drawingml/2006/main" xmlns:r="http://schemas.openxmlformats.org/officeDocument/2006/relationships" xmlns:p="http://schemas.openxmlformats.org/presentationml/2006/main" matchingName="Title slide" type="title">
   <p:cSld name="TITLE">
     <p:spTree>
       <p:nvGrpSpPr>
-        <p:cNvPr id="7" name="Shape 7"/>
+        <p:cNvPr id="1" name="Shape 7"/>
         <p:cNvGrpSpPr/>
         <p:nvPr/>
       </p:nvGrpSpPr>
@@ -2095,9 +2261,11 @@
       <p:sp>
         <p:nvSpPr>
           <p:cNvPr id="8" name="Google Shape;8;p12"/>
-          <p:cNvSpPr txBox="1"/>
+          <p:cNvSpPr txBox="1">
+            <a:spLocks noGrp="1"/>
+          </p:cNvSpPr>
           <p:nvPr>
-            <p:ph idx="12" type="sldNum"/>
+            <p:ph type="sldNum" idx="12"/>
           </p:nvPr>
         </p:nvSpPr>
         <p:spPr>
@@ -2114,11 +2282,11 @@
           </a:ln>
         </p:spPr>
         <p:txBody>
-          <a:bodyPr anchorCtr="0" anchor="ctr" bIns="91425" lIns="91425" spcFirstLastPara="1" rIns="91425" wrap="square" tIns="91425">
+          <a:bodyPr spcFirstLastPara="1" wrap="square" lIns="91425" tIns="91425" rIns="91425" bIns="91425" anchor="ctr" anchorCtr="0">
             <a:normAutofit/>
           </a:bodyPr>
           <a:lstStyle>
-            <a:lvl1pPr indent="0" lvl="0" marL="0" marR="0" algn="r">
+            <a:lvl1pPr marL="0" marR="0" lvl="0" indent="0" algn="r">
               <a:lnSpc>
                 <a:spcPct val="100000"/>
               </a:lnSpc>
@@ -2134,7 +2302,7 @@
               <a:buSzPts val="1000"/>
               <a:buFont typeface="Arial"/>
               <a:buNone/>
-              <a:defRPr b="0" i="0" sz="1000" u="none" cap="none" strike="noStrike">
+              <a:defRPr sz="1000" b="0" i="0" u="none" strike="noStrike" cap="none">
                 <a:solidFill>
                   <a:schemeClr val="dk2"/>
                 </a:solidFill>
@@ -2144,7 +2312,7 @@
                 <a:sym typeface="Arial"/>
               </a:defRPr>
             </a:lvl1pPr>
-            <a:lvl2pPr indent="0" lvl="1" marL="0" marR="0" algn="r">
+            <a:lvl2pPr marL="0" marR="0" lvl="1" indent="0" algn="r">
               <a:lnSpc>
                 <a:spcPct val="100000"/>
               </a:lnSpc>
@@ -2160,7 +2328,7 @@
               <a:buSzPts val="1000"/>
               <a:buFont typeface="Arial"/>
               <a:buNone/>
-              <a:defRPr b="0" i="0" sz="1000" u="none" cap="none" strike="noStrike">
+              <a:defRPr sz="1000" b="0" i="0" u="none" strike="noStrike" cap="none">
                 <a:solidFill>
                   <a:schemeClr val="dk2"/>
                 </a:solidFill>
@@ -2170,7 +2338,7 @@
                 <a:sym typeface="Arial"/>
               </a:defRPr>
             </a:lvl2pPr>
-            <a:lvl3pPr indent="0" lvl="2" marL="0" marR="0" algn="r">
+            <a:lvl3pPr marL="0" marR="0" lvl="2" indent="0" algn="r">
               <a:lnSpc>
                 <a:spcPct val="100000"/>
               </a:lnSpc>
@@ -2186,7 +2354,7 @@
               <a:buSzPts val="1000"/>
               <a:buFont typeface="Arial"/>
               <a:buNone/>
-              <a:defRPr b="0" i="0" sz="1000" u="none" cap="none" strike="noStrike">
+              <a:defRPr sz="1000" b="0" i="0" u="none" strike="noStrike" cap="none">
                 <a:solidFill>
                   <a:schemeClr val="dk2"/>
                 </a:solidFill>
@@ -2196,7 +2364,7 @@
                 <a:sym typeface="Arial"/>
               </a:defRPr>
             </a:lvl3pPr>
-            <a:lvl4pPr indent="0" lvl="3" marL="0" marR="0" algn="r">
+            <a:lvl4pPr marL="0" marR="0" lvl="3" indent="0" algn="r">
               <a:lnSpc>
                 <a:spcPct val="100000"/>
               </a:lnSpc>
@@ -2212,7 +2380,7 @@
               <a:buSzPts val="1000"/>
               <a:buFont typeface="Arial"/>
               <a:buNone/>
-              <a:defRPr b="0" i="0" sz="1000" u="none" cap="none" strike="noStrike">
+              <a:defRPr sz="1000" b="0" i="0" u="none" strike="noStrike" cap="none">
                 <a:solidFill>
                   <a:schemeClr val="dk2"/>
                 </a:solidFill>
@@ -2222,7 +2390,7 @@
                 <a:sym typeface="Arial"/>
               </a:defRPr>
             </a:lvl4pPr>
-            <a:lvl5pPr indent="0" lvl="4" marL="0" marR="0" algn="r">
+            <a:lvl5pPr marL="0" marR="0" lvl="4" indent="0" algn="r">
               <a:lnSpc>
                 <a:spcPct val="100000"/>
               </a:lnSpc>
@@ -2238,7 +2406,7 @@
               <a:buSzPts val="1000"/>
               <a:buFont typeface="Arial"/>
               <a:buNone/>
-              <a:defRPr b="0" i="0" sz="1000" u="none" cap="none" strike="noStrike">
+              <a:defRPr sz="1000" b="0" i="0" u="none" strike="noStrike" cap="none">
                 <a:solidFill>
                   <a:schemeClr val="dk2"/>
                 </a:solidFill>
@@ -2248,7 +2416,7 @@
                 <a:sym typeface="Arial"/>
               </a:defRPr>
             </a:lvl5pPr>
-            <a:lvl6pPr indent="0" lvl="5" marL="0" marR="0" algn="r">
+            <a:lvl6pPr marL="0" marR="0" lvl="5" indent="0" algn="r">
               <a:lnSpc>
                 <a:spcPct val="100000"/>
               </a:lnSpc>
@@ -2264,7 +2432,7 @@
               <a:buSzPts val="1000"/>
               <a:buFont typeface="Arial"/>
               <a:buNone/>
-              <a:defRPr b="0" i="0" sz="1000" u="none" cap="none" strike="noStrike">
+              <a:defRPr sz="1000" b="0" i="0" u="none" strike="noStrike" cap="none">
                 <a:solidFill>
                   <a:schemeClr val="dk2"/>
                 </a:solidFill>
@@ -2274,7 +2442,7 @@
                 <a:sym typeface="Arial"/>
               </a:defRPr>
             </a:lvl6pPr>
-            <a:lvl7pPr indent="0" lvl="6" marL="0" marR="0" algn="r">
+            <a:lvl7pPr marL="0" marR="0" lvl="6" indent="0" algn="r">
               <a:lnSpc>
                 <a:spcPct val="100000"/>
               </a:lnSpc>
@@ -2290,7 +2458,7 @@
               <a:buSzPts val="1000"/>
               <a:buFont typeface="Arial"/>
               <a:buNone/>
-              <a:defRPr b="0" i="0" sz="1000" u="none" cap="none" strike="noStrike">
+              <a:defRPr sz="1000" b="0" i="0" u="none" strike="noStrike" cap="none">
                 <a:solidFill>
                   <a:schemeClr val="dk2"/>
                 </a:solidFill>
@@ -2300,7 +2468,7 @@
                 <a:sym typeface="Arial"/>
               </a:defRPr>
             </a:lvl7pPr>
-            <a:lvl8pPr indent="0" lvl="7" marL="0" marR="0" algn="r">
+            <a:lvl8pPr marL="0" marR="0" lvl="7" indent="0" algn="r">
               <a:lnSpc>
                 <a:spcPct val="100000"/>
               </a:lnSpc>
@@ -2316,7 +2484,7 @@
               <a:buSzPts val="1000"/>
               <a:buFont typeface="Arial"/>
               <a:buNone/>
-              <a:defRPr b="0" i="0" sz="1000" u="none" cap="none" strike="noStrike">
+              <a:defRPr sz="1000" b="0" i="0" u="none" strike="noStrike" cap="none">
                 <a:solidFill>
                   <a:schemeClr val="dk2"/>
                 </a:solidFill>
@@ -2326,7 +2494,7 @@
                 <a:sym typeface="Arial"/>
               </a:defRPr>
             </a:lvl8pPr>
-            <a:lvl9pPr indent="0" lvl="8" marL="0" marR="0" algn="r">
+            <a:lvl9pPr marL="0" marR="0" lvl="8" indent="0" algn="r">
               <a:lnSpc>
                 <a:spcPct val="100000"/>
               </a:lnSpc>
@@ -2342,7 +2510,7 @@
               <a:buSzPts val="1000"/>
               <a:buFont typeface="Arial"/>
               <a:buNone/>
-              <a:defRPr b="0" i="0" sz="1000" u="none" cap="none" strike="noStrike">
+              <a:defRPr sz="1000" b="0" i="0" u="none" strike="noStrike" cap="none">
                 <a:solidFill>
                   <a:schemeClr val="dk2"/>
                 </a:solidFill>
@@ -2354,7 +2522,7 @@
             </a:lvl9pPr>
           </a:lstStyle>
           <a:p>
-            <a:pPr indent="0" lvl="0" marL="0" rtl="0" algn="r">
+            <a:pPr marL="0" lvl="0" indent="0" algn="r" rtl="0">
               <a:spcBef>
                 <a:spcPts val="0"/>
               </a:spcBef>
@@ -2365,7 +2533,7 @@
             </a:pPr>
             <a:fld id="{00000000-1234-1234-1234-123412341234}" type="slidenum">
               <a:rPr lang="en"/>
-              <a:t>‹#›</a:t>
+              <a:t>‹Nº›</a:t>
             </a:fld>
             <a:endParaRPr/>
           </a:p>
@@ -2380,11 +2548,11 @@
 </file>
 
 <file path=ppt/slideLayouts/slideLayout10.xml><?xml version="1.0" encoding="utf-8"?>
-<p:sldLayout xmlns:a="http://schemas.openxmlformats.org/drawingml/2006/main" xmlns:r="http://schemas.openxmlformats.org/officeDocument/2006/relationships" xmlns:mc="http://schemas.openxmlformats.org/markup-compatibility/2006" xmlns:mv="urn:schemas-microsoft-com:mac:vml" xmlns:p="http://schemas.openxmlformats.org/presentationml/2006/main" xmlns:c="http://schemas.openxmlformats.org/drawingml/2006/chart" xmlns:dgm="http://schemas.openxmlformats.org/drawingml/2006/diagram" xmlns:o="urn:schemas-microsoft-com:office:office" xmlns:v="urn:schemas-microsoft-com:vml" xmlns:pvml="urn:schemas-microsoft-com:office:powerpoint" xmlns:com="http://schemas.openxmlformats.org/drawingml/2006/compatibility" xmlns:p14="http://schemas.microsoft.com/office/powerpoint/2010/main" xmlns:p15="http://schemas.microsoft.com/office/powerpoint/2012/main" xmlns:ahyp="http://schemas.microsoft.com/office/drawing/2018/hyperlinkcolor" matchingName="Caption">
+<p:sldLayout xmlns:a="http://schemas.openxmlformats.org/drawingml/2006/main" xmlns:r="http://schemas.openxmlformats.org/officeDocument/2006/relationships" xmlns:p="http://schemas.openxmlformats.org/presentationml/2006/main" matchingName="Caption">
   <p:cSld name="CAPTION_ONLY">
     <p:spTree>
       <p:nvGrpSpPr>
-        <p:cNvPr id="24" name="Shape 24"/>
+        <p:cNvPr id="1" name="Shape 24"/>
         <p:cNvGrpSpPr/>
         <p:nvPr/>
       </p:nvGrpSpPr>
@@ -2399,9 +2567,11 @@
       <p:sp>
         <p:nvSpPr>
           <p:cNvPr id="25" name="Google Shape;25;p21"/>
-          <p:cNvSpPr txBox="1"/>
+          <p:cNvSpPr txBox="1">
+            <a:spLocks noGrp="1"/>
+          </p:cNvSpPr>
           <p:nvPr>
-            <p:ph idx="12" type="sldNum"/>
+            <p:ph type="sldNum" idx="12"/>
           </p:nvPr>
         </p:nvSpPr>
         <p:spPr>
@@ -2418,11 +2588,11 @@
           </a:ln>
         </p:spPr>
         <p:txBody>
-          <a:bodyPr anchorCtr="0" anchor="ctr" bIns="91425" lIns="91425" spcFirstLastPara="1" rIns="91425" wrap="square" tIns="91425">
+          <a:bodyPr spcFirstLastPara="1" wrap="square" lIns="91425" tIns="91425" rIns="91425" bIns="91425" anchor="ctr" anchorCtr="0">
             <a:normAutofit/>
           </a:bodyPr>
           <a:lstStyle>
-            <a:lvl1pPr indent="0" lvl="0" marL="0" marR="0" algn="r">
+            <a:lvl1pPr marL="0" marR="0" lvl="0" indent="0" algn="r">
               <a:lnSpc>
                 <a:spcPct val="100000"/>
               </a:lnSpc>
@@ -2438,7 +2608,7 @@
               <a:buSzPts val="1000"/>
               <a:buFont typeface="Arial"/>
               <a:buNone/>
-              <a:defRPr b="0" i="0" sz="1000" u="none" cap="none" strike="noStrike">
+              <a:defRPr sz="1000" b="0" i="0" u="none" strike="noStrike" cap="none">
                 <a:solidFill>
                   <a:schemeClr val="dk2"/>
                 </a:solidFill>
@@ -2448,7 +2618,7 @@
                 <a:sym typeface="Arial"/>
               </a:defRPr>
             </a:lvl1pPr>
-            <a:lvl2pPr indent="0" lvl="1" marL="0" marR="0" algn="r">
+            <a:lvl2pPr marL="0" marR="0" lvl="1" indent="0" algn="r">
               <a:lnSpc>
                 <a:spcPct val="100000"/>
               </a:lnSpc>
@@ -2464,7 +2634,7 @@
               <a:buSzPts val="1000"/>
               <a:buFont typeface="Arial"/>
               <a:buNone/>
-              <a:defRPr b="0" i="0" sz="1000" u="none" cap="none" strike="noStrike">
+              <a:defRPr sz="1000" b="0" i="0" u="none" strike="noStrike" cap="none">
                 <a:solidFill>
                   <a:schemeClr val="dk2"/>
                 </a:solidFill>
@@ -2474,7 +2644,7 @@
                 <a:sym typeface="Arial"/>
               </a:defRPr>
             </a:lvl2pPr>
-            <a:lvl3pPr indent="0" lvl="2" marL="0" marR="0" algn="r">
+            <a:lvl3pPr marL="0" marR="0" lvl="2" indent="0" algn="r">
               <a:lnSpc>
                 <a:spcPct val="100000"/>
               </a:lnSpc>
@@ -2490,7 +2660,7 @@
               <a:buSzPts val="1000"/>
               <a:buFont typeface="Arial"/>
               <a:buNone/>
-              <a:defRPr b="0" i="0" sz="1000" u="none" cap="none" strike="noStrike">
+              <a:defRPr sz="1000" b="0" i="0" u="none" strike="noStrike" cap="none">
                 <a:solidFill>
                   <a:schemeClr val="dk2"/>
                 </a:solidFill>
@@ -2500,7 +2670,7 @@
                 <a:sym typeface="Arial"/>
               </a:defRPr>
             </a:lvl3pPr>
-            <a:lvl4pPr indent="0" lvl="3" marL="0" marR="0" algn="r">
+            <a:lvl4pPr marL="0" marR="0" lvl="3" indent="0" algn="r">
               <a:lnSpc>
                 <a:spcPct val="100000"/>
               </a:lnSpc>
@@ -2516,7 +2686,7 @@
               <a:buSzPts val="1000"/>
               <a:buFont typeface="Arial"/>
               <a:buNone/>
-              <a:defRPr b="0" i="0" sz="1000" u="none" cap="none" strike="noStrike">
+              <a:defRPr sz="1000" b="0" i="0" u="none" strike="noStrike" cap="none">
                 <a:solidFill>
                   <a:schemeClr val="dk2"/>
                 </a:solidFill>
@@ -2526,7 +2696,7 @@
                 <a:sym typeface="Arial"/>
               </a:defRPr>
             </a:lvl4pPr>
-            <a:lvl5pPr indent="0" lvl="4" marL="0" marR="0" algn="r">
+            <a:lvl5pPr marL="0" marR="0" lvl="4" indent="0" algn="r">
               <a:lnSpc>
                 <a:spcPct val="100000"/>
               </a:lnSpc>
@@ -2542,7 +2712,7 @@
               <a:buSzPts val="1000"/>
               <a:buFont typeface="Arial"/>
               <a:buNone/>
-              <a:defRPr b="0" i="0" sz="1000" u="none" cap="none" strike="noStrike">
+              <a:defRPr sz="1000" b="0" i="0" u="none" strike="noStrike" cap="none">
                 <a:solidFill>
                   <a:schemeClr val="dk2"/>
                 </a:solidFill>
@@ -2552,7 +2722,7 @@
                 <a:sym typeface="Arial"/>
               </a:defRPr>
             </a:lvl5pPr>
-            <a:lvl6pPr indent="0" lvl="5" marL="0" marR="0" algn="r">
+            <a:lvl6pPr marL="0" marR="0" lvl="5" indent="0" algn="r">
               <a:lnSpc>
                 <a:spcPct val="100000"/>
               </a:lnSpc>
@@ -2568,7 +2738,7 @@
               <a:buSzPts val="1000"/>
               <a:buFont typeface="Arial"/>
               <a:buNone/>
-              <a:defRPr b="0" i="0" sz="1000" u="none" cap="none" strike="noStrike">
+              <a:defRPr sz="1000" b="0" i="0" u="none" strike="noStrike" cap="none">
                 <a:solidFill>
                   <a:schemeClr val="dk2"/>
                 </a:solidFill>
@@ -2578,7 +2748,7 @@
                 <a:sym typeface="Arial"/>
               </a:defRPr>
             </a:lvl6pPr>
-            <a:lvl7pPr indent="0" lvl="6" marL="0" marR="0" algn="r">
+            <a:lvl7pPr marL="0" marR="0" lvl="6" indent="0" algn="r">
               <a:lnSpc>
                 <a:spcPct val="100000"/>
               </a:lnSpc>
@@ -2594,7 +2764,7 @@
               <a:buSzPts val="1000"/>
               <a:buFont typeface="Arial"/>
               <a:buNone/>
-              <a:defRPr b="0" i="0" sz="1000" u="none" cap="none" strike="noStrike">
+              <a:defRPr sz="1000" b="0" i="0" u="none" strike="noStrike" cap="none">
                 <a:solidFill>
                   <a:schemeClr val="dk2"/>
                 </a:solidFill>
@@ -2604,7 +2774,7 @@
                 <a:sym typeface="Arial"/>
               </a:defRPr>
             </a:lvl7pPr>
-            <a:lvl8pPr indent="0" lvl="7" marL="0" marR="0" algn="r">
+            <a:lvl8pPr marL="0" marR="0" lvl="7" indent="0" algn="r">
               <a:lnSpc>
                 <a:spcPct val="100000"/>
               </a:lnSpc>
@@ -2620,7 +2790,7 @@
               <a:buSzPts val="1000"/>
               <a:buFont typeface="Arial"/>
               <a:buNone/>
-              <a:defRPr b="0" i="0" sz="1000" u="none" cap="none" strike="noStrike">
+              <a:defRPr sz="1000" b="0" i="0" u="none" strike="noStrike" cap="none">
                 <a:solidFill>
                   <a:schemeClr val="dk2"/>
                 </a:solidFill>
@@ -2630,7 +2800,7 @@
                 <a:sym typeface="Arial"/>
               </a:defRPr>
             </a:lvl8pPr>
-            <a:lvl9pPr indent="0" lvl="8" marL="0" marR="0" algn="r">
+            <a:lvl9pPr marL="0" marR="0" lvl="8" indent="0" algn="r">
               <a:lnSpc>
                 <a:spcPct val="100000"/>
               </a:lnSpc>
@@ -2646,7 +2816,7 @@
               <a:buSzPts val="1000"/>
               <a:buFont typeface="Arial"/>
               <a:buNone/>
-              <a:defRPr b="0" i="0" sz="1000" u="none" cap="none" strike="noStrike">
+              <a:defRPr sz="1000" b="0" i="0" u="none" strike="noStrike" cap="none">
                 <a:solidFill>
                   <a:schemeClr val="dk2"/>
                 </a:solidFill>
@@ -2658,7 +2828,7 @@
             </a:lvl9pPr>
           </a:lstStyle>
           <a:p>
-            <a:pPr indent="0" lvl="0" marL="0" rtl="0" algn="r">
+            <a:pPr marL="0" lvl="0" indent="0" algn="r" rtl="0">
               <a:spcBef>
                 <a:spcPts val="0"/>
               </a:spcBef>
@@ -2667,9 +2837,6 @@
               </a:spcAft>
               <a:buNone/>
             </a:pPr>
-            <a:r>
-              <a:t/>
-            </a:r>
             <a:endParaRPr/>
           </a:p>
         </p:txBody>
@@ -2683,11 +2850,11 @@
 </file>
 
 <file path=ppt/slideLayouts/slideLayout11.xml><?xml version="1.0" encoding="utf-8"?>
-<p:sldLayout xmlns:a="http://schemas.openxmlformats.org/drawingml/2006/main" xmlns:r="http://schemas.openxmlformats.org/officeDocument/2006/relationships" xmlns:mc="http://schemas.openxmlformats.org/markup-compatibility/2006" xmlns:mv="urn:schemas-microsoft-com:mac:vml" xmlns:p="http://schemas.openxmlformats.org/presentationml/2006/main" xmlns:c="http://schemas.openxmlformats.org/drawingml/2006/chart" xmlns:dgm="http://schemas.openxmlformats.org/drawingml/2006/diagram" xmlns:o="urn:schemas-microsoft-com:office:office" xmlns:v="urn:schemas-microsoft-com:vml" xmlns:pvml="urn:schemas-microsoft-com:office:powerpoint" xmlns:com="http://schemas.openxmlformats.org/drawingml/2006/compatibility" xmlns:p14="http://schemas.microsoft.com/office/powerpoint/2010/main" xmlns:p15="http://schemas.microsoft.com/office/powerpoint/2012/main" xmlns:ahyp="http://schemas.microsoft.com/office/drawing/2018/hyperlinkcolor" matchingName="Big number">
+<p:sldLayout xmlns:a="http://schemas.openxmlformats.org/drawingml/2006/main" xmlns:r="http://schemas.openxmlformats.org/officeDocument/2006/relationships" xmlns:p="http://schemas.openxmlformats.org/presentationml/2006/main" matchingName="Big number">
   <p:cSld name="BIG_NUMBER">
     <p:spTree>
       <p:nvGrpSpPr>
-        <p:cNvPr id="26" name="Shape 26"/>
+        <p:cNvPr id="1" name="Shape 26"/>
         <p:cNvGrpSpPr/>
         <p:nvPr/>
       </p:nvGrpSpPr>
@@ -2702,9 +2869,11 @@
       <p:sp>
         <p:nvSpPr>
           <p:cNvPr id="27" name="Google Shape;27;p22"/>
-          <p:cNvSpPr txBox="1"/>
+          <p:cNvSpPr txBox="1">
+            <a:spLocks noGrp="1"/>
+          </p:cNvSpPr>
           <p:nvPr>
-            <p:ph idx="12" type="sldNum"/>
+            <p:ph type="sldNum" idx="12"/>
           </p:nvPr>
         </p:nvSpPr>
         <p:spPr>
@@ -2721,11 +2890,11 @@
           </a:ln>
         </p:spPr>
         <p:txBody>
-          <a:bodyPr anchorCtr="0" anchor="ctr" bIns="91425" lIns="91425" spcFirstLastPara="1" rIns="91425" wrap="square" tIns="91425">
+          <a:bodyPr spcFirstLastPara="1" wrap="square" lIns="91425" tIns="91425" rIns="91425" bIns="91425" anchor="ctr" anchorCtr="0">
             <a:normAutofit/>
           </a:bodyPr>
           <a:lstStyle>
-            <a:lvl1pPr indent="0" lvl="0" marL="0" marR="0" algn="r">
+            <a:lvl1pPr marL="0" marR="0" lvl="0" indent="0" algn="r">
               <a:lnSpc>
                 <a:spcPct val="100000"/>
               </a:lnSpc>
@@ -2741,7 +2910,7 @@
               <a:buSzPts val="1000"/>
               <a:buFont typeface="Arial"/>
               <a:buNone/>
-              <a:defRPr b="0" i="0" sz="1000" u="none" cap="none" strike="noStrike">
+              <a:defRPr sz="1000" b="0" i="0" u="none" strike="noStrike" cap="none">
                 <a:solidFill>
                   <a:schemeClr val="dk2"/>
                 </a:solidFill>
@@ -2751,7 +2920,7 @@
                 <a:sym typeface="Arial"/>
               </a:defRPr>
             </a:lvl1pPr>
-            <a:lvl2pPr indent="0" lvl="1" marL="0" marR="0" algn="r">
+            <a:lvl2pPr marL="0" marR="0" lvl="1" indent="0" algn="r">
               <a:lnSpc>
                 <a:spcPct val="100000"/>
               </a:lnSpc>
@@ -2767,7 +2936,7 @@
               <a:buSzPts val="1000"/>
               <a:buFont typeface="Arial"/>
               <a:buNone/>
-              <a:defRPr b="0" i="0" sz="1000" u="none" cap="none" strike="noStrike">
+              <a:defRPr sz="1000" b="0" i="0" u="none" strike="noStrike" cap="none">
                 <a:solidFill>
                   <a:schemeClr val="dk2"/>
                 </a:solidFill>
@@ -2777,7 +2946,7 @@
                 <a:sym typeface="Arial"/>
               </a:defRPr>
             </a:lvl2pPr>
-            <a:lvl3pPr indent="0" lvl="2" marL="0" marR="0" algn="r">
+            <a:lvl3pPr marL="0" marR="0" lvl="2" indent="0" algn="r">
               <a:lnSpc>
                 <a:spcPct val="100000"/>
               </a:lnSpc>
@@ -2793,7 +2962,7 @@
               <a:buSzPts val="1000"/>
               <a:buFont typeface="Arial"/>
               <a:buNone/>
-              <a:defRPr b="0" i="0" sz="1000" u="none" cap="none" strike="noStrike">
+              <a:defRPr sz="1000" b="0" i="0" u="none" strike="noStrike" cap="none">
                 <a:solidFill>
                   <a:schemeClr val="dk2"/>
                 </a:solidFill>
@@ -2803,7 +2972,7 @@
                 <a:sym typeface="Arial"/>
               </a:defRPr>
             </a:lvl3pPr>
-            <a:lvl4pPr indent="0" lvl="3" marL="0" marR="0" algn="r">
+            <a:lvl4pPr marL="0" marR="0" lvl="3" indent="0" algn="r">
               <a:lnSpc>
                 <a:spcPct val="100000"/>
               </a:lnSpc>
@@ -2819,7 +2988,7 @@
               <a:buSzPts val="1000"/>
               <a:buFont typeface="Arial"/>
               <a:buNone/>
-              <a:defRPr b="0" i="0" sz="1000" u="none" cap="none" strike="noStrike">
+              <a:defRPr sz="1000" b="0" i="0" u="none" strike="noStrike" cap="none">
                 <a:solidFill>
                   <a:schemeClr val="dk2"/>
                 </a:solidFill>
@@ -2829,7 +2998,7 @@
                 <a:sym typeface="Arial"/>
               </a:defRPr>
             </a:lvl4pPr>
-            <a:lvl5pPr indent="0" lvl="4" marL="0" marR="0" algn="r">
+            <a:lvl5pPr marL="0" marR="0" lvl="4" indent="0" algn="r">
               <a:lnSpc>
                 <a:spcPct val="100000"/>
               </a:lnSpc>
@@ -2845,7 +3014,7 @@
               <a:buSzPts val="1000"/>
               <a:buFont typeface="Arial"/>
               <a:buNone/>
-              <a:defRPr b="0" i="0" sz="1000" u="none" cap="none" strike="noStrike">
+              <a:defRPr sz="1000" b="0" i="0" u="none" strike="noStrike" cap="none">
                 <a:solidFill>
                   <a:schemeClr val="dk2"/>
                 </a:solidFill>
@@ -2855,7 +3024,7 @@
                 <a:sym typeface="Arial"/>
               </a:defRPr>
             </a:lvl5pPr>
-            <a:lvl6pPr indent="0" lvl="5" marL="0" marR="0" algn="r">
+            <a:lvl6pPr marL="0" marR="0" lvl="5" indent="0" algn="r">
               <a:lnSpc>
                 <a:spcPct val="100000"/>
               </a:lnSpc>
@@ -2871,7 +3040,7 @@
               <a:buSzPts val="1000"/>
               <a:buFont typeface="Arial"/>
               <a:buNone/>
-              <a:defRPr b="0" i="0" sz="1000" u="none" cap="none" strike="noStrike">
+              <a:defRPr sz="1000" b="0" i="0" u="none" strike="noStrike" cap="none">
                 <a:solidFill>
                   <a:schemeClr val="dk2"/>
                 </a:solidFill>
@@ -2881,7 +3050,7 @@
                 <a:sym typeface="Arial"/>
               </a:defRPr>
             </a:lvl6pPr>
-            <a:lvl7pPr indent="0" lvl="6" marL="0" marR="0" algn="r">
+            <a:lvl7pPr marL="0" marR="0" lvl="6" indent="0" algn="r">
               <a:lnSpc>
                 <a:spcPct val="100000"/>
               </a:lnSpc>
@@ -2897,7 +3066,7 @@
               <a:buSzPts val="1000"/>
               <a:buFont typeface="Arial"/>
               <a:buNone/>
-              <a:defRPr b="0" i="0" sz="1000" u="none" cap="none" strike="noStrike">
+              <a:defRPr sz="1000" b="0" i="0" u="none" strike="noStrike" cap="none">
                 <a:solidFill>
                   <a:schemeClr val="dk2"/>
                 </a:solidFill>
@@ -2907,7 +3076,7 @@
                 <a:sym typeface="Arial"/>
               </a:defRPr>
             </a:lvl7pPr>
-            <a:lvl8pPr indent="0" lvl="7" marL="0" marR="0" algn="r">
+            <a:lvl8pPr marL="0" marR="0" lvl="7" indent="0" algn="r">
               <a:lnSpc>
                 <a:spcPct val="100000"/>
               </a:lnSpc>
@@ -2923,7 +3092,7 @@
               <a:buSzPts val="1000"/>
               <a:buFont typeface="Arial"/>
               <a:buNone/>
-              <a:defRPr b="0" i="0" sz="1000" u="none" cap="none" strike="noStrike">
+              <a:defRPr sz="1000" b="0" i="0" u="none" strike="noStrike" cap="none">
                 <a:solidFill>
                   <a:schemeClr val="dk2"/>
                 </a:solidFill>
@@ -2933,7 +3102,7 @@
                 <a:sym typeface="Arial"/>
               </a:defRPr>
             </a:lvl8pPr>
-            <a:lvl9pPr indent="0" lvl="8" marL="0" marR="0" algn="r">
+            <a:lvl9pPr marL="0" marR="0" lvl="8" indent="0" algn="r">
               <a:lnSpc>
                 <a:spcPct val="100000"/>
               </a:lnSpc>
@@ -2949,7 +3118,7 @@
               <a:buSzPts val="1000"/>
               <a:buFont typeface="Arial"/>
               <a:buNone/>
-              <a:defRPr b="0" i="0" sz="1000" u="none" cap="none" strike="noStrike">
+              <a:defRPr sz="1000" b="0" i="0" u="none" strike="noStrike" cap="none">
                 <a:solidFill>
                   <a:schemeClr val="dk2"/>
                 </a:solidFill>
@@ -2961,7 +3130,7 @@
             </a:lvl9pPr>
           </a:lstStyle>
           <a:p>
-            <a:pPr indent="0" lvl="0" marL="0" rtl="0" algn="r">
+            <a:pPr marL="0" lvl="0" indent="0" algn="r" rtl="0">
               <a:spcBef>
                 <a:spcPts val="0"/>
               </a:spcBef>
@@ -2972,7 +3141,7 @@
             </a:pPr>
             <a:fld id="{00000000-1234-1234-1234-123412341234}" type="slidenum">
               <a:rPr lang="en"/>
-              <a:t>‹#›</a:t>
+              <a:t>‹Nº›</a:t>
             </a:fld>
             <a:endParaRPr/>
           </a:p>
@@ -2987,18 +3156,19 @@
 </file>
 
 <file path=ppt/slideLayouts/slideLayout12.xml><?xml version="1.0" encoding="utf-8"?>
-<p:sldLayout xmlns:a="http://schemas.openxmlformats.org/drawingml/2006/main" xmlns:r="http://schemas.openxmlformats.org/officeDocument/2006/relationships" xmlns:mc="http://schemas.openxmlformats.org/markup-compatibility/2006" xmlns:mv="urn:schemas-microsoft-com:mac:vml" xmlns:p="http://schemas.openxmlformats.org/presentationml/2006/main" xmlns:c="http://schemas.openxmlformats.org/drawingml/2006/chart" xmlns:dgm="http://schemas.openxmlformats.org/drawingml/2006/diagram" xmlns:o="urn:schemas-microsoft-com:office:office" xmlns:v="urn:schemas-microsoft-com:vml" xmlns:pvml="urn:schemas-microsoft-com:office:powerpoint" xmlns:com="http://schemas.openxmlformats.org/drawingml/2006/compatibility" xmlns:p14="http://schemas.microsoft.com/office/powerpoint/2010/main" xmlns:p15="http://schemas.microsoft.com/office/powerpoint/2012/main" xmlns:ahyp="http://schemas.microsoft.com/office/drawing/2018/hyperlinkcolor" matchingName="DEFAULT">
+<p:sldLayout xmlns:a="http://schemas.openxmlformats.org/drawingml/2006/main" xmlns:r="http://schemas.openxmlformats.org/officeDocument/2006/relationships" xmlns:p="http://schemas.openxmlformats.org/presentationml/2006/main" matchingName="DEFAULT">
   <p:cSld name="DEFAULT">
     <p:bg>
       <p:bgPr>
         <a:solidFill>
           <a:schemeClr val="lt1"/>
         </a:solidFill>
+        <a:effectLst/>
       </p:bgPr>
     </p:bg>
     <p:spTree>
       <p:nvGrpSpPr>
-        <p:cNvPr id="28" name="Shape 28"/>
+        <p:cNvPr id="1" name="Shape 28"/>
         <p:cNvGrpSpPr/>
         <p:nvPr/>
       </p:nvGrpSpPr>
@@ -3019,11 +3189,11 @@
 </file>
 
 <file path=ppt/slideLayouts/slideLayout2.xml><?xml version="1.0" encoding="utf-8"?>
-<p:sldLayout xmlns:a="http://schemas.openxmlformats.org/drawingml/2006/main" xmlns:r="http://schemas.openxmlformats.org/officeDocument/2006/relationships" xmlns:mc="http://schemas.openxmlformats.org/markup-compatibility/2006" xmlns:mv="urn:schemas-microsoft-com:mac:vml" xmlns:p="http://schemas.openxmlformats.org/presentationml/2006/main" xmlns:c="http://schemas.openxmlformats.org/drawingml/2006/chart" xmlns:dgm="http://schemas.openxmlformats.org/drawingml/2006/diagram" xmlns:o="urn:schemas-microsoft-com:office:office" xmlns:v="urn:schemas-microsoft-com:vml" xmlns:pvml="urn:schemas-microsoft-com:office:powerpoint" xmlns:com="http://schemas.openxmlformats.org/drawingml/2006/compatibility" xmlns:p14="http://schemas.microsoft.com/office/powerpoint/2010/main" xmlns:p15="http://schemas.microsoft.com/office/powerpoint/2012/main" xmlns:ahyp="http://schemas.microsoft.com/office/drawing/2018/hyperlinkcolor" matchingName="Blank" type="blank">
+<p:sldLayout xmlns:a="http://schemas.openxmlformats.org/drawingml/2006/main" xmlns:r="http://schemas.openxmlformats.org/officeDocument/2006/relationships" xmlns:p="http://schemas.openxmlformats.org/presentationml/2006/main" matchingName="Blank" type="blank">
   <p:cSld name="BLANK">
     <p:spTree>
       <p:nvGrpSpPr>
-        <p:cNvPr id="9" name="Shape 9"/>
+        <p:cNvPr id="1" name="Shape 9"/>
         <p:cNvGrpSpPr/>
         <p:nvPr/>
       </p:nvGrpSpPr>
@@ -3038,9 +3208,11 @@
       <p:sp>
         <p:nvSpPr>
           <p:cNvPr id="10" name="Google Shape;10;p13"/>
-          <p:cNvSpPr txBox="1"/>
+          <p:cNvSpPr txBox="1">
+            <a:spLocks noGrp="1"/>
+          </p:cNvSpPr>
           <p:nvPr>
-            <p:ph idx="12" type="sldNum"/>
+            <p:ph type="sldNum" idx="12"/>
           </p:nvPr>
         </p:nvSpPr>
         <p:spPr>
@@ -3057,11 +3229,11 @@
           </a:ln>
         </p:spPr>
         <p:txBody>
-          <a:bodyPr anchorCtr="0" anchor="ctr" bIns="91425" lIns="91425" spcFirstLastPara="1" rIns="91425" wrap="square" tIns="91425">
+          <a:bodyPr spcFirstLastPara="1" wrap="square" lIns="91425" tIns="91425" rIns="91425" bIns="91425" anchor="ctr" anchorCtr="0">
             <a:normAutofit/>
           </a:bodyPr>
           <a:lstStyle>
-            <a:lvl1pPr indent="0" lvl="0" marL="0" marR="0" algn="r">
+            <a:lvl1pPr marL="0" marR="0" lvl="0" indent="0" algn="r">
               <a:lnSpc>
                 <a:spcPct val="100000"/>
               </a:lnSpc>
@@ -3077,7 +3249,7 @@
               <a:buSzPts val="1000"/>
               <a:buFont typeface="Arial"/>
               <a:buNone/>
-              <a:defRPr b="0" i="0" sz="1000" u="none" cap="none" strike="noStrike">
+              <a:defRPr sz="1000" b="0" i="0" u="none" strike="noStrike" cap="none">
                 <a:solidFill>
                   <a:schemeClr val="dk2"/>
                 </a:solidFill>
@@ -3087,7 +3259,7 @@
                 <a:sym typeface="Arial"/>
               </a:defRPr>
             </a:lvl1pPr>
-            <a:lvl2pPr indent="0" lvl="1" marL="0" marR="0" algn="r">
+            <a:lvl2pPr marL="0" marR="0" lvl="1" indent="0" algn="r">
               <a:lnSpc>
                 <a:spcPct val="100000"/>
               </a:lnSpc>
@@ -3103,7 +3275,7 @@
               <a:buSzPts val="1000"/>
               <a:buFont typeface="Arial"/>
               <a:buNone/>
-              <a:defRPr b="0" i="0" sz="1000" u="none" cap="none" strike="noStrike">
+              <a:defRPr sz="1000" b="0" i="0" u="none" strike="noStrike" cap="none">
                 <a:solidFill>
                   <a:schemeClr val="dk2"/>
                 </a:solidFill>
@@ -3113,7 +3285,7 @@
                 <a:sym typeface="Arial"/>
               </a:defRPr>
             </a:lvl2pPr>
-            <a:lvl3pPr indent="0" lvl="2" marL="0" marR="0" algn="r">
+            <a:lvl3pPr marL="0" marR="0" lvl="2" indent="0" algn="r">
               <a:lnSpc>
                 <a:spcPct val="100000"/>
               </a:lnSpc>
@@ -3129,7 +3301,7 @@
               <a:buSzPts val="1000"/>
               <a:buFont typeface="Arial"/>
               <a:buNone/>
-              <a:defRPr b="0" i="0" sz="1000" u="none" cap="none" strike="noStrike">
+              <a:defRPr sz="1000" b="0" i="0" u="none" strike="noStrike" cap="none">
                 <a:solidFill>
                   <a:schemeClr val="dk2"/>
                 </a:solidFill>
@@ -3139,7 +3311,7 @@
                 <a:sym typeface="Arial"/>
               </a:defRPr>
             </a:lvl3pPr>
-            <a:lvl4pPr indent="0" lvl="3" marL="0" marR="0" algn="r">
+            <a:lvl4pPr marL="0" marR="0" lvl="3" indent="0" algn="r">
               <a:lnSpc>
                 <a:spcPct val="100000"/>
               </a:lnSpc>
@@ -3155,7 +3327,7 @@
               <a:buSzPts val="1000"/>
               <a:buFont typeface="Arial"/>
               <a:buNone/>
-              <a:defRPr b="0" i="0" sz="1000" u="none" cap="none" strike="noStrike">
+              <a:defRPr sz="1000" b="0" i="0" u="none" strike="noStrike" cap="none">
                 <a:solidFill>
                   <a:schemeClr val="dk2"/>
                 </a:solidFill>
@@ -3165,7 +3337,7 @@
                 <a:sym typeface="Arial"/>
               </a:defRPr>
             </a:lvl4pPr>
-            <a:lvl5pPr indent="0" lvl="4" marL="0" marR="0" algn="r">
+            <a:lvl5pPr marL="0" marR="0" lvl="4" indent="0" algn="r">
               <a:lnSpc>
                 <a:spcPct val="100000"/>
               </a:lnSpc>
@@ -3181,7 +3353,7 @@
               <a:buSzPts val="1000"/>
               <a:buFont typeface="Arial"/>
               <a:buNone/>
-              <a:defRPr b="0" i="0" sz="1000" u="none" cap="none" strike="noStrike">
+              <a:defRPr sz="1000" b="0" i="0" u="none" strike="noStrike" cap="none">
                 <a:solidFill>
                   <a:schemeClr val="dk2"/>
                 </a:solidFill>
@@ -3191,7 +3363,7 @@
                 <a:sym typeface="Arial"/>
               </a:defRPr>
             </a:lvl5pPr>
-            <a:lvl6pPr indent="0" lvl="5" marL="0" marR="0" algn="r">
+            <a:lvl6pPr marL="0" marR="0" lvl="5" indent="0" algn="r">
               <a:lnSpc>
                 <a:spcPct val="100000"/>
               </a:lnSpc>
@@ -3207,7 +3379,7 @@
               <a:buSzPts val="1000"/>
               <a:buFont typeface="Arial"/>
               <a:buNone/>
-              <a:defRPr b="0" i="0" sz="1000" u="none" cap="none" strike="noStrike">
+              <a:defRPr sz="1000" b="0" i="0" u="none" strike="noStrike" cap="none">
                 <a:solidFill>
                   <a:schemeClr val="dk2"/>
                 </a:solidFill>
@@ -3217,7 +3389,7 @@
                 <a:sym typeface="Arial"/>
               </a:defRPr>
             </a:lvl6pPr>
-            <a:lvl7pPr indent="0" lvl="6" marL="0" marR="0" algn="r">
+            <a:lvl7pPr marL="0" marR="0" lvl="6" indent="0" algn="r">
               <a:lnSpc>
                 <a:spcPct val="100000"/>
               </a:lnSpc>
@@ -3233,7 +3405,7 @@
               <a:buSzPts val="1000"/>
               <a:buFont typeface="Arial"/>
               <a:buNone/>
-              <a:defRPr b="0" i="0" sz="1000" u="none" cap="none" strike="noStrike">
+              <a:defRPr sz="1000" b="0" i="0" u="none" strike="noStrike" cap="none">
                 <a:solidFill>
                   <a:schemeClr val="dk2"/>
                 </a:solidFill>
@@ -3243,7 +3415,7 @@
                 <a:sym typeface="Arial"/>
               </a:defRPr>
             </a:lvl7pPr>
-            <a:lvl8pPr indent="0" lvl="7" marL="0" marR="0" algn="r">
+            <a:lvl8pPr marL="0" marR="0" lvl="7" indent="0" algn="r">
               <a:lnSpc>
                 <a:spcPct val="100000"/>
               </a:lnSpc>
@@ -3259,7 +3431,7 @@
               <a:buSzPts val="1000"/>
               <a:buFont typeface="Arial"/>
               <a:buNone/>
-              <a:defRPr b="0" i="0" sz="1000" u="none" cap="none" strike="noStrike">
+              <a:defRPr sz="1000" b="0" i="0" u="none" strike="noStrike" cap="none">
                 <a:solidFill>
                   <a:schemeClr val="dk2"/>
                 </a:solidFill>
@@ -3269,7 +3441,7 @@
                 <a:sym typeface="Arial"/>
               </a:defRPr>
             </a:lvl8pPr>
-            <a:lvl9pPr indent="0" lvl="8" marL="0" marR="0" algn="r">
+            <a:lvl9pPr marL="0" marR="0" lvl="8" indent="0" algn="r">
               <a:lnSpc>
                 <a:spcPct val="100000"/>
               </a:lnSpc>
@@ -3285,7 +3457,7 @@
               <a:buSzPts val="1000"/>
               <a:buFont typeface="Arial"/>
               <a:buNone/>
-              <a:defRPr b="0" i="0" sz="1000" u="none" cap="none" strike="noStrike">
+              <a:defRPr sz="1000" b="0" i="0" u="none" strike="noStrike" cap="none">
                 <a:solidFill>
                   <a:schemeClr val="dk2"/>
                 </a:solidFill>
@@ -3297,7 +3469,7 @@
             </a:lvl9pPr>
           </a:lstStyle>
           <a:p>
-            <a:pPr indent="0" lvl="0" marL="0" rtl="0" algn="r">
+            <a:pPr marL="0" lvl="0" indent="0" algn="r" rtl="0">
               <a:spcBef>
                 <a:spcPts val="0"/>
               </a:spcBef>
@@ -3308,7 +3480,7 @@
             </a:pPr>
             <a:fld id="{00000000-1234-1234-1234-123412341234}" type="slidenum">
               <a:rPr lang="en"/>
-              <a:t>‹#›</a:t>
+              <a:t>‹Nº›</a:t>
             </a:fld>
             <a:endParaRPr/>
           </a:p>
@@ -3323,11 +3495,11 @@
 </file>
 
 <file path=ppt/slideLayouts/slideLayout3.xml><?xml version="1.0" encoding="utf-8"?>
-<p:sldLayout xmlns:a="http://schemas.openxmlformats.org/drawingml/2006/main" xmlns:r="http://schemas.openxmlformats.org/officeDocument/2006/relationships" xmlns:mc="http://schemas.openxmlformats.org/markup-compatibility/2006" xmlns:mv="urn:schemas-microsoft-com:mac:vml" xmlns:p="http://schemas.openxmlformats.org/presentationml/2006/main" xmlns:c="http://schemas.openxmlformats.org/drawingml/2006/chart" xmlns:dgm="http://schemas.openxmlformats.org/drawingml/2006/diagram" xmlns:o="urn:schemas-microsoft-com:office:office" xmlns:v="urn:schemas-microsoft-com:vml" xmlns:pvml="urn:schemas-microsoft-com:office:powerpoint" xmlns:com="http://schemas.openxmlformats.org/drawingml/2006/compatibility" xmlns:p14="http://schemas.microsoft.com/office/powerpoint/2010/main" xmlns:p15="http://schemas.microsoft.com/office/powerpoint/2012/main" xmlns:ahyp="http://schemas.microsoft.com/office/drawing/2018/hyperlinkcolor" matchingName="Team (4 people)" type="secHead">
+<p:sldLayout xmlns:a="http://schemas.openxmlformats.org/drawingml/2006/main" xmlns:r="http://schemas.openxmlformats.org/officeDocument/2006/relationships" xmlns:p="http://schemas.openxmlformats.org/presentationml/2006/main" matchingName="Team (4 people)" type="secHead">
   <p:cSld name="SECTION_HEADER">
     <p:spTree>
       <p:nvGrpSpPr>
-        <p:cNvPr id="11" name="Shape 11"/>
+        <p:cNvPr id="1" name="Shape 11"/>
         <p:cNvGrpSpPr/>
         <p:nvPr/>
       </p:nvGrpSpPr>
@@ -3348,11 +3520,11 @@
 </file>
 
 <file path=ppt/slideLayouts/slideLayout4.xml><?xml version="1.0" encoding="utf-8"?>
-<p:sldLayout xmlns:a="http://schemas.openxmlformats.org/drawingml/2006/main" xmlns:r="http://schemas.openxmlformats.org/officeDocument/2006/relationships" xmlns:mc="http://schemas.openxmlformats.org/markup-compatibility/2006" xmlns:mv="urn:schemas-microsoft-com:mac:vml" xmlns:p="http://schemas.openxmlformats.org/presentationml/2006/main" xmlns:c="http://schemas.openxmlformats.org/drawingml/2006/chart" xmlns:dgm="http://schemas.openxmlformats.org/drawingml/2006/diagram" xmlns:o="urn:schemas-microsoft-com:office:office" xmlns:v="urn:schemas-microsoft-com:vml" xmlns:pvml="urn:schemas-microsoft-com:office:powerpoint" xmlns:com="http://schemas.openxmlformats.org/drawingml/2006/compatibility" xmlns:p14="http://schemas.microsoft.com/office/powerpoint/2010/main" xmlns:p15="http://schemas.microsoft.com/office/powerpoint/2012/main" xmlns:ahyp="http://schemas.microsoft.com/office/drawing/2018/hyperlinkcolor" matchingName="Title and body" type="tx">
+<p:sldLayout xmlns:a="http://schemas.openxmlformats.org/drawingml/2006/main" xmlns:r="http://schemas.openxmlformats.org/officeDocument/2006/relationships" xmlns:p="http://schemas.openxmlformats.org/presentationml/2006/main" matchingName="Title and body" type="tx">
   <p:cSld name="TITLE_AND_BODY">
     <p:spTree>
       <p:nvGrpSpPr>
-        <p:cNvPr id="12" name="Shape 12"/>
+        <p:cNvPr id="1" name="Shape 12"/>
         <p:cNvGrpSpPr/>
         <p:nvPr/>
       </p:nvGrpSpPr>
@@ -3367,9 +3539,11 @@
       <p:sp>
         <p:nvSpPr>
           <p:cNvPr id="13" name="Google Shape;13;p15"/>
-          <p:cNvSpPr txBox="1"/>
+          <p:cNvSpPr txBox="1">
+            <a:spLocks noGrp="1"/>
+          </p:cNvSpPr>
           <p:nvPr>
-            <p:ph idx="12" type="sldNum"/>
+            <p:ph type="sldNum" idx="12"/>
           </p:nvPr>
         </p:nvSpPr>
         <p:spPr>
@@ -3386,11 +3560,11 @@
           </a:ln>
         </p:spPr>
         <p:txBody>
-          <a:bodyPr anchorCtr="0" anchor="ctr" bIns="91425" lIns="91425" spcFirstLastPara="1" rIns="91425" wrap="square" tIns="91425">
+          <a:bodyPr spcFirstLastPara="1" wrap="square" lIns="91425" tIns="91425" rIns="91425" bIns="91425" anchor="ctr" anchorCtr="0">
             <a:normAutofit/>
           </a:bodyPr>
           <a:lstStyle>
-            <a:lvl1pPr indent="0" lvl="0" marL="0" marR="0" algn="r">
+            <a:lvl1pPr marL="0" marR="0" lvl="0" indent="0" algn="r">
               <a:lnSpc>
                 <a:spcPct val="100000"/>
               </a:lnSpc>
@@ -3406,7 +3580,7 @@
               <a:buSzPts val="1000"/>
               <a:buFont typeface="Arial"/>
               <a:buNone/>
-              <a:defRPr b="0" i="0" sz="1000" u="none" cap="none" strike="noStrike">
+              <a:defRPr sz="1000" b="0" i="0" u="none" strike="noStrike" cap="none">
                 <a:solidFill>
                   <a:schemeClr val="dk2"/>
                 </a:solidFill>
@@ -3416,7 +3590,7 @@
                 <a:sym typeface="Arial"/>
               </a:defRPr>
             </a:lvl1pPr>
-            <a:lvl2pPr indent="0" lvl="1" marL="0" marR="0" algn="r">
+            <a:lvl2pPr marL="0" marR="0" lvl="1" indent="0" algn="r">
               <a:lnSpc>
                 <a:spcPct val="100000"/>
               </a:lnSpc>
@@ -3432,7 +3606,7 @@
               <a:buSzPts val="1000"/>
               <a:buFont typeface="Arial"/>
               <a:buNone/>
-              <a:defRPr b="0" i="0" sz="1000" u="none" cap="none" strike="noStrike">
+              <a:defRPr sz="1000" b="0" i="0" u="none" strike="noStrike" cap="none">
                 <a:solidFill>
                   <a:schemeClr val="dk2"/>
                 </a:solidFill>
@@ -3442,7 +3616,7 @@
                 <a:sym typeface="Arial"/>
               </a:defRPr>
             </a:lvl2pPr>
-            <a:lvl3pPr indent="0" lvl="2" marL="0" marR="0" algn="r">
+            <a:lvl3pPr marL="0" marR="0" lvl="2" indent="0" algn="r">
               <a:lnSpc>
                 <a:spcPct val="100000"/>
               </a:lnSpc>
@@ -3458,7 +3632,7 @@
               <a:buSzPts val="1000"/>
               <a:buFont typeface="Arial"/>
               <a:buNone/>
-              <a:defRPr b="0" i="0" sz="1000" u="none" cap="none" strike="noStrike">
+              <a:defRPr sz="1000" b="0" i="0" u="none" strike="noStrike" cap="none">
                 <a:solidFill>
                   <a:schemeClr val="dk2"/>
                 </a:solidFill>
@@ -3468,7 +3642,7 @@
                 <a:sym typeface="Arial"/>
               </a:defRPr>
             </a:lvl3pPr>
-            <a:lvl4pPr indent="0" lvl="3" marL="0" marR="0" algn="r">
+            <a:lvl4pPr marL="0" marR="0" lvl="3" indent="0" algn="r">
               <a:lnSpc>
                 <a:spcPct val="100000"/>
               </a:lnSpc>
@@ -3484,7 +3658,7 @@
               <a:buSzPts val="1000"/>
               <a:buFont typeface="Arial"/>
               <a:buNone/>
-              <a:defRPr b="0" i="0" sz="1000" u="none" cap="none" strike="noStrike">
+              <a:defRPr sz="1000" b="0" i="0" u="none" strike="noStrike" cap="none">
                 <a:solidFill>
                   <a:schemeClr val="dk2"/>
                 </a:solidFill>
@@ -3494,7 +3668,7 @@
                 <a:sym typeface="Arial"/>
               </a:defRPr>
             </a:lvl4pPr>
-            <a:lvl5pPr indent="0" lvl="4" marL="0" marR="0" algn="r">
+            <a:lvl5pPr marL="0" marR="0" lvl="4" indent="0" algn="r">
               <a:lnSpc>
                 <a:spcPct val="100000"/>
               </a:lnSpc>
@@ -3510,7 +3684,7 @@
               <a:buSzPts val="1000"/>
               <a:buFont typeface="Arial"/>
               <a:buNone/>
-              <a:defRPr b="0" i="0" sz="1000" u="none" cap="none" strike="noStrike">
+              <a:defRPr sz="1000" b="0" i="0" u="none" strike="noStrike" cap="none">
                 <a:solidFill>
                   <a:schemeClr val="dk2"/>
                 </a:solidFill>
@@ -3520,7 +3694,7 @@
                 <a:sym typeface="Arial"/>
               </a:defRPr>
             </a:lvl5pPr>
-            <a:lvl6pPr indent="0" lvl="5" marL="0" marR="0" algn="r">
+            <a:lvl6pPr marL="0" marR="0" lvl="5" indent="0" algn="r">
               <a:lnSpc>
                 <a:spcPct val="100000"/>
               </a:lnSpc>
@@ -3536,7 +3710,7 @@
               <a:buSzPts val="1000"/>
               <a:buFont typeface="Arial"/>
               <a:buNone/>
-              <a:defRPr b="0" i="0" sz="1000" u="none" cap="none" strike="noStrike">
+              <a:defRPr sz="1000" b="0" i="0" u="none" strike="noStrike" cap="none">
                 <a:solidFill>
                   <a:schemeClr val="dk2"/>
                 </a:solidFill>
@@ -3546,7 +3720,7 @@
                 <a:sym typeface="Arial"/>
               </a:defRPr>
             </a:lvl6pPr>
-            <a:lvl7pPr indent="0" lvl="6" marL="0" marR="0" algn="r">
+            <a:lvl7pPr marL="0" marR="0" lvl="6" indent="0" algn="r">
               <a:lnSpc>
                 <a:spcPct val="100000"/>
               </a:lnSpc>
@@ -3562,7 +3736,7 @@
               <a:buSzPts val="1000"/>
               <a:buFont typeface="Arial"/>
               <a:buNone/>
-              <a:defRPr b="0" i="0" sz="1000" u="none" cap="none" strike="noStrike">
+              <a:defRPr sz="1000" b="0" i="0" u="none" strike="noStrike" cap="none">
                 <a:solidFill>
                   <a:schemeClr val="dk2"/>
                 </a:solidFill>
@@ -3572,7 +3746,7 @@
                 <a:sym typeface="Arial"/>
               </a:defRPr>
             </a:lvl7pPr>
-            <a:lvl8pPr indent="0" lvl="7" marL="0" marR="0" algn="r">
+            <a:lvl8pPr marL="0" marR="0" lvl="7" indent="0" algn="r">
               <a:lnSpc>
                 <a:spcPct val="100000"/>
               </a:lnSpc>
@@ -3588,7 +3762,7 @@
               <a:buSzPts val="1000"/>
               <a:buFont typeface="Arial"/>
               <a:buNone/>
-              <a:defRPr b="0" i="0" sz="1000" u="none" cap="none" strike="noStrike">
+              <a:defRPr sz="1000" b="0" i="0" u="none" strike="noStrike" cap="none">
                 <a:solidFill>
                   <a:schemeClr val="dk2"/>
                 </a:solidFill>
@@ -3598,7 +3772,7 @@
                 <a:sym typeface="Arial"/>
               </a:defRPr>
             </a:lvl8pPr>
-            <a:lvl9pPr indent="0" lvl="8" marL="0" marR="0" algn="r">
+            <a:lvl9pPr marL="0" marR="0" lvl="8" indent="0" algn="r">
               <a:lnSpc>
                 <a:spcPct val="100000"/>
               </a:lnSpc>
@@ -3614,7 +3788,7 @@
               <a:buSzPts val="1000"/>
               <a:buFont typeface="Arial"/>
               <a:buNone/>
-              <a:defRPr b="0" i="0" sz="1000" u="none" cap="none" strike="noStrike">
+              <a:defRPr sz="1000" b="0" i="0" u="none" strike="noStrike" cap="none">
                 <a:solidFill>
                   <a:schemeClr val="dk2"/>
                 </a:solidFill>
@@ -3626,7 +3800,7 @@
             </a:lvl9pPr>
           </a:lstStyle>
           <a:p>
-            <a:pPr indent="0" lvl="0" marL="0" rtl="0" algn="r">
+            <a:pPr marL="0" lvl="0" indent="0" algn="r" rtl="0">
               <a:spcBef>
                 <a:spcPts val="0"/>
               </a:spcBef>
@@ -3637,7 +3811,7 @@
             </a:pPr>
             <a:fld id="{00000000-1234-1234-1234-123412341234}" type="slidenum">
               <a:rPr lang="en"/>
-              <a:t>‹#›</a:t>
+              <a:t>‹Nº›</a:t>
             </a:fld>
             <a:endParaRPr/>
           </a:p>
@@ -3652,11 +3826,11 @@
 </file>
 
 <file path=ppt/slideLayouts/slideLayout5.xml><?xml version="1.0" encoding="utf-8"?>
-<p:sldLayout xmlns:a="http://schemas.openxmlformats.org/drawingml/2006/main" xmlns:r="http://schemas.openxmlformats.org/officeDocument/2006/relationships" xmlns:mc="http://schemas.openxmlformats.org/markup-compatibility/2006" xmlns:mv="urn:schemas-microsoft-com:mac:vml" xmlns:p="http://schemas.openxmlformats.org/presentationml/2006/main" xmlns:c="http://schemas.openxmlformats.org/drawingml/2006/chart" xmlns:dgm="http://schemas.openxmlformats.org/drawingml/2006/diagram" xmlns:o="urn:schemas-microsoft-com:office:office" xmlns:v="urn:schemas-microsoft-com:vml" xmlns:pvml="urn:schemas-microsoft-com:office:powerpoint" xmlns:com="http://schemas.openxmlformats.org/drawingml/2006/compatibility" xmlns:p14="http://schemas.microsoft.com/office/powerpoint/2010/main" xmlns:p15="http://schemas.microsoft.com/office/powerpoint/2012/main" xmlns:ahyp="http://schemas.microsoft.com/office/drawing/2018/hyperlinkcolor" matchingName="Title and two columns" type="twoColTx">
+<p:sldLayout xmlns:a="http://schemas.openxmlformats.org/drawingml/2006/main" xmlns:r="http://schemas.openxmlformats.org/officeDocument/2006/relationships" xmlns:p="http://schemas.openxmlformats.org/presentationml/2006/main" matchingName="Title and two columns" type="twoColTx">
   <p:cSld name="TITLE_AND_TWO_COLUMNS">
     <p:spTree>
       <p:nvGrpSpPr>
-        <p:cNvPr id="14" name="Shape 14"/>
+        <p:cNvPr id="1" name="Shape 14"/>
         <p:cNvGrpSpPr/>
         <p:nvPr/>
       </p:nvGrpSpPr>
@@ -3671,9 +3845,11 @@
       <p:sp>
         <p:nvSpPr>
           <p:cNvPr id="15" name="Google Shape;15;p16"/>
-          <p:cNvSpPr txBox="1"/>
+          <p:cNvSpPr txBox="1">
+            <a:spLocks noGrp="1"/>
+          </p:cNvSpPr>
           <p:nvPr>
-            <p:ph idx="12" type="sldNum"/>
+            <p:ph type="sldNum" idx="12"/>
           </p:nvPr>
         </p:nvSpPr>
         <p:spPr>
@@ -3690,11 +3866,11 @@
           </a:ln>
         </p:spPr>
         <p:txBody>
-          <a:bodyPr anchorCtr="0" anchor="ctr" bIns="91425" lIns="91425" spcFirstLastPara="1" rIns="91425" wrap="square" tIns="91425">
+          <a:bodyPr spcFirstLastPara="1" wrap="square" lIns="91425" tIns="91425" rIns="91425" bIns="91425" anchor="ctr" anchorCtr="0">
             <a:normAutofit/>
           </a:bodyPr>
           <a:lstStyle>
-            <a:lvl1pPr indent="0" lvl="0" marL="0" marR="0" algn="r">
+            <a:lvl1pPr marL="0" marR="0" lvl="0" indent="0" algn="r">
               <a:lnSpc>
                 <a:spcPct val="100000"/>
               </a:lnSpc>
@@ -3710,7 +3886,7 @@
               <a:buSzPts val="1000"/>
               <a:buFont typeface="Arial"/>
               <a:buNone/>
-              <a:defRPr b="0" i="0" sz="1000" u="none" cap="none" strike="noStrike">
+              <a:defRPr sz="1000" b="0" i="0" u="none" strike="noStrike" cap="none">
                 <a:solidFill>
                   <a:schemeClr val="dk2"/>
                 </a:solidFill>
@@ -3720,7 +3896,7 @@
                 <a:sym typeface="Arial"/>
               </a:defRPr>
             </a:lvl1pPr>
-            <a:lvl2pPr indent="0" lvl="1" marL="0" marR="0" algn="r">
+            <a:lvl2pPr marL="0" marR="0" lvl="1" indent="0" algn="r">
               <a:lnSpc>
                 <a:spcPct val="100000"/>
               </a:lnSpc>
@@ -3736,7 +3912,7 @@
               <a:buSzPts val="1000"/>
               <a:buFont typeface="Arial"/>
               <a:buNone/>
-              <a:defRPr b="0" i="0" sz="1000" u="none" cap="none" strike="noStrike">
+              <a:defRPr sz="1000" b="0" i="0" u="none" strike="noStrike" cap="none">
                 <a:solidFill>
                   <a:schemeClr val="dk2"/>
                 </a:solidFill>
@@ -3746,7 +3922,7 @@
                 <a:sym typeface="Arial"/>
               </a:defRPr>
             </a:lvl2pPr>
-            <a:lvl3pPr indent="0" lvl="2" marL="0" marR="0" algn="r">
+            <a:lvl3pPr marL="0" marR="0" lvl="2" indent="0" algn="r">
               <a:lnSpc>
                 <a:spcPct val="100000"/>
               </a:lnSpc>
@@ -3762,7 +3938,7 @@
               <a:buSzPts val="1000"/>
               <a:buFont typeface="Arial"/>
               <a:buNone/>
-              <a:defRPr b="0" i="0" sz="1000" u="none" cap="none" strike="noStrike">
+              <a:defRPr sz="1000" b="0" i="0" u="none" strike="noStrike" cap="none">
                 <a:solidFill>
                   <a:schemeClr val="dk2"/>
                 </a:solidFill>
@@ -3772,7 +3948,7 @@
                 <a:sym typeface="Arial"/>
               </a:defRPr>
             </a:lvl3pPr>
-            <a:lvl4pPr indent="0" lvl="3" marL="0" marR="0" algn="r">
+            <a:lvl4pPr marL="0" marR="0" lvl="3" indent="0" algn="r">
               <a:lnSpc>
                 <a:spcPct val="100000"/>
               </a:lnSpc>
@@ -3788,7 +3964,7 @@
               <a:buSzPts val="1000"/>
               <a:buFont typeface="Arial"/>
               <a:buNone/>
-              <a:defRPr b="0" i="0" sz="1000" u="none" cap="none" strike="noStrike">
+              <a:defRPr sz="1000" b="0" i="0" u="none" strike="noStrike" cap="none">
                 <a:solidFill>
                   <a:schemeClr val="dk2"/>
                 </a:solidFill>
@@ -3798,7 +3974,7 @@
                 <a:sym typeface="Arial"/>
               </a:defRPr>
             </a:lvl4pPr>
-            <a:lvl5pPr indent="0" lvl="4" marL="0" marR="0" algn="r">
+            <a:lvl5pPr marL="0" marR="0" lvl="4" indent="0" algn="r">
               <a:lnSpc>
                 <a:spcPct val="100000"/>
               </a:lnSpc>
@@ -3814,7 +3990,7 @@
               <a:buSzPts val="1000"/>
               <a:buFont typeface="Arial"/>
               <a:buNone/>
-              <a:defRPr b="0" i="0" sz="1000" u="none" cap="none" strike="noStrike">
+              <a:defRPr sz="1000" b="0" i="0" u="none" strike="noStrike" cap="none">
                 <a:solidFill>
                   <a:schemeClr val="dk2"/>
                 </a:solidFill>
@@ -3824,7 +4000,7 @@
                 <a:sym typeface="Arial"/>
               </a:defRPr>
             </a:lvl5pPr>
-            <a:lvl6pPr indent="0" lvl="5" marL="0" marR="0" algn="r">
+            <a:lvl6pPr marL="0" marR="0" lvl="5" indent="0" algn="r">
               <a:lnSpc>
                 <a:spcPct val="100000"/>
               </a:lnSpc>
@@ -3840,7 +4016,7 @@
               <a:buSzPts val="1000"/>
               <a:buFont typeface="Arial"/>
               <a:buNone/>
-              <a:defRPr b="0" i="0" sz="1000" u="none" cap="none" strike="noStrike">
+              <a:defRPr sz="1000" b="0" i="0" u="none" strike="noStrike" cap="none">
                 <a:solidFill>
                   <a:schemeClr val="dk2"/>
                 </a:solidFill>
@@ -3850,7 +4026,7 @@
                 <a:sym typeface="Arial"/>
               </a:defRPr>
             </a:lvl6pPr>
-            <a:lvl7pPr indent="0" lvl="6" marL="0" marR="0" algn="r">
+            <a:lvl7pPr marL="0" marR="0" lvl="6" indent="0" algn="r">
               <a:lnSpc>
                 <a:spcPct val="100000"/>
               </a:lnSpc>
@@ -3866,7 +4042,7 @@
               <a:buSzPts val="1000"/>
               <a:buFont typeface="Arial"/>
               <a:buNone/>
-              <a:defRPr b="0" i="0" sz="1000" u="none" cap="none" strike="noStrike">
+              <a:defRPr sz="1000" b="0" i="0" u="none" strike="noStrike" cap="none">
                 <a:solidFill>
                   <a:schemeClr val="dk2"/>
                 </a:solidFill>
@@ -3876,7 +4052,7 @@
                 <a:sym typeface="Arial"/>
               </a:defRPr>
             </a:lvl7pPr>
-            <a:lvl8pPr indent="0" lvl="7" marL="0" marR="0" algn="r">
+            <a:lvl8pPr marL="0" marR="0" lvl="7" indent="0" algn="r">
               <a:lnSpc>
                 <a:spcPct val="100000"/>
               </a:lnSpc>
@@ -3892,7 +4068,7 @@
               <a:buSzPts val="1000"/>
               <a:buFont typeface="Arial"/>
               <a:buNone/>
-              <a:defRPr b="0" i="0" sz="1000" u="none" cap="none" strike="noStrike">
+              <a:defRPr sz="1000" b="0" i="0" u="none" strike="noStrike" cap="none">
                 <a:solidFill>
                   <a:schemeClr val="dk2"/>
                 </a:solidFill>
@@ -3902,7 +4078,7 @@
                 <a:sym typeface="Arial"/>
               </a:defRPr>
             </a:lvl8pPr>
-            <a:lvl9pPr indent="0" lvl="8" marL="0" marR="0" algn="r">
+            <a:lvl9pPr marL="0" marR="0" lvl="8" indent="0" algn="r">
               <a:lnSpc>
                 <a:spcPct val="100000"/>
               </a:lnSpc>
@@ -3918,7 +4094,7 @@
               <a:buSzPts val="1000"/>
               <a:buFont typeface="Arial"/>
               <a:buNone/>
-              <a:defRPr b="0" i="0" sz="1000" u="none" cap="none" strike="noStrike">
+              <a:defRPr sz="1000" b="0" i="0" u="none" strike="noStrike" cap="none">
                 <a:solidFill>
                   <a:schemeClr val="dk2"/>
                 </a:solidFill>
@@ -3930,7 +4106,7 @@
             </a:lvl9pPr>
           </a:lstStyle>
           <a:p>
-            <a:pPr indent="0" lvl="0" marL="0" rtl="0" algn="r">
+            <a:pPr marL="0" lvl="0" indent="0" algn="r" rtl="0">
               <a:spcBef>
                 <a:spcPts val="0"/>
               </a:spcBef>
@@ -3941,7 +4117,7 @@
             </a:pPr>
             <a:fld id="{00000000-1234-1234-1234-123412341234}" type="slidenum">
               <a:rPr lang="en"/>
-              <a:t>‹#›</a:t>
+              <a:t>‹Nº›</a:t>
             </a:fld>
             <a:endParaRPr/>
           </a:p>
@@ -3956,11 +4132,11 @@
 </file>
 
 <file path=ppt/slideLayouts/slideLayout6.xml><?xml version="1.0" encoding="utf-8"?>
-<p:sldLayout xmlns:a="http://schemas.openxmlformats.org/drawingml/2006/main" xmlns:r="http://schemas.openxmlformats.org/officeDocument/2006/relationships" xmlns:mc="http://schemas.openxmlformats.org/markup-compatibility/2006" xmlns:mv="urn:schemas-microsoft-com:mac:vml" xmlns:p="http://schemas.openxmlformats.org/presentationml/2006/main" xmlns:c="http://schemas.openxmlformats.org/drawingml/2006/chart" xmlns:dgm="http://schemas.openxmlformats.org/drawingml/2006/diagram" xmlns:o="urn:schemas-microsoft-com:office:office" xmlns:v="urn:schemas-microsoft-com:vml" xmlns:pvml="urn:schemas-microsoft-com:office:powerpoint" xmlns:com="http://schemas.openxmlformats.org/drawingml/2006/compatibility" xmlns:p14="http://schemas.microsoft.com/office/powerpoint/2010/main" xmlns:p15="http://schemas.microsoft.com/office/powerpoint/2012/main" xmlns:ahyp="http://schemas.microsoft.com/office/drawing/2018/hyperlinkcolor" matchingName="Title only" type="titleOnly">
+<p:sldLayout xmlns:a="http://schemas.openxmlformats.org/drawingml/2006/main" xmlns:r="http://schemas.openxmlformats.org/officeDocument/2006/relationships" xmlns:p="http://schemas.openxmlformats.org/presentationml/2006/main" matchingName="Title only" type="titleOnly">
   <p:cSld name="TITLE_ONLY">
     <p:spTree>
       <p:nvGrpSpPr>
-        <p:cNvPr id="16" name="Shape 16"/>
+        <p:cNvPr id="1" name="Shape 16"/>
         <p:cNvGrpSpPr/>
         <p:nvPr/>
       </p:nvGrpSpPr>
@@ -3975,9 +4151,11 @@
       <p:sp>
         <p:nvSpPr>
           <p:cNvPr id="17" name="Google Shape;17;p17"/>
-          <p:cNvSpPr txBox="1"/>
+          <p:cNvSpPr txBox="1">
+            <a:spLocks noGrp="1"/>
+          </p:cNvSpPr>
           <p:nvPr>
-            <p:ph idx="12" type="sldNum"/>
+            <p:ph type="sldNum" idx="12"/>
           </p:nvPr>
         </p:nvSpPr>
         <p:spPr>
@@ -3994,11 +4172,11 @@
           </a:ln>
         </p:spPr>
         <p:txBody>
-          <a:bodyPr anchorCtr="0" anchor="ctr" bIns="91425" lIns="91425" spcFirstLastPara="1" rIns="91425" wrap="square" tIns="91425">
+          <a:bodyPr spcFirstLastPara="1" wrap="square" lIns="91425" tIns="91425" rIns="91425" bIns="91425" anchor="ctr" anchorCtr="0">
             <a:normAutofit/>
           </a:bodyPr>
           <a:lstStyle>
-            <a:lvl1pPr indent="0" lvl="0" marL="0" marR="0" algn="r">
+            <a:lvl1pPr marL="0" marR="0" lvl="0" indent="0" algn="r">
               <a:lnSpc>
                 <a:spcPct val="100000"/>
               </a:lnSpc>
@@ -4014,7 +4192,7 @@
               <a:buSzPts val="1000"/>
               <a:buFont typeface="Arial"/>
               <a:buNone/>
-              <a:defRPr b="0" i="0" sz="1000" u="none" cap="none" strike="noStrike">
+              <a:defRPr sz="1000" b="0" i="0" u="none" strike="noStrike" cap="none">
                 <a:solidFill>
                   <a:schemeClr val="dk2"/>
                 </a:solidFill>
@@ -4024,7 +4202,7 @@
                 <a:sym typeface="Arial"/>
               </a:defRPr>
             </a:lvl1pPr>
-            <a:lvl2pPr indent="0" lvl="1" marL="0" marR="0" algn="r">
+            <a:lvl2pPr marL="0" marR="0" lvl="1" indent="0" algn="r">
               <a:lnSpc>
                 <a:spcPct val="100000"/>
               </a:lnSpc>
@@ -4040,7 +4218,7 @@
               <a:buSzPts val="1000"/>
               <a:buFont typeface="Arial"/>
               <a:buNone/>
-              <a:defRPr b="0" i="0" sz="1000" u="none" cap="none" strike="noStrike">
+              <a:defRPr sz="1000" b="0" i="0" u="none" strike="noStrike" cap="none">
                 <a:solidFill>
                   <a:schemeClr val="dk2"/>
                 </a:solidFill>
@@ -4050,7 +4228,7 @@
                 <a:sym typeface="Arial"/>
               </a:defRPr>
             </a:lvl2pPr>
-            <a:lvl3pPr indent="0" lvl="2" marL="0" marR="0" algn="r">
+            <a:lvl3pPr marL="0" marR="0" lvl="2" indent="0" algn="r">
               <a:lnSpc>
                 <a:spcPct val="100000"/>
               </a:lnSpc>
@@ -4066,7 +4244,7 @@
               <a:buSzPts val="1000"/>
               <a:buFont typeface="Arial"/>
               <a:buNone/>
-              <a:defRPr b="0" i="0" sz="1000" u="none" cap="none" strike="noStrike">
+              <a:defRPr sz="1000" b="0" i="0" u="none" strike="noStrike" cap="none">
                 <a:solidFill>
                   <a:schemeClr val="dk2"/>
                 </a:solidFill>
@@ -4076,7 +4254,7 @@
                 <a:sym typeface="Arial"/>
               </a:defRPr>
             </a:lvl3pPr>
-            <a:lvl4pPr indent="0" lvl="3" marL="0" marR="0" algn="r">
+            <a:lvl4pPr marL="0" marR="0" lvl="3" indent="0" algn="r">
               <a:lnSpc>
                 <a:spcPct val="100000"/>
               </a:lnSpc>
@@ -4092,7 +4270,7 @@
               <a:buSzPts val="1000"/>
               <a:buFont typeface="Arial"/>
               <a:buNone/>
-              <a:defRPr b="0" i="0" sz="1000" u="none" cap="none" strike="noStrike">
+              <a:defRPr sz="1000" b="0" i="0" u="none" strike="noStrike" cap="none">
                 <a:solidFill>
                   <a:schemeClr val="dk2"/>
                 </a:solidFill>
@@ -4102,7 +4280,7 @@
                 <a:sym typeface="Arial"/>
               </a:defRPr>
             </a:lvl4pPr>
-            <a:lvl5pPr indent="0" lvl="4" marL="0" marR="0" algn="r">
+            <a:lvl5pPr marL="0" marR="0" lvl="4" indent="0" algn="r">
               <a:lnSpc>
                 <a:spcPct val="100000"/>
               </a:lnSpc>
@@ -4118,7 +4296,7 @@
               <a:buSzPts val="1000"/>
               <a:buFont typeface="Arial"/>
               <a:buNone/>
-              <a:defRPr b="0" i="0" sz="1000" u="none" cap="none" strike="noStrike">
+              <a:defRPr sz="1000" b="0" i="0" u="none" strike="noStrike" cap="none">
                 <a:solidFill>
                   <a:schemeClr val="dk2"/>
                 </a:solidFill>
@@ -4128,7 +4306,7 @@
                 <a:sym typeface="Arial"/>
               </a:defRPr>
             </a:lvl5pPr>
-            <a:lvl6pPr indent="0" lvl="5" marL="0" marR="0" algn="r">
+            <a:lvl6pPr marL="0" marR="0" lvl="5" indent="0" algn="r">
               <a:lnSpc>
                 <a:spcPct val="100000"/>
               </a:lnSpc>
@@ -4144,7 +4322,7 @@
               <a:buSzPts val="1000"/>
               <a:buFont typeface="Arial"/>
               <a:buNone/>
-              <a:defRPr b="0" i="0" sz="1000" u="none" cap="none" strike="noStrike">
+              <a:defRPr sz="1000" b="0" i="0" u="none" strike="noStrike" cap="none">
                 <a:solidFill>
                   <a:schemeClr val="dk2"/>
                 </a:solidFill>
@@ -4154,7 +4332,7 @@
                 <a:sym typeface="Arial"/>
               </a:defRPr>
             </a:lvl6pPr>
-            <a:lvl7pPr indent="0" lvl="6" marL="0" marR="0" algn="r">
+            <a:lvl7pPr marL="0" marR="0" lvl="6" indent="0" algn="r">
               <a:lnSpc>
                 <a:spcPct val="100000"/>
               </a:lnSpc>
@@ -4170,7 +4348,7 @@
               <a:buSzPts val="1000"/>
               <a:buFont typeface="Arial"/>
               <a:buNone/>
-              <a:defRPr b="0" i="0" sz="1000" u="none" cap="none" strike="noStrike">
+              <a:defRPr sz="1000" b="0" i="0" u="none" strike="noStrike" cap="none">
                 <a:solidFill>
                   <a:schemeClr val="dk2"/>
                 </a:solidFill>
@@ -4180,7 +4358,7 @@
                 <a:sym typeface="Arial"/>
               </a:defRPr>
             </a:lvl7pPr>
-            <a:lvl8pPr indent="0" lvl="7" marL="0" marR="0" algn="r">
+            <a:lvl8pPr marL="0" marR="0" lvl="7" indent="0" algn="r">
               <a:lnSpc>
                 <a:spcPct val="100000"/>
               </a:lnSpc>
@@ -4196,7 +4374,7 @@
               <a:buSzPts val="1000"/>
               <a:buFont typeface="Arial"/>
               <a:buNone/>
-              <a:defRPr b="0" i="0" sz="1000" u="none" cap="none" strike="noStrike">
+              <a:defRPr sz="1000" b="0" i="0" u="none" strike="noStrike" cap="none">
                 <a:solidFill>
                   <a:schemeClr val="dk2"/>
                 </a:solidFill>
@@ -4206,7 +4384,7 @@
                 <a:sym typeface="Arial"/>
               </a:defRPr>
             </a:lvl8pPr>
-            <a:lvl9pPr indent="0" lvl="8" marL="0" marR="0" algn="r">
+            <a:lvl9pPr marL="0" marR="0" lvl="8" indent="0" algn="r">
               <a:lnSpc>
                 <a:spcPct val="100000"/>
               </a:lnSpc>
@@ -4222,7 +4400,7 @@
               <a:buSzPts val="1000"/>
               <a:buFont typeface="Arial"/>
               <a:buNone/>
-              <a:defRPr b="0" i="0" sz="1000" u="none" cap="none" strike="noStrike">
+              <a:defRPr sz="1000" b="0" i="0" u="none" strike="noStrike" cap="none">
                 <a:solidFill>
                   <a:schemeClr val="dk2"/>
                 </a:solidFill>
@@ -4234,7 +4412,7 @@
             </a:lvl9pPr>
           </a:lstStyle>
           <a:p>
-            <a:pPr indent="0" lvl="0" marL="0" rtl="0" algn="r">
+            <a:pPr marL="0" lvl="0" indent="0" algn="r" rtl="0">
               <a:spcBef>
                 <a:spcPts val="0"/>
               </a:spcBef>
@@ -4245,7 +4423,7 @@
             </a:pPr>
             <a:fld id="{00000000-1234-1234-1234-123412341234}" type="slidenum">
               <a:rPr lang="en"/>
-              <a:t>‹#›</a:t>
+              <a:t>‹Nº›</a:t>
             </a:fld>
             <a:endParaRPr/>
           </a:p>
@@ -4260,11 +4438,11 @@
 </file>
 
 <file path=ppt/slideLayouts/slideLayout7.xml><?xml version="1.0" encoding="utf-8"?>
-<p:sldLayout xmlns:a="http://schemas.openxmlformats.org/drawingml/2006/main" xmlns:r="http://schemas.openxmlformats.org/officeDocument/2006/relationships" xmlns:mc="http://schemas.openxmlformats.org/markup-compatibility/2006" xmlns:mv="urn:schemas-microsoft-com:mac:vml" xmlns:p="http://schemas.openxmlformats.org/presentationml/2006/main" xmlns:c="http://schemas.openxmlformats.org/drawingml/2006/chart" xmlns:dgm="http://schemas.openxmlformats.org/drawingml/2006/diagram" xmlns:o="urn:schemas-microsoft-com:office:office" xmlns:v="urn:schemas-microsoft-com:vml" xmlns:pvml="urn:schemas-microsoft-com:office:powerpoint" xmlns:com="http://schemas.openxmlformats.org/drawingml/2006/compatibility" xmlns:p14="http://schemas.microsoft.com/office/powerpoint/2010/main" xmlns:p15="http://schemas.microsoft.com/office/powerpoint/2012/main" xmlns:ahyp="http://schemas.microsoft.com/office/drawing/2018/hyperlinkcolor" matchingName="One column text">
+<p:sldLayout xmlns:a="http://schemas.openxmlformats.org/drawingml/2006/main" xmlns:r="http://schemas.openxmlformats.org/officeDocument/2006/relationships" xmlns:p="http://schemas.openxmlformats.org/presentationml/2006/main" matchingName="One column text">
   <p:cSld name="ONE_COLUMN_TEXT">
     <p:spTree>
       <p:nvGrpSpPr>
-        <p:cNvPr id="18" name="Shape 18"/>
+        <p:cNvPr id="1" name="Shape 18"/>
         <p:cNvGrpSpPr/>
         <p:nvPr/>
       </p:nvGrpSpPr>
@@ -4279,9 +4457,11 @@
       <p:sp>
         <p:nvSpPr>
           <p:cNvPr id="19" name="Google Shape;19;p18"/>
-          <p:cNvSpPr txBox="1"/>
+          <p:cNvSpPr txBox="1">
+            <a:spLocks noGrp="1"/>
+          </p:cNvSpPr>
           <p:nvPr>
-            <p:ph idx="12" type="sldNum"/>
+            <p:ph type="sldNum" idx="12"/>
           </p:nvPr>
         </p:nvSpPr>
         <p:spPr>
@@ -4298,11 +4478,11 @@
           </a:ln>
         </p:spPr>
         <p:txBody>
-          <a:bodyPr anchorCtr="0" anchor="ctr" bIns="91425" lIns="91425" spcFirstLastPara="1" rIns="91425" wrap="square" tIns="91425">
+          <a:bodyPr spcFirstLastPara="1" wrap="square" lIns="91425" tIns="91425" rIns="91425" bIns="91425" anchor="ctr" anchorCtr="0">
             <a:normAutofit/>
           </a:bodyPr>
           <a:lstStyle>
-            <a:lvl1pPr indent="0" lvl="0" marL="0" marR="0" algn="r">
+            <a:lvl1pPr marL="0" marR="0" lvl="0" indent="0" algn="r">
               <a:lnSpc>
                 <a:spcPct val="100000"/>
               </a:lnSpc>
@@ -4318,7 +4498,7 @@
               <a:buSzPts val="1000"/>
               <a:buFont typeface="Arial"/>
               <a:buNone/>
-              <a:defRPr b="0" i="0" sz="1000" u="none" cap="none" strike="noStrike">
+              <a:defRPr sz="1000" b="0" i="0" u="none" strike="noStrike" cap="none">
                 <a:solidFill>
                   <a:schemeClr val="dk2"/>
                 </a:solidFill>
@@ -4328,7 +4508,7 @@
                 <a:sym typeface="Arial"/>
               </a:defRPr>
             </a:lvl1pPr>
-            <a:lvl2pPr indent="0" lvl="1" marL="0" marR="0" algn="r">
+            <a:lvl2pPr marL="0" marR="0" lvl="1" indent="0" algn="r">
               <a:lnSpc>
                 <a:spcPct val="100000"/>
               </a:lnSpc>
@@ -4344,7 +4524,7 @@
               <a:buSzPts val="1000"/>
               <a:buFont typeface="Arial"/>
               <a:buNone/>
-              <a:defRPr b="0" i="0" sz="1000" u="none" cap="none" strike="noStrike">
+              <a:defRPr sz="1000" b="0" i="0" u="none" strike="noStrike" cap="none">
                 <a:solidFill>
                   <a:schemeClr val="dk2"/>
                 </a:solidFill>
@@ -4354,7 +4534,7 @@
                 <a:sym typeface="Arial"/>
               </a:defRPr>
             </a:lvl2pPr>
-            <a:lvl3pPr indent="0" lvl="2" marL="0" marR="0" algn="r">
+            <a:lvl3pPr marL="0" marR="0" lvl="2" indent="0" algn="r">
               <a:lnSpc>
                 <a:spcPct val="100000"/>
               </a:lnSpc>
@@ -4370,7 +4550,7 @@
               <a:buSzPts val="1000"/>
               <a:buFont typeface="Arial"/>
               <a:buNone/>
-              <a:defRPr b="0" i="0" sz="1000" u="none" cap="none" strike="noStrike">
+              <a:defRPr sz="1000" b="0" i="0" u="none" strike="noStrike" cap="none">
                 <a:solidFill>
                   <a:schemeClr val="dk2"/>
                 </a:solidFill>
@@ -4380,7 +4560,7 @@
                 <a:sym typeface="Arial"/>
               </a:defRPr>
             </a:lvl3pPr>
-            <a:lvl4pPr indent="0" lvl="3" marL="0" marR="0" algn="r">
+            <a:lvl4pPr marL="0" marR="0" lvl="3" indent="0" algn="r">
               <a:lnSpc>
                 <a:spcPct val="100000"/>
               </a:lnSpc>
@@ -4396,7 +4576,7 @@
               <a:buSzPts val="1000"/>
               <a:buFont typeface="Arial"/>
               <a:buNone/>
-              <a:defRPr b="0" i="0" sz="1000" u="none" cap="none" strike="noStrike">
+              <a:defRPr sz="1000" b="0" i="0" u="none" strike="noStrike" cap="none">
                 <a:solidFill>
                   <a:schemeClr val="dk2"/>
                 </a:solidFill>
@@ -4406,7 +4586,7 @@
                 <a:sym typeface="Arial"/>
               </a:defRPr>
             </a:lvl4pPr>
-            <a:lvl5pPr indent="0" lvl="4" marL="0" marR="0" algn="r">
+            <a:lvl5pPr marL="0" marR="0" lvl="4" indent="0" algn="r">
               <a:lnSpc>
                 <a:spcPct val="100000"/>
               </a:lnSpc>
@@ -4422,7 +4602,7 @@
               <a:buSzPts val="1000"/>
               <a:buFont typeface="Arial"/>
               <a:buNone/>
-              <a:defRPr b="0" i="0" sz="1000" u="none" cap="none" strike="noStrike">
+              <a:defRPr sz="1000" b="0" i="0" u="none" strike="noStrike" cap="none">
                 <a:solidFill>
                   <a:schemeClr val="dk2"/>
                 </a:solidFill>
@@ -4432,7 +4612,7 @@
                 <a:sym typeface="Arial"/>
               </a:defRPr>
             </a:lvl5pPr>
-            <a:lvl6pPr indent="0" lvl="5" marL="0" marR="0" algn="r">
+            <a:lvl6pPr marL="0" marR="0" lvl="5" indent="0" algn="r">
               <a:lnSpc>
                 <a:spcPct val="100000"/>
               </a:lnSpc>
@@ -4448,7 +4628,7 @@
               <a:buSzPts val="1000"/>
               <a:buFont typeface="Arial"/>
               <a:buNone/>
-              <a:defRPr b="0" i="0" sz="1000" u="none" cap="none" strike="noStrike">
+              <a:defRPr sz="1000" b="0" i="0" u="none" strike="noStrike" cap="none">
                 <a:solidFill>
                   <a:schemeClr val="dk2"/>
                 </a:solidFill>
@@ -4458,7 +4638,7 @@
                 <a:sym typeface="Arial"/>
               </a:defRPr>
             </a:lvl6pPr>
-            <a:lvl7pPr indent="0" lvl="6" marL="0" marR="0" algn="r">
+            <a:lvl7pPr marL="0" marR="0" lvl="6" indent="0" algn="r">
               <a:lnSpc>
                 <a:spcPct val="100000"/>
               </a:lnSpc>
@@ -4474,7 +4654,7 @@
               <a:buSzPts val="1000"/>
               <a:buFont typeface="Arial"/>
               <a:buNone/>
-              <a:defRPr b="0" i="0" sz="1000" u="none" cap="none" strike="noStrike">
+              <a:defRPr sz="1000" b="0" i="0" u="none" strike="noStrike" cap="none">
                 <a:solidFill>
                   <a:schemeClr val="dk2"/>
                 </a:solidFill>
@@ -4484,7 +4664,7 @@
                 <a:sym typeface="Arial"/>
               </a:defRPr>
             </a:lvl7pPr>
-            <a:lvl8pPr indent="0" lvl="7" marL="0" marR="0" algn="r">
+            <a:lvl8pPr marL="0" marR="0" lvl="7" indent="0" algn="r">
               <a:lnSpc>
                 <a:spcPct val="100000"/>
               </a:lnSpc>
@@ -4500,7 +4680,7 @@
               <a:buSzPts val="1000"/>
               <a:buFont typeface="Arial"/>
               <a:buNone/>
-              <a:defRPr b="0" i="0" sz="1000" u="none" cap="none" strike="noStrike">
+              <a:defRPr sz="1000" b="0" i="0" u="none" strike="noStrike" cap="none">
                 <a:solidFill>
                   <a:schemeClr val="dk2"/>
                 </a:solidFill>
@@ -4510,7 +4690,7 @@
                 <a:sym typeface="Arial"/>
               </a:defRPr>
             </a:lvl8pPr>
-            <a:lvl9pPr indent="0" lvl="8" marL="0" marR="0" algn="r">
+            <a:lvl9pPr marL="0" marR="0" lvl="8" indent="0" algn="r">
               <a:lnSpc>
                 <a:spcPct val="100000"/>
               </a:lnSpc>
@@ -4526,7 +4706,7 @@
               <a:buSzPts val="1000"/>
               <a:buFont typeface="Arial"/>
               <a:buNone/>
-              <a:defRPr b="0" i="0" sz="1000" u="none" cap="none" strike="noStrike">
+              <a:defRPr sz="1000" b="0" i="0" u="none" strike="noStrike" cap="none">
                 <a:solidFill>
                   <a:schemeClr val="dk2"/>
                 </a:solidFill>
@@ -4538,7 +4718,7 @@
             </a:lvl9pPr>
           </a:lstStyle>
           <a:p>
-            <a:pPr indent="0" lvl="0" marL="0" rtl="0" algn="r">
+            <a:pPr marL="0" lvl="0" indent="0" algn="r" rtl="0">
               <a:spcBef>
                 <a:spcPts val="0"/>
               </a:spcBef>
@@ -4549,7 +4729,7 @@
             </a:pPr>
             <a:fld id="{00000000-1234-1234-1234-123412341234}" type="slidenum">
               <a:rPr lang="en"/>
-              <a:t>‹#›</a:t>
+              <a:t>‹Nº›</a:t>
             </a:fld>
             <a:endParaRPr/>
           </a:p>
@@ -4564,11 +4744,11 @@
 </file>
 
 <file path=ppt/slideLayouts/slideLayout8.xml><?xml version="1.0" encoding="utf-8"?>
-<p:sldLayout xmlns:a="http://schemas.openxmlformats.org/drawingml/2006/main" xmlns:r="http://schemas.openxmlformats.org/officeDocument/2006/relationships" xmlns:mc="http://schemas.openxmlformats.org/markup-compatibility/2006" xmlns:mv="urn:schemas-microsoft-com:mac:vml" xmlns:p="http://schemas.openxmlformats.org/presentationml/2006/main" xmlns:c="http://schemas.openxmlformats.org/drawingml/2006/chart" xmlns:dgm="http://schemas.openxmlformats.org/drawingml/2006/diagram" xmlns:o="urn:schemas-microsoft-com:office:office" xmlns:v="urn:schemas-microsoft-com:vml" xmlns:pvml="urn:schemas-microsoft-com:office:powerpoint" xmlns:com="http://schemas.openxmlformats.org/drawingml/2006/compatibility" xmlns:p14="http://schemas.microsoft.com/office/powerpoint/2010/main" xmlns:p15="http://schemas.microsoft.com/office/powerpoint/2012/main" xmlns:ahyp="http://schemas.microsoft.com/office/drawing/2018/hyperlinkcolor" matchingName="Main point">
+<p:sldLayout xmlns:a="http://schemas.openxmlformats.org/drawingml/2006/main" xmlns:r="http://schemas.openxmlformats.org/officeDocument/2006/relationships" xmlns:p="http://schemas.openxmlformats.org/presentationml/2006/main" matchingName="Main point">
   <p:cSld name="MAIN_POINT">
     <p:spTree>
       <p:nvGrpSpPr>
-        <p:cNvPr id="20" name="Shape 20"/>
+        <p:cNvPr id="1" name="Shape 20"/>
         <p:cNvGrpSpPr/>
         <p:nvPr/>
       </p:nvGrpSpPr>
@@ -4583,9 +4763,11 @@
       <p:sp>
         <p:nvSpPr>
           <p:cNvPr id="21" name="Google Shape;21;p19"/>
-          <p:cNvSpPr txBox="1"/>
+          <p:cNvSpPr txBox="1">
+            <a:spLocks noGrp="1"/>
+          </p:cNvSpPr>
           <p:nvPr>
-            <p:ph idx="12" type="sldNum"/>
+            <p:ph type="sldNum" idx="12"/>
           </p:nvPr>
         </p:nvSpPr>
         <p:spPr>
@@ -4602,11 +4784,11 @@
           </a:ln>
         </p:spPr>
         <p:txBody>
-          <a:bodyPr anchorCtr="0" anchor="ctr" bIns="91425" lIns="91425" spcFirstLastPara="1" rIns="91425" wrap="square" tIns="91425">
+          <a:bodyPr spcFirstLastPara="1" wrap="square" lIns="91425" tIns="91425" rIns="91425" bIns="91425" anchor="ctr" anchorCtr="0">
             <a:normAutofit/>
           </a:bodyPr>
           <a:lstStyle>
-            <a:lvl1pPr indent="0" lvl="0" marL="0" marR="0" algn="r">
+            <a:lvl1pPr marL="0" marR="0" lvl="0" indent="0" algn="r">
               <a:lnSpc>
                 <a:spcPct val="100000"/>
               </a:lnSpc>
@@ -4622,7 +4804,7 @@
               <a:buSzPts val="1000"/>
               <a:buFont typeface="Arial"/>
               <a:buNone/>
-              <a:defRPr b="0" i="0" sz="1000" u="none" cap="none" strike="noStrike">
+              <a:defRPr sz="1000" b="0" i="0" u="none" strike="noStrike" cap="none">
                 <a:solidFill>
                   <a:schemeClr val="dk2"/>
                 </a:solidFill>
@@ -4632,7 +4814,7 @@
                 <a:sym typeface="Arial"/>
               </a:defRPr>
             </a:lvl1pPr>
-            <a:lvl2pPr indent="0" lvl="1" marL="0" marR="0" algn="r">
+            <a:lvl2pPr marL="0" marR="0" lvl="1" indent="0" algn="r">
               <a:lnSpc>
                 <a:spcPct val="100000"/>
               </a:lnSpc>
@@ -4648,7 +4830,7 @@
               <a:buSzPts val="1000"/>
               <a:buFont typeface="Arial"/>
               <a:buNone/>
-              <a:defRPr b="0" i="0" sz="1000" u="none" cap="none" strike="noStrike">
+              <a:defRPr sz="1000" b="0" i="0" u="none" strike="noStrike" cap="none">
                 <a:solidFill>
                   <a:schemeClr val="dk2"/>
                 </a:solidFill>
@@ -4658,7 +4840,7 @@
                 <a:sym typeface="Arial"/>
               </a:defRPr>
             </a:lvl2pPr>
-            <a:lvl3pPr indent="0" lvl="2" marL="0" marR="0" algn="r">
+            <a:lvl3pPr marL="0" marR="0" lvl="2" indent="0" algn="r">
               <a:lnSpc>
                 <a:spcPct val="100000"/>
               </a:lnSpc>
@@ -4674,7 +4856,7 @@
               <a:buSzPts val="1000"/>
               <a:buFont typeface="Arial"/>
               <a:buNone/>
-              <a:defRPr b="0" i="0" sz="1000" u="none" cap="none" strike="noStrike">
+              <a:defRPr sz="1000" b="0" i="0" u="none" strike="noStrike" cap="none">
                 <a:solidFill>
                   <a:schemeClr val="dk2"/>
                 </a:solidFill>
@@ -4684,7 +4866,7 @@
                 <a:sym typeface="Arial"/>
               </a:defRPr>
             </a:lvl3pPr>
-            <a:lvl4pPr indent="0" lvl="3" marL="0" marR="0" algn="r">
+            <a:lvl4pPr marL="0" marR="0" lvl="3" indent="0" algn="r">
               <a:lnSpc>
                 <a:spcPct val="100000"/>
               </a:lnSpc>
@@ -4700,7 +4882,7 @@
               <a:buSzPts val="1000"/>
               <a:buFont typeface="Arial"/>
               <a:buNone/>
-              <a:defRPr b="0" i="0" sz="1000" u="none" cap="none" strike="noStrike">
+              <a:defRPr sz="1000" b="0" i="0" u="none" strike="noStrike" cap="none">
                 <a:solidFill>
                   <a:schemeClr val="dk2"/>
                 </a:solidFill>
@@ -4710,7 +4892,7 @@
                 <a:sym typeface="Arial"/>
               </a:defRPr>
             </a:lvl4pPr>
-            <a:lvl5pPr indent="0" lvl="4" marL="0" marR="0" algn="r">
+            <a:lvl5pPr marL="0" marR="0" lvl="4" indent="0" algn="r">
               <a:lnSpc>
                 <a:spcPct val="100000"/>
               </a:lnSpc>
@@ -4726,7 +4908,7 @@
               <a:buSzPts val="1000"/>
               <a:buFont typeface="Arial"/>
               <a:buNone/>
-              <a:defRPr b="0" i="0" sz="1000" u="none" cap="none" strike="noStrike">
+              <a:defRPr sz="1000" b="0" i="0" u="none" strike="noStrike" cap="none">
                 <a:solidFill>
                   <a:schemeClr val="dk2"/>
                 </a:solidFill>
@@ -4736,7 +4918,7 @@
                 <a:sym typeface="Arial"/>
               </a:defRPr>
             </a:lvl5pPr>
-            <a:lvl6pPr indent="0" lvl="5" marL="0" marR="0" algn="r">
+            <a:lvl6pPr marL="0" marR="0" lvl="5" indent="0" algn="r">
               <a:lnSpc>
                 <a:spcPct val="100000"/>
               </a:lnSpc>
@@ -4752,7 +4934,7 @@
               <a:buSzPts val="1000"/>
               <a:buFont typeface="Arial"/>
               <a:buNone/>
-              <a:defRPr b="0" i="0" sz="1000" u="none" cap="none" strike="noStrike">
+              <a:defRPr sz="1000" b="0" i="0" u="none" strike="noStrike" cap="none">
                 <a:solidFill>
                   <a:schemeClr val="dk2"/>
                 </a:solidFill>
@@ -4762,7 +4944,7 @@
                 <a:sym typeface="Arial"/>
               </a:defRPr>
             </a:lvl6pPr>
-            <a:lvl7pPr indent="0" lvl="6" marL="0" marR="0" algn="r">
+            <a:lvl7pPr marL="0" marR="0" lvl="6" indent="0" algn="r">
               <a:lnSpc>
                 <a:spcPct val="100000"/>
               </a:lnSpc>
@@ -4778,7 +4960,7 @@
               <a:buSzPts val="1000"/>
               <a:buFont typeface="Arial"/>
               <a:buNone/>
-              <a:defRPr b="0" i="0" sz="1000" u="none" cap="none" strike="noStrike">
+              <a:defRPr sz="1000" b="0" i="0" u="none" strike="noStrike" cap="none">
                 <a:solidFill>
                   <a:schemeClr val="dk2"/>
                 </a:solidFill>
@@ -4788,7 +4970,7 @@
                 <a:sym typeface="Arial"/>
               </a:defRPr>
             </a:lvl7pPr>
-            <a:lvl8pPr indent="0" lvl="7" marL="0" marR="0" algn="r">
+            <a:lvl8pPr marL="0" marR="0" lvl="7" indent="0" algn="r">
               <a:lnSpc>
                 <a:spcPct val="100000"/>
               </a:lnSpc>
@@ -4804,7 +4986,7 @@
               <a:buSzPts val="1000"/>
               <a:buFont typeface="Arial"/>
               <a:buNone/>
-              <a:defRPr b="0" i="0" sz="1000" u="none" cap="none" strike="noStrike">
+              <a:defRPr sz="1000" b="0" i="0" u="none" strike="noStrike" cap="none">
                 <a:solidFill>
                   <a:schemeClr val="dk2"/>
                 </a:solidFill>
@@ -4814,7 +4996,7 @@
                 <a:sym typeface="Arial"/>
               </a:defRPr>
             </a:lvl8pPr>
-            <a:lvl9pPr indent="0" lvl="8" marL="0" marR="0" algn="r">
+            <a:lvl9pPr marL="0" marR="0" lvl="8" indent="0" algn="r">
               <a:lnSpc>
                 <a:spcPct val="100000"/>
               </a:lnSpc>
@@ -4830,7 +5012,7 @@
               <a:buSzPts val="1000"/>
               <a:buFont typeface="Arial"/>
               <a:buNone/>
-              <a:defRPr b="0" i="0" sz="1000" u="none" cap="none" strike="noStrike">
+              <a:defRPr sz="1000" b="0" i="0" u="none" strike="noStrike" cap="none">
                 <a:solidFill>
                   <a:schemeClr val="dk2"/>
                 </a:solidFill>
@@ -4842,7 +5024,7 @@
             </a:lvl9pPr>
           </a:lstStyle>
           <a:p>
-            <a:pPr indent="0" lvl="0" marL="0" rtl="0" algn="r">
+            <a:pPr marL="0" lvl="0" indent="0" algn="r" rtl="0">
               <a:spcBef>
                 <a:spcPts val="0"/>
               </a:spcBef>
@@ -4853,7 +5035,7 @@
             </a:pPr>
             <a:fld id="{00000000-1234-1234-1234-123412341234}" type="slidenum">
               <a:rPr lang="en"/>
-              <a:t>‹#›</a:t>
+              <a:t>‹Nº›</a:t>
             </a:fld>
             <a:endParaRPr/>
           </a:p>
@@ -4868,11 +5050,11 @@
 </file>
 
 <file path=ppt/slideLayouts/slideLayout9.xml><?xml version="1.0" encoding="utf-8"?>
-<p:sldLayout xmlns:a="http://schemas.openxmlformats.org/drawingml/2006/main" xmlns:r="http://schemas.openxmlformats.org/officeDocument/2006/relationships" xmlns:mc="http://schemas.openxmlformats.org/markup-compatibility/2006" xmlns:mv="urn:schemas-microsoft-com:mac:vml" xmlns:p="http://schemas.openxmlformats.org/presentationml/2006/main" xmlns:c="http://schemas.openxmlformats.org/drawingml/2006/chart" xmlns:dgm="http://schemas.openxmlformats.org/drawingml/2006/diagram" xmlns:o="urn:schemas-microsoft-com:office:office" xmlns:v="urn:schemas-microsoft-com:vml" xmlns:pvml="urn:schemas-microsoft-com:office:powerpoint" xmlns:com="http://schemas.openxmlformats.org/drawingml/2006/compatibility" xmlns:p14="http://schemas.microsoft.com/office/powerpoint/2010/main" xmlns:p15="http://schemas.microsoft.com/office/powerpoint/2012/main" xmlns:ahyp="http://schemas.microsoft.com/office/drawing/2018/hyperlinkcolor" matchingName="Section title and description">
+<p:sldLayout xmlns:a="http://schemas.openxmlformats.org/drawingml/2006/main" xmlns:r="http://schemas.openxmlformats.org/officeDocument/2006/relationships" xmlns:p="http://schemas.openxmlformats.org/presentationml/2006/main" matchingName="Section title and description">
   <p:cSld name="SECTION_TITLE_AND_DESCRIPTION">
     <p:spTree>
       <p:nvGrpSpPr>
-        <p:cNvPr id="22" name="Shape 22"/>
+        <p:cNvPr id="1" name="Shape 22"/>
         <p:cNvGrpSpPr/>
         <p:nvPr/>
       </p:nvGrpSpPr>
@@ -4887,9 +5069,11 @@
       <p:sp>
         <p:nvSpPr>
           <p:cNvPr id="23" name="Google Shape;23;p20"/>
-          <p:cNvSpPr txBox="1"/>
+          <p:cNvSpPr txBox="1">
+            <a:spLocks noGrp="1"/>
+          </p:cNvSpPr>
           <p:nvPr>
-            <p:ph idx="12" type="sldNum"/>
+            <p:ph type="sldNum" idx="12"/>
           </p:nvPr>
         </p:nvSpPr>
         <p:spPr>
@@ -4906,11 +5090,11 @@
           </a:ln>
         </p:spPr>
         <p:txBody>
-          <a:bodyPr anchorCtr="0" anchor="ctr" bIns="91425" lIns="91425" spcFirstLastPara="1" rIns="91425" wrap="square" tIns="91425">
+          <a:bodyPr spcFirstLastPara="1" wrap="square" lIns="91425" tIns="91425" rIns="91425" bIns="91425" anchor="ctr" anchorCtr="0">
             <a:normAutofit/>
           </a:bodyPr>
           <a:lstStyle>
-            <a:lvl1pPr indent="0" lvl="0" marL="0" marR="0" algn="r">
+            <a:lvl1pPr marL="0" marR="0" lvl="0" indent="0" algn="r">
               <a:lnSpc>
                 <a:spcPct val="100000"/>
               </a:lnSpc>
@@ -4926,7 +5110,7 @@
               <a:buSzPts val="1000"/>
               <a:buFont typeface="Arial"/>
               <a:buNone/>
-              <a:defRPr b="0" i="0" sz="1000" u="none" cap="none" strike="noStrike">
+              <a:defRPr sz="1000" b="0" i="0" u="none" strike="noStrike" cap="none">
                 <a:solidFill>
                   <a:schemeClr val="dk2"/>
                 </a:solidFill>
@@ -4936,7 +5120,7 @@
                 <a:sym typeface="Arial"/>
               </a:defRPr>
             </a:lvl1pPr>
-            <a:lvl2pPr indent="0" lvl="1" marL="0" marR="0" algn="r">
+            <a:lvl2pPr marL="0" marR="0" lvl="1" indent="0" algn="r">
               <a:lnSpc>
                 <a:spcPct val="100000"/>
               </a:lnSpc>
@@ -4952,7 +5136,7 @@
               <a:buSzPts val="1000"/>
               <a:buFont typeface="Arial"/>
               <a:buNone/>
-              <a:defRPr b="0" i="0" sz="1000" u="none" cap="none" strike="noStrike">
+              <a:defRPr sz="1000" b="0" i="0" u="none" strike="noStrike" cap="none">
                 <a:solidFill>
                   <a:schemeClr val="dk2"/>
                 </a:solidFill>
@@ -4962,7 +5146,7 @@
                 <a:sym typeface="Arial"/>
               </a:defRPr>
             </a:lvl2pPr>
-            <a:lvl3pPr indent="0" lvl="2" marL="0" marR="0" algn="r">
+            <a:lvl3pPr marL="0" marR="0" lvl="2" indent="0" algn="r">
               <a:lnSpc>
                 <a:spcPct val="100000"/>
               </a:lnSpc>
@@ -4978,7 +5162,7 @@
               <a:buSzPts val="1000"/>
               <a:buFont typeface="Arial"/>
               <a:buNone/>
-              <a:defRPr b="0" i="0" sz="1000" u="none" cap="none" strike="noStrike">
+              <a:defRPr sz="1000" b="0" i="0" u="none" strike="noStrike" cap="none">
                 <a:solidFill>
                   <a:schemeClr val="dk2"/>
                 </a:solidFill>
@@ -4988,7 +5172,7 @@
                 <a:sym typeface="Arial"/>
               </a:defRPr>
             </a:lvl3pPr>
-            <a:lvl4pPr indent="0" lvl="3" marL="0" marR="0" algn="r">
+            <a:lvl4pPr marL="0" marR="0" lvl="3" indent="0" algn="r">
               <a:lnSpc>
                 <a:spcPct val="100000"/>
               </a:lnSpc>
@@ -5004,7 +5188,7 @@
               <a:buSzPts val="1000"/>
               <a:buFont typeface="Arial"/>
               <a:buNone/>
-              <a:defRPr b="0" i="0" sz="1000" u="none" cap="none" strike="noStrike">
+              <a:defRPr sz="1000" b="0" i="0" u="none" strike="noStrike" cap="none">
                 <a:solidFill>
                   <a:schemeClr val="dk2"/>
                 </a:solidFill>
@@ -5014,7 +5198,7 @@
                 <a:sym typeface="Arial"/>
               </a:defRPr>
             </a:lvl4pPr>
-            <a:lvl5pPr indent="0" lvl="4" marL="0" marR="0" algn="r">
+            <a:lvl5pPr marL="0" marR="0" lvl="4" indent="0" algn="r">
               <a:lnSpc>
                 <a:spcPct val="100000"/>
               </a:lnSpc>
@@ -5030,7 +5214,7 @@
               <a:buSzPts val="1000"/>
               <a:buFont typeface="Arial"/>
               <a:buNone/>
-              <a:defRPr b="0" i="0" sz="1000" u="none" cap="none" strike="noStrike">
+              <a:defRPr sz="1000" b="0" i="0" u="none" strike="noStrike" cap="none">
                 <a:solidFill>
                   <a:schemeClr val="dk2"/>
                 </a:solidFill>
@@ -5040,7 +5224,7 @@
                 <a:sym typeface="Arial"/>
               </a:defRPr>
             </a:lvl5pPr>
-            <a:lvl6pPr indent="0" lvl="5" marL="0" marR="0" algn="r">
+            <a:lvl6pPr marL="0" marR="0" lvl="5" indent="0" algn="r">
               <a:lnSpc>
                 <a:spcPct val="100000"/>
               </a:lnSpc>
@@ -5056,7 +5240,7 @@
               <a:buSzPts val="1000"/>
               <a:buFont typeface="Arial"/>
               <a:buNone/>
-              <a:defRPr b="0" i="0" sz="1000" u="none" cap="none" strike="noStrike">
+              <a:defRPr sz="1000" b="0" i="0" u="none" strike="noStrike" cap="none">
                 <a:solidFill>
                   <a:schemeClr val="dk2"/>
                 </a:solidFill>
@@ -5066,7 +5250,7 @@
                 <a:sym typeface="Arial"/>
               </a:defRPr>
             </a:lvl6pPr>
-            <a:lvl7pPr indent="0" lvl="6" marL="0" marR="0" algn="r">
+            <a:lvl7pPr marL="0" marR="0" lvl="6" indent="0" algn="r">
               <a:lnSpc>
                 <a:spcPct val="100000"/>
               </a:lnSpc>
@@ -5082,7 +5266,7 @@
               <a:buSzPts val="1000"/>
               <a:buFont typeface="Arial"/>
               <a:buNone/>
-              <a:defRPr b="0" i="0" sz="1000" u="none" cap="none" strike="noStrike">
+              <a:defRPr sz="1000" b="0" i="0" u="none" strike="noStrike" cap="none">
                 <a:solidFill>
                   <a:schemeClr val="dk2"/>
                 </a:solidFill>
@@ -5092,7 +5276,7 @@
                 <a:sym typeface="Arial"/>
               </a:defRPr>
             </a:lvl7pPr>
-            <a:lvl8pPr indent="0" lvl="7" marL="0" marR="0" algn="r">
+            <a:lvl8pPr marL="0" marR="0" lvl="7" indent="0" algn="r">
               <a:lnSpc>
                 <a:spcPct val="100000"/>
               </a:lnSpc>
@@ -5108,7 +5292,7 @@
               <a:buSzPts val="1000"/>
               <a:buFont typeface="Arial"/>
               <a:buNone/>
-              <a:defRPr b="0" i="0" sz="1000" u="none" cap="none" strike="noStrike">
+              <a:defRPr sz="1000" b="0" i="0" u="none" strike="noStrike" cap="none">
                 <a:solidFill>
                   <a:schemeClr val="dk2"/>
                 </a:solidFill>
@@ -5118,7 +5302,7 @@
                 <a:sym typeface="Arial"/>
               </a:defRPr>
             </a:lvl8pPr>
-            <a:lvl9pPr indent="0" lvl="8" marL="0" marR="0" algn="r">
+            <a:lvl9pPr marL="0" marR="0" lvl="8" indent="0" algn="r">
               <a:lnSpc>
                 <a:spcPct val="100000"/>
               </a:lnSpc>
@@ -5134,7 +5318,7 @@
               <a:buSzPts val="1000"/>
               <a:buFont typeface="Arial"/>
               <a:buNone/>
-              <a:defRPr b="0" i="0" sz="1000" u="none" cap="none" strike="noStrike">
+              <a:defRPr sz="1000" b="0" i="0" u="none" strike="noStrike" cap="none">
                 <a:solidFill>
                   <a:schemeClr val="dk2"/>
                 </a:solidFill>
@@ -5146,7 +5330,7 @@
             </a:lvl9pPr>
           </a:lstStyle>
           <a:p>
-            <a:pPr indent="0" lvl="0" marL="0" rtl="0" algn="r">
+            <a:pPr marL="0" lvl="0" indent="0" algn="r" rtl="0">
               <a:spcBef>
                 <a:spcPts val="0"/>
               </a:spcBef>
@@ -5157,7 +5341,7 @@
             </a:pPr>
             <a:fld id="{00000000-1234-1234-1234-123412341234}" type="slidenum">
               <a:rPr lang="en"/>
-              <a:t>‹#›</a:t>
+              <a:t>‹Nº›</a:t>
             </a:fld>
             <a:endParaRPr/>
           </a:p>
@@ -5172,18 +5356,19 @@
 </file>
 
 <file path=ppt/slideMasters/slideMaster1.xml><?xml version="1.0" encoding="utf-8"?>
-<p:sldMaster xmlns:a="http://schemas.openxmlformats.org/drawingml/2006/main" xmlns:r="http://schemas.openxmlformats.org/officeDocument/2006/relationships" xmlns:mc="http://schemas.openxmlformats.org/markup-compatibility/2006" xmlns:mv="urn:schemas-microsoft-com:mac:vml" xmlns:p="http://schemas.openxmlformats.org/presentationml/2006/main" xmlns:c="http://schemas.openxmlformats.org/drawingml/2006/chart" xmlns:dgm="http://schemas.openxmlformats.org/drawingml/2006/diagram" xmlns:o="urn:schemas-microsoft-com:office:office" xmlns:v="urn:schemas-microsoft-com:vml" xmlns:pvml="urn:schemas-microsoft-com:office:powerpoint" xmlns:com="http://schemas.openxmlformats.org/drawingml/2006/compatibility" xmlns:p14="http://schemas.microsoft.com/office/powerpoint/2010/main" xmlns:p15="http://schemas.microsoft.com/office/powerpoint/2012/main" xmlns:ahyp="http://schemas.microsoft.com/office/drawing/2018/hyperlinkcolor">
+<p:sldMaster xmlns:a="http://schemas.openxmlformats.org/drawingml/2006/main" xmlns:r="http://schemas.openxmlformats.org/officeDocument/2006/relationships" xmlns:p="http://schemas.openxmlformats.org/presentationml/2006/main">
   <p:cSld name="simple-light-2">
     <p:bg>
       <p:bgPr>
         <a:solidFill>
           <a:schemeClr val="lt1"/>
         </a:solidFill>
+        <a:effectLst/>
       </p:bgPr>
     </p:bg>
     <p:spTree>
       <p:nvGrpSpPr>
-        <p:cNvPr id="5" name="Shape 5"/>
+        <p:cNvPr id="1" name="Shape 5"/>
         <p:cNvGrpSpPr/>
         <p:nvPr/>
       </p:nvGrpSpPr>
@@ -5198,9 +5383,11 @@
       <p:sp>
         <p:nvSpPr>
           <p:cNvPr id="6" name="Google Shape;6;p11"/>
-          <p:cNvSpPr txBox="1"/>
+          <p:cNvSpPr txBox="1">
+            <a:spLocks noGrp="1"/>
+          </p:cNvSpPr>
           <p:nvPr>
-            <p:ph idx="12" type="sldNum"/>
+            <p:ph type="sldNum" idx="12"/>
           </p:nvPr>
         </p:nvSpPr>
         <p:spPr>
@@ -5217,11 +5404,11 @@
           </a:ln>
         </p:spPr>
         <p:txBody>
-          <a:bodyPr anchorCtr="0" anchor="ctr" bIns="91425" lIns="91425" spcFirstLastPara="1" rIns="91425" wrap="square" tIns="91425">
+          <a:bodyPr spcFirstLastPara="1" wrap="square" lIns="91425" tIns="91425" rIns="91425" bIns="91425" anchor="ctr" anchorCtr="0">
             <a:normAutofit/>
           </a:bodyPr>
           <a:lstStyle>
-            <a:lvl1pPr indent="0" lvl="0" marL="0" marR="0" rtl="0" algn="r">
+            <a:lvl1pPr marL="0" marR="0" lvl="0" indent="0" algn="r" rtl="0">
               <a:lnSpc>
                 <a:spcPct val="100000"/>
               </a:lnSpc>
@@ -5237,7 +5424,7 @@
               <a:buSzPts val="1000"/>
               <a:buFont typeface="Arial"/>
               <a:buNone/>
-              <a:defRPr b="0" i="0" sz="1000" u="none" cap="none" strike="noStrike">
+              <a:defRPr sz="1000" b="0" i="0" u="none" strike="noStrike" cap="none">
                 <a:solidFill>
                   <a:schemeClr val="dk2"/>
                 </a:solidFill>
@@ -5247,7 +5434,7 @@
                 <a:sym typeface="Arial"/>
               </a:defRPr>
             </a:lvl1pPr>
-            <a:lvl2pPr indent="0" lvl="1" marL="0" marR="0" rtl="0" algn="r">
+            <a:lvl2pPr marL="0" marR="0" lvl="1" indent="0" algn="r" rtl="0">
               <a:lnSpc>
                 <a:spcPct val="100000"/>
               </a:lnSpc>
@@ -5263,7 +5450,7 @@
               <a:buSzPts val="1000"/>
               <a:buFont typeface="Arial"/>
               <a:buNone/>
-              <a:defRPr b="0" i="0" sz="1000" u="none" cap="none" strike="noStrike">
+              <a:defRPr sz="1000" b="0" i="0" u="none" strike="noStrike" cap="none">
                 <a:solidFill>
                   <a:schemeClr val="dk2"/>
                 </a:solidFill>
@@ -5273,7 +5460,7 @@
                 <a:sym typeface="Arial"/>
               </a:defRPr>
             </a:lvl2pPr>
-            <a:lvl3pPr indent="0" lvl="2" marL="0" marR="0" rtl="0" algn="r">
+            <a:lvl3pPr marL="0" marR="0" lvl="2" indent="0" algn="r" rtl="0">
               <a:lnSpc>
                 <a:spcPct val="100000"/>
               </a:lnSpc>
@@ -5289,7 +5476,7 @@
               <a:buSzPts val="1000"/>
               <a:buFont typeface="Arial"/>
               <a:buNone/>
-              <a:defRPr b="0" i="0" sz="1000" u="none" cap="none" strike="noStrike">
+              <a:defRPr sz="1000" b="0" i="0" u="none" strike="noStrike" cap="none">
                 <a:solidFill>
                   <a:schemeClr val="dk2"/>
                 </a:solidFill>
@@ -5299,7 +5486,7 @@
                 <a:sym typeface="Arial"/>
               </a:defRPr>
             </a:lvl3pPr>
-            <a:lvl4pPr indent="0" lvl="3" marL="0" marR="0" rtl="0" algn="r">
+            <a:lvl4pPr marL="0" marR="0" lvl="3" indent="0" algn="r" rtl="0">
               <a:lnSpc>
                 <a:spcPct val="100000"/>
               </a:lnSpc>
@@ -5315,7 +5502,7 @@
               <a:buSzPts val="1000"/>
               <a:buFont typeface="Arial"/>
               <a:buNone/>
-              <a:defRPr b="0" i="0" sz="1000" u="none" cap="none" strike="noStrike">
+              <a:defRPr sz="1000" b="0" i="0" u="none" strike="noStrike" cap="none">
                 <a:solidFill>
                   <a:schemeClr val="dk2"/>
                 </a:solidFill>
@@ -5325,7 +5512,7 @@
                 <a:sym typeface="Arial"/>
               </a:defRPr>
             </a:lvl4pPr>
-            <a:lvl5pPr indent="0" lvl="4" marL="0" marR="0" rtl="0" algn="r">
+            <a:lvl5pPr marL="0" marR="0" lvl="4" indent="0" algn="r" rtl="0">
               <a:lnSpc>
                 <a:spcPct val="100000"/>
               </a:lnSpc>
@@ -5341,7 +5528,7 @@
               <a:buSzPts val="1000"/>
               <a:buFont typeface="Arial"/>
               <a:buNone/>
-              <a:defRPr b="0" i="0" sz="1000" u="none" cap="none" strike="noStrike">
+              <a:defRPr sz="1000" b="0" i="0" u="none" strike="noStrike" cap="none">
                 <a:solidFill>
                   <a:schemeClr val="dk2"/>
                 </a:solidFill>
@@ -5351,7 +5538,7 @@
                 <a:sym typeface="Arial"/>
               </a:defRPr>
             </a:lvl5pPr>
-            <a:lvl6pPr indent="0" lvl="5" marL="0" marR="0" rtl="0" algn="r">
+            <a:lvl6pPr marL="0" marR="0" lvl="5" indent="0" algn="r" rtl="0">
               <a:lnSpc>
                 <a:spcPct val="100000"/>
               </a:lnSpc>
@@ -5367,7 +5554,7 @@
               <a:buSzPts val="1000"/>
               <a:buFont typeface="Arial"/>
               <a:buNone/>
-              <a:defRPr b="0" i="0" sz="1000" u="none" cap="none" strike="noStrike">
+              <a:defRPr sz="1000" b="0" i="0" u="none" strike="noStrike" cap="none">
                 <a:solidFill>
                   <a:schemeClr val="dk2"/>
                 </a:solidFill>
@@ -5377,7 +5564,7 @@
                 <a:sym typeface="Arial"/>
               </a:defRPr>
             </a:lvl6pPr>
-            <a:lvl7pPr indent="0" lvl="6" marL="0" marR="0" rtl="0" algn="r">
+            <a:lvl7pPr marL="0" marR="0" lvl="6" indent="0" algn="r" rtl="0">
               <a:lnSpc>
                 <a:spcPct val="100000"/>
               </a:lnSpc>
@@ -5393,7 +5580,7 @@
               <a:buSzPts val="1000"/>
               <a:buFont typeface="Arial"/>
               <a:buNone/>
-              <a:defRPr b="0" i="0" sz="1000" u="none" cap="none" strike="noStrike">
+              <a:defRPr sz="1000" b="0" i="0" u="none" strike="noStrike" cap="none">
                 <a:solidFill>
                   <a:schemeClr val="dk2"/>
                 </a:solidFill>
@@ -5403,7 +5590,7 @@
                 <a:sym typeface="Arial"/>
               </a:defRPr>
             </a:lvl7pPr>
-            <a:lvl8pPr indent="0" lvl="7" marL="0" marR="0" rtl="0" algn="r">
+            <a:lvl8pPr marL="0" marR="0" lvl="7" indent="0" algn="r" rtl="0">
               <a:lnSpc>
                 <a:spcPct val="100000"/>
               </a:lnSpc>
@@ -5419,7 +5606,7 @@
               <a:buSzPts val="1000"/>
               <a:buFont typeface="Arial"/>
               <a:buNone/>
-              <a:defRPr b="0" i="0" sz="1000" u="none" cap="none" strike="noStrike">
+              <a:defRPr sz="1000" b="0" i="0" u="none" strike="noStrike" cap="none">
                 <a:solidFill>
                   <a:schemeClr val="dk2"/>
                 </a:solidFill>
@@ -5429,7 +5616,7 @@
                 <a:sym typeface="Arial"/>
               </a:defRPr>
             </a:lvl8pPr>
-            <a:lvl9pPr indent="0" lvl="8" marL="0" marR="0" rtl="0" algn="r">
+            <a:lvl9pPr marL="0" marR="0" lvl="8" indent="0" algn="r" rtl="0">
               <a:lnSpc>
                 <a:spcPct val="100000"/>
               </a:lnSpc>
@@ -5445,7 +5632,7 @@
               <a:buSzPts val="1000"/>
               <a:buFont typeface="Arial"/>
               <a:buNone/>
-              <a:defRPr b="0" i="0" sz="1000" u="none" cap="none" strike="noStrike">
+              <a:defRPr sz="1000" b="0" i="0" u="none" strike="noStrike" cap="none">
                 <a:solidFill>
                   <a:schemeClr val="dk2"/>
                 </a:solidFill>
@@ -5457,7 +5644,7 @@
             </a:lvl9pPr>
           </a:lstStyle>
           <a:p>
-            <a:pPr indent="0" lvl="0" marL="0" rtl="0" algn="r">
+            <a:pPr marL="0" lvl="0" indent="0" algn="r" rtl="0">
               <a:spcBef>
                 <a:spcPts val="0"/>
               </a:spcBef>
@@ -5468,7 +5655,7 @@
             </a:pPr>
             <a:fld id="{00000000-1234-1234-1234-123412341234}" type="slidenum">
               <a:rPr lang="en"/>
-              <a:t>‹#›</a:t>
+              <a:t>‹Nº›</a:t>
             </a:fld>
             <a:endParaRPr/>
           </a:p>
@@ -5476,7 +5663,7 @@
       </p:sp>
     </p:spTree>
   </p:cSld>
-  <p:clrMap accent1="accent1" accent2="accent2" accent3="accent3" accent4="accent4" accent5="accent5" accent6="accent6" bg1="lt1" bg2="dk2" tx1="dk1" tx2="lt2" folHlink="folHlink" hlink="hlink"/>
+  <p:clrMap bg1="lt1" tx1="dk1" bg2="dk2" tx2="lt2" accent1="accent1" accent2="accent2" accent3="accent3" accent4="accent4" accent5="accent5" accent6="accent6" hlink="hlink" folHlink="folHlink"/>
   <p:sldLayoutIdLst>
     <p:sldLayoutId id="2147483649" r:id="rId1"/>
     <p:sldLayoutId id="2147483650" r:id="rId2"/>
@@ -5491,10 +5678,10 @@
     <p:sldLayoutId id="2147483659" r:id="rId11"/>
     <p:sldLayoutId id="2147483660" r:id="rId12"/>
   </p:sldLayoutIdLst>
-  <p:hf dt="0" ftr="0" hdr="0" sldNum="0"/>
+  <p:hf sldNum="0" hdr="0" ftr="0" dt="0"/>
   <p:txStyles>
     <p:titleStyle>
-      <a:defPPr lvl="0" marR="0" rtl="0" algn="l">
+      <a:defPPr marR="0" lvl="0" algn="l" rtl="0">
         <a:lnSpc>
           <a:spcPct val="100000"/>
         </a:lnSpc>
@@ -5505,7 +5692,7 @@
           <a:spcPts val="0"/>
         </a:spcAft>
       </a:defPPr>
-      <a:lvl1pPr lvl="0" marR="0" rtl="0" algn="l">
+      <a:lvl1pPr marR="0" lvl="0" algn="l" rtl="0">
         <a:lnSpc>
           <a:spcPct val="100000"/>
         </a:lnSpc>
@@ -5519,7 +5706,7 @@
           <a:srgbClr val="000000"/>
         </a:buClr>
         <a:buFont typeface="Arial"/>
-        <a:defRPr b="0" i="0" sz="1400" u="none" cap="none" strike="noStrike">
+        <a:defRPr sz="1400" b="0" i="0" u="none" strike="noStrike" cap="none">
           <a:solidFill>
             <a:srgbClr val="000000"/>
           </a:solidFill>
@@ -5529,7 +5716,7 @@
           <a:sym typeface="Arial"/>
         </a:defRPr>
       </a:lvl1pPr>
-      <a:lvl2pPr lvl="1" marR="0" rtl="0" algn="l">
+      <a:lvl2pPr marR="0" lvl="1" algn="l" rtl="0">
         <a:lnSpc>
           <a:spcPct val="100000"/>
         </a:lnSpc>
@@ -5543,7 +5730,7 @@
           <a:srgbClr val="000000"/>
         </a:buClr>
         <a:buFont typeface="Arial"/>
-        <a:defRPr b="0" i="0" sz="1400" u="none" cap="none" strike="noStrike">
+        <a:defRPr sz="1400" b="0" i="0" u="none" strike="noStrike" cap="none">
           <a:solidFill>
             <a:srgbClr val="000000"/>
           </a:solidFill>
@@ -5553,7 +5740,7 @@
           <a:sym typeface="Arial"/>
         </a:defRPr>
       </a:lvl2pPr>
-      <a:lvl3pPr lvl="2" marR="0" rtl="0" algn="l">
+      <a:lvl3pPr marR="0" lvl="2" algn="l" rtl="0">
         <a:lnSpc>
           <a:spcPct val="100000"/>
         </a:lnSpc>
@@ -5567,7 +5754,7 @@
           <a:srgbClr val="000000"/>
         </a:buClr>
         <a:buFont typeface="Arial"/>
-        <a:defRPr b="0" i="0" sz="1400" u="none" cap="none" strike="noStrike">
+        <a:defRPr sz="1400" b="0" i="0" u="none" strike="noStrike" cap="none">
           <a:solidFill>
             <a:srgbClr val="000000"/>
           </a:solidFill>
@@ -5577,7 +5764,7 @@
           <a:sym typeface="Arial"/>
         </a:defRPr>
       </a:lvl3pPr>
-      <a:lvl4pPr lvl="3" marR="0" rtl="0" algn="l">
+      <a:lvl4pPr marR="0" lvl="3" algn="l" rtl="0">
         <a:lnSpc>
           <a:spcPct val="100000"/>
         </a:lnSpc>
@@ -5591,7 +5778,7 @@
           <a:srgbClr val="000000"/>
         </a:buClr>
         <a:buFont typeface="Arial"/>
-        <a:defRPr b="0" i="0" sz="1400" u="none" cap="none" strike="noStrike">
+        <a:defRPr sz="1400" b="0" i="0" u="none" strike="noStrike" cap="none">
           <a:solidFill>
             <a:srgbClr val="000000"/>
           </a:solidFill>
@@ -5601,7 +5788,7 @@
           <a:sym typeface="Arial"/>
         </a:defRPr>
       </a:lvl4pPr>
-      <a:lvl5pPr lvl="4" marR="0" rtl="0" algn="l">
+      <a:lvl5pPr marR="0" lvl="4" algn="l" rtl="0">
         <a:lnSpc>
           <a:spcPct val="100000"/>
         </a:lnSpc>
@@ -5615,7 +5802,7 @@
           <a:srgbClr val="000000"/>
         </a:buClr>
         <a:buFont typeface="Arial"/>
-        <a:defRPr b="0" i="0" sz="1400" u="none" cap="none" strike="noStrike">
+        <a:defRPr sz="1400" b="0" i="0" u="none" strike="noStrike" cap="none">
           <a:solidFill>
             <a:srgbClr val="000000"/>
           </a:solidFill>
@@ -5625,7 +5812,7 @@
           <a:sym typeface="Arial"/>
         </a:defRPr>
       </a:lvl5pPr>
-      <a:lvl6pPr lvl="5" marR="0" rtl="0" algn="l">
+      <a:lvl6pPr marR="0" lvl="5" algn="l" rtl="0">
         <a:lnSpc>
           <a:spcPct val="100000"/>
         </a:lnSpc>
@@ -5639,7 +5826,7 @@
           <a:srgbClr val="000000"/>
         </a:buClr>
         <a:buFont typeface="Arial"/>
-        <a:defRPr b="0" i="0" sz="1400" u="none" cap="none" strike="noStrike">
+        <a:defRPr sz="1400" b="0" i="0" u="none" strike="noStrike" cap="none">
           <a:solidFill>
             <a:srgbClr val="000000"/>
           </a:solidFill>
@@ -5649,7 +5836,7 @@
           <a:sym typeface="Arial"/>
         </a:defRPr>
       </a:lvl6pPr>
-      <a:lvl7pPr lvl="6" marR="0" rtl="0" algn="l">
+      <a:lvl7pPr marR="0" lvl="6" algn="l" rtl="0">
         <a:lnSpc>
           <a:spcPct val="100000"/>
         </a:lnSpc>
@@ -5663,7 +5850,7 @@
           <a:srgbClr val="000000"/>
         </a:buClr>
         <a:buFont typeface="Arial"/>
-        <a:defRPr b="0" i="0" sz="1400" u="none" cap="none" strike="noStrike">
+        <a:defRPr sz="1400" b="0" i="0" u="none" strike="noStrike" cap="none">
           <a:solidFill>
             <a:srgbClr val="000000"/>
           </a:solidFill>
@@ -5673,7 +5860,7 @@
           <a:sym typeface="Arial"/>
         </a:defRPr>
       </a:lvl7pPr>
-      <a:lvl8pPr lvl="7" marR="0" rtl="0" algn="l">
+      <a:lvl8pPr marR="0" lvl="7" algn="l" rtl="0">
         <a:lnSpc>
           <a:spcPct val="100000"/>
         </a:lnSpc>
@@ -5687,7 +5874,7 @@
           <a:srgbClr val="000000"/>
         </a:buClr>
         <a:buFont typeface="Arial"/>
-        <a:defRPr b="0" i="0" sz="1400" u="none" cap="none" strike="noStrike">
+        <a:defRPr sz="1400" b="0" i="0" u="none" strike="noStrike" cap="none">
           <a:solidFill>
             <a:srgbClr val="000000"/>
           </a:solidFill>
@@ -5697,7 +5884,7 @@
           <a:sym typeface="Arial"/>
         </a:defRPr>
       </a:lvl8pPr>
-      <a:lvl9pPr lvl="8" marR="0" rtl="0" algn="l">
+      <a:lvl9pPr marR="0" lvl="8" algn="l" rtl="0">
         <a:lnSpc>
           <a:spcPct val="100000"/>
         </a:lnSpc>
@@ -5711,7 +5898,7 @@
           <a:srgbClr val="000000"/>
         </a:buClr>
         <a:buFont typeface="Arial"/>
-        <a:defRPr b="0" i="0" sz="1400" u="none" cap="none" strike="noStrike">
+        <a:defRPr sz="1400" b="0" i="0" u="none" strike="noStrike" cap="none">
           <a:solidFill>
             <a:srgbClr val="000000"/>
           </a:solidFill>
@@ -5723,7 +5910,7 @@
       </a:lvl9pPr>
     </p:titleStyle>
     <p:bodyStyle>
-      <a:defPPr lvl="0" marR="0" rtl="0" algn="l">
+      <a:defPPr marR="0" lvl="0" algn="l" rtl="0">
         <a:lnSpc>
           <a:spcPct val="100000"/>
         </a:lnSpc>
@@ -5734,7 +5921,7 @@
           <a:spcPts val="0"/>
         </a:spcAft>
       </a:defPPr>
-      <a:lvl1pPr lvl="0" marR="0" rtl="0" algn="l">
+      <a:lvl1pPr marR="0" lvl="0" algn="l" rtl="0">
         <a:lnSpc>
           <a:spcPct val="100000"/>
         </a:lnSpc>
@@ -5748,7 +5935,7 @@
           <a:srgbClr val="000000"/>
         </a:buClr>
         <a:buFont typeface="Arial"/>
-        <a:defRPr b="0" i="0" sz="1400" u="none" cap="none" strike="noStrike">
+        <a:defRPr sz="1400" b="0" i="0" u="none" strike="noStrike" cap="none">
           <a:solidFill>
             <a:srgbClr val="000000"/>
           </a:solidFill>
@@ -5758,7 +5945,7 @@
           <a:sym typeface="Arial"/>
         </a:defRPr>
       </a:lvl1pPr>
-      <a:lvl2pPr lvl="1" marR="0" rtl="0" algn="l">
+      <a:lvl2pPr marR="0" lvl="1" algn="l" rtl="0">
         <a:lnSpc>
           <a:spcPct val="100000"/>
         </a:lnSpc>
@@ -5772,7 +5959,7 @@
           <a:srgbClr val="000000"/>
         </a:buClr>
         <a:buFont typeface="Arial"/>
-        <a:defRPr b="0" i="0" sz="1400" u="none" cap="none" strike="noStrike">
+        <a:defRPr sz="1400" b="0" i="0" u="none" strike="noStrike" cap="none">
           <a:solidFill>
             <a:srgbClr val="000000"/>
           </a:solidFill>
@@ -5782,7 +5969,7 @@
           <a:sym typeface="Arial"/>
         </a:defRPr>
       </a:lvl2pPr>
-      <a:lvl3pPr lvl="2" marR="0" rtl="0" algn="l">
+      <a:lvl3pPr marR="0" lvl="2" algn="l" rtl="0">
         <a:lnSpc>
           <a:spcPct val="100000"/>
         </a:lnSpc>
@@ -5796,7 +5983,7 @@
           <a:srgbClr val="000000"/>
         </a:buClr>
         <a:buFont typeface="Arial"/>
-        <a:defRPr b="0" i="0" sz="1400" u="none" cap="none" strike="noStrike">
+        <a:defRPr sz="1400" b="0" i="0" u="none" strike="noStrike" cap="none">
           <a:solidFill>
             <a:srgbClr val="000000"/>
           </a:solidFill>
@@ -5806,7 +5993,7 @@
           <a:sym typeface="Arial"/>
         </a:defRPr>
       </a:lvl3pPr>
-      <a:lvl4pPr lvl="3" marR="0" rtl="0" algn="l">
+      <a:lvl4pPr marR="0" lvl="3" algn="l" rtl="0">
         <a:lnSpc>
           <a:spcPct val="100000"/>
         </a:lnSpc>
@@ -5820,7 +6007,7 @@
           <a:srgbClr val="000000"/>
         </a:buClr>
         <a:buFont typeface="Arial"/>
-        <a:defRPr b="0" i="0" sz="1400" u="none" cap="none" strike="noStrike">
+        <a:defRPr sz="1400" b="0" i="0" u="none" strike="noStrike" cap="none">
           <a:solidFill>
             <a:srgbClr val="000000"/>
           </a:solidFill>
@@ -5830,7 +6017,7 @@
           <a:sym typeface="Arial"/>
         </a:defRPr>
       </a:lvl4pPr>
-      <a:lvl5pPr lvl="4" marR="0" rtl="0" algn="l">
+      <a:lvl5pPr marR="0" lvl="4" algn="l" rtl="0">
         <a:lnSpc>
           <a:spcPct val="100000"/>
         </a:lnSpc>
@@ -5844,7 +6031,7 @@
           <a:srgbClr val="000000"/>
         </a:buClr>
         <a:buFont typeface="Arial"/>
-        <a:defRPr b="0" i="0" sz="1400" u="none" cap="none" strike="noStrike">
+        <a:defRPr sz="1400" b="0" i="0" u="none" strike="noStrike" cap="none">
           <a:solidFill>
             <a:srgbClr val="000000"/>
           </a:solidFill>
@@ -5854,7 +6041,7 @@
           <a:sym typeface="Arial"/>
         </a:defRPr>
       </a:lvl5pPr>
-      <a:lvl6pPr lvl="5" marR="0" rtl="0" algn="l">
+      <a:lvl6pPr marR="0" lvl="5" algn="l" rtl="0">
         <a:lnSpc>
           <a:spcPct val="100000"/>
         </a:lnSpc>
@@ -5868,7 +6055,7 @@
           <a:srgbClr val="000000"/>
         </a:buClr>
         <a:buFont typeface="Arial"/>
-        <a:defRPr b="0" i="0" sz="1400" u="none" cap="none" strike="noStrike">
+        <a:defRPr sz="1400" b="0" i="0" u="none" strike="noStrike" cap="none">
           <a:solidFill>
             <a:srgbClr val="000000"/>
           </a:solidFill>
@@ -5878,7 +6065,7 @@
           <a:sym typeface="Arial"/>
         </a:defRPr>
       </a:lvl6pPr>
-      <a:lvl7pPr lvl="6" marR="0" rtl="0" algn="l">
+      <a:lvl7pPr marR="0" lvl="6" algn="l" rtl="0">
         <a:lnSpc>
           <a:spcPct val="100000"/>
         </a:lnSpc>
@@ -5892,7 +6079,7 @@
           <a:srgbClr val="000000"/>
         </a:buClr>
         <a:buFont typeface="Arial"/>
-        <a:defRPr b="0" i="0" sz="1400" u="none" cap="none" strike="noStrike">
+        <a:defRPr sz="1400" b="0" i="0" u="none" strike="noStrike" cap="none">
           <a:solidFill>
             <a:srgbClr val="000000"/>
           </a:solidFill>
@@ -5902,7 +6089,7 @@
           <a:sym typeface="Arial"/>
         </a:defRPr>
       </a:lvl7pPr>
-      <a:lvl8pPr lvl="7" marR="0" rtl="0" algn="l">
+      <a:lvl8pPr marR="0" lvl="7" algn="l" rtl="0">
         <a:lnSpc>
           <a:spcPct val="100000"/>
         </a:lnSpc>
@@ -5916,7 +6103,7 @@
           <a:srgbClr val="000000"/>
         </a:buClr>
         <a:buFont typeface="Arial"/>
-        <a:defRPr b="0" i="0" sz="1400" u="none" cap="none" strike="noStrike">
+        <a:defRPr sz="1400" b="0" i="0" u="none" strike="noStrike" cap="none">
           <a:solidFill>
             <a:srgbClr val="000000"/>
           </a:solidFill>
@@ -5926,7 +6113,7 @@
           <a:sym typeface="Arial"/>
         </a:defRPr>
       </a:lvl8pPr>
-      <a:lvl9pPr lvl="8" marR="0" rtl="0" algn="l">
+      <a:lvl9pPr marR="0" lvl="8" algn="l" rtl="0">
         <a:lnSpc>
           <a:spcPct val="100000"/>
         </a:lnSpc>
@@ -5940,7 +6127,7 @@
           <a:srgbClr val="000000"/>
         </a:buClr>
         <a:buFont typeface="Arial"/>
-        <a:defRPr b="0" i="0" sz="1400" u="none" cap="none" strike="noStrike">
+        <a:defRPr sz="1400" b="0" i="0" u="none" strike="noStrike" cap="none">
           <a:solidFill>
             <a:srgbClr val="000000"/>
           </a:solidFill>
@@ -5952,7 +6139,7 @@
       </a:lvl9pPr>
     </p:bodyStyle>
     <p:otherStyle>
-      <a:defPPr lvl="0" marR="0" rtl="0" algn="l">
+      <a:defPPr marR="0" lvl="0" algn="l" rtl="0">
         <a:lnSpc>
           <a:spcPct val="100000"/>
         </a:lnSpc>
@@ -5963,7 +6150,7 @@
           <a:spcPts val="0"/>
         </a:spcAft>
       </a:defPPr>
-      <a:lvl1pPr lvl="0" marR="0" rtl="0" algn="l">
+      <a:lvl1pPr marR="0" lvl="0" algn="l" rtl="0">
         <a:lnSpc>
           <a:spcPct val="100000"/>
         </a:lnSpc>
@@ -5977,7 +6164,7 @@
           <a:srgbClr val="000000"/>
         </a:buClr>
         <a:buFont typeface="Arial"/>
-        <a:defRPr b="0" i="0" sz="1400" u="none" cap="none" strike="noStrike">
+        <a:defRPr sz="1400" b="0" i="0" u="none" strike="noStrike" cap="none">
           <a:solidFill>
             <a:srgbClr val="000000"/>
           </a:solidFill>
@@ -5987,7 +6174,7 @@
           <a:sym typeface="Arial"/>
         </a:defRPr>
       </a:lvl1pPr>
-      <a:lvl2pPr lvl="1" marR="0" rtl="0" algn="l">
+      <a:lvl2pPr marR="0" lvl="1" algn="l" rtl="0">
         <a:lnSpc>
           <a:spcPct val="100000"/>
         </a:lnSpc>
@@ -6001,7 +6188,7 @@
           <a:srgbClr val="000000"/>
         </a:buClr>
         <a:buFont typeface="Arial"/>
-        <a:defRPr b="0" i="0" sz="1400" u="none" cap="none" strike="noStrike">
+        <a:defRPr sz="1400" b="0" i="0" u="none" strike="noStrike" cap="none">
           <a:solidFill>
             <a:srgbClr val="000000"/>
           </a:solidFill>
@@ -6011,7 +6198,7 @@
           <a:sym typeface="Arial"/>
         </a:defRPr>
       </a:lvl2pPr>
-      <a:lvl3pPr lvl="2" marR="0" rtl="0" algn="l">
+      <a:lvl3pPr marR="0" lvl="2" algn="l" rtl="0">
         <a:lnSpc>
           <a:spcPct val="100000"/>
         </a:lnSpc>
@@ -6025,7 +6212,7 @@
           <a:srgbClr val="000000"/>
         </a:buClr>
         <a:buFont typeface="Arial"/>
-        <a:defRPr b="0" i="0" sz="1400" u="none" cap="none" strike="noStrike">
+        <a:defRPr sz="1400" b="0" i="0" u="none" strike="noStrike" cap="none">
           <a:solidFill>
             <a:srgbClr val="000000"/>
           </a:solidFill>
@@ -6035,7 +6222,7 @@
           <a:sym typeface="Arial"/>
         </a:defRPr>
       </a:lvl3pPr>
-      <a:lvl4pPr lvl="3" marR="0" rtl="0" algn="l">
+      <a:lvl4pPr marR="0" lvl="3" algn="l" rtl="0">
         <a:lnSpc>
           <a:spcPct val="100000"/>
         </a:lnSpc>
@@ -6049,7 +6236,7 @@
           <a:srgbClr val="000000"/>
         </a:buClr>
         <a:buFont typeface="Arial"/>
-        <a:defRPr b="0" i="0" sz="1400" u="none" cap="none" strike="noStrike">
+        <a:defRPr sz="1400" b="0" i="0" u="none" strike="noStrike" cap="none">
           <a:solidFill>
             <a:srgbClr val="000000"/>
           </a:solidFill>
@@ -6059,7 +6246,7 @@
           <a:sym typeface="Arial"/>
         </a:defRPr>
       </a:lvl4pPr>
-      <a:lvl5pPr lvl="4" marR="0" rtl="0" algn="l">
+      <a:lvl5pPr marR="0" lvl="4" algn="l" rtl="0">
         <a:lnSpc>
           <a:spcPct val="100000"/>
         </a:lnSpc>
@@ -6073,7 +6260,7 @@
           <a:srgbClr val="000000"/>
         </a:buClr>
         <a:buFont typeface="Arial"/>
-        <a:defRPr b="0" i="0" sz="1400" u="none" cap="none" strike="noStrike">
+        <a:defRPr sz="1400" b="0" i="0" u="none" strike="noStrike" cap="none">
           <a:solidFill>
             <a:srgbClr val="000000"/>
           </a:solidFill>
@@ -6083,7 +6270,7 @@
           <a:sym typeface="Arial"/>
         </a:defRPr>
       </a:lvl5pPr>
-      <a:lvl6pPr lvl="5" marR="0" rtl="0" algn="l">
+      <a:lvl6pPr marR="0" lvl="5" algn="l" rtl="0">
         <a:lnSpc>
           <a:spcPct val="100000"/>
         </a:lnSpc>
@@ -6097,7 +6284,7 @@
           <a:srgbClr val="000000"/>
         </a:buClr>
         <a:buFont typeface="Arial"/>
-        <a:defRPr b="0" i="0" sz="1400" u="none" cap="none" strike="noStrike">
+        <a:defRPr sz="1400" b="0" i="0" u="none" strike="noStrike" cap="none">
           <a:solidFill>
             <a:srgbClr val="000000"/>
           </a:solidFill>
@@ -6107,7 +6294,7 @@
           <a:sym typeface="Arial"/>
         </a:defRPr>
       </a:lvl6pPr>
-      <a:lvl7pPr lvl="6" marR="0" rtl="0" algn="l">
+      <a:lvl7pPr marR="0" lvl="6" algn="l" rtl="0">
         <a:lnSpc>
           <a:spcPct val="100000"/>
         </a:lnSpc>
@@ -6121,7 +6308,7 @@
           <a:srgbClr val="000000"/>
         </a:buClr>
         <a:buFont typeface="Arial"/>
-        <a:defRPr b="0" i="0" sz="1400" u="none" cap="none" strike="noStrike">
+        <a:defRPr sz="1400" b="0" i="0" u="none" strike="noStrike" cap="none">
           <a:solidFill>
             <a:srgbClr val="000000"/>
           </a:solidFill>
@@ -6131,7 +6318,7 @@
           <a:sym typeface="Arial"/>
         </a:defRPr>
       </a:lvl7pPr>
-      <a:lvl8pPr lvl="7" marR="0" rtl="0" algn="l">
+      <a:lvl8pPr marR="0" lvl="7" algn="l" rtl="0">
         <a:lnSpc>
           <a:spcPct val="100000"/>
         </a:lnSpc>
@@ -6145,7 +6332,7 @@
           <a:srgbClr val="000000"/>
         </a:buClr>
         <a:buFont typeface="Arial"/>
-        <a:defRPr b="0" i="0" sz="1400" u="none" cap="none" strike="noStrike">
+        <a:defRPr sz="1400" b="0" i="0" u="none" strike="noStrike" cap="none">
           <a:solidFill>
             <a:srgbClr val="000000"/>
           </a:solidFill>
@@ -6155,7 +6342,7 @@
           <a:sym typeface="Arial"/>
         </a:defRPr>
       </a:lvl8pPr>
-      <a:lvl9pPr lvl="8" marR="0" rtl="0" algn="l">
+      <a:lvl9pPr marR="0" lvl="8" algn="l" rtl="0">
         <a:lnSpc>
           <a:spcPct val="100000"/>
         </a:lnSpc>
@@ -6169,7 +6356,7 @@
           <a:srgbClr val="000000"/>
         </a:buClr>
         <a:buFont typeface="Arial"/>
-        <a:defRPr b="0" i="0" sz="1400" u="none" cap="none" strike="noStrike">
+        <a:defRPr sz="1400" b="0" i="0" u="none" strike="noStrike" cap="none">
           <a:solidFill>
             <a:srgbClr val="000000"/>
           </a:solidFill>
@@ -6185,18 +6372,19 @@
 </file>
 
 <file path=ppt/slides/slide1.xml><?xml version="1.0" encoding="utf-8"?>
-<p:sld xmlns:a="http://schemas.openxmlformats.org/drawingml/2006/main" xmlns:r="http://schemas.openxmlformats.org/officeDocument/2006/relationships" xmlns:mc="http://schemas.openxmlformats.org/markup-compatibility/2006" xmlns:mv="urn:schemas-microsoft-com:mac:vml" xmlns:p="http://schemas.openxmlformats.org/presentationml/2006/main" xmlns:c="http://schemas.openxmlformats.org/drawingml/2006/chart" xmlns:dgm="http://schemas.openxmlformats.org/drawingml/2006/diagram" xmlns:o="urn:schemas-microsoft-com:office:office" xmlns:v="urn:schemas-microsoft-com:vml" xmlns:pvml="urn:schemas-microsoft-com:office:powerpoint" xmlns:com="http://schemas.openxmlformats.org/drawingml/2006/compatibility" xmlns:p14="http://schemas.microsoft.com/office/powerpoint/2010/main" xmlns:p15="http://schemas.microsoft.com/office/powerpoint/2012/main" xmlns:ahyp="http://schemas.microsoft.com/office/drawing/2018/hyperlinkcolor">
+<p:sld xmlns:a="http://schemas.openxmlformats.org/drawingml/2006/main" xmlns:r="http://schemas.openxmlformats.org/officeDocument/2006/relationships" xmlns:p="http://schemas.openxmlformats.org/presentationml/2006/main">
   <p:cSld>
     <p:bg>
       <p:bgPr>
         <a:solidFill>
           <a:srgbClr val="FF8F60"/>
         </a:solidFill>
+        <a:effectLst/>
       </p:bgPr>
     </p:bg>
     <p:spTree>
       <p:nvGrpSpPr>
-        <p:cNvPr id="32" name="Shape 32"/>
+        <p:cNvPr id="1" name="Shape 32"/>
         <p:cNvGrpSpPr/>
         <p:nvPr/>
       </p:nvGrpSpPr>
@@ -6211,7 +6399,9 @@
       <p:sp>
         <p:nvSpPr>
           <p:cNvPr id="33" name="Google Shape;33;p1"/>
-          <p:cNvSpPr txBox="1"/>
+          <p:cNvSpPr txBox="1">
+            <a:spLocks noGrp="1"/>
+          </p:cNvSpPr>
           <p:nvPr>
             <p:ph type="ctrTitle"/>
           </p:nvPr>
@@ -6230,12 +6420,12 @@
           </a:ln>
         </p:spPr>
         <p:txBody>
-          <a:bodyPr anchorCtr="0" anchor="t" bIns="91425" lIns="91425" spcFirstLastPara="1" rIns="91425" wrap="square" tIns="0">
+          <a:bodyPr spcFirstLastPara="1" wrap="square" lIns="91425" tIns="0" rIns="91425" bIns="91425" anchor="t" anchorCtr="0">
             <a:spAutoFit/>
           </a:bodyPr>
           <a:lstStyle/>
           <a:p>
-            <a:pPr indent="0" lvl="0" marL="0" marR="0" rtl="0" algn="l">
+            <a:pPr marL="0" marR="0" lvl="0" indent="0" algn="l" rtl="0">
               <a:lnSpc>
                 <a:spcPct val="90000"/>
               </a:lnSpc>
@@ -6253,7 +6443,7 @@
               <a:buNone/>
             </a:pPr>
             <a:r>
-              <a:rPr b="0" i="0" lang="en" sz="6000" u="none" cap="none" strike="noStrike">
+              <a:rPr lang="en" sz="6000" b="0" i="0" u="none" strike="noStrike" cap="none">
                 <a:solidFill>
                   <a:srgbClr val="1A1A1A"/>
                 </a:solidFill>
@@ -6287,7 +6477,7 @@
             </a:endParaRPr>
           </a:p>
           <a:p>
-            <a:pPr indent="0" lvl="0" marL="0" marR="0" rtl="0" algn="l">
+            <a:pPr marL="0" marR="0" lvl="0" indent="0" algn="l" rtl="0">
               <a:lnSpc>
                 <a:spcPct val="90000"/>
               </a:lnSpc>
@@ -6304,9 +6494,6 @@
               <a:buFont typeface="Arial"/>
               <a:buNone/>
             </a:pPr>
-            <a:r>
-              <a:t/>
-            </a:r>
             <a:endParaRPr sz="6000">
               <a:solidFill>
                 <a:srgbClr val="1A1A1A"/>
@@ -6318,7 +6505,7 @@
             </a:endParaRPr>
           </a:p>
           <a:p>
-            <a:pPr indent="0" lvl="0" marL="0" marR="0" rtl="0" algn="l">
+            <a:pPr marL="0" marR="0" lvl="0" indent="0" algn="l" rtl="0">
               <a:lnSpc>
                 <a:spcPct val="90000"/>
               </a:lnSpc>
@@ -6335,9 +6522,6 @@
               <a:buFont typeface="Arial"/>
               <a:buNone/>
             </a:pPr>
-            <a:r>
-              <a:t/>
-            </a:r>
             <a:endParaRPr sz="6000">
               <a:solidFill>
                 <a:srgbClr val="1A1A1A"/>
@@ -6349,7 +6533,7 @@
             </a:endParaRPr>
           </a:p>
           <a:p>
-            <a:pPr indent="0" lvl="0" marL="0" marR="0" rtl="0" algn="l">
+            <a:pPr marL="0" marR="0" lvl="0" indent="0" algn="l" rtl="0">
               <a:lnSpc>
                 <a:spcPct val="90000"/>
               </a:lnSpc>
@@ -6366,9 +6550,6 @@
               <a:buFont typeface="Arial"/>
               <a:buNone/>
             </a:pPr>
-            <a:r>
-              <a:t/>
-            </a:r>
             <a:endParaRPr sz="6000">
               <a:solidFill>
                 <a:srgbClr val="1A1A1A"/>
@@ -6380,7 +6561,7 @@
             </a:endParaRPr>
           </a:p>
           <a:p>
-            <a:pPr indent="0" lvl="0" marL="0" marR="0" rtl="0" algn="l">
+            <a:pPr marL="0" marR="0" lvl="0" indent="0" algn="l" rtl="0">
               <a:lnSpc>
                 <a:spcPct val="100000"/>
               </a:lnSpc>
@@ -6398,7 +6579,7 @@
               <a:buNone/>
             </a:pPr>
             <a:r>
-              <a:rPr b="0" i="0" lang="en" sz="1800" u="none" cap="none" strike="noStrike">
+              <a:rPr lang="en" sz="1800" b="0" i="0" u="none" strike="noStrike" cap="none">
                 <a:solidFill>
                   <a:srgbClr val="1A1A1A"/>
                 </a:solidFill>
@@ -6409,7 +6590,7 @@
               </a:rPr>
               <a:t>Bienvenidos a este emocionante curso de Python, donde aprenderán las habilidades fundamentales para convertirse en programadores exitosos</a:t>
             </a:r>
-            <a:endParaRPr b="0" i="0" sz="5800" u="none" cap="none" strike="noStrike">
+            <a:endParaRPr sz="5800" b="0" i="0" u="none" strike="noStrike" cap="none">
               <a:solidFill>
                 <a:srgbClr val="1A1A1A"/>
               </a:solidFill>
@@ -6431,7 +6612,7 @@
           <a:blip r:embed="rId3">
             <a:alphaModFix/>
           </a:blip>
-          <a:srcRect b="0" l="0" r="0" t="0"/>
+          <a:srcRect/>
           <a:stretch/>
         </p:blipFill>
         <p:spPr>
@@ -6457,18 +6638,238 @@
 </file>
 
 <file path=ppt/slides/slide10.xml><?xml version="1.0" encoding="utf-8"?>
-<p:sld xmlns:a="http://schemas.openxmlformats.org/drawingml/2006/main" xmlns:r="http://schemas.openxmlformats.org/officeDocument/2006/relationships" xmlns:mc="http://schemas.openxmlformats.org/markup-compatibility/2006" xmlns:mv="urn:schemas-microsoft-com:mac:vml" xmlns:p="http://schemas.openxmlformats.org/presentationml/2006/main" xmlns:c="http://schemas.openxmlformats.org/drawingml/2006/chart" xmlns:dgm="http://schemas.openxmlformats.org/drawingml/2006/diagram" xmlns:o="urn:schemas-microsoft-com:office:office" xmlns:v="urn:schemas-microsoft-com:vml" xmlns:pvml="urn:schemas-microsoft-com:office:powerpoint" xmlns:com="http://schemas.openxmlformats.org/drawingml/2006/compatibility" xmlns:p14="http://schemas.microsoft.com/office/powerpoint/2010/main" xmlns:p15="http://schemas.microsoft.com/office/powerpoint/2012/main" xmlns:ahyp="http://schemas.microsoft.com/office/drawing/2018/hyperlinkcolor">
+<p:sld xmlns:a="http://schemas.openxmlformats.org/drawingml/2006/main" xmlns:r="http://schemas.openxmlformats.org/officeDocument/2006/relationships" xmlns:p="http://schemas.openxmlformats.org/presentationml/2006/main">
+  <p:cSld>
+    <p:bg>
+      <p:bgPr>
+        <a:solidFill>
+          <a:srgbClr val="1A1A1A"/>
+        </a:solidFill>
+        <a:effectLst/>
+      </p:bgPr>
+    </p:bg>
+    <p:spTree>
+      <p:nvGrpSpPr>
+        <p:cNvPr id="1" name="Shape 119"/>
+        <p:cNvGrpSpPr/>
+        <p:nvPr/>
+      </p:nvGrpSpPr>
+      <p:grpSpPr>
+        <a:xfrm>
+          <a:off x="0" y="0"/>
+          <a:ext cx="0" cy="0"/>
+          <a:chOff x="0" y="0"/>
+          <a:chExt cx="0" cy="0"/>
+        </a:xfrm>
+      </p:grpSpPr>
+      <p:pic>
+        <p:nvPicPr>
+          <p:cNvPr id="120" name="Google Shape;120;p9"/>
+          <p:cNvPicPr preferRelativeResize="0"/>
+          <p:nvPr/>
+        </p:nvPicPr>
+        <p:blipFill rotWithShape="1">
+          <a:blip r:embed="rId3">
+            <a:alphaModFix/>
+          </a:blip>
+          <a:srcRect/>
+          <a:stretch/>
+        </p:blipFill>
+        <p:spPr>
+          <a:xfrm>
+            <a:off x="228600" y="228600"/>
+            <a:ext cx="868680" cy="191756"/>
+          </a:xfrm>
+          <a:prstGeom prst="rect">
+            <a:avLst/>
+          </a:prstGeom>
+          <a:noFill/>
+          <a:ln>
+            <a:noFill/>
+          </a:ln>
+        </p:spPr>
+      </p:pic>
+      <p:sp>
+        <p:nvSpPr>
+          <p:cNvPr id="121" name="Google Shape;121;p9"/>
+          <p:cNvSpPr txBox="1"/>
+          <p:nvPr/>
+        </p:nvSpPr>
+        <p:spPr>
+          <a:xfrm>
+            <a:off x="96875" y="424975"/>
+            <a:ext cx="8520600" cy="800400"/>
+          </a:xfrm>
+          <a:prstGeom prst="rect">
+            <a:avLst/>
+          </a:prstGeom>
+          <a:noFill/>
+          <a:ln>
+            <a:noFill/>
+          </a:ln>
+        </p:spPr>
+        <p:txBody>
+          <a:bodyPr spcFirstLastPara="1" wrap="square" lIns="91425" tIns="91425" rIns="91425" bIns="91425" anchor="t" anchorCtr="0">
+            <a:spAutoFit/>
+          </a:bodyPr>
+          <a:lstStyle/>
+          <a:p>
+            <a:pPr marL="0" marR="0" lvl="0" indent="0" algn="l" rtl="0">
+              <a:lnSpc>
+                <a:spcPct val="100000"/>
+              </a:lnSpc>
+              <a:spcBef>
+                <a:spcPts val="0"/>
+              </a:spcBef>
+              <a:spcAft>
+                <a:spcPts val="0"/>
+              </a:spcAft>
+              <a:buClr>
+                <a:srgbClr val="000000"/>
+              </a:buClr>
+              <a:buSzPts val="4000"/>
+              <a:buFont typeface="Arial"/>
+              <a:buNone/>
+            </a:pPr>
+            <a:r>
+              <a:rPr lang="en" sz="4000" b="0" i="0" u="none" strike="noStrike" cap="none">
+                <a:solidFill>
+                  <a:srgbClr val="F2F1EE"/>
+                </a:solidFill>
+                <a:latin typeface="Inter ExtraBold"/>
+                <a:ea typeface="Inter ExtraBold"/>
+                <a:cs typeface="Inter ExtraBold"/>
+                <a:sym typeface="Inter ExtraBold"/>
+              </a:rPr>
+              <a:t>¿Preguntas?</a:t>
+            </a:r>
+            <a:endParaRPr sz="4000" b="0" i="0" u="none" strike="noStrike" cap="none">
+              <a:solidFill>
+                <a:srgbClr val="F2F1EE"/>
+              </a:solidFill>
+              <a:latin typeface="Inter ExtraBold"/>
+              <a:ea typeface="Inter ExtraBold"/>
+              <a:cs typeface="Inter ExtraBold"/>
+              <a:sym typeface="Inter ExtraBold"/>
+            </a:endParaRPr>
+          </a:p>
+        </p:txBody>
+      </p:sp>
+      <p:sp>
+        <p:nvSpPr>
+          <p:cNvPr id="122" name="Google Shape;122;p9"/>
+          <p:cNvSpPr txBox="1"/>
+          <p:nvPr/>
+        </p:nvSpPr>
+        <p:spPr>
+          <a:xfrm>
+            <a:off x="139800" y="2298300"/>
+            <a:ext cx="6053400" cy="2616600"/>
+          </a:xfrm>
+          <a:prstGeom prst="rect">
+            <a:avLst/>
+          </a:prstGeom>
+          <a:noFill/>
+          <a:ln>
+            <a:noFill/>
+          </a:ln>
+        </p:spPr>
+        <p:txBody>
+          <a:bodyPr spcFirstLastPara="1" wrap="square" lIns="91425" tIns="91425" rIns="91425" bIns="91425" anchor="b" anchorCtr="0">
+            <a:noAutofit/>
+          </a:bodyPr>
+          <a:lstStyle/>
+          <a:p>
+            <a:pPr marL="0" marR="0" lvl="0" indent="0" algn="l" rtl="0">
+              <a:lnSpc>
+                <a:spcPct val="100000"/>
+              </a:lnSpc>
+              <a:spcBef>
+                <a:spcPts val="0"/>
+              </a:spcBef>
+              <a:spcAft>
+                <a:spcPts val="0"/>
+              </a:spcAft>
+              <a:buClr>
+                <a:srgbClr val="000000"/>
+              </a:buClr>
+              <a:buSzPts val="2000"/>
+              <a:buFont typeface="Arial"/>
+              <a:buNone/>
+            </a:pPr>
+            <a:r>
+              <a:rPr lang="en" sz="2000" b="0" i="0" u="none" strike="noStrike" cap="none">
+                <a:solidFill>
+                  <a:srgbClr val="F2F1EE"/>
+                </a:solidFill>
+                <a:latin typeface="Inter"/>
+                <a:ea typeface="Inter"/>
+                <a:cs typeface="Inter"/>
+                <a:sym typeface="Inter"/>
+              </a:rPr>
+              <a:t>Estoy aquí para ayudarles. No duden en contactarme si tienen alguna duda o inquietud.</a:t>
+            </a:r>
+            <a:endParaRPr sz="2000" b="0" i="0" u="none" strike="noStrike" cap="none">
+              <a:solidFill>
+                <a:srgbClr val="F2F1EE"/>
+              </a:solidFill>
+              <a:latin typeface="Inter"/>
+              <a:ea typeface="Inter"/>
+              <a:cs typeface="Inter"/>
+              <a:sym typeface="Inter"/>
+            </a:endParaRPr>
+          </a:p>
+        </p:txBody>
+      </p:sp>
+      <p:pic>
+        <p:nvPicPr>
+          <p:cNvPr id="123" name="Google Shape;123;p9"/>
+          <p:cNvPicPr preferRelativeResize="0"/>
+          <p:nvPr/>
+        </p:nvPicPr>
+        <p:blipFill rotWithShape="1">
+          <a:blip r:embed="rId4">
+            <a:alphaModFix/>
+          </a:blip>
+          <a:srcRect/>
+          <a:stretch/>
+        </p:blipFill>
+        <p:spPr>
+          <a:xfrm>
+            <a:off x="1097280" y="1131575"/>
+            <a:ext cx="6401751" cy="2510050"/>
+          </a:xfrm>
+          <a:prstGeom prst="rect">
+            <a:avLst/>
+          </a:prstGeom>
+          <a:noFill/>
+          <a:ln>
+            <a:noFill/>
+          </a:ln>
+        </p:spPr>
+      </p:pic>
+    </p:spTree>
+  </p:cSld>
+  <p:clrMapOvr>
+    <a:masterClrMapping/>
+  </p:clrMapOvr>
+</p:sld>
+</file>
+
+<file path=ppt/slides/slide11.xml><?xml version="1.0" encoding="utf-8"?>
+<p:sld xmlns:a="http://schemas.openxmlformats.org/drawingml/2006/main" xmlns:r="http://schemas.openxmlformats.org/officeDocument/2006/relationships" xmlns:p="http://schemas.openxmlformats.org/presentationml/2006/main">
   <p:cSld>
     <p:bg>
       <p:bgPr>
         <a:solidFill>
           <a:srgbClr val="FF8F60"/>
         </a:solidFill>
+        <a:effectLst/>
       </p:bgPr>
     </p:bg>
     <p:spTree>
       <p:nvGrpSpPr>
-        <p:cNvPr id="127" name="Shape 127"/>
+        <p:cNvPr id="1" name="Shape 127"/>
         <p:cNvGrpSpPr/>
         <p:nvPr/>
       </p:nvGrpSpPr>
@@ -6483,7 +6884,9 @@
       <p:sp>
         <p:nvSpPr>
           <p:cNvPr id="128" name="Google Shape;128;p10"/>
-          <p:cNvSpPr txBox="1"/>
+          <p:cNvSpPr txBox="1">
+            <a:spLocks noGrp="1"/>
+          </p:cNvSpPr>
           <p:nvPr>
             <p:ph type="ctrTitle"/>
           </p:nvPr>
@@ -6502,12 +6905,12 @@
           </a:ln>
         </p:spPr>
         <p:txBody>
-          <a:bodyPr anchorCtr="0" anchor="t" bIns="91425" lIns="91425" spcFirstLastPara="1" rIns="91425" wrap="square" tIns="91425">
+          <a:bodyPr spcFirstLastPara="1" wrap="square" lIns="91425" tIns="91425" rIns="91425" bIns="91425" anchor="t" anchorCtr="0">
             <a:spAutoFit/>
           </a:bodyPr>
           <a:lstStyle/>
           <a:p>
-            <a:pPr indent="0" lvl="0" marL="0" marR="0" rtl="0" algn="ctr">
+            <a:pPr marL="0" marR="0" lvl="0" indent="0" algn="ctr" rtl="0">
               <a:lnSpc>
                 <a:spcPct val="100000"/>
               </a:lnSpc>
@@ -6525,7 +6928,7 @@
               <a:buNone/>
             </a:pPr>
             <a:r>
-              <a:rPr b="0" i="0" lang="en" sz="4800" u="none" cap="none" strike="noStrike">
+              <a:rPr lang="en" sz="4800" b="0" i="0" u="none" strike="noStrike" cap="none">
                 <a:solidFill>
                   <a:srgbClr val="1A1A1A"/>
                 </a:solidFill>
@@ -6536,7 +6939,7 @@
               </a:rPr>
               <a:t>¡Gracias      por acompañarnos!</a:t>
             </a:r>
-            <a:endParaRPr b="0" i="0" sz="4800" u="none" cap="none" strike="noStrike">
+            <a:endParaRPr sz="4800" b="0" i="0" u="none" strike="noStrike" cap="none">
               <a:solidFill>
                 <a:srgbClr val="1A1A1A"/>
               </a:solidFill>
@@ -6558,7 +6961,7 @@
           <a:blip r:embed="rId3">
             <a:alphaModFix/>
           </a:blip>
-          <a:srcRect b="0" l="0" r="0" t="0"/>
+          <a:srcRect/>
           <a:stretch/>
         </p:blipFill>
         <p:spPr>
@@ -6585,7 +6988,7 @@
           <a:blip r:embed="rId4">
             <a:alphaModFix/>
           </a:blip>
-          <a:srcRect b="0" l="0" r="0" t="0"/>
+          <a:srcRect/>
           <a:stretch/>
         </p:blipFill>
         <p:spPr>
@@ -6622,12 +7025,12 @@
           </a:ln>
         </p:spPr>
         <p:txBody>
-          <a:bodyPr anchorCtr="0" anchor="t" bIns="91425" lIns="91425" spcFirstLastPara="1" rIns="91425" wrap="square" tIns="91425">
+          <a:bodyPr spcFirstLastPara="1" wrap="square" lIns="91425" tIns="91425" rIns="91425" bIns="91425" anchor="t" anchorCtr="0">
             <a:spAutoFit/>
           </a:bodyPr>
           <a:lstStyle/>
           <a:p>
-            <a:pPr indent="0" lvl="0" marL="0" marR="0" rtl="0" algn="ctr">
+            <a:pPr marL="0" marR="0" lvl="0" indent="0" algn="ctr" rtl="0">
               <a:lnSpc>
                 <a:spcPct val="115000"/>
               </a:lnSpc>
@@ -6645,7 +7048,7 @@
               <a:buNone/>
             </a:pPr>
             <a:r>
-              <a:rPr b="0" i="0" lang="en" sz="1400" u="none" cap="none" strike="noStrike">
+              <a:rPr lang="en" sz="1400" b="0" i="0" u="none" strike="noStrike" cap="none">
                 <a:solidFill>
                   <a:srgbClr val="1A1A1A"/>
                 </a:solidFill>
@@ -6657,7 +7060,7 @@
               <a:t>Les deseo lo mejor en su viaje de aprendizaje de Python. </a:t>
             </a:r>
             <a:br>
-              <a:rPr b="0" i="0" lang="en" sz="1400" u="none" cap="none" strike="noStrike">
+              <a:rPr lang="en" sz="1400" b="0" i="0" u="none" strike="noStrike" cap="none">
                 <a:solidFill>
                   <a:srgbClr val="1A1A1A"/>
                 </a:solidFill>
@@ -6668,7 +7071,7 @@
               </a:rPr>
             </a:br>
             <a:r>
-              <a:rPr b="0" i="0" lang="en" sz="1400" u="none" cap="none" strike="noStrike">
+              <a:rPr lang="en" sz="1400" b="0" i="0" u="none" strike="noStrike" cap="none">
                 <a:solidFill>
                   <a:srgbClr val="1A1A1A"/>
                 </a:solidFill>
@@ -6679,7 +7082,7 @@
               </a:rPr>
               <a:t>¡Que esta sea la puerta de entrada a un mundo de posibilidades!</a:t>
             </a:r>
-            <a:endParaRPr b="0" i="0" sz="1400" u="none" cap="none" strike="noStrike">
+            <a:endParaRPr sz="1400" b="0" i="0" u="none" strike="noStrike" cap="none">
               <a:solidFill>
                 <a:srgbClr val="1A1A1A"/>
               </a:solidFill>
@@ -6700,18 +7103,246 @@
 </file>
 
 <file path=ppt/slides/slide2.xml><?xml version="1.0" encoding="utf-8"?>
-<p:sld xmlns:a="http://schemas.openxmlformats.org/drawingml/2006/main" xmlns:r="http://schemas.openxmlformats.org/officeDocument/2006/relationships" xmlns:mc="http://schemas.openxmlformats.org/markup-compatibility/2006" xmlns:mv="urn:schemas-microsoft-com:mac:vml" xmlns:p="http://schemas.openxmlformats.org/presentationml/2006/main" xmlns:c="http://schemas.openxmlformats.org/drawingml/2006/chart" xmlns:dgm="http://schemas.openxmlformats.org/drawingml/2006/diagram" xmlns:o="urn:schemas-microsoft-com:office:office" xmlns:v="urn:schemas-microsoft-com:vml" xmlns:pvml="urn:schemas-microsoft-com:office:powerpoint" xmlns:com="http://schemas.openxmlformats.org/drawingml/2006/compatibility" xmlns:p14="http://schemas.microsoft.com/office/powerpoint/2010/main" xmlns:p15="http://schemas.microsoft.com/office/powerpoint/2012/main" xmlns:ahyp="http://schemas.microsoft.com/office/drawing/2018/hyperlinkcolor">
+<p:sld xmlns:a="http://schemas.openxmlformats.org/drawingml/2006/main" xmlns:r="http://schemas.openxmlformats.org/officeDocument/2006/relationships" xmlns:p="http://schemas.openxmlformats.org/presentationml/2006/main">
+  <p:cSld>
+    <p:spTree>
+      <p:nvGrpSpPr>
+        <p:cNvPr id="1" name="Shape 68"/>
+        <p:cNvGrpSpPr/>
+        <p:nvPr/>
+      </p:nvGrpSpPr>
+      <p:grpSpPr>
+        <a:xfrm>
+          <a:off x="0" y="0"/>
+          <a:ext cx="0" cy="0"/>
+          <a:chOff x="0" y="0"/>
+          <a:chExt cx="0" cy="0"/>
+        </a:xfrm>
+      </p:grpSpPr>
+      <p:pic>
+        <p:nvPicPr>
+          <p:cNvPr id="69" name="Google Shape;69;p18"/>
+          <p:cNvPicPr preferRelativeResize="0"/>
+          <p:nvPr/>
+        </p:nvPicPr>
+        <p:blipFill>
+          <a:blip r:embed="rId3">
+            <a:alphaModFix/>
+          </a:blip>
+          <a:stretch>
+            <a:fillRect/>
+          </a:stretch>
+        </p:blipFill>
+        <p:spPr>
+          <a:xfrm>
+            <a:off x="228600" y="228600"/>
+            <a:ext cx="866775" cy="194225"/>
+          </a:xfrm>
+          <a:prstGeom prst="rect">
+            <a:avLst/>
+          </a:prstGeom>
+          <a:noFill/>
+          <a:ln>
+            <a:noFill/>
+          </a:ln>
+        </p:spPr>
+      </p:pic>
+      <p:sp>
+        <p:nvSpPr>
+          <p:cNvPr id="70" name="Google Shape;70;p18"/>
+          <p:cNvSpPr txBox="1">
+            <a:spLocks noGrp="1"/>
+          </p:cNvSpPr>
+          <p:nvPr>
+            <p:ph type="ctrTitle"/>
+          </p:nvPr>
+        </p:nvSpPr>
+        <p:spPr>
+          <a:xfrm>
+            <a:off x="96875" y="424975"/>
+            <a:ext cx="8520600" cy="800400"/>
+          </a:xfrm>
+          <a:prstGeom prst="rect">
+            <a:avLst/>
+          </a:prstGeom>
+          <a:noFill/>
+          <a:ln>
+            <a:noFill/>
+          </a:ln>
+        </p:spPr>
+        <p:txBody>
+          <a:bodyPr spcFirstLastPara="1" wrap="square" lIns="91425" tIns="91425" rIns="91425" bIns="91425" anchor="t" anchorCtr="0">
+            <a:spAutoFit/>
+          </a:bodyPr>
+          <a:lstStyle/>
+          <a:p>
+            <a:pPr marL="0" lvl="0" indent="0" algn="l" rtl="0">
+              <a:spcBef>
+                <a:spcPts val="0"/>
+              </a:spcBef>
+              <a:spcAft>
+                <a:spcPts val="0"/>
+              </a:spcAft>
+              <a:buNone/>
+            </a:pPr>
+            <a:r>
+              <a:rPr lang="en" sz="4000">
+                <a:solidFill>
+                  <a:srgbClr val="1A1A1A"/>
+                </a:solidFill>
+                <a:latin typeface="Inter ExtraBold"/>
+                <a:ea typeface="Inter ExtraBold"/>
+                <a:cs typeface="Inter ExtraBold"/>
+                <a:sym typeface="Inter ExtraBold"/>
+              </a:rPr>
+              <a:t>Speaker</a:t>
+            </a:r>
+            <a:endParaRPr sz="4000">
+              <a:solidFill>
+                <a:srgbClr val="1A1A1A"/>
+              </a:solidFill>
+              <a:latin typeface="Inter ExtraBold"/>
+              <a:ea typeface="Inter ExtraBold"/>
+              <a:cs typeface="Inter ExtraBold"/>
+              <a:sym typeface="Inter ExtraBold"/>
+            </a:endParaRPr>
+          </a:p>
+        </p:txBody>
+      </p:sp>
+      <p:sp>
+        <p:nvSpPr>
+          <p:cNvPr id="71" name="Google Shape;71;p18"/>
+          <p:cNvSpPr txBox="1">
+            <a:spLocks noGrp="1"/>
+          </p:cNvSpPr>
+          <p:nvPr>
+            <p:ph type="ctrTitle" idx="2"/>
+          </p:nvPr>
+        </p:nvSpPr>
+        <p:spPr>
+          <a:xfrm>
+            <a:off x="188775" y="4206900"/>
+            <a:ext cx="4265100" cy="708000"/>
+          </a:xfrm>
+          <a:prstGeom prst="rect">
+            <a:avLst/>
+          </a:prstGeom>
+          <a:noFill/>
+          <a:ln>
+            <a:noFill/>
+          </a:ln>
+        </p:spPr>
+        <p:txBody>
+          <a:bodyPr spcFirstLastPara="1" wrap="square" lIns="0" tIns="0" rIns="0" bIns="0" anchor="t" anchorCtr="0">
+            <a:spAutoFit/>
+          </a:bodyPr>
+          <a:lstStyle/>
+          <a:p>
+            <a:pPr marL="0" lvl="0" indent="0" algn="l" rtl="0">
+              <a:spcBef>
+                <a:spcPts val="0"/>
+              </a:spcBef>
+              <a:spcAft>
+                <a:spcPts val="0"/>
+              </a:spcAft>
+              <a:buNone/>
+            </a:pPr>
+            <a:r>
+              <a:rPr lang="en" sz="3200" dirty="0">
+                <a:solidFill>
+                  <a:srgbClr val="1A1A1A"/>
+                </a:solidFill>
+                <a:latin typeface="Inter ExtraBold"/>
+                <a:ea typeface="Inter ExtraBold"/>
+                <a:cs typeface="Inter ExtraBold"/>
+                <a:sym typeface="Inter ExtraBold"/>
+              </a:rPr>
+              <a:t>Leyton Jean Piere</a:t>
+            </a:r>
+            <a:br>
+              <a:rPr lang="en" sz="3200" dirty="0">
+                <a:solidFill>
+                  <a:srgbClr val="1A1A1A"/>
+                </a:solidFill>
+                <a:latin typeface="Inter ExtraBold"/>
+                <a:ea typeface="Inter ExtraBold"/>
+                <a:cs typeface="Inter ExtraBold"/>
+                <a:sym typeface="Inter ExtraBold"/>
+              </a:rPr>
+            </a:br>
+            <a:r>
+              <a:rPr lang="en" sz="1400" dirty="0">
+                <a:solidFill>
+                  <a:srgbClr val="1A1A1A"/>
+                </a:solidFill>
+                <a:latin typeface="Inter"/>
+                <a:ea typeface="Inter"/>
+                <a:cs typeface="Inter"/>
+                <a:sym typeface="Inter"/>
+              </a:rPr>
+              <a:t>Tutor</a:t>
+            </a:r>
+            <a:endParaRPr sz="1800" dirty="0">
+              <a:solidFill>
+                <a:srgbClr val="1A1A1A"/>
+              </a:solidFill>
+              <a:latin typeface="Inter ExtraBold"/>
+              <a:ea typeface="Inter ExtraBold"/>
+              <a:cs typeface="Inter ExtraBold"/>
+              <a:sym typeface="Inter ExtraBold"/>
+            </a:endParaRPr>
+          </a:p>
+        </p:txBody>
+      </p:sp>
+      <p:pic>
+        <p:nvPicPr>
+          <p:cNvPr id="72" name="Google Shape;72;p18"/>
+          <p:cNvPicPr preferRelativeResize="0"/>
+          <p:nvPr/>
+        </p:nvPicPr>
+        <p:blipFill>
+          <a:blip r:embed="rId4"/>
+          <a:srcRect l="4836" t="5470" r="2404" b="32805"/>
+          <a:stretch/>
+        </p:blipFill>
+        <p:spPr>
+          <a:xfrm>
+            <a:off x="5409525" y="1139398"/>
+            <a:ext cx="3545700" cy="3545700"/>
+          </a:xfrm>
+          <a:prstGeom prst="roundRect">
+            <a:avLst>
+              <a:gd name="adj" fmla="val 4772"/>
+            </a:avLst>
+          </a:prstGeom>
+          <a:noFill/>
+          <a:ln>
+            <a:noFill/>
+          </a:ln>
+        </p:spPr>
+      </p:pic>
+    </p:spTree>
+  </p:cSld>
+  <p:clrMapOvr>
+    <a:masterClrMapping/>
+  </p:clrMapOvr>
+</p:sld>
+</file>
+
+<file path=ppt/slides/slide3.xml><?xml version="1.0" encoding="utf-8"?>
+<p:sld xmlns:a="http://schemas.openxmlformats.org/drawingml/2006/main" xmlns:r="http://schemas.openxmlformats.org/officeDocument/2006/relationships" xmlns:p="http://schemas.openxmlformats.org/presentationml/2006/main">
   <p:cSld>
     <p:bg>
       <p:bgPr>
         <a:solidFill>
           <a:srgbClr val="F2F1EE"/>
         </a:solidFill>
+        <a:effectLst/>
       </p:bgPr>
     </p:bg>
     <p:spTree>
       <p:nvGrpSpPr>
-        <p:cNvPr id="38" name="Shape 38"/>
+        <p:cNvPr id="1" name="Shape 38"/>
         <p:cNvGrpSpPr/>
         <p:nvPr/>
       </p:nvGrpSpPr>
@@ -6733,7 +7364,7 @@
           <a:blip r:embed="rId3">
             <a:alphaModFix/>
           </a:blip>
-          <a:srcRect b="0" l="0" r="0" t="0"/>
+          <a:srcRect/>
           <a:stretch/>
         </p:blipFill>
         <p:spPr>
@@ -6753,7 +7384,9 @@
       <p:sp>
         <p:nvSpPr>
           <p:cNvPr id="40" name="Google Shape;40;p2"/>
-          <p:cNvSpPr txBox="1"/>
+          <p:cNvSpPr txBox="1">
+            <a:spLocks noGrp="1"/>
+          </p:cNvSpPr>
           <p:nvPr>
             <p:ph type="ctrTitle"/>
           </p:nvPr>
@@ -6772,12 +7405,12 @@
           </a:ln>
         </p:spPr>
         <p:txBody>
-          <a:bodyPr anchorCtr="0" anchor="t" bIns="91425" lIns="91425" spcFirstLastPara="1" rIns="91425" wrap="square" tIns="91425">
+          <a:bodyPr spcFirstLastPara="1" wrap="square" lIns="91425" tIns="91425" rIns="91425" bIns="91425" anchor="t" anchorCtr="0">
             <a:spAutoFit/>
           </a:bodyPr>
           <a:lstStyle/>
           <a:p>
-            <a:pPr indent="0" lvl="0" marL="0" marR="0" rtl="0" algn="l">
+            <a:pPr marL="0" marR="0" lvl="0" indent="0" algn="l" rtl="0">
               <a:lnSpc>
                 <a:spcPct val="100000"/>
               </a:lnSpc>
@@ -6795,7 +7428,7 @@
               <a:buNone/>
             </a:pPr>
             <a:r>
-              <a:rPr b="0" i="0" lang="en" sz="4000" u="none" cap="none" strike="noStrike">
+              <a:rPr lang="en" sz="4000" b="0" i="0" u="none" strike="noStrike" cap="none">
                 <a:solidFill>
                   <a:srgbClr val="1A1A1A"/>
                 </a:solidFill>
@@ -6806,7 +7439,7 @@
               </a:rPr>
               <a:t>Agenda para hoy</a:t>
             </a:r>
-            <a:endParaRPr b="0" i="0" sz="4000" u="none" cap="none" strike="noStrike">
+            <a:endParaRPr sz="4000" b="0" i="0" u="none" strike="noStrike" cap="none">
               <a:solidFill>
                 <a:srgbClr val="1A1A1A"/>
               </a:solidFill>
@@ -6831,7 +7464,7 @@
           </a:xfrm>
           <a:prstGeom prst="roundRect">
             <a:avLst>
-              <a:gd fmla="val 25478" name="adj"/>
+              <a:gd name="adj" fmla="val 25478"/>
             </a:avLst>
           </a:prstGeom>
           <a:solidFill>
@@ -6842,12 +7475,12 @@
           </a:ln>
         </p:spPr>
         <p:txBody>
-          <a:bodyPr anchorCtr="0" anchor="ctr" bIns="0" lIns="91425" spcFirstLastPara="1" rIns="91425" wrap="square" tIns="0">
+          <a:bodyPr spcFirstLastPara="1" wrap="square" lIns="91425" tIns="0" rIns="91425" bIns="0" anchor="ctr" anchorCtr="0">
             <a:noAutofit/>
           </a:bodyPr>
           <a:lstStyle/>
           <a:p>
-            <a:pPr indent="0" lvl="0" marL="0" marR="0" rtl="0" algn="l">
+            <a:pPr marL="0" marR="0" lvl="0" indent="0" algn="l" rtl="0">
               <a:lnSpc>
                 <a:spcPct val="100000"/>
               </a:lnSpc>
@@ -6865,7 +7498,7 @@
               <a:buNone/>
             </a:pPr>
             <a:r>
-              <a:rPr b="0" i="0" lang="en" sz="1600" u="none" cap="none" strike="noStrike">
+              <a:rPr lang="en" sz="1600" b="0" i="0" u="none" strike="noStrike" cap="none">
                 <a:solidFill>
                   <a:srgbClr val="000000"/>
                 </a:solidFill>
@@ -6876,7 +7509,7 @@
               </a:rPr>
               <a:t>1. Revisión de teoría</a:t>
             </a:r>
-            <a:endParaRPr b="0" i="0" sz="1600" u="none" cap="none" strike="noStrike">
+            <a:endParaRPr sz="1600" b="0" i="0" u="none" strike="noStrike" cap="none">
               <a:solidFill>
                 <a:srgbClr val="000000"/>
               </a:solidFill>
@@ -6887,7 +7520,7 @@
             </a:endParaRPr>
           </a:p>
           <a:p>
-            <a:pPr indent="-279400" lvl="0" marL="457200" marR="0" rtl="0" algn="l">
+            <a:pPr marL="457200" marR="0" lvl="0" indent="-279400" algn="l" rtl="0">
               <a:lnSpc>
                 <a:spcPct val="100000"/>
               </a:lnSpc>
@@ -6905,7 +7538,7 @@
               <a:buChar char="●"/>
             </a:pPr>
             <a:r>
-              <a:rPr b="0" i="0" lang="en" sz="800" u="none" cap="none" strike="noStrike">
+              <a:rPr lang="en" sz="800" b="0" i="0" u="none" strike="noStrike" cap="none">
                 <a:solidFill>
                   <a:schemeClr val="dk1"/>
                 </a:solidFill>
@@ -6916,7 +7549,7 @@
               </a:rPr>
               <a:t>Variables y tipos de datos</a:t>
             </a:r>
-            <a:endParaRPr b="0" i="0" sz="800" u="none" cap="none" strike="noStrike">
+            <a:endParaRPr sz="800" b="0" i="0" u="none" strike="noStrike" cap="none">
               <a:solidFill>
                 <a:schemeClr val="dk1"/>
               </a:solidFill>
@@ -6927,7 +7560,7 @@
             </a:endParaRPr>
           </a:p>
           <a:p>
-            <a:pPr indent="-279400" lvl="0" marL="457200" marR="0" rtl="0" algn="l">
+            <a:pPr marL="457200" marR="0" lvl="0" indent="-279400" algn="l" rtl="0">
               <a:lnSpc>
                 <a:spcPct val="100000"/>
               </a:lnSpc>
@@ -6945,7 +7578,7 @@
               <a:buChar char="●"/>
             </a:pPr>
             <a:r>
-              <a:rPr b="0" i="0" lang="en" sz="800" u="none" cap="none" strike="noStrike">
+              <a:rPr lang="en" sz="800" b="0" i="0" u="none" strike="noStrike" cap="none">
                 <a:solidFill>
                   <a:schemeClr val="dk1"/>
                 </a:solidFill>
@@ -6956,7 +7589,7 @@
               </a:rPr>
               <a:t>Oper. aritméticas y errores</a:t>
             </a:r>
-            <a:endParaRPr b="0" i="0" sz="800" u="none" cap="none" strike="noStrike">
+            <a:endParaRPr sz="800" b="0" i="0" u="none" strike="noStrike" cap="none">
               <a:solidFill>
                 <a:schemeClr val="dk1"/>
               </a:solidFill>
@@ -6967,7 +7600,7 @@
             </a:endParaRPr>
           </a:p>
           <a:p>
-            <a:pPr indent="-279400" lvl="0" marL="457200" marR="0" rtl="0" algn="l">
+            <a:pPr marL="457200" marR="0" lvl="0" indent="-279400" algn="l" rtl="0">
               <a:lnSpc>
                 <a:spcPct val="100000"/>
               </a:lnSpc>
@@ -7007,7 +7640,7 @@
             </a:endParaRPr>
           </a:p>
           <a:p>
-            <a:pPr indent="-279400" lvl="0" marL="457200" marR="0" rtl="0" algn="l">
+            <a:pPr marL="457200" marR="0" lvl="0" indent="-279400" algn="l" rtl="0">
               <a:lnSpc>
                 <a:spcPct val="100000"/>
               </a:lnSpc>
@@ -7084,7 +7717,7 @@
           </a:xfrm>
           <a:prstGeom prst="roundRect">
             <a:avLst>
-              <a:gd fmla="val 25478" name="adj"/>
+              <a:gd name="adj" fmla="val 25478"/>
             </a:avLst>
           </a:prstGeom>
           <a:solidFill>
@@ -7095,12 +7728,12 @@
           </a:ln>
         </p:spPr>
         <p:txBody>
-          <a:bodyPr anchorCtr="0" anchor="ctr" bIns="0" lIns="91425" spcFirstLastPara="1" rIns="91425" wrap="square" tIns="0">
+          <a:bodyPr spcFirstLastPara="1" wrap="square" lIns="91425" tIns="0" rIns="91425" bIns="0" anchor="ctr" anchorCtr="0">
             <a:noAutofit/>
           </a:bodyPr>
           <a:lstStyle/>
           <a:p>
-            <a:pPr indent="0" lvl="0" marL="0" marR="0" rtl="0" algn="l">
+            <a:pPr marL="0" marR="0" lvl="0" indent="0" algn="l" rtl="0">
               <a:lnSpc>
                 <a:spcPct val="100000"/>
               </a:lnSpc>
@@ -7118,7 +7751,7 @@
               <a:buNone/>
             </a:pPr>
             <a:r>
-              <a:rPr b="0" i="0" lang="en" sz="1600" u="none" cap="none" strike="noStrike">
+              <a:rPr lang="en" sz="1600" b="0" i="0" u="none" strike="noStrike" cap="none">
                 <a:solidFill>
                   <a:srgbClr val="000000"/>
                 </a:solidFill>
@@ -7129,7 +7762,7 @@
               </a:rPr>
               <a:t>2. Codificando juntos + Quiz!</a:t>
             </a:r>
-            <a:endParaRPr b="0" i="0" sz="1600" u="none" cap="none" strike="noStrike">
+            <a:endParaRPr sz="1600" b="0" i="0" u="none" strike="noStrike" cap="none">
               <a:solidFill>
                 <a:srgbClr val="000000"/>
               </a:solidFill>
@@ -7154,7 +7787,7 @@
           </a:xfrm>
           <a:prstGeom prst="roundRect">
             <a:avLst>
-              <a:gd fmla="val 25478" name="adj"/>
+              <a:gd name="adj" fmla="val 25478"/>
             </a:avLst>
           </a:prstGeom>
           <a:solidFill>
@@ -7165,12 +7798,12 @@
           </a:ln>
         </p:spPr>
         <p:txBody>
-          <a:bodyPr anchorCtr="0" anchor="ctr" bIns="0" lIns="91425" spcFirstLastPara="1" rIns="91425" wrap="square" tIns="0">
+          <a:bodyPr spcFirstLastPara="1" wrap="square" lIns="91425" tIns="0" rIns="91425" bIns="0" anchor="ctr" anchorCtr="0">
             <a:noAutofit/>
           </a:bodyPr>
           <a:lstStyle/>
           <a:p>
-            <a:pPr indent="0" lvl="0" marL="0" marR="0" rtl="0" algn="l">
+            <a:pPr marL="0" marR="0" lvl="0" indent="0" algn="l" rtl="0">
               <a:lnSpc>
                 <a:spcPct val="100000"/>
               </a:lnSpc>
@@ -7197,7 +7830,7 @@
               <a:t>3</a:t>
             </a:r>
             <a:r>
-              <a:rPr b="0" i="0" lang="en" sz="1600" u="none" cap="none" strike="noStrike">
+              <a:rPr lang="en" sz="1600" b="0" i="0" u="none" strike="noStrike" cap="none">
                 <a:solidFill>
                   <a:srgbClr val="000000"/>
                 </a:solidFill>
@@ -7208,7 +7841,7 @@
               </a:rPr>
               <a:t>. Preguntas</a:t>
             </a:r>
-            <a:endParaRPr b="0" i="0" sz="1600" u="none" cap="none" strike="noStrike">
+            <a:endParaRPr sz="1600" b="0" i="0" u="none" strike="noStrike" cap="none">
               <a:solidFill>
                 <a:srgbClr val="000000"/>
               </a:solidFill>
@@ -7230,7 +7863,7 @@
           <a:blip r:embed="rId4">
             <a:alphaModFix/>
           </a:blip>
-          <a:srcRect b="0" l="0" r="0" t="0"/>
+          <a:srcRect/>
           <a:stretch/>
         </p:blipFill>
         <p:spPr>
@@ -7257,7 +7890,7 @@
           <a:blip r:embed="rId5">
             <a:alphaModFix/>
           </a:blip>
-          <a:srcRect b="0" l="0" r="0" t="0"/>
+          <a:srcRect/>
           <a:stretch/>
         </p:blipFill>
         <p:spPr>
@@ -7284,7 +7917,7 @@
           <a:blip r:embed="rId6">
             <a:alphaModFix/>
           </a:blip>
-          <a:srcRect b="0" l="0" r="0" t="0"/>
+          <a:srcRect/>
           <a:stretch/>
         </p:blipFill>
         <p:spPr>
@@ -7311,7 +7944,7 @@
           <a:blip r:embed="rId5">
             <a:alphaModFix/>
           </a:blip>
-          <a:srcRect b="0" l="0" r="0" t="0"/>
+          <a:srcRect/>
           <a:stretch/>
         </p:blipFill>
         <p:spPr>
@@ -7336,19 +7969,20 @@
 </p:sld>
 </file>
 
-<file path=ppt/slides/slide3.xml><?xml version="1.0" encoding="utf-8"?>
-<p:sld xmlns:a="http://schemas.openxmlformats.org/drawingml/2006/main" xmlns:r="http://schemas.openxmlformats.org/officeDocument/2006/relationships" xmlns:mc="http://schemas.openxmlformats.org/markup-compatibility/2006" xmlns:mv="urn:schemas-microsoft-com:mac:vml" xmlns:p="http://schemas.openxmlformats.org/presentationml/2006/main" xmlns:c="http://schemas.openxmlformats.org/drawingml/2006/chart" xmlns:dgm="http://schemas.openxmlformats.org/drawingml/2006/diagram" xmlns:o="urn:schemas-microsoft-com:office:office" xmlns:v="urn:schemas-microsoft-com:vml" xmlns:pvml="urn:schemas-microsoft-com:office:powerpoint" xmlns:com="http://schemas.openxmlformats.org/drawingml/2006/compatibility" xmlns:p14="http://schemas.microsoft.com/office/powerpoint/2010/main" xmlns:p15="http://schemas.microsoft.com/office/powerpoint/2012/main" xmlns:ahyp="http://schemas.microsoft.com/office/drawing/2018/hyperlinkcolor">
+<file path=ppt/slides/slide4.xml><?xml version="1.0" encoding="utf-8"?>
+<p:sld xmlns:a="http://schemas.openxmlformats.org/drawingml/2006/main" xmlns:r="http://schemas.openxmlformats.org/officeDocument/2006/relationships" xmlns:p="http://schemas.openxmlformats.org/presentationml/2006/main">
   <p:cSld>
     <p:bg>
       <p:bgPr>
         <a:solidFill>
           <a:srgbClr val="F2F1EE"/>
         </a:solidFill>
+        <a:effectLst/>
       </p:bgPr>
     </p:bg>
     <p:spTree>
       <p:nvGrpSpPr>
-        <p:cNvPr id="51" name="Shape 51"/>
+        <p:cNvPr id="1" name="Shape 51"/>
         <p:cNvGrpSpPr/>
         <p:nvPr/>
       </p:nvGrpSpPr>
@@ -7370,7 +8004,7 @@
           <a:blip r:embed="rId3">
             <a:alphaModFix/>
           </a:blip>
-          <a:srcRect b="0" l="0" r="0" t="0"/>
+          <a:srcRect/>
           <a:stretch/>
         </p:blipFill>
         <p:spPr>
@@ -7390,7 +8024,9 @@
       <p:sp>
         <p:nvSpPr>
           <p:cNvPr id="53" name="Google Shape;53;g2e433a42c2d_0_1"/>
-          <p:cNvSpPr txBox="1"/>
+          <p:cNvSpPr txBox="1">
+            <a:spLocks noGrp="1"/>
+          </p:cNvSpPr>
           <p:nvPr>
             <p:ph type="ctrTitle"/>
           </p:nvPr>
@@ -7409,12 +8045,12 @@
           </a:ln>
         </p:spPr>
         <p:txBody>
-          <a:bodyPr anchorCtr="0" anchor="t" bIns="91425" lIns="91425" spcFirstLastPara="1" rIns="91425" wrap="square" tIns="91425">
+          <a:bodyPr spcFirstLastPara="1" wrap="square" lIns="91425" tIns="91425" rIns="91425" bIns="91425" anchor="t" anchorCtr="0">
             <a:spAutoFit/>
           </a:bodyPr>
           <a:lstStyle/>
           <a:p>
-            <a:pPr indent="0" lvl="0" marL="0" marR="0" rtl="0" algn="l">
+            <a:pPr marL="0" marR="0" lvl="0" indent="0" algn="l" rtl="0">
               <a:lnSpc>
                 <a:spcPct val="100000"/>
               </a:lnSpc>
@@ -7443,7 +8079,7 @@
               </a:rPr>
               <a:t>Objetivos</a:t>
             </a:r>
-            <a:endParaRPr b="0" i="0" sz="4000" u="none" cap="none" strike="noStrike">
+            <a:endParaRPr sz="4000" b="0" i="0" u="none" strike="noStrike" cap="none">
               <a:solidFill>
                 <a:srgbClr val="1A1A1A"/>
               </a:solidFill>
@@ -7468,7 +8104,7 @@
           </a:xfrm>
           <a:prstGeom prst="roundRect">
             <a:avLst>
-              <a:gd fmla="val 25478" name="adj"/>
+              <a:gd name="adj" fmla="val 25478"/>
             </a:avLst>
           </a:prstGeom>
           <a:solidFill>
@@ -7479,12 +8115,12 @@
           </a:ln>
         </p:spPr>
         <p:txBody>
-          <a:bodyPr anchorCtr="0" anchor="ctr" bIns="0" lIns="91425" spcFirstLastPara="1" rIns="91425" wrap="square" tIns="0">
+          <a:bodyPr spcFirstLastPara="1" wrap="square" lIns="91425" tIns="0" rIns="91425" bIns="0" anchor="ctr" anchorCtr="0">
             <a:noAutofit/>
           </a:bodyPr>
           <a:lstStyle/>
           <a:p>
-            <a:pPr indent="0" lvl="0" marL="0" marR="0" rtl="0" algn="ctr">
+            <a:pPr marL="0" marR="0" lvl="0" indent="0" algn="ctr" rtl="0">
               <a:lnSpc>
                 <a:spcPct val="100000"/>
               </a:lnSpc>
@@ -7505,7 +8141,7 @@
               <a:t>Escribir y ejecutar código básico en </a:t>
             </a:r>
             <a:r>
-              <a:rPr b="1" lang="en" sz="1100">
+              <a:rPr lang="en" sz="1100" b="1">
                 <a:solidFill>
                   <a:schemeClr val="dk1"/>
                 </a:solidFill>
@@ -7521,7 +8157,7 @@
               <a:t>, aplicando </a:t>
             </a:r>
             <a:r>
-              <a:rPr b="1" lang="en" sz="1100">
+              <a:rPr lang="en" sz="1100" b="1">
                 <a:solidFill>
                   <a:schemeClr val="dk1"/>
                 </a:solidFill>
@@ -7561,7 +8197,7 @@
           </a:xfrm>
           <a:prstGeom prst="roundRect">
             <a:avLst>
-              <a:gd fmla="val 25478" name="adj"/>
+              <a:gd name="adj" fmla="val 25478"/>
             </a:avLst>
           </a:prstGeom>
           <a:solidFill>
@@ -7572,12 +8208,12 @@
           </a:ln>
         </p:spPr>
         <p:txBody>
-          <a:bodyPr anchorCtr="0" anchor="ctr" bIns="0" lIns="91425" spcFirstLastPara="1" rIns="91425" wrap="square" tIns="0">
+          <a:bodyPr spcFirstLastPara="1" wrap="square" lIns="91425" tIns="0" rIns="91425" bIns="0" anchor="ctr" anchorCtr="0">
             <a:noAutofit/>
           </a:bodyPr>
           <a:lstStyle/>
           <a:p>
-            <a:pPr indent="0" lvl="0" marL="0" marR="0" rtl="0" algn="ctr">
+            <a:pPr marL="0" marR="0" lvl="0" indent="0" algn="ctr" rtl="0">
               <a:lnSpc>
                 <a:spcPct val="100000"/>
               </a:lnSpc>
@@ -7603,7 +8239,7 @@
               <a:t>Participar en una </a:t>
             </a:r>
             <a:r>
-              <a:rPr b="1" lang="en" sz="1100">
+              <a:rPr lang="en" sz="1100" b="1">
                 <a:solidFill>
                   <a:schemeClr val="dk1"/>
                 </a:solidFill>
@@ -7619,7 +8255,7 @@
               <a:t> para resolver ejercicios en Python de manera estructurada y guiada, completando </a:t>
             </a:r>
             <a:r>
-              <a:rPr b="1" lang="en" sz="1100">
+              <a:rPr lang="en" sz="1100" b="1">
                 <a:solidFill>
                   <a:schemeClr val="dk1"/>
                 </a:solidFill>
@@ -7634,7 +8270,7 @@
               </a:rPr>
               <a:t>, aplicando los conceptos aprendidos de forma práctica y activa. 🚀</a:t>
             </a:r>
-            <a:endParaRPr b="0" i="0" sz="1600" u="none" cap="none" strike="noStrike">
+            <a:endParaRPr sz="1600" b="0" i="0" u="none" strike="noStrike" cap="none">
               <a:solidFill>
                 <a:srgbClr val="000000"/>
               </a:solidFill>
@@ -7656,7 +8292,7 @@
           <a:blip r:embed="rId4">
             <a:alphaModFix/>
           </a:blip>
-          <a:srcRect b="0" l="0" r="0" t="0"/>
+          <a:srcRect/>
           <a:stretch/>
         </p:blipFill>
         <p:spPr>
@@ -7683,7 +8319,7 @@
           <a:blip r:embed="rId5">
             <a:alphaModFix/>
           </a:blip>
-          <a:srcRect b="0" l="0" r="0" t="0"/>
+          <a:srcRect/>
           <a:stretch/>
         </p:blipFill>
         <p:spPr>
@@ -7710,7 +8346,7 @@
           <a:blip r:embed="rId6">
             <a:alphaModFix/>
           </a:blip>
-          <a:srcRect b="0" l="0" r="0" t="0"/>
+          <a:srcRect/>
           <a:stretch/>
         </p:blipFill>
         <p:spPr>
@@ -7735,19 +8371,20 @@
 </p:sld>
 </file>
 
-<file path=ppt/slides/slide4.xml><?xml version="1.0" encoding="utf-8"?>
-<p:sld xmlns:a="http://schemas.openxmlformats.org/drawingml/2006/main" xmlns:r="http://schemas.openxmlformats.org/officeDocument/2006/relationships" xmlns:mc="http://schemas.openxmlformats.org/markup-compatibility/2006" xmlns:mv="urn:schemas-microsoft-com:mac:vml" xmlns:p="http://schemas.openxmlformats.org/presentationml/2006/main" xmlns:c="http://schemas.openxmlformats.org/drawingml/2006/chart" xmlns:dgm="http://schemas.openxmlformats.org/drawingml/2006/diagram" xmlns:o="urn:schemas-microsoft-com:office:office" xmlns:v="urn:schemas-microsoft-com:vml" xmlns:pvml="urn:schemas-microsoft-com:office:powerpoint" xmlns:com="http://schemas.openxmlformats.org/drawingml/2006/compatibility" xmlns:p14="http://schemas.microsoft.com/office/powerpoint/2010/main" xmlns:p15="http://schemas.microsoft.com/office/powerpoint/2012/main" xmlns:ahyp="http://schemas.microsoft.com/office/drawing/2018/hyperlinkcolor" show="0">
+<file path=ppt/slides/slide5.xml><?xml version="1.0" encoding="utf-8"?>
+<p:sld xmlns:a="http://schemas.openxmlformats.org/drawingml/2006/main" xmlns:r="http://schemas.openxmlformats.org/officeDocument/2006/relationships" xmlns:p="http://schemas.openxmlformats.org/presentationml/2006/main" show="0">
   <p:cSld>
     <p:bg>
       <p:bgPr>
         <a:solidFill>
           <a:srgbClr val="F2F1EE"/>
         </a:solidFill>
+        <a:effectLst/>
       </p:bgPr>
     </p:bg>
     <p:spTree>
       <p:nvGrpSpPr>
-        <p:cNvPr id="62" name="Shape 62"/>
+        <p:cNvPr id="1" name="Shape 62"/>
         <p:cNvGrpSpPr/>
         <p:nvPr/>
       </p:nvGrpSpPr>
@@ -7769,7 +8406,7 @@
           <a:blip r:embed="rId3">
             <a:alphaModFix/>
           </a:blip>
-          <a:srcRect b="0" l="0" r="0" t="0"/>
+          <a:srcRect/>
           <a:stretch/>
         </p:blipFill>
         <p:spPr>
@@ -7789,7 +8426,9 @@
       <p:sp>
         <p:nvSpPr>
           <p:cNvPr id="64" name="Google Shape;64;p5"/>
-          <p:cNvSpPr txBox="1"/>
+          <p:cNvSpPr txBox="1">
+            <a:spLocks noGrp="1"/>
+          </p:cNvSpPr>
           <p:nvPr>
             <p:ph type="ctrTitle"/>
           </p:nvPr>
@@ -7808,12 +8447,12 @@
           </a:ln>
         </p:spPr>
         <p:txBody>
-          <a:bodyPr anchorCtr="0" anchor="t" bIns="91425" lIns="91425" spcFirstLastPara="1" rIns="91425" wrap="square" tIns="91425">
+          <a:bodyPr spcFirstLastPara="1" wrap="square" lIns="91425" tIns="91425" rIns="91425" bIns="91425" anchor="t" anchorCtr="0">
             <a:spAutoFit/>
           </a:bodyPr>
           <a:lstStyle/>
           <a:p>
-            <a:pPr indent="0" lvl="0" marL="0" marR="0" rtl="0" algn="l">
+            <a:pPr marL="0" marR="0" lvl="0" indent="0" algn="l" rtl="0">
               <a:lnSpc>
                 <a:spcPct val="100000"/>
               </a:lnSpc>
@@ -7831,7 +8470,7 @@
               <a:buNone/>
             </a:pPr>
             <a:r>
-              <a:rPr b="0" i="0" lang="en" sz="4000" u="none" cap="none" strike="noStrike">
+              <a:rPr lang="en" sz="4000" b="0" i="0" u="none" strike="noStrike" cap="none">
                 <a:solidFill>
                   <a:srgbClr val="1A1A1A"/>
                 </a:solidFill>
@@ -7842,7 +8481,7 @@
               </a:rPr>
               <a:t>Variables y tipos de datos</a:t>
             </a:r>
-            <a:endParaRPr b="0" i="0" sz="4000" u="none" cap="none" strike="noStrike">
+            <a:endParaRPr sz="4000" b="0" i="0" u="none" strike="noStrike" cap="none">
               <a:solidFill>
                 <a:srgbClr val="1A1A1A"/>
               </a:solidFill>
@@ -7867,7 +8506,7 @@
           </a:xfrm>
           <a:prstGeom prst="roundRect">
             <a:avLst>
-              <a:gd fmla="val 5630" name="adj"/>
+              <a:gd name="adj" fmla="val 5630"/>
             </a:avLst>
           </a:prstGeom>
           <a:solidFill>
@@ -7878,12 +8517,12 @@
           </a:ln>
         </p:spPr>
         <p:txBody>
-          <a:bodyPr anchorCtr="0" anchor="b" bIns="0" lIns="91425" spcFirstLastPara="1" rIns="91425" wrap="square" tIns="91425">
+          <a:bodyPr spcFirstLastPara="1" wrap="square" lIns="91425" tIns="91425" rIns="91425" bIns="0" anchor="b" anchorCtr="0">
             <a:noAutofit/>
           </a:bodyPr>
           <a:lstStyle/>
           <a:p>
-            <a:pPr indent="0" lvl="0" marL="0" marR="0" rtl="0" algn="l">
+            <a:pPr marL="0" marR="0" lvl="0" indent="0" algn="l" rtl="0">
               <a:lnSpc>
                 <a:spcPct val="115000"/>
               </a:lnSpc>
@@ -7901,7 +8540,7 @@
               <a:buNone/>
             </a:pPr>
             <a:r>
-              <a:rPr b="1" i="0" lang="en" sz="1600" u="none" cap="none" strike="noStrike">
+              <a:rPr lang="en" sz="1600" b="1" i="0" u="none" strike="noStrike" cap="none">
                 <a:solidFill>
                   <a:schemeClr val="dk1"/>
                 </a:solidFill>
@@ -7912,7 +8551,7 @@
               </a:rPr>
               <a:t>Variables</a:t>
             </a:r>
-            <a:endParaRPr b="1" i="0" sz="1600" u="none" cap="none" strike="noStrike">
+            <a:endParaRPr sz="1600" b="1" i="0" u="none" strike="noStrike" cap="none">
               <a:solidFill>
                 <a:schemeClr val="dk1"/>
               </a:solidFill>
@@ -7923,7 +8562,7 @@
             </a:endParaRPr>
           </a:p>
           <a:p>
-            <a:pPr indent="0" lvl="0" marL="0" marR="0" rtl="0" algn="l">
+            <a:pPr marL="0" marR="0" lvl="0" indent="0" algn="l" rtl="0">
               <a:lnSpc>
                 <a:spcPct val="115000"/>
               </a:lnSpc>
@@ -7941,7 +8580,7 @@
               <a:buNone/>
             </a:pPr>
             <a:r>
-              <a:rPr b="0" i="0" lang="en" sz="1200" u="none" cap="none" strike="noStrike">
+              <a:rPr lang="en" sz="1200" b="0" i="0" u="none" strike="noStrike" cap="none">
                 <a:solidFill>
                   <a:srgbClr val="1A1A1A"/>
                 </a:solidFill>
@@ -7952,7 +8591,7 @@
               </a:rPr>
               <a:t>Las variables son contenedores que permiten almacenar y manipular diferentes tipos de datos en Python. Siguen convenciones de nombramiento claras para facilitar su uso.</a:t>
             </a:r>
-            <a:endParaRPr b="1" i="0" sz="1600" u="none" cap="none" strike="noStrike">
+            <a:endParaRPr sz="1600" b="1" i="0" u="none" strike="noStrike" cap="none">
               <a:solidFill>
                 <a:srgbClr val="1A1A1A"/>
               </a:solidFill>
@@ -7977,7 +8616,7 @@
           </a:xfrm>
           <a:prstGeom prst="roundRect">
             <a:avLst>
-              <a:gd fmla="val 5630" name="adj"/>
+              <a:gd name="adj" fmla="val 5630"/>
             </a:avLst>
           </a:prstGeom>
           <a:solidFill>
@@ -7988,12 +8627,12 @@
           </a:ln>
         </p:spPr>
         <p:txBody>
-          <a:bodyPr anchorCtr="0" anchor="b" bIns="0" lIns="91425" spcFirstLastPara="1" rIns="91425" wrap="square" tIns="91425">
+          <a:bodyPr spcFirstLastPara="1" wrap="square" lIns="91425" tIns="91425" rIns="91425" bIns="0" anchor="b" anchorCtr="0">
             <a:noAutofit/>
           </a:bodyPr>
           <a:lstStyle/>
           <a:p>
-            <a:pPr indent="0" lvl="0" marL="0" marR="0" rtl="0" algn="l">
+            <a:pPr marL="0" marR="0" lvl="0" indent="0" algn="l" rtl="0">
               <a:lnSpc>
                 <a:spcPct val="115000"/>
               </a:lnSpc>
@@ -8011,7 +8650,7 @@
               <a:buNone/>
             </a:pPr>
             <a:r>
-              <a:rPr b="1" i="0" lang="en" sz="1600" u="none" cap="none" strike="noStrike">
+              <a:rPr lang="en" sz="1600" b="1" i="0" u="none" strike="noStrike" cap="none">
                 <a:solidFill>
                   <a:schemeClr val="dk1"/>
                 </a:solidFill>
@@ -8022,7 +8661,7 @@
               </a:rPr>
               <a:t>Tipos de datos</a:t>
             </a:r>
-            <a:endParaRPr b="1" i="0" sz="1600" u="none" cap="none" strike="noStrike">
+            <a:endParaRPr sz="1600" b="1" i="0" u="none" strike="noStrike" cap="none">
               <a:solidFill>
                 <a:schemeClr val="dk1"/>
               </a:solidFill>
@@ -8033,7 +8672,7 @@
             </a:endParaRPr>
           </a:p>
           <a:p>
-            <a:pPr indent="0" lvl="0" marL="0" marR="0" rtl="0" algn="l">
+            <a:pPr marL="0" marR="0" lvl="0" indent="0" algn="l" rtl="0">
               <a:lnSpc>
                 <a:spcPct val="115000"/>
               </a:lnSpc>
@@ -8051,7 +8690,7 @@
               <a:buNone/>
             </a:pPr>
             <a:r>
-              <a:rPr b="0" i="0" lang="en" sz="1200" u="none" cap="none" strike="noStrike">
+              <a:rPr lang="en" sz="1200" b="0" i="0" u="none" strike="noStrike" cap="none">
                 <a:solidFill>
                   <a:srgbClr val="1A1A1A"/>
                 </a:solidFill>
@@ -8062,7 +8701,7 @@
               </a:rPr>
               <a:t>Python admite varios tipos de datos, como enteros, flotantes, cadenas de texto y booleanos. Cada uno tiene sus propias características y usos específicos. Función: type(variable)</a:t>
             </a:r>
-            <a:endParaRPr b="1" i="0" sz="1600" u="none" cap="none" strike="noStrike">
+            <a:endParaRPr sz="1600" b="1" i="0" u="none" strike="noStrike" cap="none">
               <a:solidFill>
                 <a:srgbClr val="1A1A1A"/>
               </a:solidFill>
@@ -8087,7 +8726,7 @@
           </a:xfrm>
           <a:prstGeom prst="roundRect">
             <a:avLst>
-              <a:gd fmla="val 5630" name="adj"/>
+              <a:gd name="adj" fmla="val 5630"/>
             </a:avLst>
           </a:prstGeom>
           <a:solidFill>
@@ -8098,12 +8737,12 @@
           </a:ln>
         </p:spPr>
         <p:txBody>
-          <a:bodyPr anchorCtr="0" anchor="b" bIns="0" lIns="91425" spcFirstLastPara="1" rIns="91425" wrap="square" tIns="91425">
+          <a:bodyPr spcFirstLastPara="1" wrap="square" lIns="91425" tIns="91425" rIns="91425" bIns="0" anchor="b" anchorCtr="0">
             <a:noAutofit/>
           </a:bodyPr>
           <a:lstStyle/>
           <a:p>
-            <a:pPr indent="0" lvl="0" marL="0" marR="0" rtl="0" algn="l">
+            <a:pPr marL="0" marR="0" lvl="0" indent="0" algn="l" rtl="0">
               <a:lnSpc>
                 <a:spcPct val="115000"/>
               </a:lnSpc>
@@ -8121,7 +8760,7 @@
               <a:buNone/>
             </a:pPr>
             <a:r>
-              <a:rPr b="1" i="0" lang="en" sz="1600" u="none" cap="none" strike="noStrike">
+              <a:rPr lang="en" sz="1600" b="1" i="0" u="none" strike="noStrike" cap="none">
                 <a:solidFill>
                   <a:schemeClr val="dk1"/>
                 </a:solidFill>
@@ -8132,7 +8771,7 @@
               </a:rPr>
               <a:t>Conversión de tipos</a:t>
             </a:r>
-            <a:endParaRPr b="1" i="0" sz="1600" u="none" cap="none" strike="noStrike">
+            <a:endParaRPr sz="1600" b="1" i="0" u="none" strike="noStrike" cap="none">
               <a:solidFill>
                 <a:schemeClr val="dk1"/>
               </a:solidFill>
@@ -8143,7 +8782,7 @@
             </a:endParaRPr>
           </a:p>
           <a:p>
-            <a:pPr indent="0" lvl="0" marL="0" marR="0" rtl="0" algn="l">
+            <a:pPr marL="0" marR="0" lvl="0" indent="0" algn="l" rtl="0">
               <a:lnSpc>
                 <a:spcPct val="115000"/>
               </a:lnSpc>
@@ -8161,7 +8800,7 @@
               <a:buNone/>
             </a:pPr>
             <a:r>
-              <a:rPr b="0" i="0" lang="en" sz="1200" u="none" cap="none" strike="noStrike">
+              <a:rPr lang="en" sz="1200" b="0" i="0" u="none" strike="noStrike" cap="none">
                 <a:solidFill>
                   <a:srgbClr val="1A1A1A"/>
                 </a:solidFill>
@@ -8172,7 +8811,7 @@
               </a:rPr>
               <a:t>Cuando es necesario, podemos convertir entre diferentes tipos de datos utilizando funciones integradas como int(), float() y str(). Esto nos permite operar con los datos de manera flexible.</a:t>
             </a:r>
-            <a:endParaRPr b="1" i="0" sz="1600" u="none" cap="none" strike="noStrike">
+            <a:endParaRPr sz="1600" b="1" i="0" u="none" strike="noStrike" cap="none">
               <a:solidFill>
                 <a:srgbClr val="1A1A1A"/>
               </a:solidFill>
@@ -8194,7 +8833,7 @@
           <a:blip r:embed="rId4">
             <a:alphaModFix/>
           </a:blip>
-          <a:srcRect b="0" l="0" r="0" t="0"/>
+          <a:srcRect/>
           <a:stretch/>
         </p:blipFill>
         <p:spPr>
@@ -8221,7 +8860,7 @@
           <a:blip r:embed="rId5">
             <a:alphaModFix/>
           </a:blip>
-          <a:srcRect b="0" l="0" r="0" t="0"/>
+          <a:srcRect/>
           <a:stretch/>
         </p:blipFill>
         <p:spPr>
@@ -8248,7 +8887,7 @@
           <a:blip r:embed="rId6">
             <a:alphaModFix/>
           </a:blip>
-          <a:srcRect b="0" l="0" r="0" t="0"/>
+          <a:srcRect/>
           <a:stretch/>
         </p:blipFill>
         <p:spPr>
@@ -8273,19 +8912,20 @@
 </p:sld>
 </file>
 
-<file path=ppt/slides/slide5.xml><?xml version="1.0" encoding="utf-8"?>
-<p:sld xmlns:a="http://schemas.openxmlformats.org/drawingml/2006/main" xmlns:r="http://schemas.openxmlformats.org/officeDocument/2006/relationships" xmlns:mc="http://schemas.openxmlformats.org/markup-compatibility/2006" xmlns:mv="urn:schemas-microsoft-com:mac:vml" xmlns:p="http://schemas.openxmlformats.org/presentationml/2006/main" xmlns:c="http://schemas.openxmlformats.org/drawingml/2006/chart" xmlns:dgm="http://schemas.openxmlformats.org/drawingml/2006/diagram" xmlns:o="urn:schemas-microsoft-com:office:office" xmlns:v="urn:schemas-microsoft-com:vml" xmlns:pvml="urn:schemas-microsoft-com:office:powerpoint" xmlns:com="http://schemas.openxmlformats.org/drawingml/2006/compatibility" xmlns:p14="http://schemas.microsoft.com/office/powerpoint/2010/main" xmlns:p15="http://schemas.microsoft.com/office/powerpoint/2012/main" xmlns:ahyp="http://schemas.microsoft.com/office/drawing/2018/hyperlinkcolor" show="0">
+<file path=ppt/slides/slide6.xml><?xml version="1.0" encoding="utf-8"?>
+<p:sld xmlns:a="http://schemas.openxmlformats.org/drawingml/2006/main" xmlns:r="http://schemas.openxmlformats.org/officeDocument/2006/relationships" xmlns:p="http://schemas.openxmlformats.org/presentationml/2006/main" show="0">
   <p:cSld>
     <p:bg>
       <p:bgPr>
         <a:solidFill>
           <a:srgbClr val="F2F1EE"/>
         </a:solidFill>
+        <a:effectLst/>
       </p:bgPr>
     </p:bg>
     <p:spTree>
       <p:nvGrpSpPr>
-        <p:cNvPr id="74" name="Shape 74"/>
+        <p:cNvPr id="1" name="Shape 74"/>
         <p:cNvGrpSpPr/>
         <p:nvPr/>
       </p:nvGrpSpPr>
@@ -8307,7 +8947,7 @@
           <a:blip r:embed="rId3">
             <a:alphaModFix/>
           </a:blip>
-          <a:srcRect b="0" l="0" r="0" t="0"/>
+          <a:srcRect/>
           <a:stretch/>
         </p:blipFill>
         <p:spPr>
@@ -8327,7 +8967,9 @@
       <p:sp>
         <p:nvSpPr>
           <p:cNvPr id="76" name="Google Shape;76;p6"/>
-          <p:cNvSpPr txBox="1"/>
+          <p:cNvSpPr txBox="1">
+            <a:spLocks noGrp="1"/>
+          </p:cNvSpPr>
           <p:nvPr>
             <p:ph type="ctrTitle"/>
           </p:nvPr>
@@ -8346,12 +8988,12 @@
           </a:ln>
         </p:spPr>
         <p:txBody>
-          <a:bodyPr anchorCtr="0" anchor="t" bIns="91425" lIns="91425" spcFirstLastPara="1" rIns="91425" wrap="square" tIns="91425">
+          <a:bodyPr spcFirstLastPara="1" wrap="square" lIns="91425" tIns="91425" rIns="91425" bIns="91425" anchor="t" anchorCtr="0">
             <a:spAutoFit/>
           </a:bodyPr>
           <a:lstStyle/>
           <a:p>
-            <a:pPr indent="0" lvl="0" marL="0" marR="0" rtl="0" algn="l">
+            <a:pPr marL="0" marR="0" lvl="0" indent="0" algn="l" rtl="0">
               <a:lnSpc>
                 <a:spcPct val="100000"/>
               </a:lnSpc>
@@ -8369,7 +9011,7 @@
               <a:buNone/>
             </a:pPr>
             <a:r>
-              <a:rPr b="0" i="0" lang="en" sz="4000" u="none" cap="none" strike="noStrike">
+              <a:rPr lang="en" sz="4000" b="0" i="0" u="none" strike="noStrike" cap="none">
                 <a:solidFill>
                   <a:srgbClr val="1A1A1A"/>
                 </a:solidFill>
@@ -8380,7 +9022,7 @@
               </a:rPr>
               <a:t>Operaciones aritméticas y mensajes de error</a:t>
             </a:r>
-            <a:endParaRPr b="0" i="0" sz="4000" u="none" cap="none" strike="noStrike">
+            <a:endParaRPr sz="4000" b="0" i="0" u="none" strike="noStrike" cap="none">
               <a:solidFill>
                 <a:srgbClr val="1A1A1A"/>
               </a:solidFill>
@@ -8405,8 +9047,8 @@
           </a:xfrm>
           <a:prstGeom prst="snip2DiagRect">
             <a:avLst>
-              <a:gd fmla="val 0" name="adj1"/>
-              <a:gd fmla="val 9217" name="adj2"/>
+              <a:gd name="adj1" fmla="val 0"/>
+              <a:gd name="adj2" fmla="val 9217"/>
             </a:avLst>
           </a:prstGeom>
           <a:solidFill>
@@ -8417,12 +9059,12 @@
           </a:ln>
         </p:spPr>
         <p:txBody>
-          <a:bodyPr anchorCtr="0" anchor="t" bIns="274300" lIns="91425" spcFirstLastPara="1" rIns="91425" wrap="square" tIns="91425">
+          <a:bodyPr spcFirstLastPara="1" wrap="square" lIns="91425" tIns="91425" rIns="91425" bIns="274300" anchor="t" anchorCtr="0">
             <a:noAutofit/>
           </a:bodyPr>
           <a:lstStyle/>
           <a:p>
-            <a:pPr indent="0" lvl="0" marL="0" marR="0" rtl="0" algn="l">
+            <a:pPr marL="0" marR="0" lvl="0" indent="0" algn="l" rtl="0">
               <a:lnSpc>
                 <a:spcPct val="115000"/>
               </a:lnSpc>
@@ -8440,7 +9082,7 @@
               <a:buNone/>
             </a:pPr>
             <a:r>
-              <a:rPr b="1" i="0" lang="en" sz="1600" u="none" cap="none" strike="noStrike">
+              <a:rPr lang="en" sz="1600" b="1" i="0" u="none" strike="noStrike" cap="none">
                 <a:solidFill>
                   <a:schemeClr val="dk1"/>
                 </a:solidFill>
@@ -8451,7 +9093,7 @@
               </a:rPr>
               <a:t>Operaciones aritméticas</a:t>
             </a:r>
-            <a:endParaRPr b="1" i="0" sz="1600" u="none" cap="none" strike="noStrike">
+            <a:endParaRPr sz="1600" b="1" i="0" u="none" strike="noStrike" cap="none">
               <a:solidFill>
                 <a:schemeClr val="dk1"/>
               </a:solidFill>
@@ -8462,7 +9104,7 @@
             </a:endParaRPr>
           </a:p>
           <a:p>
-            <a:pPr indent="0" lvl="0" marL="0" marR="0" rtl="0" algn="l">
+            <a:pPr marL="0" marR="0" lvl="0" indent="0" algn="l" rtl="0">
               <a:lnSpc>
                 <a:spcPct val="115000"/>
               </a:lnSpc>
@@ -8480,7 +9122,7 @@
               <a:buNone/>
             </a:pPr>
             <a:r>
-              <a:rPr b="0" i="0" lang="en" sz="1200" u="none" cap="none" strike="noStrike">
+              <a:rPr lang="en" sz="1200" b="0" i="0" u="none" strike="noStrike" cap="none">
                 <a:solidFill>
                   <a:srgbClr val="1A1A1A"/>
                 </a:solidFill>
@@ -8491,7 +9133,7 @@
               </a:rPr>
               <a:t>Python permite realizar operaciones matemáticas básicas como suma (+), resta (-), multiplicación (*) y división (/). También admite operadores avanzados como potenciación (**) y módulo (%).</a:t>
             </a:r>
-            <a:endParaRPr b="0" i="0" sz="1200" u="none" cap="none" strike="noStrike">
+            <a:endParaRPr sz="1200" b="0" i="0" u="none" strike="noStrike" cap="none">
               <a:solidFill>
                 <a:srgbClr val="1A1A1A"/>
               </a:solidFill>
@@ -8516,7 +9158,7 @@
           </a:xfrm>
           <a:prstGeom prst="roundRect">
             <a:avLst>
-              <a:gd fmla="val 9118" name="adj"/>
+              <a:gd name="adj" fmla="val 9118"/>
             </a:avLst>
           </a:prstGeom>
           <a:solidFill>
@@ -8527,12 +9169,12 @@
           </a:ln>
         </p:spPr>
         <p:txBody>
-          <a:bodyPr anchorCtr="0" anchor="t" bIns="274300" lIns="182875" spcFirstLastPara="1" rIns="182875" wrap="square" tIns="91425">
+          <a:bodyPr spcFirstLastPara="1" wrap="square" lIns="182875" tIns="91425" rIns="182875" bIns="274300" anchor="t" anchorCtr="0">
             <a:noAutofit/>
           </a:bodyPr>
           <a:lstStyle/>
           <a:p>
-            <a:pPr indent="0" lvl="0" marL="0" marR="0" rtl="0" algn="l">
+            <a:pPr marL="0" marR="0" lvl="0" indent="0" algn="l" rtl="0">
               <a:lnSpc>
                 <a:spcPct val="115000"/>
               </a:lnSpc>
@@ -8550,7 +9192,7 @@
               <a:buNone/>
             </a:pPr>
             <a:r>
-              <a:rPr b="1" i="0" lang="en" sz="1600" u="none" cap="none" strike="noStrike">
+              <a:rPr lang="en" sz="1600" b="1" i="0" u="none" strike="noStrike" cap="none">
                 <a:solidFill>
                   <a:schemeClr val="dk1"/>
                 </a:solidFill>
@@ -8562,7 +9204,7 @@
               <a:t>Mensajes</a:t>
             </a:r>
             <a:br>
-              <a:rPr b="1" i="0" lang="en" sz="1600" u="none" cap="none" strike="noStrike">
+              <a:rPr lang="en" sz="1600" b="1" i="0" u="none" strike="noStrike" cap="none">
                 <a:solidFill>
                   <a:schemeClr val="dk1"/>
                 </a:solidFill>
@@ -8573,7 +9215,7 @@
               </a:rPr>
             </a:br>
             <a:r>
-              <a:rPr b="1" i="0" lang="en" sz="1600" u="none" cap="none" strike="noStrike">
+              <a:rPr lang="en" sz="1600" b="1" i="0" u="none" strike="noStrike" cap="none">
                 <a:solidFill>
                   <a:schemeClr val="dk1"/>
                 </a:solidFill>
@@ -8584,7 +9226,7 @@
               </a:rPr>
               <a:t>de error</a:t>
             </a:r>
-            <a:endParaRPr b="1" i="0" sz="1600" u="none" cap="none" strike="noStrike">
+            <a:endParaRPr sz="1600" b="1" i="0" u="none" strike="noStrike" cap="none">
               <a:solidFill>
                 <a:schemeClr val="dk1"/>
               </a:solidFill>
@@ -8595,7 +9237,7 @@
             </a:endParaRPr>
           </a:p>
           <a:p>
-            <a:pPr indent="0" lvl="0" marL="0" marR="0" rtl="0" algn="l">
+            <a:pPr marL="0" marR="0" lvl="0" indent="0" algn="l" rtl="0">
               <a:lnSpc>
                 <a:spcPct val="115000"/>
               </a:lnSpc>
@@ -8613,7 +9255,7 @@
               <a:buNone/>
             </a:pPr>
             <a:r>
-              <a:rPr b="0" i="0" lang="en" sz="1200" u="none" cap="none" strike="noStrike">
+              <a:rPr lang="en" sz="1200" b="0" i="0" u="none" strike="noStrike" cap="none">
                 <a:solidFill>
                   <a:srgbClr val="1A1A1A"/>
                 </a:solidFill>
@@ -8624,7 +9266,7 @@
               </a:rPr>
               <a:t>Es importante familiarizarse con los mensajes de error comunes en Python. Esto nos ayudará a identificar y resolver problemas de manera eficiente durante el desarrollo.</a:t>
             </a:r>
-            <a:endParaRPr b="0" i="0" sz="2400" u="none" cap="none" strike="noStrike">
+            <a:endParaRPr sz="2400" b="0" i="0" u="none" strike="noStrike" cap="none">
               <a:solidFill>
                 <a:srgbClr val="1A1A1A"/>
               </a:solidFill>
@@ -8649,7 +9291,7 @@
           </a:xfrm>
           <a:prstGeom prst="snip1Rect">
             <a:avLst>
-              <a:gd fmla="val 9643" name="adj"/>
+              <a:gd name="adj" fmla="val 9643"/>
             </a:avLst>
           </a:prstGeom>
           <a:solidFill>
@@ -8660,12 +9302,12 @@
           </a:ln>
         </p:spPr>
         <p:txBody>
-          <a:bodyPr anchorCtr="0" anchor="t" bIns="274300" lIns="274300" spcFirstLastPara="1" rIns="274300" wrap="square" tIns="91425">
+          <a:bodyPr spcFirstLastPara="1" wrap="square" lIns="274300" tIns="91425" rIns="274300" bIns="274300" anchor="t" anchorCtr="0">
             <a:noAutofit/>
           </a:bodyPr>
           <a:lstStyle/>
           <a:p>
-            <a:pPr indent="0" lvl="0" marL="0" marR="0" rtl="0" algn="l">
+            <a:pPr marL="0" marR="0" lvl="0" indent="0" algn="l" rtl="0">
               <a:lnSpc>
                 <a:spcPct val="115000"/>
               </a:lnSpc>
@@ -8683,7 +9325,7 @@
               <a:buNone/>
             </a:pPr>
             <a:r>
-              <a:rPr b="1" i="0" lang="en" sz="1600" u="none" cap="none" strike="noStrike">
+              <a:rPr lang="en" sz="1600" b="1" i="0" u="none" strike="noStrike" cap="none">
                 <a:solidFill>
                   <a:schemeClr val="dk1"/>
                 </a:solidFill>
@@ -8694,7 +9336,7 @@
               </a:rPr>
               <a:t>Aprendizaje continuo</a:t>
             </a:r>
-            <a:endParaRPr b="1" i="0" sz="1600" u="none" cap="none" strike="noStrike">
+            <a:endParaRPr sz="1600" b="1" i="0" u="none" strike="noStrike" cap="none">
               <a:solidFill>
                 <a:schemeClr val="dk1"/>
               </a:solidFill>
@@ -8705,7 +9347,7 @@
             </a:endParaRPr>
           </a:p>
           <a:p>
-            <a:pPr indent="0" lvl="0" marL="0" marR="0" rtl="0" algn="l">
+            <a:pPr marL="0" marR="0" lvl="0" indent="0" algn="l" rtl="0">
               <a:lnSpc>
                 <a:spcPct val="115000"/>
               </a:lnSpc>
@@ -8723,7 +9365,7 @@
               <a:buNone/>
             </a:pPr>
             <a:r>
-              <a:rPr b="0" i="0" lang="en" sz="1200" u="none" cap="none" strike="noStrike">
+              <a:rPr lang="en" sz="1200" b="0" i="0" u="none" strike="noStrike" cap="none">
                 <a:solidFill>
                   <a:srgbClr val="1A1A1A"/>
                 </a:solidFill>
@@ -8734,7 +9376,7 @@
               </a:rPr>
               <a:t>A medida que avancen en su viaje de aprendizaje de Python, seguirán encontrando nuevos conceptos y desafíos. Mantengan una actitud de aprendizaje constante para dominar este lenguaje de programación.</a:t>
             </a:r>
-            <a:endParaRPr b="0" i="0" sz="2400" u="none" cap="none" strike="noStrike">
+            <a:endParaRPr sz="2400" b="0" i="0" u="none" strike="noStrike" cap="none">
               <a:solidFill>
                 <a:srgbClr val="1A1A1A"/>
               </a:solidFill>
@@ -8754,19 +9396,20 @@
 </p:sld>
 </file>
 
-<file path=ppt/slides/slide6.xml><?xml version="1.0" encoding="utf-8"?>
-<p:sld xmlns:a="http://schemas.openxmlformats.org/drawingml/2006/main" xmlns:r="http://schemas.openxmlformats.org/officeDocument/2006/relationships" xmlns:mc="http://schemas.openxmlformats.org/markup-compatibility/2006" xmlns:mv="urn:schemas-microsoft-com:mac:vml" xmlns:p="http://schemas.openxmlformats.org/presentationml/2006/main" xmlns:c="http://schemas.openxmlformats.org/drawingml/2006/chart" xmlns:dgm="http://schemas.openxmlformats.org/drawingml/2006/diagram" xmlns:o="urn:schemas-microsoft-com:office:office" xmlns:v="urn:schemas-microsoft-com:vml" xmlns:pvml="urn:schemas-microsoft-com:office:powerpoint" xmlns:com="http://schemas.openxmlformats.org/drawingml/2006/compatibility" xmlns:p14="http://schemas.microsoft.com/office/powerpoint/2010/main" xmlns:p15="http://schemas.microsoft.com/office/powerpoint/2012/main" xmlns:ahyp="http://schemas.microsoft.com/office/drawing/2018/hyperlinkcolor" show="0">
+<file path=ppt/slides/slide7.xml><?xml version="1.0" encoding="utf-8"?>
+<p:sld xmlns:a="http://schemas.openxmlformats.org/drawingml/2006/main" xmlns:r="http://schemas.openxmlformats.org/officeDocument/2006/relationships" xmlns:p="http://schemas.openxmlformats.org/presentationml/2006/main" show="0">
   <p:cSld>
     <p:bg>
       <p:bgPr>
         <a:solidFill>
           <a:srgbClr val="F2F1EE"/>
         </a:solidFill>
+        <a:effectLst/>
       </p:bgPr>
     </p:bg>
     <p:spTree>
       <p:nvGrpSpPr>
-        <p:cNvPr id="83" name="Shape 83"/>
+        <p:cNvPr id="1" name="Shape 83"/>
         <p:cNvGrpSpPr/>
         <p:nvPr/>
       </p:nvGrpSpPr>
@@ -8788,7 +9431,7 @@
           <a:blip r:embed="rId3">
             <a:alphaModFix/>
           </a:blip>
-          <a:srcRect b="0" l="0" r="0" t="0"/>
+          <a:srcRect/>
           <a:stretch/>
         </p:blipFill>
         <p:spPr>
@@ -8808,7 +9451,9 @@
       <p:sp>
         <p:nvSpPr>
           <p:cNvPr id="85" name="Google Shape;85;g32994d56a0f_0_0"/>
-          <p:cNvSpPr txBox="1"/>
+          <p:cNvSpPr txBox="1">
+            <a:spLocks noGrp="1"/>
+          </p:cNvSpPr>
           <p:nvPr>
             <p:ph type="ctrTitle"/>
           </p:nvPr>
@@ -8827,12 +9472,12 @@
           </a:ln>
         </p:spPr>
         <p:txBody>
-          <a:bodyPr anchorCtr="0" anchor="t" bIns="91425" lIns="91425" spcFirstLastPara="1" rIns="91425" wrap="square" tIns="91425">
+          <a:bodyPr spcFirstLastPara="1" wrap="square" lIns="91425" tIns="91425" rIns="91425" bIns="91425" anchor="t" anchorCtr="0">
             <a:spAutoFit/>
           </a:bodyPr>
           <a:lstStyle/>
           <a:p>
-            <a:pPr indent="0" lvl="0" marL="0" marR="0" rtl="0" algn="l">
+            <a:pPr marL="0" marR="0" lvl="0" indent="0" algn="l" rtl="0">
               <a:lnSpc>
                 <a:spcPct val="100000"/>
               </a:lnSpc>
@@ -8845,7 +9490,7 @@
               <a:buNone/>
             </a:pPr>
             <a:r>
-              <a:rPr b="0" i="0" lang="en" sz="4000" u="none" cap="none" strike="noStrike">
+              <a:rPr lang="en" sz="4000" b="0" i="0" u="none" strike="noStrike" cap="none">
                 <a:solidFill>
                   <a:srgbClr val="1A1A1A"/>
                 </a:solidFill>
@@ -8856,7 +9501,7 @@
               </a:rPr>
               <a:t>Introducción a strings</a:t>
             </a:r>
-            <a:endParaRPr b="0" i="0" sz="4000" u="none" cap="none" strike="noStrike">
+            <a:endParaRPr sz="4000" b="0" i="0" u="none" strike="noStrike" cap="none">
               <a:solidFill>
                 <a:srgbClr val="1A1A1A"/>
               </a:solidFill>
@@ -8881,7 +9526,7 @@
           </a:xfrm>
           <a:prstGeom prst="roundRect">
             <a:avLst>
-              <a:gd fmla="val 11214" name="adj"/>
+              <a:gd name="adj" fmla="val 11214"/>
             </a:avLst>
           </a:prstGeom>
           <a:solidFill>
@@ -8892,12 +9537,12 @@
           </a:ln>
         </p:spPr>
         <p:txBody>
-          <a:bodyPr anchorCtr="0" anchor="t" bIns="0" lIns="182875" spcFirstLastPara="1" rIns="91425" wrap="square" tIns="182875">
+          <a:bodyPr spcFirstLastPara="1" wrap="square" lIns="182875" tIns="182875" rIns="91425" bIns="0" anchor="t" anchorCtr="0">
             <a:noAutofit/>
           </a:bodyPr>
           <a:lstStyle/>
           <a:p>
-            <a:pPr indent="0" lvl="0" marL="0" marR="0" rtl="0" algn="l">
+            <a:pPr marL="0" marR="0" lvl="0" indent="0" algn="l" rtl="0">
               <a:lnSpc>
                 <a:spcPct val="115000"/>
               </a:lnSpc>
@@ -8910,7 +9555,7 @@
               <a:buNone/>
             </a:pPr>
             <a:r>
-              <a:rPr b="1" i="0" lang="en" sz="1600" u="none" cap="none" strike="noStrike">
+              <a:rPr lang="en" sz="1600" b="1" i="0" u="none" strike="noStrike" cap="none">
                 <a:solidFill>
                   <a:srgbClr val="1A1A1A"/>
                 </a:solidFill>
@@ -8921,7 +9566,7 @@
               </a:rPr>
               <a:t>Definición de strings</a:t>
             </a:r>
-            <a:endParaRPr b="1" i="0" sz="1600" u="none" cap="none" strike="noStrike">
+            <a:endParaRPr sz="1600" b="1" i="0" u="none" strike="noStrike" cap="none">
               <a:solidFill>
                 <a:srgbClr val="1A1A1A"/>
               </a:solidFill>
@@ -8932,7 +9577,7 @@
             </a:endParaRPr>
           </a:p>
           <a:p>
-            <a:pPr indent="0" lvl="0" marL="0" marR="0" rtl="0" algn="l">
+            <a:pPr marL="0" marR="0" lvl="0" indent="0" algn="l" rtl="0">
               <a:lnSpc>
                 <a:spcPct val="115000"/>
               </a:lnSpc>
@@ -8945,7 +9590,7 @@
               <a:buNone/>
             </a:pPr>
             <a:r>
-              <a:rPr b="0" i="0" lang="en" sz="1200" u="none" cap="none" strike="noStrike">
+              <a:rPr lang="en" sz="1200" b="0" i="0" u="none" strike="noStrike" cap="none">
                 <a:solidFill>
                   <a:srgbClr val="1A1A1A"/>
                 </a:solidFill>
@@ -8956,7 +9601,7 @@
               </a:rPr>
               <a:t>Los strings son secuencias de caracteres, como letras, números y símbolos, que se utilizan para representar y manipular texto en Python.</a:t>
             </a:r>
-            <a:endParaRPr b="0" i="0" sz="1200" u="none" cap="none" strike="noStrike">
+            <a:endParaRPr sz="1200" b="0" i="0" u="none" strike="noStrike" cap="none">
               <a:solidFill>
                 <a:srgbClr val="1A1A1A"/>
               </a:solidFill>
@@ -8981,7 +9626,7 @@
           </a:xfrm>
           <a:prstGeom prst="roundRect">
             <a:avLst>
-              <a:gd fmla="val 12052" name="adj"/>
+              <a:gd name="adj" fmla="val 12052"/>
             </a:avLst>
           </a:prstGeom>
           <a:solidFill>
@@ -8992,12 +9637,12 @@
           </a:ln>
         </p:spPr>
         <p:txBody>
-          <a:bodyPr anchorCtr="0" anchor="t" bIns="0" lIns="182875" spcFirstLastPara="1" rIns="91425" wrap="square" tIns="182875">
+          <a:bodyPr spcFirstLastPara="1" wrap="square" lIns="182875" tIns="182875" rIns="91425" bIns="0" anchor="t" anchorCtr="0">
             <a:noAutofit/>
           </a:bodyPr>
           <a:lstStyle/>
           <a:p>
-            <a:pPr indent="0" lvl="0" marL="0" marR="0" rtl="0" algn="l">
+            <a:pPr marL="0" marR="0" lvl="0" indent="0" algn="l" rtl="0">
               <a:lnSpc>
                 <a:spcPct val="115000"/>
               </a:lnSpc>
@@ -9010,7 +9655,7 @@
               <a:buNone/>
             </a:pPr>
             <a:r>
-              <a:rPr b="1" i="0" lang="en" sz="1600" u="none" cap="none" strike="noStrike">
+              <a:rPr lang="en" sz="1600" b="1" i="0" u="none" strike="noStrike" cap="none">
                 <a:solidFill>
                   <a:srgbClr val="1A1A1A"/>
                 </a:solidFill>
@@ -9021,7 +9666,7 @@
               </a:rPr>
               <a:t>Índices y slices</a:t>
             </a:r>
-            <a:endParaRPr b="1" i="0" sz="1600" u="none" cap="none" strike="noStrike">
+            <a:endParaRPr sz="1600" b="1" i="0" u="none" strike="noStrike" cap="none">
               <a:solidFill>
                 <a:srgbClr val="1A1A1A"/>
               </a:solidFill>
@@ -9032,7 +9677,7 @@
             </a:endParaRPr>
           </a:p>
           <a:p>
-            <a:pPr indent="0" lvl="0" marL="0" marR="0" rtl="0" algn="l">
+            <a:pPr marL="0" marR="0" lvl="0" indent="0" algn="l" rtl="0">
               <a:lnSpc>
                 <a:spcPct val="115000"/>
               </a:lnSpc>
@@ -9045,7 +9690,7 @@
               <a:buNone/>
             </a:pPr>
             <a:r>
-              <a:rPr b="0" i="0" lang="en" sz="1200" u="none" cap="none" strike="noStrike">
+              <a:rPr lang="en" sz="1200" b="0" i="0" u="none" strike="noStrike" cap="none">
                 <a:solidFill>
                   <a:srgbClr val="1A1A1A"/>
                 </a:solidFill>
@@ -9056,7 +9701,7 @@
               </a:rPr>
               <a:t>Podemos acceder a caracteres específicos dentro de un string utilizando índices, y crear subcadenas a través de slices. Ej.: str[0], str[1:3]</a:t>
             </a:r>
-            <a:endParaRPr b="0" i="0" sz="1200" u="none" cap="none" strike="noStrike">
+            <a:endParaRPr sz="1200" b="0" i="0" u="none" strike="noStrike" cap="none">
               <a:solidFill>
                 <a:srgbClr val="1A1A1A"/>
               </a:solidFill>
@@ -9081,7 +9726,7 @@
           </a:xfrm>
           <a:prstGeom prst="roundRect">
             <a:avLst>
-              <a:gd fmla="val 10576" name="adj"/>
+              <a:gd name="adj" fmla="val 10576"/>
             </a:avLst>
           </a:prstGeom>
           <a:solidFill>
@@ -9092,12 +9737,12 @@
           </a:ln>
         </p:spPr>
         <p:txBody>
-          <a:bodyPr anchorCtr="0" anchor="t" bIns="0" lIns="182875" spcFirstLastPara="1" rIns="91425" wrap="square" tIns="182875">
+          <a:bodyPr spcFirstLastPara="1" wrap="square" lIns="182875" tIns="182875" rIns="91425" bIns="0" anchor="t" anchorCtr="0">
             <a:noAutofit/>
           </a:bodyPr>
           <a:lstStyle/>
           <a:p>
-            <a:pPr indent="0" lvl="0" marL="0" marR="0" rtl="0" algn="l">
+            <a:pPr marL="0" marR="0" lvl="0" indent="0" algn="l" rtl="0">
               <a:lnSpc>
                 <a:spcPct val="115000"/>
               </a:lnSpc>
@@ -9110,7 +9755,7 @@
               <a:buNone/>
             </a:pPr>
             <a:r>
-              <a:rPr b="1" i="0" lang="en" sz="1600" u="none" cap="none" strike="noStrike">
+              <a:rPr lang="en" sz="1600" b="1" i="0" u="none" strike="noStrike" cap="none">
                 <a:solidFill>
                   <a:srgbClr val="1A1A1A"/>
                 </a:solidFill>
@@ -9121,7 +9766,7 @@
               </a:rPr>
               <a:t>Strings formateados</a:t>
             </a:r>
-            <a:endParaRPr b="1" i="0" sz="1600" u="none" cap="none" strike="noStrike">
+            <a:endParaRPr sz="1600" b="1" i="0" u="none" strike="noStrike" cap="none">
               <a:solidFill>
                 <a:srgbClr val="1A1A1A"/>
               </a:solidFill>
@@ -9132,7 +9777,7 @@
             </a:endParaRPr>
           </a:p>
           <a:p>
-            <a:pPr indent="0" lvl="0" marL="0" marR="0" rtl="0" algn="l">
+            <a:pPr marL="0" marR="0" lvl="0" indent="0" algn="l" rtl="0">
               <a:lnSpc>
                 <a:spcPct val="115000"/>
               </a:lnSpc>
@@ -9145,7 +9790,7 @@
               <a:buNone/>
             </a:pPr>
             <a:r>
-              <a:rPr b="0" i="0" lang="en" sz="1200" u="none" cap="none" strike="noStrike">
+              <a:rPr lang="en" sz="1200" b="0" i="0" u="none" strike="noStrike" cap="none">
                 <a:solidFill>
                   <a:srgbClr val="1A1A1A"/>
                 </a:solidFill>
@@ -9156,7 +9801,7 @@
               </a:rPr>
               <a:t>Python ofrece formas eficientes de formatear strings, como f-strings y el método format(), para incorporar valores dinámicos de manera clara y legible.</a:t>
             </a:r>
-            <a:endParaRPr b="0" i="0" sz="1200" u="none" cap="none" strike="noStrike">
+            <a:endParaRPr sz="1200" b="0" i="0" u="none" strike="noStrike" cap="none">
               <a:solidFill>
                 <a:srgbClr val="1A1A1A"/>
               </a:solidFill>
@@ -9181,7 +9826,7 @@
           </a:xfrm>
           <a:prstGeom prst="roundRect">
             <a:avLst>
-              <a:gd fmla="val 9097" name="adj"/>
+              <a:gd name="adj" fmla="val 9097"/>
             </a:avLst>
           </a:prstGeom>
           <a:solidFill>
@@ -9192,12 +9837,12 @@
           </a:ln>
         </p:spPr>
         <p:txBody>
-          <a:bodyPr anchorCtr="0" anchor="t" bIns="0" lIns="182875" spcFirstLastPara="1" rIns="91425" wrap="square" tIns="182875">
+          <a:bodyPr spcFirstLastPara="1" wrap="square" lIns="182875" tIns="182875" rIns="91425" bIns="0" anchor="t" anchorCtr="0">
             <a:noAutofit/>
           </a:bodyPr>
           <a:lstStyle/>
           <a:p>
-            <a:pPr indent="0" lvl="0" marL="0" marR="0" rtl="0" algn="l">
+            <a:pPr marL="0" marR="0" lvl="0" indent="0" algn="l" rtl="0">
               <a:lnSpc>
                 <a:spcPct val="115000"/>
               </a:lnSpc>
@@ -9210,7 +9855,7 @@
               <a:buNone/>
             </a:pPr>
             <a:r>
-              <a:rPr b="1" i="0" lang="en" sz="1600" u="none" cap="none" strike="noStrike">
+              <a:rPr lang="en" sz="1600" b="1" i="0" u="none" strike="noStrike" cap="none">
                 <a:solidFill>
                   <a:srgbClr val="1A1A1A"/>
                 </a:solidFill>
@@ -9221,7 +9866,7 @@
               </a:rPr>
               <a:t>Métodos de strings</a:t>
             </a:r>
-            <a:endParaRPr b="1" i="0" sz="1600" u="none" cap="none" strike="noStrike">
+            <a:endParaRPr sz="1600" b="1" i="0" u="none" strike="noStrike" cap="none">
               <a:solidFill>
                 <a:srgbClr val="1A1A1A"/>
               </a:solidFill>
@@ -9232,7 +9877,7 @@
             </a:endParaRPr>
           </a:p>
           <a:p>
-            <a:pPr indent="0" lvl="0" marL="0" marR="0" rtl="0" algn="l">
+            <a:pPr marL="0" marR="0" lvl="0" indent="0" algn="l" rtl="0">
               <a:lnSpc>
                 <a:spcPct val="115000"/>
               </a:lnSpc>
@@ -9245,7 +9890,7 @@
               <a:buNone/>
             </a:pPr>
             <a:r>
-              <a:rPr b="0" i="0" lang="en" sz="1200" u="none" cap="none" strike="noStrike">
+              <a:rPr lang="en" sz="1200" b="0" i="0" u="none" strike="noStrike" cap="none">
                 <a:solidFill>
                   <a:srgbClr val="1A1A1A"/>
                 </a:solidFill>
@@ -9256,7 +9901,7 @@
               </a:rPr>
               <a:t>Los strings cuentan con una variedad de métodos útiles, como upper(), lower(), split() y join(), que facilitan la manipulación y transformación de texto.</a:t>
             </a:r>
-            <a:endParaRPr b="0" i="0" sz="1200" u="none" cap="none" strike="noStrike">
+            <a:endParaRPr sz="1200" b="0" i="0" u="none" strike="noStrike" cap="none">
               <a:solidFill>
                 <a:srgbClr val="1A1A1A"/>
               </a:solidFill>
@@ -9276,19 +9921,20 @@
 </p:sld>
 </file>
 
-<file path=ppt/slides/slide7.xml><?xml version="1.0" encoding="utf-8"?>
-<p:sld xmlns:a="http://schemas.openxmlformats.org/drawingml/2006/main" xmlns:r="http://schemas.openxmlformats.org/officeDocument/2006/relationships" xmlns:mc="http://schemas.openxmlformats.org/markup-compatibility/2006" xmlns:mv="urn:schemas-microsoft-com:mac:vml" xmlns:p="http://schemas.openxmlformats.org/presentationml/2006/main" xmlns:c="http://schemas.openxmlformats.org/drawingml/2006/chart" xmlns:dgm="http://schemas.openxmlformats.org/drawingml/2006/diagram" xmlns:o="urn:schemas-microsoft-com:office:office" xmlns:v="urn:schemas-microsoft-com:vml" xmlns:pvml="urn:schemas-microsoft-com:office:powerpoint" xmlns:com="http://schemas.openxmlformats.org/drawingml/2006/compatibility" xmlns:p14="http://schemas.microsoft.com/office/powerpoint/2010/main" xmlns:p15="http://schemas.microsoft.com/office/powerpoint/2012/main" xmlns:ahyp="http://schemas.microsoft.com/office/drawing/2018/hyperlinkcolor" show="0">
+<file path=ppt/slides/slide8.xml><?xml version="1.0" encoding="utf-8"?>
+<p:sld xmlns:a="http://schemas.openxmlformats.org/drawingml/2006/main" xmlns:r="http://schemas.openxmlformats.org/officeDocument/2006/relationships" xmlns:p="http://schemas.openxmlformats.org/presentationml/2006/main" show="0">
   <p:cSld>
     <p:bg>
       <p:bgPr>
         <a:solidFill>
           <a:srgbClr val="F2F1EE"/>
         </a:solidFill>
+        <a:effectLst/>
       </p:bgPr>
     </p:bg>
     <p:spTree>
       <p:nvGrpSpPr>
-        <p:cNvPr id="93" name="Shape 93"/>
+        <p:cNvPr id="1" name="Shape 93"/>
         <p:cNvGrpSpPr/>
         <p:nvPr/>
       </p:nvGrpSpPr>
@@ -9310,7 +9956,7 @@
           <a:blip r:embed="rId3">
             <a:alphaModFix/>
           </a:blip>
-          <a:srcRect b="0" l="0" r="0" t="0"/>
+          <a:srcRect/>
           <a:stretch/>
         </p:blipFill>
         <p:spPr>
@@ -9330,7 +9976,9 @@
       <p:sp>
         <p:nvSpPr>
           <p:cNvPr id="95" name="Google Shape;95;g32994d56a0f_0_33"/>
-          <p:cNvSpPr txBox="1"/>
+          <p:cNvSpPr txBox="1">
+            <a:spLocks noGrp="1"/>
+          </p:cNvSpPr>
           <p:nvPr>
             <p:ph type="ctrTitle"/>
           </p:nvPr>
@@ -9349,12 +9997,12 @@
           </a:ln>
         </p:spPr>
         <p:txBody>
-          <a:bodyPr anchorCtr="0" anchor="t" bIns="91425" lIns="91425" spcFirstLastPara="1" rIns="91425" wrap="square" tIns="91425">
+          <a:bodyPr spcFirstLastPara="1" wrap="square" lIns="91425" tIns="91425" rIns="91425" bIns="91425" anchor="t" anchorCtr="0">
             <a:spAutoFit/>
           </a:bodyPr>
           <a:lstStyle/>
           <a:p>
-            <a:pPr indent="0" lvl="0" marL="0" marR="0" rtl="0" algn="l">
+            <a:pPr marL="0" marR="0" lvl="0" indent="0" algn="l" rtl="0">
               <a:lnSpc>
                 <a:spcPct val="100000"/>
               </a:lnSpc>
@@ -9367,7 +10015,7 @@
               <a:buNone/>
             </a:pPr>
             <a:r>
-              <a:rPr b="0" i="0" lang="en" sz="4000" u="none" cap="none" strike="noStrike">
+              <a:rPr lang="en" sz="4000" b="0" i="0" u="none" strike="noStrike" cap="none">
                 <a:solidFill>
                   <a:srgbClr val="1A1A1A"/>
                 </a:solidFill>
@@ -9390,7 +10038,7 @@
               </a:rPr>
               <a:t>Listas</a:t>
             </a:r>
-            <a:endParaRPr b="0" i="0" sz="4000" u="none" cap="none" strike="noStrike">
+            <a:endParaRPr sz="4000" b="0" i="0" u="none" strike="noStrike" cap="none">
               <a:solidFill>
                 <a:srgbClr val="1A1A1A"/>
               </a:solidFill>
@@ -9415,7 +10063,7 @@
           </a:xfrm>
           <a:prstGeom prst="roundRect">
             <a:avLst>
-              <a:gd fmla="val 11214" name="adj"/>
+              <a:gd name="adj" fmla="val 11214"/>
             </a:avLst>
           </a:prstGeom>
           <a:solidFill>
@@ -9426,12 +10074,12 @@
           </a:ln>
         </p:spPr>
         <p:txBody>
-          <a:bodyPr anchorCtr="0" anchor="t" bIns="0" lIns="182875" spcFirstLastPara="1" rIns="91425" wrap="square" tIns="182875">
+          <a:bodyPr spcFirstLastPara="1" wrap="square" lIns="182875" tIns="182875" rIns="91425" bIns="0" anchor="t" anchorCtr="0">
             <a:noAutofit/>
           </a:bodyPr>
           <a:lstStyle/>
           <a:p>
-            <a:pPr indent="0" lvl="0" marL="0" marR="0" rtl="0" algn="l">
+            <a:pPr marL="0" marR="0" lvl="0" indent="0" algn="l" rtl="0">
               <a:lnSpc>
                 <a:spcPct val="115000"/>
               </a:lnSpc>
@@ -9444,7 +10092,7 @@
               <a:buNone/>
             </a:pPr>
             <a:r>
-              <a:rPr b="1" i="0" lang="en" sz="1600" u="none" cap="none" strike="noStrike">
+              <a:rPr lang="en" sz="1600" b="1" i="0" u="none" strike="noStrike" cap="none">
                 <a:solidFill>
                   <a:srgbClr val="1A1A1A"/>
                 </a:solidFill>
@@ -9456,7 +10104,7 @@
               <a:t>Definición de </a:t>
             </a:r>
             <a:r>
-              <a:rPr b="1" lang="en" sz="1600">
+              <a:rPr lang="en" sz="1600" b="1">
                 <a:solidFill>
                   <a:srgbClr val="1A1A1A"/>
                 </a:solidFill>
@@ -9467,7 +10115,7 @@
               </a:rPr>
               <a:t>listas</a:t>
             </a:r>
-            <a:endParaRPr b="1" i="0" sz="1600" u="none" cap="none" strike="noStrike">
+            <a:endParaRPr sz="1600" b="1" i="0" u="none" strike="noStrike" cap="none">
               <a:solidFill>
                 <a:srgbClr val="1A1A1A"/>
               </a:solidFill>
@@ -9478,7 +10126,7 @@
             </a:endParaRPr>
           </a:p>
           <a:p>
-            <a:pPr indent="0" lvl="0" marL="0" marR="0" rtl="0" algn="l">
+            <a:pPr marL="0" marR="0" lvl="0" indent="0" algn="l" rtl="0">
               <a:lnSpc>
                 <a:spcPct val="115000"/>
               </a:lnSpc>
@@ -9502,7 +10150,7 @@
               </a:rPr>
               <a:t>Las listas en Python son colecciones ordenadas y mutables que pueden contener diferentes tipos de datos, como números y strings.</a:t>
             </a:r>
-            <a:endParaRPr b="0" i="0" sz="1200" u="none" cap="none" strike="noStrike">
+            <a:endParaRPr sz="1200" b="0" i="0" u="none" strike="noStrike" cap="none">
               <a:solidFill>
                 <a:srgbClr val="1A1A1A"/>
               </a:solidFill>
@@ -9527,7 +10175,7 @@
           </a:xfrm>
           <a:prstGeom prst="roundRect">
             <a:avLst>
-              <a:gd fmla="val 12052" name="adj"/>
+              <a:gd name="adj" fmla="val 12052"/>
             </a:avLst>
           </a:prstGeom>
           <a:solidFill>
@@ -9538,12 +10186,12 @@
           </a:ln>
         </p:spPr>
         <p:txBody>
-          <a:bodyPr anchorCtr="0" anchor="t" bIns="0" lIns="182875" spcFirstLastPara="1" rIns="91425" wrap="square" tIns="182875">
+          <a:bodyPr spcFirstLastPara="1" wrap="square" lIns="182875" tIns="182875" rIns="91425" bIns="0" anchor="t" anchorCtr="0">
             <a:noAutofit/>
           </a:bodyPr>
           <a:lstStyle/>
           <a:p>
-            <a:pPr indent="0" lvl="0" marL="0" marR="0" rtl="0" algn="l">
+            <a:pPr marL="0" marR="0" lvl="0" indent="0" algn="l" rtl="0">
               <a:lnSpc>
                 <a:spcPct val="115000"/>
               </a:lnSpc>
@@ -9556,7 +10204,7 @@
               <a:buNone/>
             </a:pPr>
             <a:r>
-              <a:rPr b="1" i="0" lang="en" sz="1600" u="none" cap="none" strike="noStrike">
+              <a:rPr lang="en" sz="1600" b="1" i="0" u="none" strike="noStrike" cap="none">
                 <a:solidFill>
                   <a:srgbClr val="1A1A1A"/>
                 </a:solidFill>
@@ -9567,7 +10215,7 @@
               </a:rPr>
               <a:t>Índices y slices</a:t>
             </a:r>
-            <a:endParaRPr b="1" i="0" sz="1600" u="none" cap="none" strike="noStrike">
+            <a:endParaRPr sz="1600" b="1" i="0" u="none" strike="noStrike" cap="none">
               <a:solidFill>
                 <a:srgbClr val="1A1A1A"/>
               </a:solidFill>
@@ -9578,7 +10226,7 @@
             </a:endParaRPr>
           </a:p>
           <a:p>
-            <a:pPr indent="0" lvl="0" marL="0" rtl="0" algn="l">
+            <a:pPr marL="0" lvl="0" indent="0" algn="l" rtl="0">
               <a:lnSpc>
                 <a:spcPct val="115000"/>
               </a:lnSpc>
@@ -9630,7 +10278,7 @@
             </a:endParaRPr>
           </a:p>
           <a:p>
-            <a:pPr indent="0" lvl="0" marL="0" marR="0" rtl="0" algn="l">
+            <a:pPr marL="0" marR="0" lvl="0" indent="0" algn="l" rtl="0">
               <a:lnSpc>
                 <a:spcPct val="115000"/>
               </a:lnSpc>
@@ -9643,7 +10291,7 @@
               <a:buNone/>
             </a:pPr>
             <a:r>
-              <a:rPr b="1" lang="en" sz="1100">
+              <a:rPr lang="en" sz="1100" b="1">
                 <a:solidFill>
                   <a:schemeClr val="dk1"/>
                 </a:solidFill>
@@ -9735,7 +10383,7 @@
           </a:xfrm>
           <a:prstGeom prst="roundRect">
             <a:avLst>
-              <a:gd fmla="val 10576" name="adj"/>
+              <a:gd name="adj" fmla="val 10576"/>
             </a:avLst>
           </a:prstGeom>
           <a:solidFill>
@@ -9746,12 +10394,12 @@
           </a:ln>
         </p:spPr>
         <p:txBody>
-          <a:bodyPr anchorCtr="0" anchor="t" bIns="0" lIns="182875" spcFirstLastPara="1" rIns="91425" wrap="square" tIns="182875">
+          <a:bodyPr spcFirstLastPara="1" wrap="square" lIns="182875" tIns="182875" rIns="91425" bIns="0" anchor="t" anchorCtr="0">
             <a:noAutofit/>
           </a:bodyPr>
           <a:lstStyle/>
           <a:p>
-            <a:pPr indent="0" lvl="0" marL="0" marR="0" rtl="0" algn="l">
+            <a:pPr marL="0" marR="0" lvl="0" indent="0" algn="l" rtl="0">
               <a:lnSpc>
                 <a:spcPct val="115000"/>
               </a:lnSpc>
@@ -9764,7 +10412,7 @@
               <a:buNone/>
             </a:pPr>
             <a:r>
-              <a:rPr b="1" lang="en" sz="1600">
+              <a:rPr lang="en" sz="1600" b="1">
                 <a:solidFill>
                   <a:srgbClr val="1A1A1A"/>
                 </a:solidFill>
@@ -9775,7 +10423,7 @@
               </a:rPr>
               <a:t>Modificación de listas</a:t>
             </a:r>
-            <a:endParaRPr b="1" i="0" sz="1600" u="none" cap="none" strike="noStrike">
+            <a:endParaRPr sz="1600" b="1" i="0" u="none" strike="noStrike" cap="none">
               <a:solidFill>
                 <a:srgbClr val="1A1A1A"/>
               </a:solidFill>
@@ -9786,7 +10434,7 @@
             </a:endParaRPr>
           </a:p>
           <a:p>
-            <a:pPr indent="0" lvl="0" marL="0" marR="0" rtl="0" algn="l">
+            <a:pPr marL="0" marR="0" lvl="0" indent="0" algn="l" rtl="0">
               <a:lnSpc>
                 <a:spcPct val="115000"/>
               </a:lnSpc>
@@ -9821,7 +10469,7 @@
             </a:endParaRPr>
           </a:p>
           <a:p>
-            <a:pPr indent="0" lvl="0" marL="0" marR="0" rtl="0" algn="l">
+            <a:pPr marL="0" marR="0" lvl="0" indent="0" algn="l" rtl="0">
               <a:lnSpc>
                 <a:spcPct val="115000"/>
               </a:lnSpc>
@@ -9833,9 +10481,6 @@
               </a:spcAft>
               <a:buNone/>
             </a:pPr>
-            <a:r>
-              <a:t/>
-            </a:r>
             <a:endParaRPr sz="1200">
               <a:solidFill>
                 <a:srgbClr val="1A1A1A"/>
@@ -9861,7 +10506,7 @@
           </a:xfrm>
           <a:prstGeom prst="roundRect">
             <a:avLst>
-              <a:gd fmla="val 9097" name="adj"/>
+              <a:gd name="adj" fmla="val 9097"/>
             </a:avLst>
           </a:prstGeom>
           <a:solidFill>
@@ -9872,12 +10517,12 @@
           </a:ln>
         </p:spPr>
         <p:txBody>
-          <a:bodyPr anchorCtr="0" anchor="t" bIns="0" lIns="182875" spcFirstLastPara="1" rIns="91425" wrap="square" tIns="182875">
+          <a:bodyPr spcFirstLastPara="1" wrap="square" lIns="182875" tIns="182875" rIns="91425" bIns="0" anchor="t" anchorCtr="0">
             <a:noAutofit/>
           </a:bodyPr>
           <a:lstStyle/>
           <a:p>
-            <a:pPr indent="0" lvl="0" marL="0" marR="0" rtl="0" algn="l">
+            <a:pPr marL="0" marR="0" lvl="0" indent="0" algn="l" rtl="0">
               <a:lnSpc>
                 <a:spcPct val="115000"/>
               </a:lnSpc>
@@ -9890,7 +10535,7 @@
               <a:buNone/>
             </a:pPr>
             <a:r>
-              <a:rPr b="1" lang="en" sz="1600">
+              <a:rPr lang="en" sz="1600" b="1">
                 <a:solidFill>
                   <a:srgbClr val="1A1A1A"/>
                 </a:solidFill>
@@ -9901,7 +10546,7 @@
               </a:rPr>
               <a:t>Operaciones y Métodos con listas</a:t>
             </a:r>
-            <a:endParaRPr b="1" i="0" sz="1600" u="none" cap="none" strike="noStrike">
+            <a:endParaRPr sz="1600" b="1" i="0" u="none" strike="noStrike" cap="none">
               <a:solidFill>
                 <a:srgbClr val="1A1A1A"/>
               </a:solidFill>
@@ -9912,7 +10557,7 @@
             </a:endParaRPr>
           </a:p>
           <a:p>
-            <a:pPr indent="0" lvl="0" marL="0" rtl="0" algn="l">
+            <a:pPr marL="0" lvl="0" indent="0" algn="l" rtl="0">
               <a:lnSpc>
                 <a:spcPct val="115000"/>
               </a:lnSpc>
@@ -9925,7 +10570,7 @@
               <a:buNone/>
             </a:pPr>
             <a:r>
-              <a:rPr b="1" lang="en" sz="800">
+              <a:rPr lang="en" sz="800" b="1">
                 <a:solidFill>
                   <a:schemeClr val="dk1"/>
                 </a:solidFill>
@@ -9964,7 +10609,7 @@
               </a:rPr>
             </a:br>
             <a:r>
-              <a:rPr b="1" lang="en" sz="800">
+              <a:rPr lang="en" sz="800" b="1">
                 <a:solidFill>
                   <a:schemeClr val="dk1"/>
                 </a:solidFill>
@@ -10003,7 +10648,7 @@
               </a:rPr>
             </a:br>
             <a:r>
-              <a:rPr b="1" lang="en" sz="800">
+              <a:rPr lang="en" sz="800" b="1">
                 <a:solidFill>
                   <a:schemeClr val="dk1"/>
                 </a:solidFill>
@@ -10042,7 +10687,7 @@
               </a:rPr>
             </a:br>
             <a:r>
-              <a:rPr b="1" lang="en" sz="800">
+              <a:rPr lang="en" sz="800" b="1">
                 <a:solidFill>
                   <a:schemeClr val="dk1"/>
                 </a:solidFill>
@@ -10080,7 +10725,7 @@
             </a:endParaRPr>
           </a:p>
           <a:p>
-            <a:pPr indent="0" lvl="0" marL="0" marR="0" rtl="0" algn="l">
+            <a:pPr marL="0" marR="0" lvl="0" indent="0" algn="l" rtl="0">
               <a:lnSpc>
                 <a:spcPct val="115000"/>
               </a:lnSpc>
@@ -10092,9 +10737,6 @@
               </a:spcAft>
               <a:buNone/>
             </a:pPr>
-            <a:r>
-              <a:t/>
-            </a:r>
             <a:endParaRPr sz="1200">
               <a:solidFill>
                 <a:srgbClr val="1A1A1A"/>
@@ -10157,12 +10799,12 @@
           </a:ln>
         </p:spPr>
         <p:txBody>
-          <a:bodyPr anchorCtr="0" anchor="t" bIns="91425" lIns="91425" spcFirstLastPara="1" rIns="91425" wrap="square" tIns="91425">
+          <a:bodyPr spcFirstLastPara="1" wrap="square" lIns="91425" tIns="91425" rIns="91425" bIns="91425" anchor="t" anchorCtr="0">
             <a:noAutofit/>
           </a:bodyPr>
           <a:lstStyle/>
           <a:p>
-            <a:pPr indent="0" lvl="0" marL="0" rtl="0" algn="l">
+            <a:pPr marL="0" lvl="0" indent="0" algn="l" rtl="0">
               <a:spcBef>
                 <a:spcPts val="0"/>
               </a:spcBef>
@@ -10203,7 +10845,7 @@
             </a:endParaRPr>
           </a:p>
           <a:p>
-            <a:pPr indent="0" lvl="0" marL="0" rtl="0" algn="l">
+            <a:pPr marL="0" lvl="0" indent="0" algn="l" rtl="0">
               <a:spcBef>
                 <a:spcPts val="0"/>
               </a:spcBef>
@@ -10244,7 +10886,7 @@
             </a:endParaRPr>
           </a:p>
           <a:p>
-            <a:pPr indent="0" lvl="0" marL="0" rtl="0" algn="l">
+            <a:pPr marL="0" lvl="0" indent="0" algn="l" rtl="0">
               <a:spcBef>
                 <a:spcPts val="0"/>
               </a:spcBef>
@@ -10285,7 +10927,7 @@
             </a:endParaRPr>
           </a:p>
           <a:p>
-            <a:pPr indent="0" lvl="0" marL="0" rtl="0" algn="l">
+            <a:pPr marL="0" lvl="0" indent="0" algn="l" rtl="0">
               <a:spcBef>
                 <a:spcPts val="0"/>
               </a:spcBef>
@@ -10326,7 +10968,7 @@
             </a:endParaRPr>
           </a:p>
           <a:p>
-            <a:pPr indent="0" lvl="0" marL="0" rtl="0" algn="l">
+            <a:pPr marL="0" lvl="0" indent="0" algn="l" rtl="0">
               <a:spcBef>
                 <a:spcPts val="0"/>
               </a:spcBef>
@@ -10367,19 +11009,20 @@
 </p:sld>
 </file>
 
-<file path=ppt/slides/slide8.xml><?xml version="1.0" encoding="utf-8"?>
-<p:sld xmlns:a="http://schemas.openxmlformats.org/drawingml/2006/main" xmlns:r="http://schemas.openxmlformats.org/officeDocument/2006/relationships" xmlns:mc="http://schemas.openxmlformats.org/markup-compatibility/2006" xmlns:mv="urn:schemas-microsoft-com:mac:vml" xmlns:p="http://schemas.openxmlformats.org/presentationml/2006/main" xmlns:c="http://schemas.openxmlformats.org/drawingml/2006/chart" xmlns:dgm="http://schemas.openxmlformats.org/drawingml/2006/diagram" xmlns:o="urn:schemas-microsoft-com:office:office" xmlns:v="urn:schemas-microsoft-com:vml" xmlns:pvml="urn:schemas-microsoft-com:office:powerpoint" xmlns:com="http://schemas.openxmlformats.org/drawingml/2006/compatibility" xmlns:p14="http://schemas.microsoft.com/office/powerpoint/2010/main" xmlns:p15="http://schemas.microsoft.com/office/powerpoint/2012/main" xmlns:ahyp="http://schemas.microsoft.com/office/drawing/2018/hyperlinkcolor">
+<file path=ppt/slides/slide9.xml><?xml version="1.0" encoding="utf-8"?>
+<p:sld xmlns:a="http://schemas.openxmlformats.org/drawingml/2006/main" xmlns:r="http://schemas.openxmlformats.org/officeDocument/2006/relationships" xmlns:p="http://schemas.openxmlformats.org/presentationml/2006/main">
   <p:cSld>
     <p:bg>
       <p:bgPr>
         <a:solidFill>
           <a:srgbClr val="FF8F60"/>
         </a:solidFill>
+        <a:effectLst/>
       </p:bgPr>
     </p:bg>
     <p:spTree>
       <p:nvGrpSpPr>
-        <p:cNvPr id="105" name="Shape 105"/>
+        <p:cNvPr id="1" name="Shape 105"/>
         <p:cNvGrpSpPr/>
         <p:nvPr/>
       </p:nvGrpSpPr>
@@ -10401,7 +11044,7 @@
           <a:blip r:embed="rId3">
             <a:alphaModFix/>
           </a:blip>
-          <a:srcRect b="0" l="0" r="0" t="0"/>
+          <a:srcRect/>
           <a:stretch/>
         </p:blipFill>
         <p:spPr>
@@ -10421,7 +11064,9 @@
       <p:sp>
         <p:nvSpPr>
           <p:cNvPr id="107" name="Google Shape;107;p7"/>
-          <p:cNvSpPr txBox="1"/>
+          <p:cNvSpPr txBox="1">
+            <a:spLocks noGrp="1"/>
+          </p:cNvSpPr>
           <p:nvPr>
             <p:ph type="ctrTitle"/>
           </p:nvPr>
@@ -10440,12 +11085,12 @@
           </a:ln>
         </p:spPr>
         <p:txBody>
-          <a:bodyPr anchorCtr="0" anchor="t" bIns="91425" lIns="91425" spcFirstLastPara="1" rIns="91425" wrap="square" tIns="91425">
+          <a:bodyPr spcFirstLastPara="1" wrap="square" lIns="91425" tIns="91425" rIns="91425" bIns="91425" anchor="t" anchorCtr="0">
             <a:spAutoFit/>
           </a:bodyPr>
           <a:lstStyle/>
           <a:p>
-            <a:pPr indent="0" lvl="0" marL="0" marR="0" rtl="0" algn="l">
+            <a:pPr marL="0" marR="0" lvl="0" indent="0" algn="l" rtl="0">
               <a:lnSpc>
                 <a:spcPct val="100000"/>
               </a:lnSpc>
@@ -10463,7 +11108,7 @@
               <a:buNone/>
             </a:pPr>
             <a:r>
-              <a:rPr b="0" i="0" lang="en" sz="4000" u="none" cap="none" strike="noStrike">
+              <a:rPr lang="en" sz="4000" b="0" i="0" u="none" strike="noStrike" cap="none">
                 <a:solidFill>
                   <a:srgbClr val="1A1A1A"/>
                 </a:solidFill>
@@ -10474,7 +11119,7 @@
               </a:rPr>
               <a:t>Codificando juntos</a:t>
             </a:r>
-            <a:endParaRPr b="0" i="0" sz="4000" u="none" cap="none" strike="noStrike">
+            <a:endParaRPr sz="4000" b="0" i="0" u="none" strike="noStrike" cap="none">
               <a:solidFill>
                 <a:srgbClr val="1A1A1A"/>
               </a:solidFill>
@@ -10506,12 +11151,12 @@
           </a:ln>
         </p:spPr>
         <p:txBody>
-          <a:bodyPr anchorCtr="0" anchor="t" bIns="91425" lIns="91425" spcFirstLastPara="1" rIns="91425" wrap="square" tIns="91425">
+          <a:bodyPr spcFirstLastPara="1" wrap="square" lIns="91425" tIns="91425" rIns="91425" bIns="91425" anchor="t" anchorCtr="0">
             <a:spAutoFit/>
           </a:bodyPr>
           <a:lstStyle/>
           <a:p>
-            <a:pPr indent="0" lvl="0" marL="0" marR="0" rtl="0" algn="l">
+            <a:pPr marL="0" marR="0" lvl="0" indent="0" algn="l" rtl="0">
               <a:lnSpc>
                 <a:spcPct val="115000"/>
               </a:lnSpc>
@@ -10529,7 +11174,7 @@
               <a:buNone/>
             </a:pPr>
             <a:r>
-              <a:rPr b="1" i="0" lang="en" sz="1600" u="none" cap="none" strike="noStrike">
+              <a:rPr lang="en" sz="1600" b="1" i="0" u="none" strike="noStrike" cap="none">
                 <a:solidFill>
                   <a:schemeClr val="dk1"/>
                 </a:solidFill>
@@ -10540,7 +11185,7 @@
               </a:rPr>
               <a:t>Operaciones aritméticas</a:t>
             </a:r>
-            <a:endParaRPr b="1" i="0" sz="1600" u="none" cap="none" strike="noStrike">
+            <a:endParaRPr sz="1600" b="1" i="0" u="none" strike="noStrike" cap="none">
               <a:solidFill>
                 <a:srgbClr val="1A1A1A"/>
               </a:solidFill>
@@ -10551,7 +11196,7 @@
             </a:endParaRPr>
           </a:p>
           <a:p>
-            <a:pPr indent="0" lvl="0" marL="0" marR="0" rtl="0" algn="l">
+            <a:pPr marL="0" marR="0" lvl="0" indent="0" algn="l" rtl="0">
               <a:lnSpc>
                 <a:spcPct val="115000"/>
               </a:lnSpc>
@@ -10569,7 +11214,7 @@
               <a:buNone/>
             </a:pPr>
             <a:r>
-              <a:rPr b="0" i="0" lang="en" sz="1200" u="none" cap="none" strike="noStrike">
+              <a:rPr lang="en" sz="1200" b="0" i="0" u="none" strike="noStrike" cap="none">
                 <a:solidFill>
                   <a:srgbClr val="1A1A1A"/>
                 </a:solidFill>
@@ -10580,7 +11225,7 @@
               </a:rPr>
               <a:t>Realizar operaciones matemáticas.</a:t>
             </a:r>
-            <a:endParaRPr b="0" i="0" sz="1200" u="none" cap="none" strike="noStrike">
+            <a:endParaRPr sz="1200" b="0" i="0" u="none" strike="noStrike" cap="none">
               <a:solidFill>
                 <a:srgbClr val="1A1A1A"/>
               </a:solidFill>
@@ -10612,12 +11257,12 @@
           </a:ln>
         </p:spPr>
         <p:txBody>
-          <a:bodyPr anchorCtr="0" anchor="t" bIns="91425" lIns="91425" spcFirstLastPara="1" rIns="91425" wrap="square" tIns="91425">
+          <a:bodyPr spcFirstLastPara="1" wrap="square" lIns="91425" tIns="91425" rIns="91425" bIns="91425" anchor="t" anchorCtr="0">
             <a:spAutoFit/>
           </a:bodyPr>
           <a:lstStyle/>
           <a:p>
-            <a:pPr indent="0" lvl="0" marL="0" marR="0" rtl="0" algn="l">
+            <a:pPr marL="0" marR="0" lvl="0" indent="0" algn="l" rtl="0">
               <a:lnSpc>
                 <a:spcPct val="115000"/>
               </a:lnSpc>
@@ -10635,7 +11280,7 @@
               <a:buNone/>
             </a:pPr>
             <a:r>
-              <a:rPr b="1" i="0" lang="en" sz="1600" u="none" cap="none" strike="noStrike">
+              <a:rPr lang="en" sz="1600" b="1" i="0" u="none" strike="noStrike" cap="none">
                 <a:solidFill>
                   <a:schemeClr val="dk1"/>
                 </a:solidFill>
@@ -10646,7 +11291,7 @@
               </a:rPr>
               <a:t>Mensajes de error</a:t>
             </a:r>
-            <a:endParaRPr b="1" i="0" sz="1600" u="none" cap="none" strike="noStrike">
+            <a:endParaRPr sz="1600" b="1" i="0" u="none" strike="noStrike" cap="none">
               <a:solidFill>
                 <a:srgbClr val="1A1A1A"/>
               </a:solidFill>
@@ -10657,7 +11302,7 @@
             </a:endParaRPr>
           </a:p>
           <a:p>
-            <a:pPr indent="0" lvl="0" marL="0" marR="0" rtl="0" algn="l">
+            <a:pPr marL="0" marR="0" lvl="0" indent="0" algn="l" rtl="0">
               <a:lnSpc>
                 <a:spcPct val="115000"/>
               </a:lnSpc>
@@ -10675,7 +11320,7 @@
               <a:buNone/>
             </a:pPr>
             <a:r>
-              <a:rPr b="0" i="0" lang="en" sz="1200" u="none" cap="none" strike="noStrike">
+              <a:rPr lang="en" sz="1200" b="0" i="0" u="none" strike="noStrike" cap="none">
                 <a:solidFill>
                   <a:srgbClr val="1A1A1A"/>
                 </a:solidFill>
@@ -10686,7 +11331,7 @@
               </a:rPr>
               <a:t>Realizar tratamiento de errores.</a:t>
             </a:r>
-            <a:endParaRPr b="0" i="0" sz="1200" u="none" cap="none" strike="noStrike">
+            <a:endParaRPr sz="1200" b="0" i="0" u="none" strike="noStrike" cap="none">
               <a:solidFill>
                 <a:srgbClr val="1A1A1A"/>
               </a:solidFill>
@@ -10708,7 +11353,7 @@
           <a:blip r:embed="rId4">
             <a:alphaModFix/>
           </a:blip>
-          <a:srcRect b="0" l="0" r="0" t="0"/>
+          <a:srcRect/>
           <a:stretch/>
         </p:blipFill>
         <p:spPr>
@@ -10735,7 +11380,7 @@
           <a:blip r:embed="rId5">
             <a:alphaModFix/>
           </a:blip>
-          <a:srcRect b="0" l="0" r="0" t="0"/>
+          <a:srcRect/>
           <a:stretch/>
         </p:blipFill>
         <p:spPr>
@@ -10772,12 +11417,12 @@
           </a:ln>
         </p:spPr>
         <p:txBody>
-          <a:bodyPr anchorCtr="0" anchor="t" bIns="91425" lIns="91425" spcFirstLastPara="1" rIns="91425" wrap="square" tIns="91425">
+          <a:bodyPr spcFirstLastPara="1" wrap="square" lIns="91425" tIns="91425" rIns="91425" bIns="91425" anchor="t" anchorCtr="0">
             <a:spAutoFit/>
           </a:bodyPr>
           <a:lstStyle/>
           <a:p>
-            <a:pPr indent="0" lvl="0" marL="0" marR="0" rtl="0" algn="l">
+            <a:pPr marL="0" marR="0" lvl="0" indent="0" algn="l" rtl="0">
               <a:lnSpc>
                 <a:spcPct val="115000"/>
               </a:lnSpc>
@@ -10795,7 +11440,7 @@
               <a:buNone/>
             </a:pPr>
             <a:r>
-              <a:rPr b="1" lang="en" sz="1600">
+              <a:rPr lang="en" sz="1600" b="1">
                 <a:solidFill>
                   <a:schemeClr val="dk1"/>
                 </a:solidFill>
@@ -10806,7 +11451,7 @@
               </a:rPr>
               <a:t>Strings</a:t>
             </a:r>
-            <a:endParaRPr b="1" i="0" sz="1600" u="none" cap="none" strike="noStrike">
+            <a:endParaRPr sz="1600" b="1" i="0" u="none" strike="noStrike" cap="none">
               <a:solidFill>
                 <a:srgbClr val="1A1A1A"/>
               </a:solidFill>
@@ -10817,7 +11462,7 @@
             </a:endParaRPr>
           </a:p>
           <a:p>
-            <a:pPr indent="0" lvl="0" marL="0" marR="0" rtl="0" algn="l">
+            <a:pPr marL="0" marR="0" lvl="0" indent="0" algn="l" rtl="0">
               <a:lnSpc>
                 <a:spcPct val="115000"/>
               </a:lnSpc>
@@ -10846,7 +11491,7 @@
               </a:rPr>
               <a:t>Manipular y formatear texto en Python.</a:t>
             </a:r>
-            <a:endParaRPr b="0" i="0" sz="1200" u="none" cap="none" strike="noStrike">
+            <a:endParaRPr sz="1200" b="0" i="0" u="none" strike="noStrike" cap="none">
               <a:solidFill>
                 <a:srgbClr val="1A1A1A"/>
               </a:solidFill>
@@ -10878,12 +11523,12 @@
           </a:ln>
         </p:spPr>
         <p:txBody>
-          <a:bodyPr anchorCtr="0" anchor="t" bIns="91425" lIns="91425" spcFirstLastPara="1" rIns="91425" wrap="square" tIns="91425">
+          <a:bodyPr spcFirstLastPara="1" wrap="square" lIns="91425" tIns="91425" rIns="91425" bIns="91425" anchor="t" anchorCtr="0">
             <a:spAutoFit/>
           </a:bodyPr>
           <a:lstStyle/>
           <a:p>
-            <a:pPr indent="0" lvl="0" marL="0" marR="0" rtl="0" algn="l">
+            <a:pPr marL="0" marR="0" lvl="0" indent="0" algn="l" rtl="0">
               <a:lnSpc>
                 <a:spcPct val="115000"/>
               </a:lnSpc>
@@ -10901,7 +11546,7 @@
               <a:buNone/>
             </a:pPr>
             <a:r>
-              <a:rPr b="1" lang="en" sz="1600">
+              <a:rPr lang="en" sz="1600" b="1">
                 <a:solidFill>
                   <a:schemeClr val="dk1"/>
                 </a:solidFill>
@@ -10912,7 +11557,7 @@
               </a:rPr>
               <a:t>Listas</a:t>
             </a:r>
-            <a:endParaRPr b="1" i="0" sz="1600" u="none" cap="none" strike="noStrike">
+            <a:endParaRPr sz="1600" b="1" i="0" u="none" strike="noStrike" cap="none">
               <a:solidFill>
                 <a:srgbClr val="1A1A1A"/>
               </a:solidFill>
@@ -10923,7 +11568,7 @@
             </a:endParaRPr>
           </a:p>
           <a:p>
-            <a:pPr indent="0" lvl="0" marL="0" marR="0" rtl="0" algn="l">
+            <a:pPr marL="0" marR="0" lvl="0" indent="0" algn="l" rtl="0">
               <a:lnSpc>
                 <a:spcPct val="115000"/>
               </a:lnSpc>
@@ -10952,7 +11597,7 @@
               </a:rPr>
               <a:t>Almacenar, modificar y operar con colecciones de datos.</a:t>
             </a:r>
-            <a:endParaRPr b="0" i="0" sz="1200" u="none" cap="none" strike="noStrike">
+            <a:endParaRPr sz="1200" b="0" i="0" u="none" strike="noStrike" cap="none">
               <a:solidFill>
                 <a:srgbClr val="1A1A1A"/>
               </a:solidFill>
@@ -10974,7 +11619,7 @@
           <a:blip r:embed="rId4">
             <a:alphaModFix/>
           </a:blip>
-          <a:srcRect b="0" l="0" r="0" t="0"/>
+          <a:srcRect/>
           <a:stretch/>
         </p:blipFill>
         <p:spPr>
@@ -11001,7 +11646,7 @@
           <a:blip r:embed="rId5">
             <a:alphaModFix/>
           </a:blip>
-          <a:srcRect b="0" l="0" r="0" t="0"/>
+          <a:srcRect/>
           <a:stretch/>
         </p:blipFill>
         <p:spPr>
@@ -11026,226 +11671,289 @@
 </p:sld>
 </file>
 
-<file path=ppt/slides/slide9.xml><?xml version="1.0" encoding="utf-8"?>
-<p:sld xmlns:a="http://schemas.openxmlformats.org/drawingml/2006/main" xmlns:r="http://schemas.openxmlformats.org/officeDocument/2006/relationships" xmlns:mc="http://schemas.openxmlformats.org/markup-compatibility/2006" xmlns:mv="urn:schemas-microsoft-com:mac:vml" xmlns:p="http://schemas.openxmlformats.org/presentationml/2006/main" xmlns:c="http://schemas.openxmlformats.org/drawingml/2006/chart" xmlns:dgm="http://schemas.openxmlformats.org/drawingml/2006/diagram" xmlns:o="urn:schemas-microsoft-com:office:office" xmlns:v="urn:schemas-microsoft-com:vml" xmlns:pvml="urn:schemas-microsoft-com:office:powerpoint" xmlns:com="http://schemas.openxmlformats.org/drawingml/2006/compatibility" xmlns:p14="http://schemas.microsoft.com/office/powerpoint/2010/main" xmlns:p15="http://schemas.microsoft.com/office/powerpoint/2012/main" xmlns:ahyp="http://schemas.microsoft.com/office/drawing/2018/hyperlinkcolor">
-  <p:cSld>
-    <p:bg>
-      <p:bgPr>
+<file path=ppt/theme/theme1.xml><?xml version="1.0" encoding="utf-8"?>
+<a:theme xmlns:a="http://schemas.openxmlformats.org/drawingml/2006/main" name="Simple Light">
+  <a:themeElements>
+    <a:clrScheme name="Simple Light">
+      <a:dk1>
+        <a:srgbClr val="000000"/>
+      </a:dk1>
+      <a:lt1>
+        <a:srgbClr val="FFFFFF"/>
+      </a:lt1>
+      <a:dk2>
+        <a:srgbClr val="595959"/>
+      </a:dk2>
+      <a:lt2>
+        <a:srgbClr val="EEEEEE"/>
+      </a:lt2>
+      <a:accent1>
+        <a:srgbClr val="4285F4"/>
+      </a:accent1>
+      <a:accent2>
+        <a:srgbClr val="212121"/>
+      </a:accent2>
+      <a:accent3>
+        <a:srgbClr val="78909C"/>
+      </a:accent3>
+      <a:accent4>
+        <a:srgbClr val="FFAB40"/>
+      </a:accent4>
+      <a:accent5>
+        <a:srgbClr val="0097A7"/>
+      </a:accent5>
+      <a:accent6>
+        <a:srgbClr val="EEFF41"/>
+      </a:accent6>
+      <a:hlink>
+        <a:srgbClr val="0097A7"/>
+      </a:hlink>
+      <a:folHlink>
+        <a:srgbClr val="0097A7"/>
+      </a:folHlink>
+    </a:clrScheme>
+    <a:fontScheme name="Office">
+      <a:majorFont>
+        <a:latin typeface="Arial"/>
+        <a:ea typeface=""/>
+        <a:cs typeface=""/>
+        <a:font script="Jpan" typeface="ＭＳ Ｐゴシック"/>
+        <a:font script="Hang" typeface="맑은 고딕"/>
+        <a:font script="Hans" typeface="宋体"/>
+        <a:font script="Hant" typeface="新細明體"/>
+        <a:font script="Arab" typeface="Times New Roman"/>
+        <a:font script="Hebr" typeface="Times New Roman"/>
+        <a:font script="Thai" typeface="Angsana New"/>
+        <a:font script="Ethi" typeface="Nyala"/>
+        <a:font script="Beng" typeface="Vrinda"/>
+        <a:font script="Gujr" typeface="Shruti"/>
+        <a:font script="Khmr" typeface="MoolBoran"/>
+        <a:font script="Knda" typeface="Tunga"/>
+        <a:font script="Guru" typeface="Raavi"/>
+        <a:font script="Cans" typeface="Euphemia"/>
+        <a:font script="Cher" typeface="Plantagenet Cherokee"/>
+        <a:font script="Yiii" typeface="Microsoft Yi Baiti"/>
+        <a:font script="Tibt" typeface="Microsoft Himalaya"/>
+        <a:font script="Thaa" typeface="MV Boli"/>
+        <a:font script="Deva" typeface="Mangal"/>
+        <a:font script="Telu" typeface="Gautami"/>
+        <a:font script="Taml" typeface="Latha"/>
+        <a:font script="Syrc" typeface="Estrangelo Edessa"/>
+        <a:font script="Orya" typeface="Kalinga"/>
+        <a:font script="Mlym" typeface="Kartika"/>
+        <a:font script="Laoo" typeface="DokChampa"/>
+        <a:font script="Sinh" typeface="Iskoola Pota"/>
+        <a:font script="Mong" typeface="Mongolian Baiti"/>
+        <a:font script="Viet" typeface="Times New Roman"/>
+        <a:font script="Uigh" typeface="Microsoft Uighur"/>
+        <a:font script="Geor" typeface="Sylfaen"/>
+      </a:majorFont>
+      <a:minorFont>
+        <a:latin typeface="Arial"/>
+        <a:ea typeface=""/>
+        <a:cs typeface=""/>
+        <a:font script="Jpan" typeface="ＭＳ Ｐゴシック"/>
+        <a:font script="Hang" typeface="맑은 고딕"/>
+        <a:font script="Hans" typeface="宋体"/>
+        <a:font script="Hant" typeface="新細明體"/>
+        <a:font script="Arab" typeface="Arial"/>
+        <a:font script="Hebr" typeface="Arial"/>
+        <a:font script="Thai" typeface="Cordia New"/>
+        <a:font script="Ethi" typeface="Nyala"/>
+        <a:font script="Beng" typeface="Vrinda"/>
+        <a:font script="Gujr" typeface="Shruti"/>
+        <a:font script="Khmr" typeface="DaunPenh"/>
+        <a:font script="Knda" typeface="Tunga"/>
+        <a:font script="Guru" typeface="Raavi"/>
+        <a:font script="Cans" typeface="Euphemia"/>
+        <a:font script="Cher" typeface="Plantagenet Cherokee"/>
+        <a:font script="Yiii" typeface="Microsoft Yi Baiti"/>
+        <a:font script="Tibt" typeface="Microsoft Himalaya"/>
+        <a:font script="Thaa" typeface="MV Boli"/>
+        <a:font script="Deva" typeface="Mangal"/>
+        <a:font script="Telu" typeface="Gautami"/>
+        <a:font script="Taml" typeface="Latha"/>
+        <a:font script="Syrc" typeface="Estrangelo Edessa"/>
+        <a:font script="Orya" typeface="Kalinga"/>
+        <a:font script="Mlym" typeface="Kartika"/>
+        <a:font script="Laoo" typeface="DokChampa"/>
+        <a:font script="Sinh" typeface="Iskoola Pota"/>
+        <a:font script="Mong" typeface="Mongolian Baiti"/>
+        <a:font script="Viet" typeface="Arial"/>
+        <a:font script="Uigh" typeface="Microsoft Uighur"/>
+        <a:font script="Geor" typeface="Sylfaen"/>
+      </a:minorFont>
+    </a:fontScheme>
+    <a:fmtScheme name="Office">
+      <a:fillStyleLst>
         <a:solidFill>
-          <a:srgbClr val="1A1A1A"/>
+          <a:schemeClr val="phClr"/>
         </a:solidFill>
-      </p:bgPr>
-    </p:bg>
-    <p:spTree>
-      <p:nvGrpSpPr>
-        <p:cNvPr id="119" name="Shape 119"/>
-        <p:cNvGrpSpPr/>
-        <p:nvPr/>
-      </p:nvGrpSpPr>
-      <p:grpSpPr>
-        <a:xfrm>
-          <a:off x="0" y="0"/>
-          <a:ext cx="0" cy="0"/>
-          <a:chOff x="0" y="0"/>
-          <a:chExt cx="0" cy="0"/>
-        </a:xfrm>
-      </p:grpSpPr>
-      <p:pic>
-        <p:nvPicPr>
-          <p:cNvPr id="120" name="Google Shape;120;p9"/>
-          <p:cNvPicPr preferRelativeResize="0"/>
-          <p:nvPr/>
-        </p:nvPicPr>
-        <p:blipFill rotWithShape="1">
-          <a:blip r:embed="rId3">
-            <a:alphaModFix/>
-          </a:blip>
-          <a:srcRect b="0" l="0" r="0" t="0"/>
-          <a:stretch/>
-        </p:blipFill>
-        <p:spPr>
-          <a:xfrm>
-            <a:off x="228600" y="228600"/>
-            <a:ext cx="868680" cy="191756"/>
-          </a:xfrm>
-          <a:prstGeom prst="rect">
-            <a:avLst/>
-          </a:prstGeom>
-          <a:noFill/>
-          <a:ln>
-            <a:noFill/>
-          </a:ln>
-        </p:spPr>
-      </p:pic>
-      <p:sp>
-        <p:nvSpPr>
-          <p:cNvPr id="121" name="Google Shape;121;p9"/>
-          <p:cNvSpPr txBox="1"/>
-          <p:nvPr/>
-        </p:nvSpPr>
-        <p:spPr>
-          <a:xfrm>
-            <a:off x="96875" y="424975"/>
-            <a:ext cx="8520600" cy="800400"/>
-          </a:xfrm>
-          <a:prstGeom prst="rect">
-            <a:avLst/>
-          </a:prstGeom>
-          <a:noFill/>
-          <a:ln>
-            <a:noFill/>
-          </a:ln>
-        </p:spPr>
-        <p:txBody>
-          <a:bodyPr anchorCtr="0" anchor="t" bIns="91425" lIns="91425" spcFirstLastPara="1" rIns="91425" wrap="square" tIns="91425">
-            <a:spAutoFit/>
-          </a:bodyPr>
-          <a:lstStyle/>
-          <a:p>
-            <a:pPr indent="0" lvl="0" marL="0" marR="0" rtl="0" algn="l">
-              <a:lnSpc>
-                <a:spcPct val="100000"/>
-              </a:lnSpc>
-              <a:spcBef>
-                <a:spcPts val="0"/>
-              </a:spcBef>
-              <a:spcAft>
-                <a:spcPts val="0"/>
-              </a:spcAft>
-              <a:buClr>
-                <a:srgbClr val="000000"/>
-              </a:buClr>
-              <a:buSzPts val="4000"/>
-              <a:buFont typeface="Arial"/>
-              <a:buNone/>
-            </a:pPr>
-            <a:r>
-              <a:rPr b="0" i="0" lang="en" sz="4000" u="none" cap="none" strike="noStrike">
-                <a:solidFill>
-                  <a:srgbClr val="F2F1EE"/>
-                </a:solidFill>
-                <a:latin typeface="Inter ExtraBold"/>
-                <a:ea typeface="Inter ExtraBold"/>
-                <a:cs typeface="Inter ExtraBold"/>
-                <a:sym typeface="Inter ExtraBold"/>
-              </a:rPr>
-              <a:t>¿Preguntas?</a:t>
-            </a:r>
-            <a:endParaRPr b="0" i="0" sz="4000" u="none" cap="none" strike="noStrike">
-              <a:solidFill>
-                <a:srgbClr val="F2F1EE"/>
-              </a:solidFill>
-              <a:latin typeface="Inter ExtraBold"/>
-              <a:ea typeface="Inter ExtraBold"/>
-              <a:cs typeface="Inter ExtraBold"/>
-              <a:sym typeface="Inter ExtraBold"/>
-            </a:endParaRPr>
-          </a:p>
-        </p:txBody>
-      </p:sp>
-      <p:sp>
-        <p:nvSpPr>
-          <p:cNvPr id="122" name="Google Shape;122;p9"/>
-          <p:cNvSpPr txBox="1"/>
-          <p:nvPr/>
-        </p:nvSpPr>
-        <p:spPr>
-          <a:xfrm>
-            <a:off x="139800" y="2298300"/>
-            <a:ext cx="6053400" cy="2616600"/>
-          </a:xfrm>
-          <a:prstGeom prst="rect">
-            <a:avLst/>
-          </a:prstGeom>
-          <a:noFill/>
-          <a:ln>
-            <a:noFill/>
-          </a:ln>
-        </p:spPr>
-        <p:txBody>
-          <a:bodyPr anchorCtr="0" anchor="b" bIns="91425" lIns="91425" spcFirstLastPara="1" rIns="91425" wrap="square" tIns="91425">
-            <a:noAutofit/>
-          </a:bodyPr>
-          <a:lstStyle/>
-          <a:p>
-            <a:pPr indent="0" lvl="0" marL="0" marR="0" rtl="0" algn="l">
-              <a:lnSpc>
-                <a:spcPct val="100000"/>
-              </a:lnSpc>
-              <a:spcBef>
-                <a:spcPts val="0"/>
-              </a:spcBef>
-              <a:spcAft>
-                <a:spcPts val="0"/>
-              </a:spcAft>
-              <a:buClr>
-                <a:srgbClr val="000000"/>
-              </a:buClr>
-              <a:buSzPts val="2000"/>
-              <a:buFont typeface="Arial"/>
-              <a:buNone/>
-            </a:pPr>
-            <a:r>
-              <a:rPr b="0" i="0" lang="en" sz="2000" u="none" cap="none" strike="noStrike">
-                <a:solidFill>
-                  <a:srgbClr val="F2F1EE"/>
-                </a:solidFill>
-                <a:latin typeface="Inter"/>
-                <a:ea typeface="Inter"/>
-                <a:cs typeface="Inter"/>
-                <a:sym typeface="Inter"/>
-              </a:rPr>
-              <a:t>Estoy aquí para ayudarles. No duden en contactarme si tienen alguna duda o inquietud.</a:t>
-            </a:r>
-            <a:endParaRPr b="0" i="0" sz="2000" u="none" cap="none" strike="noStrike">
-              <a:solidFill>
-                <a:srgbClr val="F2F1EE"/>
-              </a:solidFill>
-              <a:latin typeface="Inter"/>
-              <a:ea typeface="Inter"/>
-              <a:cs typeface="Inter"/>
-              <a:sym typeface="Inter"/>
-            </a:endParaRPr>
-          </a:p>
-        </p:txBody>
-      </p:sp>
-      <p:pic>
-        <p:nvPicPr>
-          <p:cNvPr id="123" name="Google Shape;123;p9"/>
-          <p:cNvPicPr preferRelativeResize="0"/>
-          <p:nvPr/>
-        </p:nvPicPr>
-        <p:blipFill rotWithShape="1">
-          <a:blip r:embed="rId4">
-            <a:alphaModFix/>
-          </a:blip>
-          <a:srcRect b="0" l="0" r="0" t="0"/>
-          <a:stretch/>
-        </p:blipFill>
-        <p:spPr>
-          <a:xfrm>
-            <a:off x="1097280" y="1131575"/>
-            <a:ext cx="6401751" cy="2510050"/>
-          </a:xfrm>
-          <a:prstGeom prst="rect">
-            <a:avLst/>
-          </a:prstGeom>
-          <a:noFill/>
-          <a:ln>
-            <a:noFill/>
-          </a:ln>
-        </p:spPr>
-      </p:pic>
-    </p:spTree>
-  </p:cSld>
-  <p:clrMapOvr>
-    <a:masterClrMapping/>
-  </p:clrMapOvr>
-</p:sld>
+        <a:gradFill rotWithShape="1">
+          <a:gsLst>
+            <a:gs pos="0">
+              <a:schemeClr val="phClr">
+                <a:tint val="50000"/>
+                <a:satMod val="300000"/>
+              </a:schemeClr>
+            </a:gs>
+            <a:gs pos="35000">
+              <a:schemeClr val="phClr">
+                <a:tint val="37000"/>
+                <a:satMod val="300000"/>
+              </a:schemeClr>
+            </a:gs>
+            <a:gs pos="100000">
+              <a:schemeClr val="phClr">
+                <a:tint val="15000"/>
+                <a:satMod val="350000"/>
+              </a:schemeClr>
+            </a:gs>
+          </a:gsLst>
+          <a:lin ang="16200000" scaled="1"/>
+        </a:gradFill>
+        <a:gradFill rotWithShape="1">
+          <a:gsLst>
+            <a:gs pos="0">
+              <a:schemeClr val="phClr">
+                <a:tint val="100000"/>
+                <a:shade val="100000"/>
+                <a:satMod val="130000"/>
+              </a:schemeClr>
+            </a:gs>
+            <a:gs pos="100000">
+              <a:schemeClr val="phClr">
+                <a:tint val="50000"/>
+                <a:shade val="100000"/>
+                <a:satMod val="350000"/>
+              </a:schemeClr>
+            </a:gs>
+          </a:gsLst>
+          <a:lin ang="16200000" scaled="0"/>
+        </a:gradFill>
+      </a:fillStyleLst>
+      <a:lnStyleLst>
+        <a:ln w="9525" cap="flat" cmpd="sng" algn="ctr">
+          <a:solidFill>
+            <a:schemeClr val="phClr">
+              <a:shade val="95000"/>
+              <a:satMod val="105000"/>
+            </a:schemeClr>
+          </a:solidFill>
+          <a:prstDash val="solid"/>
+        </a:ln>
+        <a:ln w="25400" cap="flat" cmpd="sng" algn="ctr">
+          <a:solidFill>
+            <a:schemeClr val="phClr"/>
+          </a:solidFill>
+          <a:prstDash val="solid"/>
+        </a:ln>
+        <a:ln w="38100" cap="flat" cmpd="sng" algn="ctr">
+          <a:solidFill>
+            <a:schemeClr val="phClr"/>
+          </a:solidFill>
+          <a:prstDash val="solid"/>
+        </a:ln>
+      </a:lnStyleLst>
+      <a:effectStyleLst>
+        <a:effectStyle>
+          <a:effectLst>
+            <a:outerShdw blurRad="40000" dist="20000" dir="5400000" rotWithShape="0">
+              <a:srgbClr val="000000">
+                <a:alpha val="38000"/>
+              </a:srgbClr>
+            </a:outerShdw>
+          </a:effectLst>
+        </a:effectStyle>
+        <a:effectStyle>
+          <a:effectLst>
+            <a:outerShdw blurRad="40000" dist="23000" dir="5400000" rotWithShape="0">
+              <a:srgbClr val="000000">
+                <a:alpha val="35000"/>
+              </a:srgbClr>
+            </a:outerShdw>
+          </a:effectLst>
+        </a:effectStyle>
+        <a:effectStyle>
+          <a:effectLst>
+            <a:outerShdw blurRad="40000" dist="23000" dir="5400000" rotWithShape="0">
+              <a:srgbClr val="000000">
+                <a:alpha val="35000"/>
+              </a:srgbClr>
+            </a:outerShdw>
+          </a:effectLst>
+          <a:scene3d>
+            <a:camera prst="orthographicFront">
+              <a:rot lat="0" lon="0" rev="0"/>
+            </a:camera>
+            <a:lightRig rig="threePt" dir="t">
+              <a:rot lat="0" lon="0" rev="1200000"/>
+            </a:lightRig>
+          </a:scene3d>
+          <a:sp3d>
+            <a:bevelT w="63500" h="25400"/>
+          </a:sp3d>
+        </a:effectStyle>
+      </a:effectStyleLst>
+      <a:bgFillStyleLst>
+        <a:solidFill>
+          <a:schemeClr val="phClr"/>
+        </a:solidFill>
+        <a:gradFill rotWithShape="1">
+          <a:gsLst>
+            <a:gs pos="0">
+              <a:schemeClr val="phClr">
+                <a:tint val="40000"/>
+                <a:satMod val="350000"/>
+              </a:schemeClr>
+            </a:gs>
+            <a:gs pos="40000">
+              <a:schemeClr val="phClr">
+                <a:tint val="45000"/>
+                <a:shade val="99000"/>
+                <a:satMod val="350000"/>
+              </a:schemeClr>
+            </a:gs>
+            <a:gs pos="100000">
+              <a:schemeClr val="phClr">
+                <a:shade val="20000"/>
+                <a:satMod val="255000"/>
+              </a:schemeClr>
+            </a:gs>
+          </a:gsLst>
+          <a:path path="circle">
+            <a:fillToRect l="50000" t="-80000" r="50000" b="180000"/>
+          </a:path>
+        </a:gradFill>
+        <a:gradFill rotWithShape="1">
+          <a:gsLst>
+            <a:gs pos="0">
+              <a:schemeClr val="phClr">
+                <a:tint val="80000"/>
+                <a:satMod val="300000"/>
+              </a:schemeClr>
+            </a:gs>
+            <a:gs pos="100000">
+              <a:schemeClr val="phClr">
+                <a:shade val="30000"/>
+                <a:satMod val="200000"/>
+              </a:schemeClr>
+            </a:gs>
+          </a:gsLst>
+          <a:path path="circle">
+            <a:fillToRect l="50000" t="50000" r="50000" b="50000"/>
+          </a:path>
+        </a:gradFill>
+      </a:bgFillStyleLst>
+    </a:fmtScheme>
+  </a:themeElements>
+  <a:objectDefaults/>
+  <a:extraClrSchemeLst/>
+</a:theme>
 </file>
 
-<file path=ppt/theme/theme1.xml><?xml version="1.0" encoding="utf-8"?>
-<a:theme xmlns:a="http://schemas.openxmlformats.org/drawingml/2006/main" xmlns:r="http://schemas.openxmlformats.org/officeDocument/2006/relationships">
+<file path=ppt/theme/theme2.xml><?xml version="1.0" encoding="utf-8"?>
+<a:theme xmlns:a="http://schemas.openxmlformats.org/drawingml/2006/main">
   <a:themeElements>
     <a:clrScheme name="Default">
       <a:dk1>
@@ -11520,284 +12228,7 @@
       </a:bgFillStyleLst>
     </a:fmtScheme>
   </a:themeElements>
-</a:theme>
-</file>
-
-<file path=ppt/theme/theme2.xml><?xml version="1.0" encoding="utf-8"?>
-<a:theme xmlns:a="http://schemas.openxmlformats.org/drawingml/2006/main" xmlns:r="http://schemas.openxmlformats.org/officeDocument/2006/relationships" name="Simple Light">
-  <a:themeElements>
-    <a:clrScheme name="Simple Light">
-      <a:dk1>
-        <a:srgbClr val="000000"/>
-      </a:dk1>
-      <a:lt1>
-        <a:srgbClr val="FFFFFF"/>
-      </a:lt1>
-      <a:dk2>
-        <a:srgbClr val="595959"/>
-      </a:dk2>
-      <a:lt2>
-        <a:srgbClr val="EEEEEE"/>
-      </a:lt2>
-      <a:accent1>
-        <a:srgbClr val="4285F4"/>
-      </a:accent1>
-      <a:accent2>
-        <a:srgbClr val="212121"/>
-      </a:accent2>
-      <a:accent3>
-        <a:srgbClr val="78909C"/>
-      </a:accent3>
-      <a:accent4>
-        <a:srgbClr val="FFAB40"/>
-      </a:accent4>
-      <a:accent5>
-        <a:srgbClr val="0097A7"/>
-      </a:accent5>
-      <a:accent6>
-        <a:srgbClr val="EEFF41"/>
-      </a:accent6>
-      <a:hlink>
-        <a:srgbClr val="0097A7"/>
-      </a:hlink>
-      <a:folHlink>
-        <a:srgbClr val="0097A7"/>
-      </a:folHlink>
-    </a:clrScheme>
-    <a:fontScheme name="Office">
-      <a:majorFont>
-        <a:latin typeface="Arial"/>
-        <a:ea typeface=""/>
-        <a:cs typeface=""/>
-        <a:font script="Jpan" typeface="ＭＳ Ｐゴシック"/>
-        <a:font script="Hang" typeface="맑은 고딕"/>
-        <a:font script="Hans" typeface="宋体"/>
-        <a:font script="Hant" typeface="新細明體"/>
-        <a:font script="Arab" typeface="Times New Roman"/>
-        <a:font script="Hebr" typeface="Times New Roman"/>
-        <a:font script="Thai" typeface="Angsana New"/>
-        <a:font script="Ethi" typeface="Nyala"/>
-        <a:font script="Beng" typeface="Vrinda"/>
-        <a:font script="Gujr" typeface="Shruti"/>
-        <a:font script="Khmr" typeface="MoolBoran"/>
-        <a:font script="Knda" typeface="Tunga"/>
-        <a:font script="Guru" typeface="Raavi"/>
-        <a:font script="Cans" typeface="Euphemia"/>
-        <a:font script="Cher" typeface="Plantagenet Cherokee"/>
-        <a:font script="Yiii" typeface="Microsoft Yi Baiti"/>
-        <a:font script="Tibt" typeface="Microsoft Himalaya"/>
-        <a:font script="Thaa" typeface="MV Boli"/>
-        <a:font script="Deva" typeface="Mangal"/>
-        <a:font script="Telu" typeface="Gautami"/>
-        <a:font script="Taml" typeface="Latha"/>
-        <a:font script="Syrc" typeface="Estrangelo Edessa"/>
-        <a:font script="Orya" typeface="Kalinga"/>
-        <a:font script="Mlym" typeface="Kartika"/>
-        <a:font script="Laoo" typeface="DokChampa"/>
-        <a:font script="Sinh" typeface="Iskoola Pota"/>
-        <a:font script="Mong" typeface="Mongolian Baiti"/>
-        <a:font script="Viet" typeface="Times New Roman"/>
-        <a:font script="Uigh" typeface="Microsoft Uighur"/>
-        <a:font script="Geor" typeface="Sylfaen"/>
-      </a:majorFont>
-      <a:minorFont>
-        <a:latin typeface="Arial"/>
-        <a:ea typeface=""/>
-        <a:cs typeface=""/>
-        <a:font script="Jpan" typeface="ＭＳ Ｐゴシック"/>
-        <a:font script="Hang" typeface="맑은 고딕"/>
-        <a:font script="Hans" typeface="宋体"/>
-        <a:font script="Hant" typeface="新細明體"/>
-        <a:font script="Arab" typeface="Arial"/>
-        <a:font script="Hebr" typeface="Arial"/>
-        <a:font script="Thai" typeface="Cordia New"/>
-        <a:font script="Ethi" typeface="Nyala"/>
-        <a:font script="Beng" typeface="Vrinda"/>
-        <a:font script="Gujr" typeface="Shruti"/>
-        <a:font script="Khmr" typeface="DaunPenh"/>
-        <a:font script="Knda" typeface="Tunga"/>
-        <a:font script="Guru" typeface="Raavi"/>
-        <a:font script="Cans" typeface="Euphemia"/>
-        <a:font script="Cher" typeface="Plantagenet Cherokee"/>
-        <a:font script="Yiii" typeface="Microsoft Yi Baiti"/>
-        <a:font script="Tibt" typeface="Microsoft Himalaya"/>
-        <a:font script="Thaa" typeface="MV Boli"/>
-        <a:font script="Deva" typeface="Mangal"/>
-        <a:font script="Telu" typeface="Gautami"/>
-        <a:font script="Taml" typeface="Latha"/>
-        <a:font script="Syrc" typeface="Estrangelo Edessa"/>
-        <a:font script="Orya" typeface="Kalinga"/>
-        <a:font script="Mlym" typeface="Kartika"/>
-        <a:font script="Laoo" typeface="DokChampa"/>
-        <a:font script="Sinh" typeface="Iskoola Pota"/>
-        <a:font script="Mong" typeface="Mongolian Baiti"/>
-        <a:font script="Viet" typeface="Arial"/>
-        <a:font script="Uigh" typeface="Microsoft Uighur"/>
-        <a:font script="Geor" typeface="Sylfaen"/>
-      </a:minorFont>
-    </a:fontScheme>
-    <a:fmtScheme name="Office">
-      <a:fillStyleLst>
-        <a:solidFill>
-          <a:schemeClr val="phClr"/>
-        </a:solidFill>
-        <a:gradFill rotWithShape="1">
-          <a:gsLst>
-            <a:gs pos="0">
-              <a:schemeClr val="phClr">
-                <a:tint val="50000"/>
-                <a:satMod val="300000"/>
-              </a:schemeClr>
-            </a:gs>
-            <a:gs pos="35000">
-              <a:schemeClr val="phClr">
-                <a:tint val="37000"/>
-                <a:satMod val="300000"/>
-              </a:schemeClr>
-            </a:gs>
-            <a:gs pos="100000">
-              <a:schemeClr val="phClr">
-                <a:tint val="15000"/>
-                <a:satMod val="350000"/>
-              </a:schemeClr>
-            </a:gs>
-          </a:gsLst>
-          <a:lin ang="16200000" scaled="1"/>
-        </a:gradFill>
-        <a:gradFill rotWithShape="1">
-          <a:gsLst>
-            <a:gs pos="0">
-              <a:schemeClr val="phClr">
-                <a:tint val="100000"/>
-                <a:shade val="100000"/>
-                <a:satMod val="130000"/>
-              </a:schemeClr>
-            </a:gs>
-            <a:gs pos="100000">
-              <a:schemeClr val="phClr">
-                <a:tint val="50000"/>
-                <a:shade val="100000"/>
-                <a:satMod val="350000"/>
-              </a:schemeClr>
-            </a:gs>
-          </a:gsLst>
-          <a:lin ang="16200000" scaled="0"/>
-        </a:gradFill>
-      </a:fillStyleLst>
-      <a:lnStyleLst>
-        <a:ln w="9525" cap="flat" cmpd="sng" algn="ctr">
-          <a:solidFill>
-            <a:schemeClr val="phClr">
-              <a:shade val="95000"/>
-              <a:satMod val="105000"/>
-            </a:schemeClr>
-          </a:solidFill>
-          <a:prstDash val="solid"/>
-        </a:ln>
-        <a:ln w="25400" cap="flat" cmpd="sng" algn="ctr">
-          <a:solidFill>
-            <a:schemeClr val="phClr"/>
-          </a:solidFill>
-          <a:prstDash val="solid"/>
-        </a:ln>
-        <a:ln w="38100" cap="flat" cmpd="sng" algn="ctr">
-          <a:solidFill>
-            <a:schemeClr val="phClr"/>
-          </a:solidFill>
-          <a:prstDash val="solid"/>
-        </a:ln>
-      </a:lnStyleLst>
-      <a:effectStyleLst>
-        <a:effectStyle>
-          <a:effectLst>
-            <a:outerShdw blurRad="40000" dist="20000" dir="5400000" rotWithShape="0">
-              <a:srgbClr val="000000">
-                <a:alpha val="38000"/>
-              </a:srgbClr>
-            </a:outerShdw>
-          </a:effectLst>
-        </a:effectStyle>
-        <a:effectStyle>
-          <a:effectLst>
-            <a:outerShdw blurRad="40000" dist="23000" dir="5400000" rotWithShape="0">
-              <a:srgbClr val="000000">
-                <a:alpha val="35000"/>
-              </a:srgbClr>
-            </a:outerShdw>
-          </a:effectLst>
-        </a:effectStyle>
-        <a:effectStyle>
-          <a:effectLst>
-            <a:outerShdw blurRad="40000" dist="23000" dir="5400000" rotWithShape="0">
-              <a:srgbClr val="000000">
-                <a:alpha val="35000"/>
-              </a:srgbClr>
-            </a:outerShdw>
-          </a:effectLst>
-          <a:scene3d>
-            <a:camera prst="orthographicFront">
-              <a:rot lat="0" lon="0" rev="0"/>
-            </a:camera>
-            <a:lightRig rig="threePt" dir="t">
-              <a:rot lat="0" lon="0" rev="1200000"/>
-            </a:lightRig>
-          </a:scene3d>
-          <a:sp3d>
-            <a:bevelT w="63500" h="25400"/>
-          </a:sp3d>
-        </a:effectStyle>
-      </a:effectStyleLst>
-      <a:bgFillStyleLst>
-        <a:solidFill>
-          <a:schemeClr val="phClr"/>
-        </a:solidFill>
-        <a:gradFill rotWithShape="1">
-          <a:gsLst>
-            <a:gs pos="0">
-              <a:schemeClr val="phClr">
-                <a:tint val="40000"/>
-                <a:satMod val="350000"/>
-              </a:schemeClr>
-            </a:gs>
-            <a:gs pos="40000">
-              <a:schemeClr val="phClr">
-                <a:tint val="45000"/>
-                <a:shade val="99000"/>
-                <a:satMod val="350000"/>
-              </a:schemeClr>
-            </a:gs>
-            <a:gs pos="100000">
-              <a:schemeClr val="phClr">
-                <a:shade val="20000"/>
-                <a:satMod val="255000"/>
-              </a:schemeClr>
-            </a:gs>
-          </a:gsLst>
-          <a:path path="circle">
-            <a:fillToRect l="50000" t="-80000" r="50000" b="180000"/>
-          </a:path>
-        </a:gradFill>
-        <a:gradFill rotWithShape="1">
-          <a:gsLst>
-            <a:gs pos="0">
-              <a:schemeClr val="phClr">
-                <a:tint val="80000"/>
-                <a:satMod val="300000"/>
-              </a:schemeClr>
-            </a:gs>
-            <a:gs pos="100000">
-              <a:schemeClr val="phClr">
-                <a:shade val="30000"/>
-                <a:satMod val="200000"/>
-              </a:schemeClr>
-            </a:gs>
-          </a:gsLst>
-          <a:path path="circle">
-            <a:fillToRect l="50000" t="50000" r="50000" b="50000"/>
-          </a:path>
-        </a:gradFill>
-      </a:bgFillStyleLst>
-    </a:fmtScheme>
-  </a:themeElements>
+  <a:objectDefaults/>
+  <a:extraClrSchemeLst/>
 </a:theme>
 </file>